--- a/docs/quizgen_slides.pptx
+++ b/docs/quizgen_slides.pptx
@@ -15,8 +15,6 @@
     <p:sldId id="263" r:id="rId14"/>
     <p:sldId id="264" r:id="rId15"/>
     <p:sldId id="265" r:id="rId16"/>
-    <p:sldId id="266" r:id="rId17"/>
-    <p:sldId id="267" r:id="rId18"/>
   </p:sldIdLst>
   <p:sldSz cx="12191695" cy="6858000" type="screen4x3"/>
   <p:notesSz cx="6858000" cy="9144000"/>
@@ -3252,7 +3250,7 @@
                 </a:solidFill>
                 <a:latin typeface="Calibri"/>
               </a:rPr>
-              <a:t>Automated exam &amp; quiz generation from a textbook</a:t>
+              <a:t>Automated Test Assembly from a question bank</a:t>
             </a:r>
           </a:p>
           <a:p>
@@ -3264,7 +3262,7 @@
                 </a:solidFill>
                 <a:latin typeface="Calibri"/>
               </a:rPr>
-              <a:t>A generate-then-select pipeline</a:t>
+              <a:t>Select blueprint-compliant exams — no generation, no LLM</a:t>
             </a:r>
           </a:p>
         </p:txBody>
@@ -3299,7 +3297,7 @@
                 </a:solidFill>
                 <a:latin typeface="Calibri"/>
               </a:rPr>
-              <a:t>RAG grounding   •   Bloom-controlled generation   •   Automated Test Assembly (MIP)</a:t>
+              <a:t>Question bank (JSON)   •   Blueprint (YAML + flags)   •   Greedy / MIP selection</a:t>
             </a:r>
           </a:p>
           <a:p>
@@ -3343,7 +3341,7 @@
         <p:spPr>
           <a:xfrm>
             <a:off x="0" y="0"/>
-            <a:ext cx="12191695" cy="1051560"/>
+            <a:ext cx="12191695" cy="6858000"/>
           </a:xfrm>
           <a:prstGeom prst="rect">
             <a:avLst/>
@@ -3386,1472 +3384,6 @@
         </p:nvSpPr>
         <p:spPr>
           <a:xfrm>
-            <a:off x="502920" y="164592"/>
-            <a:ext cx="11155680" cy="731520"/>
-          </a:xfrm>
-          <a:prstGeom prst="rect">
-            <a:avLst/>
-          </a:prstGeom>
-          <a:noFill/>
-        </p:spPr>
-        <p:txBody>
-          <a:bodyPr wrap="square" anchor="ctr">
-            <a:spAutoFit/>
-          </a:bodyPr>
-          <a:lstStyle/>
-          <a:p>
-            <a:pPr algn="l"/>
-            <a:r>
-              <a:rPr sz="3000" b="1" i="0">
-                <a:solidFill>
-                  <a:srgbClr val="FFFFFF"/>
-                </a:solidFill>
-                <a:latin typeface="Calibri"/>
-              </a:rPr>
-              <a:t>Orchestration &amp; fully-offline operation</a:t>
-            </a:r>
-          </a:p>
-        </p:txBody>
-      </p:sp>
-      <p:sp>
-        <p:nvSpPr>
-          <p:cNvPr id="4" name="TextBox 3"/>
-          <p:cNvSpPr txBox="1"/>
-          <p:nvPr/>
-        </p:nvSpPr>
-        <p:spPr>
-          <a:xfrm>
-            <a:off x="530352" y="18288"/>
-            <a:ext cx="10972800" cy="274320"/>
-          </a:xfrm>
-          <a:prstGeom prst="rect">
-            <a:avLst/>
-          </a:prstGeom>
-          <a:noFill/>
-        </p:spPr>
-        <p:txBody>
-          <a:bodyPr wrap="square" anchor="t">
-            <a:spAutoFit/>
-          </a:bodyPr>
-          <a:lstStyle/>
-          <a:p>
-            <a:pPr algn="l"/>
-            <a:r>
-              <a:rPr sz="1200" b="1" i="0">
-                <a:solidFill>
-                  <a:srgbClr val="DEEBF7"/>
-                </a:solidFill>
-                <a:latin typeface="Calibri"/>
-              </a:rPr>
-              <a:t>pipeline.py • mock_client.py</a:t>
-            </a:r>
-          </a:p>
-        </p:txBody>
-      </p:sp>
-      <p:sp>
-        <p:nvSpPr>
-          <p:cNvPr id="5" name="TextBox 4"/>
-          <p:cNvSpPr txBox="1"/>
-          <p:nvPr/>
-        </p:nvSpPr>
-        <p:spPr>
-          <a:xfrm>
-            <a:off x="640080" y="1371600"/>
-            <a:ext cx="10972800" cy="2377440"/>
-          </a:xfrm>
-          <a:prstGeom prst="rect">
-            <a:avLst/>
-          </a:prstGeom>
-          <a:noFill/>
-        </p:spPr>
-        <p:txBody>
-          <a:bodyPr wrap="square">
-            <a:spAutoFit/>
-          </a:bodyPr>
-          <a:lstStyle/>
-          <a:p>
-            <a:pPr>
-              <a:spcAft>
-                <a:spcPts val="1000"/>
-              </a:spcAft>
-            </a:pPr>
-            <a:r>
-              <a:rPr sz="1700">
-                <a:solidFill>
-                  <a:srgbClr val="333333"/>
-                </a:solidFill>
-                <a:latin typeface="Calibri"/>
-              </a:rPr>
-              <a:t>• pipeline.py sequences every stage; each stage is imported from its own module.</a:t>
-            </a:r>
-          </a:p>
-          <a:p>
-            <a:pPr>
-              <a:spcAft>
-                <a:spcPts val="1000"/>
-              </a:spcAft>
-            </a:pPr>
-            <a:r>
-              <a:rPr sz="1700">
-                <a:solidFill>
-                  <a:srgbClr val="333333"/>
-                </a:solidFill>
-                <a:latin typeface="Calibri"/>
-              </a:rPr>
-              <a:t>• MockLLMClient parses #SPEC/#JUDGE directives and synthesises deterministic, schema-valid output — no network needed (--mock).</a:t>
-            </a:r>
-          </a:p>
-          <a:p>
-            <a:pPr>
-              <a:spcAft>
-                <a:spcPts val="1000"/>
-              </a:spcAft>
-            </a:pPr>
-            <a:r>
-              <a:rPr sz="1700">
-                <a:solidFill>
-                  <a:srgbClr val="333333"/>
-                </a:solidFill>
-                <a:latin typeface="Calibri"/>
-              </a:rPr>
-              <a:t>• Index build is best-effort: no embeddings ⇒ generate without RAG, dedup/validate fall back to token backend.</a:t>
-            </a:r>
-          </a:p>
-          <a:p>
-            <a:pPr>
-              <a:spcAft>
-                <a:spcPts val="1000"/>
-              </a:spcAft>
-            </a:pPr>
-            <a:r>
-              <a:rPr sz="1700">
-                <a:solidFill>
-                  <a:srgbClr val="333333"/>
-                </a:solidFill>
-                <a:latin typeface="Calibri"/>
-              </a:rPr>
-              <a:t>• Swapping the real LLM provider is a one-line .env change.</a:t>
-            </a:r>
-          </a:p>
-        </p:txBody>
-      </p:sp>
-      <p:sp>
-        <p:nvSpPr>
-          <p:cNvPr id="6" name="Rectangle 5"/>
-          <p:cNvSpPr/>
-          <p:nvPr/>
-        </p:nvSpPr>
-        <p:spPr>
-          <a:xfrm>
-            <a:off x="640080" y="4297680"/>
-            <a:ext cx="10972800" cy="914400"/>
-          </a:xfrm>
-          <a:prstGeom prst="rect">
-            <a:avLst/>
-          </a:prstGeom>
-          <a:solidFill>
-            <a:srgbClr val="1F2D3D"/>
-          </a:solidFill>
-          <a:ln w="15875">
-            <a:solidFill>
-              <a:srgbClr val="1F2D3D"/>
-            </a:solidFill>
-          </a:ln>
-          <a:effectLst/>
-        </p:spPr>
-        <p:style>
-          <a:lnRef idx="1">
-            <a:schemeClr val="accent1"/>
-          </a:lnRef>
-          <a:fillRef idx="3">
-            <a:schemeClr val="accent1"/>
-          </a:fillRef>
-          <a:effectRef idx="2">
-            <a:schemeClr val="accent1"/>
-          </a:effectRef>
-          <a:fontRef idx="minor">
-            <a:schemeClr val="lt1"/>
-          </a:fontRef>
-        </p:style>
-        <p:txBody>
-          <a:bodyPr rtlCol="0" anchor="ctr" wrap="square" lIns="45720" rIns="45720" tIns="27432" bIns="27432"/>
-          <a:lstStyle/>
-          <a:p>
-            <a:pPr algn="ctr"/>
-            <a:r>
-              <a:rPr sz="1600" b="0" i="0">
-                <a:solidFill>
-                  <a:srgbClr val="FFFFFF"/>
-                </a:solidFill>
-                <a:latin typeface="Consolas"/>
-              </a:rPr>
-              <a:t>python -m quizgen.pipeline --chapters 1-3 --blueprint blueprint.yaml --mock --judge</a:t>
-            </a:r>
-          </a:p>
-        </p:txBody>
-      </p:sp>
-      <p:sp>
-        <p:nvSpPr>
-          <p:cNvPr id="7" name="TextBox 6"/>
-          <p:cNvSpPr txBox="1"/>
-          <p:nvPr/>
-        </p:nvSpPr>
-        <p:spPr>
-          <a:xfrm>
-            <a:off x="640080" y="5394960"/>
-            <a:ext cx="10972800" cy="731520"/>
-          </a:xfrm>
-          <a:prstGeom prst="rect">
-            <a:avLst/>
-          </a:prstGeom>
-          <a:noFill/>
-        </p:spPr>
-        <p:txBody>
-          <a:bodyPr wrap="square" anchor="t">
-            <a:spAutoFit/>
-          </a:bodyPr>
-          <a:lstStyle/>
-          <a:p>
-            <a:pPr algn="ctr"/>
-            <a:r>
-              <a:rPr sz="1800" b="1" i="0">
-                <a:solidFill>
-                  <a:srgbClr val="3182BD"/>
-                </a:solidFill>
-                <a:latin typeface="Calibri"/>
-              </a:rPr>
-              <a:t>ingest → index → generate → dedup → assemble → validate → judge</a:t>
-            </a:r>
-          </a:p>
-        </p:txBody>
-      </p:sp>
-    </p:spTree>
-  </p:cSld>
-  <p:clrMapOvr>
-    <a:masterClrMapping/>
-  </p:clrMapOvr>
-</p:sld>
-</file>
-
-<file path=ppt/slides/slide11.xml><?xml version="1.0" encoding="utf-8"?>
-<p:sld xmlns:a="http://schemas.openxmlformats.org/drawingml/2006/main" xmlns:p="http://schemas.openxmlformats.org/presentationml/2006/main" xmlns:r="http://schemas.openxmlformats.org/officeDocument/2006/relationships">
-  <p:cSld>
-    <p:spTree>
-      <p:nvGrpSpPr>
-        <p:cNvPr id="1" name=""/>
-        <p:cNvGrpSpPr/>
-        <p:nvPr/>
-      </p:nvGrpSpPr>
-      <p:grpSpPr/>
-      <p:sp>
-        <p:nvSpPr>
-          <p:cNvPr id="2" name="Rectangle 1"/>
-          <p:cNvSpPr/>
-          <p:nvPr/>
-        </p:nvSpPr>
-        <p:spPr>
-          <a:xfrm>
-            <a:off x="0" y="0"/>
-            <a:ext cx="12191695" cy="1051560"/>
-          </a:xfrm>
-          <a:prstGeom prst="rect">
-            <a:avLst/>
-          </a:prstGeom>
-          <a:solidFill>
-            <a:srgbClr val="1F2D3D"/>
-          </a:solidFill>
-          <a:ln>
-            <a:noFill/>
-          </a:ln>
-          <a:effectLst/>
-        </p:spPr>
-        <p:style>
-          <a:lnRef idx="1">
-            <a:schemeClr val="accent1"/>
-          </a:lnRef>
-          <a:fillRef idx="3">
-            <a:schemeClr val="accent1"/>
-          </a:fillRef>
-          <a:effectRef idx="2">
-            <a:schemeClr val="accent1"/>
-          </a:effectRef>
-          <a:fontRef idx="minor">
-            <a:schemeClr val="lt1"/>
-          </a:fontRef>
-        </p:style>
-        <p:txBody>
-          <a:bodyPr rtlCol="0" anchor="ctr"/>
-          <a:lstStyle/>
-          <a:p>
-            <a:pPr algn="ctr"/>
-          </a:p>
-        </p:txBody>
-      </p:sp>
-      <p:sp>
-        <p:nvSpPr>
-          <p:cNvPr id="3" name="TextBox 2"/>
-          <p:cNvSpPr txBox="1"/>
-          <p:nvPr/>
-        </p:nvSpPr>
-        <p:spPr>
-          <a:xfrm>
-            <a:off x="502920" y="164592"/>
-            <a:ext cx="11155680" cy="731520"/>
-          </a:xfrm>
-          <a:prstGeom prst="rect">
-            <a:avLst/>
-          </a:prstGeom>
-          <a:noFill/>
-        </p:spPr>
-        <p:txBody>
-          <a:bodyPr wrap="square" anchor="ctr">
-            <a:spAutoFit/>
-          </a:bodyPr>
-          <a:lstStyle/>
-          <a:p>
-            <a:pPr algn="l"/>
-            <a:r>
-              <a:rPr sz="3000" b="1" i="0">
-                <a:solidFill>
-                  <a:srgbClr val="FFFFFF"/>
-                </a:solidFill>
-                <a:latin typeface="Calibri"/>
-              </a:rPr>
-              <a:t>Where each technique comes from</a:t>
-            </a:r>
-          </a:p>
-        </p:txBody>
-      </p:sp>
-      <p:sp>
-        <p:nvSpPr>
-          <p:cNvPr id="4" name="TextBox 3"/>
-          <p:cNvSpPr txBox="1"/>
-          <p:nvPr/>
-        </p:nvSpPr>
-        <p:spPr>
-          <a:xfrm>
-            <a:off x="530352" y="18288"/>
-            <a:ext cx="10972800" cy="274320"/>
-          </a:xfrm>
-          <a:prstGeom prst="rect">
-            <a:avLst/>
-          </a:prstGeom>
-          <a:noFill/>
-        </p:spPr>
-        <p:txBody>
-          <a:bodyPr wrap="square" anchor="t">
-            <a:spAutoFit/>
-          </a:bodyPr>
-          <a:lstStyle/>
-          <a:p>
-            <a:pPr algn="l"/>
-            <a:r>
-              <a:rPr sz="1200" b="1" i="0">
-                <a:solidFill>
-                  <a:srgbClr val="DEEBF7"/>
-                </a:solidFill>
-                <a:latin typeface="Calibri"/>
-              </a:rPr>
-              <a:t>TECHNIQUE → SOURCE LINEAGE</a:t>
-            </a:r>
-          </a:p>
-        </p:txBody>
-      </p:sp>
-      <p:sp>
-        <p:nvSpPr>
-          <p:cNvPr id="5" name="Rounded Rectangle 4"/>
-          <p:cNvSpPr/>
-          <p:nvPr/>
-        </p:nvSpPr>
-        <p:spPr>
-          <a:xfrm>
-            <a:off x="640080" y="1325880"/>
-            <a:ext cx="4937760" cy="475488"/>
-          </a:xfrm>
-          <a:prstGeom prst="roundRect">
-            <a:avLst/>
-          </a:prstGeom>
-          <a:solidFill>
-            <a:srgbClr val="3182BD"/>
-          </a:solidFill>
-          <a:ln w="15875">
-            <a:solidFill>
-              <a:srgbClr val="3182BD"/>
-            </a:solidFill>
-          </a:ln>
-          <a:effectLst/>
-        </p:spPr>
-        <p:style>
-          <a:lnRef idx="1">
-            <a:schemeClr val="accent1"/>
-          </a:lnRef>
-          <a:fillRef idx="3">
-            <a:schemeClr val="accent1"/>
-          </a:fillRef>
-          <a:effectRef idx="2">
-            <a:schemeClr val="accent1"/>
-          </a:effectRef>
-          <a:fontRef idx="minor">
-            <a:schemeClr val="lt1"/>
-          </a:fontRef>
-        </p:style>
-        <p:txBody>
-          <a:bodyPr rtlCol="0" anchor="ctr" wrap="square" lIns="45720" rIns="45720" tIns="27432" bIns="27432"/>
-          <a:lstStyle/>
-          <a:p>
-            <a:pPr algn="ctr"/>
-            <a:r>
-              <a:rPr sz="1400" b="1" i="0">
-                <a:solidFill>
-                  <a:srgbClr val="FFFFFF"/>
-                </a:solidFill>
-                <a:latin typeface="Calibri"/>
-              </a:rPr>
-              <a:t>Implemented in code</a:t>
-            </a:r>
-          </a:p>
-        </p:txBody>
-      </p:sp>
-      <p:sp>
-        <p:nvSpPr>
-          <p:cNvPr id="6" name="Rounded Rectangle 5"/>
-          <p:cNvSpPr/>
-          <p:nvPr/>
-        </p:nvSpPr>
-        <p:spPr>
-          <a:xfrm>
-            <a:off x="5669280" y="1325880"/>
-            <a:ext cx="5943600" cy="475488"/>
-          </a:xfrm>
-          <a:prstGeom prst="roundRect">
-            <a:avLst/>
-          </a:prstGeom>
-          <a:solidFill>
-            <a:srgbClr val="3182BD"/>
-          </a:solidFill>
-          <a:ln w="15875">
-            <a:solidFill>
-              <a:srgbClr val="3182BD"/>
-            </a:solidFill>
-          </a:ln>
-          <a:effectLst/>
-        </p:spPr>
-        <p:style>
-          <a:lnRef idx="1">
-            <a:schemeClr val="accent1"/>
-          </a:lnRef>
-          <a:fillRef idx="3">
-            <a:schemeClr val="accent1"/>
-          </a:fillRef>
-          <a:effectRef idx="2">
-            <a:schemeClr val="accent1"/>
-          </a:effectRef>
-          <a:fontRef idx="minor">
-            <a:schemeClr val="lt1"/>
-          </a:fontRef>
-        </p:style>
-        <p:txBody>
-          <a:bodyPr rtlCol="0" anchor="ctr" wrap="square" lIns="45720" rIns="45720" tIns="27432" bIns="27432"/>
-          <a:lstStyle/>
-          <a:p>
-            <a:pPr algn="ctr"/>
-            <a:r>
-              <a:rPr sz="1400" b="1" i="0">
-                <a:solidFill>
-                  <a:srgbClr val="FFFFFF"/>
-                </a:solidFill>
-                <a:latin typeface="Calibri"/>
-              </a:rPr>
-              <a:t>Source lineage</a:t>
-            </a:r>
-          </a:p>
-        </p:txBody>
-      </p:sp>
-      <p:sp>
-        <p:nvSpPr>
-          <p:cNvPr id="7" name="Rectangle 6"/>
-          <p:cNvSpPr/>
-          <p:nvPr/>
-        </p:nvSpPr>
-        <p:spPr>
-          <a:xfrm>
-            <a:off x="640080" y="1801368"/>
-            <a:ext cx="4937760" cy="475488"/>
-          </a:xfrm>
-          <a:prstGeom prst="rect">
-            <a:avLst/>
-          </a:prstGeom>
-          <a:solidFill>
-            <a:srgbClr val="F0F0F2"/>
-          </a:solidFill>
-          <a:ln w="15875">
-            <a:solidFill>
-              <a:srgbClr val="636363"/>
-            </a:solidFill>
-          </a:ln>
-          <a:effectLst/>
-        </p:spPr>
-        <p:style>
-          <a:lnRef idx="1">
-            <a:schemeClr val="accent1"/>
-          </a:lnRef>
-          <a:fillRef idx="3">
-            <a:schemeClr val="accent1"/>
-          </a:fillRef>
-          <a:effectRef idx="2">
-            <a:schemeClr val="accent1"/>
-          </a:effectRef>
-          <a:fontRef idx="minor">
-            <a:schemeClr val="lt1"/>
-          </a:fontRef>
-        </p:style>
-        <p:txBody>
-          <a:bodyPr rtlCol="0" anchor="ctr" wrap="square" lIns="45720" rIns="45720" tIns="27432" bIns="27432"/>
-          <a:lstStyle/>
-          <a:p>
-            <a:pPr algn="ctr"/>
-            <a:r>
-              <a:rPr sz="1200" b="0" i="0">
-                <a:solidFill>
-                  <a:srgbClr val="333333"/>
-                </a:solidFill>
-                <a:latin typeface="Calibri"/>
-              </a:rPr>
-              <a:t>Generate-then-select pipeline</a:t>
-            </a:r>
-          </a:p>
-        </p:txBody>
-      </p:sp>
-      <p:sp>
-        <p:nvSpPr>
-          <p:cNvPr id="8" name="Rectangle 7"/>
-          <p:cNvSpPr/>
-          <p:nvPr/>
-        </p:nvSpPr>
-        <p:spPr>
-          <a:xfrm>
-            <a:off x="5669280" y="1801368"/>
-            <a:ext cx="5943600" cy="475488"/>
-          </a:xfrm>
-          <a:prstGeom prst="rect">
-            <a:avLst/>
-          </a:prstGeom>
-          <a:solidFill>
-            <a:srgbClr val="F0F0F2"/>
-          </a:solidFill>
-          <a:ln w="15875">
-            <a:solidFill>
-              <a:srgbClr val="636363"/>
-            </a:solidFill>
-          </a:ln>
-          <a:effectLst/>
-        </p:spPr>
-        <p:style>
-          <a:lnRef idx="1">
-            <a:schemeClr val="accent1"/>
-          </a:lnRef>
-          <a:fillRef idx="3">
-            <a:schemeClr val="accent1"/>
-          </a:fillRef>
-          <a:effectRef idx="2">
-            <a:schemeClr val="accent1"/>
-          </a:effectRef>
-          <a:fontRef idx="minor">
-            <a:schemeClr val="lt1"/>
-          </a:fontRef>
-        </p:style>
-        <p:txBody>
-          <a:bodyPr rtlCol="0" anchor="ctr" wrap="square" lIns="45720" rIns="45720" tIns="27432" bIns="27432"/>
-          <a:lstStyle/>
-          <a:p>
-            <a:pPr algn="ctr"/>
-            <a:r>
-              <a:rPr sz="1200" b="0" i="0">
-                <a:solidFill>
-                  <a:srgbClr val="333333"/>
-                </a:solidFill>
-                <a:latin typeface="Calibri"/>
-              </a:rPr>
-              <a:t>over-generate &amp; select pattern (NLG / QG)</a:t>
-            </a:r>
-          </a:p>
-        </p:txBody>
-      </p:sp>
-      <p:sp>
-        <p:nvSpPr>
-          <p:cNvPr id="9" name="Rectangle 8"/>
-          <p:cNvSpPr/>
-          <p:nvPr/>
-        </p:nvSpPr>
-        <p:spPr>
-          <a:xfrm>
-            <a:off x="640080" y="2276856"/>
-            <a:ext cx="4937760" cy="475488"/>
-          </a:xfrm>
-          <a:prstGeom prst="rect">
-            <a:avLst/>
-          </a:prstGeom>
-          <a:solidFill>
-            <a:srgbClr val="FFFFFF"/>
-          </a:solidFill>
-          <a:ln w="15875">
-            <a:solidFill>
-              <a:srgbClr val="636363"/>
-            </a:solidFill>
-          </a:ln>
-          <a:effectLst/>
-        </p:spPr>
-        <p:style>
-          <a:lnRef idx="1">
-            <a:schemeClr val="accent1"/>
-          </a:lnRef>
-          <a:fillRef idx="3">
-            <a:schemeClr val="accent1"/>
-          </a:fillRef>
-          <a:effectRef idx="2">
-            <a:schemeClr val="accent1"/>
-          </a:effectRef>
-          <a:fontRef idx="minor">
-            <a:schemeClr val="lt1"/>
-          </a:fontRef>
-        </p:style>
-        <p:txBody>
-          <a:bodyPr rtlCol="0" anchor="ctr" wrap="square" lIns="45720" rIns="45720" tIns="27432" bIns="27432"/>
-          <a:lstStyle/>
-          <a:p>
-            <a:pPr algn="ctr"/>
-            <a:r>
-              <a:rPr sz="1200" b="0" i="0">
-                <a:solidFill>
-                  <a:srgbClr val="333333"/>
-                </a:solidFill>
-                <a:latin typeface="Calibri"/>
-              </a:rPr>
-              <a:t>RAG grounding (index.py)</a:t>
-            </a:r>
-          </a:p>
-        </p:txBody>
-      </p:sp>
-      <p:sp>
-        <p:nvSpPr>
-          <p:cNvPr id="10" name="Rectangle 9"/>
-          <p:cNvSpPr/>
-          <p:nvPr/>
-        </p:nvSpPr>
-        <p:spPr>
-          <a:xfrm>
-            <a:off x="5669280" y="2276856"/>
-            <a:ext cx="5943600" cy="475488"/>
-          </a:xfrm>
-          <a:prstGeom prst="rect">
-            <a:avLst/>
-          </a:prstGeom>
-          <a:solidFill>
-            <a:srgbClr val="FFFFFF"/>
-          </a:solidFill>
-          <a:ln w="15875">
-            <a:solidFill>
-              <a:srgbClr val="636363"/>
-            </a:solidFill>
-          </a:ln>
-          <a:effectLst/>
-        </p:spPr>
-        <p:style>
-          <a:lnRef idx="1">
-            <a:schemeClr val="accent1"/>
-          </a:lnRef>
-          <a:fillRef idx="3">
-            <a:schemeClr val="accent1"/>
-          </a:fillRef>
-          <a:effectRef idx="2">
-            <a:schemeClr val="accent1"/>
-          </a:effectRef>
-          <a:fontRef idx="minor">
-            <a:schemeClr val="lt1"/>
-          </a:fontRef>
-        </p:style>
-        <p:txBody>
-          <a:bodyPr rtlCol="0" anchor="ctr" wrap="square" lIns="45720" rIns="45720" tIns="27432" bIns="27432"/>
-          <a:lstStyle/>
-          <a:p>
-            <a:pPr algn="ctr"/>
-            <a:r>
-              <a:rPr sz="1200" b="0" i="0">
-                <a:solidFill>
-                  <a:srgbClr val="333333"/>
-                </a:solidFill>
-                <a:latin typeface="Calibri"/>
-              </a:rPr>
-              <a:t>Lewis et al. 2020 — retrieval-augmented generation</a:t>
-            </a:r>
-          </a:p>
-        </p:txBody>
-      </p:sp>
-      <p:sp>
-        <p:nvSpPr>
-          <p:cNvPr id="11" name="Rectangle 10"/>
-          <p:cNvSpPr/>
-          <p:nvPr/>
-        </p:nvSpPr>
-        <p:spPr>
-          <a:xfrm>
-            <a:off x="640080" y="2752344"/>
-            <a:ext cx="4937760" cy="475488"/>
-          </a:xfrm>
-          <a:prstGeom prst="rect">
-            <a:avLst/>
-          </a:prstGeom>
-          <a:solidFill>
-            <a:srgbClr val="F0F0F2"/>
-          </a:solidFill>
-          <a:ln w="15875">
-            <a:solidFill>
-              <a:srgbClr val="636363"/>
-            </a:solidFill>
-          </a:ln>
-          <a:effectLst/>
-        </p:spPr>
-        <p:style>
-          <a:lnRef idx="1">
-            <a:schemeClr val="accent1"/>
-          </a:lnRef>
-          <a:fillRef idx="3">
-            <a:schemeClr val="accent1"/>
-          </a:fillRef>
-          <a:effectRef idx="2">
-            <a:schemeClr val="accent1"/>
-          </a:effectRef>
-          <a:fontRef idx="minor">
-            <a:schemeClr val="lt1"/>
-          </a:fontRef>
-        </p:style>
-        <p:txBody>
-          <a:bodyPr rtlCol="0" anchor="ctr" wrap="square" lIns="45720" rIns="45720" tIns="27432" bIns="27432"/>
-          <a:lstStyle/>
-          <a:p>
-            <a:pPr algn="ctr"/>
-            <a:r>
-              <a:rPr sz="1200" b="0" i="0">
-                <a:solidFill>
-                  <a:srgbClr val="333333"/>
-                </a:solidFill>
-                <a:latin typeface="Calibri"/>
-              </a:rPr>
-              <a:t>Bloom levels + aligned prompting</a:t>
-            </a:r>
-          </a:p>
-        </p:txBody>
-      </p:sp>
-      <p:sp>
-        <p:nvSpPr>
-          <p:cNvPr id="12" name="Rectangle 11"/>
-          <p:cNvSpPr/>
-          <p:nvPr/>
-        </p:nvSpPr>
-        <p:spPr>
-          <a:xfrm>
-            <a:off x="5669280" y="2752344"/>
-            <a:ext cx="5943600" cy="475488"/>
-          </a:xfrm>
-          <a:prstGeom prst="rect">
-            <a:avLst/>
-          </a:prstGeom>
-          <a:solidFill>
-            <a:srgbClr val="F0F0F2"/>
-          </a:solidFill>
-          <a:ln w="15875">
-            <a:solidFill>
-              <a:srgbClr val="636363"/>
-            </a:solidFill>
-          </a:ln>
-          <a:effectLst/>
-        </p:spPr>
-        <p:style>
-          <a:lnRef idx="1">
-            <a:schemeClr val="accent1"/>
-          </a:lnRef>
-          <a:fillRef idx="3">
-            <a:schemeClr val="accent1"/>
-          </a:fillRef>
-          <a:effectRef idx="2">
-            <a:schemeClr val="accent1"/>
-          </a:effectRef>
-          <a:fontRef idx="minor">
-            <a:schemeClr val="lt1"/>
-          </a:fontRef>
-        </p:style>
-        <p:txBody>
-          <a:bodyPr rtlCol="0" anchor="ctr" wrap="square" lIns="45720" rIns="45720" tIns="27432" bIns="27432"/>
-          <a:lstStyle/>
-          <a:p>
-            <a:pPr algn="ctr"/>
-            <a:r>
-              <a:rPr sz="1200" b="0" i="0">
-                <a:solidFill>
-                  <a:srgbClr val="333333"/>
-                </a:solidFill>
-                <a:latin typeface="Calibri"/>
-              </a:rPr>
-              <a:t>Anderson &amp; Krathwohl 2001 (revised Bloom)</a:t>
-            </a:r>
-          </a:p>
-        </p:txBody>
-      </p:sp>
-      <p:sp>
-        <p:nvSpPr>
-          <p:cNvPr id="13" name="Rectangle 12"/>
-          <p:cNvSpPr/>
-          <p:nvPr/>
-        </p:nvSpPr>
-        <p:spPr>
-          <a:xfrm>
-            <a:off x="640080" y="3227832"/>
-            <a:ext cx="4937760" cy="475488"/>
-          </a:xfrm>
-          <a:prstGeom prst="rect">
-            <a:avLst/>
-          </a:prstGeom>
-          <a:solidFill>
-            <a:srgbClr val="FFFFFF"/>
-          </a:solidFill>
-          <a:ln w="15875">
-            <a:solidFill>
-              <a:srgbClr val="636363"/>
-            </a:solidFill>
-          </a:ln>
-          <a:effectLst/>
-        </p:spPr>
-        <p:style>
-          <a:lnRef idx="1">
-            <a:schemeClr val="accent1"/>
-          </a:lnRef>
-          <a:fillRef idx="3">
-            <a:schemeClr val="accent1"/>
-          </a:fillRef>
-          <a:effectRef idx="2">
-            <a:schemeClr val="accent1"/>
-          </a:effectRef>
-          <a:fontRef idx="minor">
-            <a:schemeClr val="lt1"/>
-          </a:fontRef>
-        </p:style>
-        <p:txBody>
-          <a:bodyPr rtlCol="0" anchor="ctr" wrap="square" lIns="45720" rIns="45720" tIns="27432" bIns="27432"/>
-          <a:lstStyle/>
-          <a:p>
-            <a:pPr algn="ctr"/>
-            <a:r>
-              <a:rPr sz="1200" b="0" i="0">
-                <a:solidFill>
-                  <a:srgbClr val="333333"/>
-                </a:solidFill>
-                <a:latin typeface="Calibri"/>
-              </a:rPr>
-              <a:t>Structured / constrained decoding</a:t>
-            </a:r>
-          </a:p>
-        </p:txBody>
-      </p:sp>
-      <p:sp>
-        <p:nvSpPr>
-          <p:cNvPr id="14" name="Rectangle 13"/>
-          <p:cNvSpPr/>
-          <p:nvPr/>
-        </p:nvSpPr>
-        <p:spPr>
-          <a:xfrm>
-            <a:off x="5669280" y="3227832"/>
-            <a:ext cx="5943600" cy="475488"/>
-          </a:xfrm>
-          <a:prstGeom prst="rect">
-            <a:avLst/>
-          </a:prstGeom>
-          <a:solidFill>
-            <a:srgbClr val="FFFFFF"/>
-          </a:solidFill>
-          <a:ln w="15875">
-            <a:solidFill>
-              <a:srgbClr val="636363"/>
-            </a:solidFill>
-          </a:ln>
-          <a:effectLst/>
-        </p:spPr>
-        <p:style>
-          <a:lnRef idx="1">
-            <a:schemeClr val="accent1"/>
-          </a:lnRef>
-          <a:fillRef idx="3">
-            <a:schemeClr val="accent1"/>
-          </a:fillRef>
-          <a:effectRef idx="2">
-            <a:schemeClr val="accent1"/>
-          </a:effectRef>
-          <a:fontRef idx="minor">
-            <a:schemeClr val="lt1"/>
-          </a:fontRef>
-        </p:style>
-        <p:txBody>
-          <a:bodyPr rtlCol="0" anchor="ctr" wrap="square" lIns="45720" rIns="45720" tIns="27432" bIns="27432"/>
-          <a:lstStyle/>
-          <a:p>
-            <a:pPr algn="ctr"/>
-            <a:r>
-              <a:rPr sz="1200" b="0" i="0">
-                <a:solidFill>
-                  <a:srgbClr val="333333"/>
-                </a:solidFill>
-                <a:latin typeface="Calibri"/>
-              </a:rPr>
-              <a:t>JSON-Schema decoding; Outlines (Willard &amp; Louf 2023)</a:t>
-            </a:r>
-          </a:p>
-        </p:txBody>
-      </p:sp>
-      <p:sp>
-        <p:nvSpPr>
-          <p:cNvPr id="15" name="Rectangle 14"/>
-          <p:cNvSpPr/>
-          <p:nvPr/>
-        </p:nvSpPr>
-        <p:spPr>
-          <a:xfrm>
-            <a:off x="640080" y="3703320"/>
-            <a:ext cx="4937760" cy="475488"/>
-          </a:xfrm>
-          <a:prstGeom prst="rect">
-            <a:avLst/>
-          </a:prstGeom>
-          <a:solidFill>
-            <a:srgbClr val="F0F0F2"/>
-          </a:solidFill>
-          <a:ln w="15875">
-            <a:solidFill>
-              <a:srgbClr val="636363"/>
-            </a:solidFill>
-          </a:ln>
-          <a:effectLst/>
-        </p:spPr>
-        <p:style>
-          <a:lnRef idx="1">
-            <a:schemeClr val="accent1"/>
-          </a:lnRef>
-          <a:fillRef idx="3">
-            <a:schemeClr val="accent1"/>
-          </a:fillRef>
-          <a:effectRef idx="2">
-            <a:schemeClr val="accent1"/>
-          </a:effectRef>
-          <a:fontRef idx="minor">
-            <a:schemeClr val="lt1"/>
-          </a:fontRef>
-        </p:style>
-        <p:txBody>
-          <a:bodyPr rtlCol="0" anchor="ctr" wrap="square" lIns="45720" rIns="45720" tIns="27432" bIns="27432"/>
-          <a:lstStyle/>
-          <a:p>
-            <a:pPr algn="ctr"/>
-            <a:r>
-              <a:rPr sz="1200" b="0" i="0">
-                <a:solidFill>
-                  <a:srgbClr val="333333"/>
-                </a:solidFill>
-                <a:latin typeface="Calibri"/>
-              </a:rPr>
-              <a:t>Test assembly as 0–1 MIP</a:t>
-            </a:r>
-          </a:p>
-        </p:txBody>
-      </p:sp>
-      <p:sp>
-        <p:nvSpPr>
-          <p:cNvPr id="16" name="Rectangle 15"/>
-          <p:cNvSpPr/>
-          <p:nvPr/>
-        </p:nvSpPr>
-        <p:spPr>
-          <a:xfrm>
-            <a:off x="5669280" y="3703320"/>
-            <a:ext cx="5943600" cy="475488"/>
-          </a:xfrm>
-          <a:prstGeom prst="rect">
-            <a:avLst/>
-          </a:prstGeom>
-          <a:solidFill>
-            <a:srgbClr val="F0F0F2"/>
-          </a:solidFill>
-          <a:ln w="15875">
-            <a:solidFill>
-              <a:srgbClr val="636363"/>
-            </a:solidFill>
-          </a:ln>
-          <a:effectLst/>
-        </p:spPr>
-        <p:style>
-          <a:lnRef idx="1">
-            <a:schemeClr val="accent1"/>
-          </a:lnRef>
-          <a:fillRef idx="3">
-            <a:schemeClr val="accent1"/>
-          </a:fillRef>
-          <a:effectRef idx="2">
-            <a:schemeClr val="accent1"/>
-          </a:effectRef>
-          <a:fontRef idx="minor">
-            <a:schemeClr val="lt1"/>
-          </a:fontRef>
-        </p:style>
-        <p:txBody>
-          <a:bodyPr rtlCol="0" anchor="ctr" wrap="square" lIns="45720" rIns="45720" tIns="27432" bIns="27432"/>
-          <a:lstStyle/>
-          <a:p>
-            <a:pPr algn="ctr"/>
-            <a:r>
-              <a:rPr sz="1200" b="0" i="0">
-                <a:solidFill>
-                  <a:srgbClr val="333333"/>
-                </a:solidFill>
-                <a:latin typeface="Calibri"/>
-              </a:rPr>
-              <a:t>van der Linden 2005 — optimal test design</a:t>
-            </a:r>
-          </a:p>
-        </p:txBody>
-      </p:sp>
-      <p:sp>
-        <p:nvSpPr>
-          <p:cNvPr id="17" name="Rectangle 16"/>
-          <p:cNvSpPr/>
-          <p:nvPr/>
-        </p:nvSpPr>
-        <p:spPr>
-          <a:xfrm>
-            <a:off x="640080" y="4178808"/>
-            <a:ext cx="4937760" cy="475488"/>
-          </a:xfrm>
-          <a:prstGeom prst="rect">
-            <a:avLst/>
-          </a:prstGeom>
-          <a:solidFill>
-            <a:srgbClr val="FFFFFF"/>
-          </a:solidFill>
-          <a:ln w="15875">
-            <a:solidFill>
-              <a:srgbClr val="636363"/>
-            </a:solidFill>
-          </a:ln>
-          <a:effectLst/>
-        </p:spPr>
-        <p:style>
-          <a:lnRef idx="1">
-            <a:schemeClr val="accent1"/>
-          </a:lnRef>
-          <a:fillRef idx="3">
-            <a:schemeClr val="accent1"/>
-          </a:fillRef>
-          <a:effectRef idx="2">
-            <a:schemeClr val="accent1"/>
-          </a:effectRef>
-          <a:fontRef idx="minor">
-            <a:schemeClr val="lt1"/>
-          </a:fontRef>
-        </p:style>
-        <p:txBody>
-          <a:bodyPr rtlCol="0" anchor="ctr" wrap="square" lIns="45720" rIns="45720" tIns="27432" bIns="27432"/>
-          <a:lstStyle/>
-          <a:p>
-            <a:pPr algn="ctr"/>
-            <a:r>
-              <a:rPr sz="1200" b="0" i="0">
-                <a:solidFill>
-                  <a:srgbClr val="333333"/>
-                </a:solidFill>
-                <a:latin typeface="Calibri"/>
-              </a:rPr>
-              <a:t>Semantic dedup (embeddings)</a:t>
-            </a:r>
-          </a:p>
-        </p:txBody>
-      </p:sp>
-      <p:sp>
-        <p:nvSpPr>
-          <p:cNvPr id="18" name="Rectangle 17"/>
-          <p:cNvSpPr/>
-          <p:nvPr/>
-        </p:nvSpPr>
-        <p:spPr>
-          <a:xfrm>
-            <a:off x="5669280" y="4178808"/>
-            <a:ext cx="5943600" cy="475488"/>
-          </a:xfrm>
-          <a:prstGeom prst="rect">
-            <a:avLst/>
-          </a:prstGeom>
-          <a:solidFill>
-            <a:srgbClr val="FFFFFF"/>
-          </a:solidFill>
-          <a:ln w="15875">
-            <a:solidFill>
-              <a:srgbClr val="636363"/>
-            </a:solidFill>
-          </a:ln>
-          <a:effectLst/>
-        </p:spPr>
-        <p:style>
-          <a:lnRef idx="1">
-            <a:schemeClr val="accent1"/>
-          </a:lnRef>
-          <a:fillRef idx="3">
-            <a:schemeClr val="accent1"/>
-          </a:fillRef>
-          <a:effectRef idx="2">
-            <a:schemeClr val="accent1"/>
-          </a:effectRef>
-          <a:fontRef idx="minor">
-            <a:schemeClr val="lt1"/>
-          </a:fontRef>
-        </p:style>
-        <p:txBody>
-          <a:bodyPr rtlCol="0" anchor="ctr" wrap="square" lIns="45720" rIns="45720" tIns="27432" bIns="27432"/>
-          <a:lstStyle/>
-          <a:p>
-            <a:pPr algn="ctr"/>
-            <a:r>
-              <a:rPr sz="1200" b="0" i="0">
-                <a:solidFill>
-                  <a:srgbClr val="333333"/>
-                </a:solidFill>
-                <a:latin typeface="Calibri"/>
-              </a:rPr>
-              <a:t>Sentence-BERT (Reimers &amp; Gurevych 2019)</a:t>
-            </a:r>
-          </a:p>
-        </p:txBody>
-      </p:sp>
-      <p:sp>
-        <p:nvSpPr>
-          <p:cNvPr id="19" name="Rectangle 18"/>
-          <p:cNvSpPr/>
-          <p:nvPr/>
-        </p:nvSpPr>
-        <p:spPr>
-          <a:xfrm>
-            <a:off x="640080" y="4654296"/>
-            <a:ext cx="4937760" cy="475488"/>
-          </a:xfrm>
-          <a:prstGeom prst="rect">
-            <a:avLst/>
-          </a:prstGeom>
-          <a:solidFill>
-            <a:srgbClr val="F0F0F2"/>
-          </a:solidFill>
-          <a:ln w="15875">
-            <a:solidFill>
-              <a:srgbClr val="636363"/>
-            </a:solidFill>
-          </a:ln>
-          <a:effectLst/>
-        </p:spPr>
-        <p:style>
-          <a:lnRef idx="1">
-            <a:schemeClr val="accent1"/>
-          </a:lnRef>
-          <a:fillRef idx="3">
-            <a:schemeClr val="accent1"/>
-          </a:fillRef>
-          <a:effectRef idx="2">
-            <a:schemeClr val="accent1"/>
-          </a:effectRef>
-          <a:fontRef idx="minor">
-            <a:schemeClr val="lt1"/>
-          </a:fontRef>
-        </p:style>
-        <p:txBody>
-          <a:bodyPr rtlCol="0" anchor="ctr" wrap="square" lIns="45720" rIns="45720" tIns="27432" bIns="27432"/>
-          <a:lstStyle/>
-          <a:p>
-            <a:pPr algn="ctr"/>
-            <a:r>
-              <a:rPr sz="1200" b="0" i="0">
-                <a:solidFill>
-                  <a:srgbClr val="333333"/>
-                </a:solidFill>
-                <a:latin typeface="Calibri"/>
-              </a:rPr>
-              <a:t>LLM-as-judge (judge.py)</a:t>
-            </a:r>
-          </a:p>
-        </p:txBody>
-      </p:sp>
-      <p:sp>
-        <p:nvSpPr>
-          <p:cNvPr id="20" name="Rectangle 19"/>
-          <p:cNvSpPr/>
-          <p:nvPr/>
-        </p:nvSpPr>
-        <p:spPr>
-          <a:xfrm>
-            <a:off x="5669280" y="4654296"/>
-            <a:ext cx="5943600" cy="475488"/>
-          </a:xfrm>
-          <a:prstGeom prst="rect">
-            <a:avLst/>
-          </a:prstGeom>
-          <a:solidFill>
-            <a:srgbClr val="F0F0F2"/>
-          </a:solidFill>
-          <a:ln w="15875">
-            <a:solidFill>
-              <a:srgbClr val="636363"/>
-            </a:solidFill>
-          </a:ln>
-          <a:effectLst/>
-        </p:spPr>
-        <p:style>
-          <a:lnRef idx="1">
-            <a:schemeClr val="accent1"/>
-          </a:lnRef>
-          <a:fillRef idx="3">
-            <a:schemeClr val="accent1"/>
-          </a:fillRef>
-          <a:effectRef idx="2">
-            <a:schemeClr val="accent1"/>
-          </a:effectRef>
-          <a:fontRef idx="minor">
-            <a:schemeClr val="lt1"/>
-          </a:fontRef>
-        </p:style>
-        <p:txBody>
-          <a:bodyPr rtlCol="0" anchor="ctr" wrap="square" lIns="45720" rIns="45720" tIns="27432" bIns="27432"/>
-          <a:lstStyle/>
-          <a:p>
-            <a:pPr algn="ctr"/>
-            <a:r>
-              <a:rPr sz="1200" b="0" i="0">
-                <a:solidFill>
-                  <a:srgbClr val="333333"/>
-                </a:solidFill>
-                <a:latin typeface="Calibri"/>
-              </a:rPr>
-              <a:t>Zheng et al. 2023 — judging LLM-as-a-judge</a:t>
-            </a:r>
-          </a:p>
-        </p:txBody>
-      </p:sp>
-      <p:sp>
-        <p:nvSpPr>
-          <p:cNvPr id="21" name="Rectangle 20"/>
-          <p:cNvSpPr/>
-          <p:nvPr/>
-        </p:nvSpPr>
-        <p:spPr>
-          <a:xfrm>
-            <a:off x="640080" y="5129784"/>
-            <a:ext cx="4937760" cy="475488"/>
-          </a:xfrm>
-          <a:prstGeom prst="rect">
-            <a:avLst/>
-          </a:prstGeom>
-          <a:solidFill>
-            <a:srgbClr val="FFFFFF"/>
-          </a:solidFill>
-          <a:ln w="15875">
-            <a:solidFill>
-              <a:srgbClr val="636363"/>
-            </a:solidFill>
-          </a:ln>
-          <a:effectLst/>
-        </p:spPr>
-        <p:style>
-          <a:lnRef idx="1">
-            <a:schemeClr val="accent1"/>
-          </a:lnRef>
-          <a:fillRef idx="3">
-            <a:schemeClr val="accent1"/>
-          </a:fillRef>
-          <a:effectRef idx="2">
-            <a:schemeClr val="accent1"/>
-          </a:effectRef>
-          <a:fontRef idx="minor">
-            <a:schemeClr val="lt1"/>
-          </a:fontRef>
-        </p:style>
-        <p:txBody>
-          <a:bodyPr rtlCol="0" anchor="ctr" wrap="square" lIns="45720" rIns="45720" tIns="27432" bIns="27432"/>
-          <a:lstStyle/>
-          <a:p>
-            <a:pPr algn="ctr"/>
-            <a:r>
-              <a:rPr sz="1200" b="0" i="0">
-                <a:solidFill>
-                  <a:srgbClr val="333333"/>
-                </a:solidFill>
-                <a:latin typeface="Calibri"/>
-              </a:rPr>
-              <a:t>Test blueprint</a:t>
-            </a:r>
-          </a:p>
-        </p:txBody>
-      </p:sp>
-      <p:sp>
-        <p:nvSpPr>
-          <p:cNvPr id="22" name="Rectangle 21"/>
-          <p:cNvSpPr/>
-          <p:nvPr/>
-        </p:nvSpPr>
-        <p:spPr>
-          <a:xfrm>
-            <a:off x="5669280" y="5129784"/>
-            <a:ext cx="5943600" cy="475488"/>
-          </a:xfrm>
-          <a:prstGeom prst="rect">
-            <a:avLst/>
-          </a:prstGeom>
-          <a:solidFill>
-            <a:srgbClr val="FFFFFF"/>
-          </a:solidFill>
-          <a:ln w="15875">
-            <a:solidFill>
-              <a:srgbClr val="636363"/>
-            </a:solidFill>
-          </a:ln>
-          <a:effectLst/>
-        </p:spPr>
-        <p:style>
-          <a:lnRef idx="1">
-            <a:schemeClr val="accent1"/>
-          </a:lnRef>
-          <a:fillRef idx="3">
-            <a:schemeClr val="accent1"/>
-          </a:fillRef>
-          <a:effectRef idx="2">
-            <a:schemeClr val="accent1"/>
-          </a:effectRef>
-          <a:fontRef idx="minor">
-            <a:schemeClr val="lt1"/>
-          </a:fontRef>
-        </p:style>
-        <p:txBody>
-          <a:bodyPr rtlCol="0" anchor="ctr" wrap="square" lIns="45720" rIns="45720" tIns="27432" bIns="27432"/>
-          <a:lstStyle/>
-          <a:p>
-            <a:pPr algn="ctr"/>
-            <a:r>
-              <a:rPr sz="1200" b="0" i="0">
-                <a:solidFill>
-                  <a:srgbClr val="333333"/>
-                </a:solidFill>
-                <a:latin typeface="Calibri"/>
-              </a:rPr>
-              <a:t>classical table-of-specifications assessment design</a:t>
-            </a:r>
-          </a:p>
-        </p:txBody>
-      </p:sp>
-      <p:sp>
-        <p:nvSpPr>
-          <p:cNvPr id="23" name="TextBox 22"/>
-          <p:cNvSpPr txBox="1"/>
-          <p:nvPr/>
-        </p:nvSpPr>
-        <p:spPr>
-          <a:xfrm>
-            <a:off x="640080" y="6355080"/>
-            <a:ext cx="11338560" cy="457200"/>
-          </a:xfrm>
-          <a:prstGeom prst="rect">
-            <a:avLst/>
-          </a:prstGeom>
-          <a:noFill/>
-        </p:spPr>
-        <p:txBody>
-          <a:bodyPr wrap="square" anchor="t">
-            <a:spAutoFit/>
-          </a:bodyPr>
-          <a:lstStyle/>
-          <a:p>
-            <a:pPr algn="l"/>
-            <a:r>
-              <a:rPr sz="1100" b="0" i="1">
-                <a:solidFill>
-                  <a:srgbClr val="DE2D26"/>
-                </a:solidFill>
-                <a:latin typeface="Calibri"/>
-              </a:rPr>
-              <a:t>Note: the cited papers are not in the repo — replace these keys with the thesis's exact bibliography. Engineering (apportionment, greedy baseline, mock client) is project-specific.</a:t>
-            </a:r>
-          </a:p>
-        </p:txBody>
-      </p:sp>
-    </p:spTree>
-  </p:cSld>
-  <p:clrMapOvr>
-    <a:masterClrMapping/>
-  </p:clrMapOvr>
-</p:sld>
-</file>
-
-<file path=ppt/slides/slide12.xml><?xml version="1.0" encoding="utf-8"?>
-<p:sld xmlns:a="http://schemas.openxmlformats.org/drawingml/2006/main" xmlns:p="http://schemas.openxmlformats.org/presentationml/2006/main" xmlns:r="http://schemas.openxmlformats.org/officeDocument/2006/relationships">
-  <p:cSld>
-    <p:spTree>
-      <p:nvGrpSpPr>
-        <p:cNvPr id="1" name=""/>
-        <p:cNvGrpSpPr/>
-        <p:nvPr/>
-      </p:nvGrpSpPr>
-      <p:grpSpPr/>
-      <p:sp>
-        <p:nvSpPr>
-          <p:cNvPr id="2" name="Rectangle 1"/>
-          <p:cNvSpPr/>
-          <p:nvPr/>
-        </p:nvSpPr>
-        <p:spPr>
-          <a:xfrm>
-            <a:off x="0" y="0"/>
-            <a:ext cx="12191695" cy="6858000"/>
-          </a:xfrm>
-          <a:prstGeom prst="rect">
-            <a:avLst/>
-          </a:prstGeom>
-          <a:solidFill>
-            <a:srgbClr val="1F2D3D"/>
-          </a:solidFill>
-          <a:ln>
-            <a:noFill/>
-          </a:ln>
-          <a:effectLst/>
-        </p:spPr>
-        <p:style>
-          <a:lnRef idx="1">
-            <a:schemeClr val="accent1"/>
-          </a:lnRef>
-          <a:fillRef idx="3">
-            <a:schemeClr val="accent1"/>
-          </a:fillRef>
-          <a:effectRef idx="2">
-            <a:schemeClr val="accent1"/>
-          </a:effectRef>
-          <a:fontRef idx="minor">
-            <a:schemeClr val="lt1"/>
-          </a:fontRef>
-        </p:style>
-        <p:txBody>
-          <a:bodyPr rtlCol="0" anchor="ctr"/>
-          <a:lstStyle/>
-          <a:p>
-            <a:pPr algn="ctr"/>
-          </a:p>
-        </p:txBody>
-      </p:sp>
-      <p:sp>
-        <p:nvSpPr>
-          <p:cNvPr id="3" name="TextBox 2"/>
-          <p:cNvSpPr txBox="1"/>
-          <p:nvPr/>
-        </p:nvSpPr>
-        <p:spPr>
-          <a:xfrm>
             <a:off x="731520" y="640080"/>
             <a:ext cx="10972800" cy="822960"/>
           </a:xfrm>
@@ -4957,7 +3489,7 @@
                 </a:solidFill>
                 <a:latin typeface="Calibri"/>
               </a:rPr>
-              <a:t>→  Separate GENERATION from SELECTION — creativity vs. exact constraints.</a:t>
+              <a:t>→  Scope: SELECT an exam from a question bank — no generation, no LLM.</a:t>
             </a:r>
           </a:p>
           <a:p>
@@ -4973,7 +3505,7 @@
                 </a:solidFill>
                 <a:latin typeface="Calibri"/>
               </a:rPr>
-              <a:t>→  RAG keeps questions grounded &amp; traceable (source_ref).</a:t>
+              <a:t>→  Blueprint = exact spec; counts resolve via largest-remainder.</a:t>
             </a:r>
           </a:p>
           <a:p>
@@ -4989,7 +3521,7 @@
                 </a:solidFill>
                 <a:latin typeface="Calibri"/>
               </a:rPr>
-              <a:t>→  Bloom-aligned prompting + tag coercion = exact pedagogical control.</a:t>
+              <a:t>→  Constraints from YAML and/or CLI flags (flags override).</a:t>
             </a:r>
           </a:p>
           <a:p>
@@ -5005,7 +3537,7 @@
                 </a:solidFill>
                 <a:latin typeface="Calibri"/>
               </a:rPr>
-              <a:t>→  A 0–1 MIP gives exact, auditable, multi-version assembly.</a:t>
+              <a:t>→  A 0–1 MIP gives exact, optimal, disjoint multi-version assembly.</a:t>
             </a:r>
           </a:p>
           <a:p>
@@ -5021,7 +3553,7 @@
                 </a:solidFill>
                 <a:latin typeface="Calibri"/>
               </a:rPr>
-              <a:t>→  Layered checks: schema, blueprint, grounding, dedup, LLM-judge.</a:t>
+              <a:t>→  Optional dedup + layered validation (schema, blueprint, dups).</a:t>
             </a:r>
           </a:p>
           <a:p>
@@ -5037,7 +3569,7 @@
                 </a:solidFill>
                 <a:latin typeface="Calibri"/>
               </a:rPr>
-              <a:t>→  Runs fully offline; swap the LLM provider with one .env line.</a:t>
+              <a:t>→  Runs fully offline; greedy baseline behind the same interface.</a:t>
             </a:r>
           </a:p>
         </p:txBody>
@@ -5134,7 +3666,7 @@
                 </a:solidFill>
                 <a:latin typeface="Calibri"/>
               </a:rPr>
-              <a:t>The core idea: generate, then select</a:t>
+              <a:t>Selection as exact optimisation</a:t>
             </a:r>
           </a:p>
         </p:txBody>
@@ -5169,7 +3701,7 @@
                 </a:solidFill>
                 <a:latin typeface="Calibri"/>
               </a:rPr>
-              <a:t>WHY THIS ARCHITECTURE</a:t>
+              <a:t>WHAT THE TOOL DOES</a:t>
             </a:r>
           </a:p>
         </p:txBody>
@@ -5183,7 +3715,7 @@
         <p:spPr>
           <a:xfrm>
             <a:off x="502920" y="1234440"/>
-            <a:ext cx="11155680" cy="640080"/>
+            <a:ext cx="11155680" cy="731520"/>
           </a:xfrm>
           <a:prstGeom prst="rect">
             <a:avLst/>
@@ -5204,7 +3736,7 @@
                 </a:solidFill>
                 <a:latin typeface="Calibri"/>
               </a:rPr>
-              <a:t>Don't ask one prompt to write "the exam". Split the job into two stages with very different failure modes.</a:t>
+              <a:t>You bring a bank of tagged questions. quizgen picks the exam that matches the professor's blueprint — exactly.</a:t>
             </a:r>
           </a:p>
         </p:txBody>
@@ -5217,8 +3749,63 @@
         </p:nvSpPr>
         <p:spPr>
           <a:xfrm>
-            <a:off x="640080" y="2103120"/>
-            <a:ext cx="5029200" cy="914400"/>
+            <a:off x="640080" y="2148840"/>
+            <a:ext cx="4846320" cy="914400"/>
+          </a:xfrm>
+          <a:prstGeom prst="roundRect">
+            <a:avLst/>
+          </a:prstGeom>
+          <a:solidFill>
+            <a:srgbClr val="E5F5E0"/>
+          </a:solidFill>
+          <a:ln w="15875">
+            <a:solidFill>
+              <a:srgbClr val="31A354"/>
+            </a:solidFill>
+          </a:ln>
+          <a:effectLst/>
+        </p:spPr>
+        <p:style>
+          <a:lnRef idx="1">
+            <a:schemeClr val="accent1"/>
+          </a:lnRef>
+          <a:fillRef idx="3">
+            <a:schemeClr val="accent1"/>
+          </a:fillRef>
+          <a:effectRef idx="2">
+            <a:schemeClr val="accent1"/>
+          </a:effectRef>
+          <a:fontRef idx="minor">
+            <a:schemeClr val="lt1"/>
+          </a:fontRef>
+        </p:style>
+        <p:txBody>
+          <a:bodyPr rtlCol="0" anchor="ctr" wrap="square" lIns="45720" rIns="45720" tIns="27432" bIns="27432"/>
+          <a:lstStyle/>
+          <a:p>
+            <a:pPr algn="ctr"/>
+            <a:r>
+              <a:rPr sz="1500" b="1" i="0">
+                <a:solidFill>
+                  <a:srgbClr val="333333"/>
+                </a:solidFill>
+                <a:latin typeface="Calibri"/>
+              </a:rPr>
+              <a:t>INPUT  ·  question bank (JSON) with metadata + a blueprint</a:t>
+            </a:r>
+          </a:p>
+        </p:txBody>
+      </p:sp>
+      <p:sp>
+        <p:nvSpPr>
+          <p:cNvPr id="7" name="Rounded Rectangle 6"/>
+          <p:cNvSpPr/>
+          <p:nvPr/>
+        </p:nvSpPr>
+        <p:spPr>
+          <a:xfrm>
+            <a:off x="6675120" y="2148840"/>
+            <a:ext cx="4846320" cy="914400"/>
           </a:xfrm>
           <a:prstGeom prst="roundRect">
             <a:avLst/>
@@ -5259,62 +3846,7 @@
                 </a:solidFill>
                 <a:latin typeface="Calibri"/>
               </a:rPr>
-              <a:t>GENERATE  →  over-produce a large, tagged, source-grounded POOL of candidates</a:t>
-            </a:r>
-          </a:p>
-        </p:txBody>
-      </p:sp>
-      <p:sp>
-        <p:nvSpPr>
-          <p:cNvPr id="7" name="Rounded Rectangle 6"/>
-          <p:cNvSpPr/>
-          <p:nvPr/>
-        </p:nvSpPr>
-        <p:spPr>
-          <a:xfrm>
-            <a:off x="6492240" y="2103120"/>
-            <a:ext cx="5029200" cy="914400"/>
-          </a:xfrm>
-          <a:prstGeom prst="roundRect">
-            <a:avLst/>
-          </a:prstGeom>
-          <a:solidFill>
-            <a:srgbClr val="E5F5E0"/>
-          </a:solidFill>
-          <a:ln w="15875">
-            <a:solidFill>
-              <a:srgbClr val="31A354"/>
-            </a:solidFill>
-          </a:ln>
-          <a:effectLst/>
-        </p:spPr>
-        <p:style>
-          <a:lnRef idx="1">
-            <a:schemeClr val="accent1"/>
-          </a:lnRef>
-          <a:fillRef idx="3">
-            <a:schemeClr val="accent1"/>
-          </a:fillRef>
-          <a:effectRef idx="2">
-            <a:schemeClr val="accent1"/>
-          </a:effectRef>
-          <a:fontRef idx="minor">
-            <a:schemeClr val="lt1"/>
-          </a:fontRef>
-        </p:style>
-        <p:txBody>
-          <a:bodyPr rtlCol="0" anchor="ctr" wrap="square" lIns="45720" rIns="45720" tIns="27432" bIns="27432"/>
-          <a:lstStyle/>
-          <a:p>
-            <a:pPr algn="ctr"/>
-            <a:r>
-              <a:rPr sz="1500" b="1" i="0">
-                <a:solidFill>
-                  <a:srgbClr val="333333"/>
-                </a:solidFill>
-                <a:latin typeface="Calibri"/>
-              </a:rPr>
-              <a:t>SELECT  →  pick the optimal subset matching the professor's BLUEPRINT</a:t>
+              <a:t>OUTPUT  ·  one or more disjoint, blueprint-compliant exam versions</a:t>
             </a:r>
           </a:p>
         </p:txBody>
@@ -5327,8 +3859,8 @@
         </p:nvCxnSpPr>
         <p:spPr>
           <a:xfrm>
-            <a:off x="5669280" y="2560320"/>
-            <a:ext cx="822960" cy="0"/>
+            <a:off x="5486400" y="2606040"/>
+            <a:ext cx="1188720" cy="0"/>
           </a:xfrm>
           <a:prstGeom prst="line">
             <a:avLst/>
@@ -5363,8 +3895,8 @@
         </p:nvSpPr>
         <p:spPr>
           <a:xfrm>
-            <a:off x="640080" y="3383280"/>
-            <a:ext cx="10972800" cy="2926080"/>
+            <a:off x="640080" y="3429000"/>
+            <a:ext cx="10972800" cy="2834640"/>
           </a:xfrm>
           <a:prstGeom prst="rect">
             <a:avLst/>
@@ -5389,7 +3921,7 @@
                 </a:solidFill>
                 <a:latin typeface="Calibri"/>
               </a:rPr>
-              <a:t>• Creative &amp; stochastic generation is decoupled from exact constraint satisfaction.</a:t>
+              <a:t>• Hitting counts exactly (per chapter, per difficulty, N versions) is a combinatorial optimisation problem — not a prompting problem.</a:t>
             </a:r>
           </a:p>
           <a:p>
@@ -5405,7 +3937,7 @@
                 </a:solidFill>
                 <a:latin typeface="Calibri"/>
               </a:rPr>
-              <a:t>• Auditability — every question traces to a source chunk; every exam traces to a blueprint.</a:t>
+              <a:t>• Solved with a 0–1 Mixed-Integer Program: exact, auditable, optimal under a quality objective.</a:t>
             </a:r>
           </a:p>
           <a:p>
@@ -5421,7 +3953,7 @@
                 </a:solidFill>
                 <a:latin typeface="Calibri"/>
               </a:rPr>
-              <a:t>• Exact constraints — selection is solved with a Mixed-Integer Program, not coaxed from a prompt.</a:t>
+              <a:t>• Parallel versions are produced in one solve and provably share no questions.</a:t>
             </a:r>
           </a:p>
           <a:p>
@@ -5437,7 +3969,7 @@
                 </a:solidFill>
                 <a:latin typeface="Calibri"/>
               </a:rPr>
-              <a:t>• Reusability — one pool yields many exams and parallel versions.</a:t>
+              <a:t>• Every exam embeds the resolved blueprint → self-describing &amp; reproducible.</a:t>
             </a:r>
           </a:p>
           <a:p>
@@ -5453,7 +3985,7 @@
                 </a:solidFill>
                 <a:latin typeface="Calibri"/>
               </a:rPr>
-              <a:t>• Separable evaluation — grounding, dedup, schema validation &amp; LLM-judge act on finished artifacts.</a:t>
+              <a:t>• No LLM, no PDF ingestion, no network — runs fully offline.</a:t>
             </a:r>
           </a:p>
         </p:txBody>
@@ -5585,21 +4117,124 @@
                 </a:solidFill>
                 <a:latin typeface="Calibri"/>
               </a:rPr>
-              <a:t>FIVE STAGES, ONE FLOW</a:t>
-            </a:r>
-          </a:p>
-        </p:txBody>
-      </p:sp>
-      <p:sp>
-        <p:nvSpPr>
-          <p:cNvPr id="5" name="Rounded Rectangle 4"/>
+              <a:t>POOL → SELECT → VERIFY</a:t>
+            </a:r>
+          </a:p>
+        </p:txBody>
+      </p:sp>
+      <p:sp>
+        <p:nvSpPr>
+          <p:cNvPr id="5" name="Rectangle 4"/>
           <p:cNvSpPr/>
           <p:nvPr/>
         </p:nvSpPr>
         <p:spPr>
           <a:xfrm>
-            <a:off x="691743" y="2468880"/>
-            <a:ext cx="1371600" cy="1051560"/>
+            <a:off x="640080" y="2651760"/>
+            <a:ext cx="2011680" cy="1097280"/>
+          </a:xfrm>
+          <a:prstGeom prst="rect">
+            <a:avLst/>
+          </a:prstGeom>
+          <a:solidFill>
+            <a:srgbClr val="E5F5E0"/>
+          </a:solidFill>
+          <a:ln w="15875">
+            <a:solidFill>
+              <a:srgbClr val="31A354"/>
+            </a:solidFill>
+          </a:ln>
+          <a:effectLst/>
+        </p:spPr>
+        <p:style>
+          <a:lnRef idx="1">
+            <a:schemeClr val="accent1"/>
+          </a:lnRef>
+          <a:fillRef idx="3">
+            <a:schemeClr val="accent1"/>
+          </a:fillRef>
+          <a:effectRef idx="2">
+            <a:schemeClr val="accent1"/>
+          </a:effectRef>
+          <a:fontRef idx="minor">
+            <a:schemeClr val="lt1"/>
+          </a:fontRef>
+        </p:style>
+        <p:txBody>
+          <a:bodyPr rtlCol="0" anchor="ctr" wrap="square" lIns="45720" rIns="45720" tIns="27432" bIns="27432"/>
+          <a:lstStyle/>
+          <a:p>
+            <a:pPr algn="ctr"/>
+            <a:r>
+              <a:rPr sz="1400" b="1" i="0">
+                <a:solidFill>
+                  <a:srgbClr val="333333"/>
+                </a:solidFill>
+                <a:latin typeface="Calibri"/>
+              </a:rPr>
+              <a:t>question bank</a:t>
+            </a:r>
+          </a:p>
+          <a:p>
+            <a:pPr algn="ctr"/>
+            <a:r>
+              <a:rPr sz="1400" b="1" i="0">
+                <a:solidFill>
+                  <a:srgbClr val="333333"/>
+                </a:solidFill>
+                <a:latin typeface="Calibri"/>
+              </a:rPr>
+              <a:t>(JSON)</a:t>
+            </a:r>
+          </a:p>
+        </p:txBody>
+      </p:sp>
+      <p:cxnSp>
+        <p:nvCxnSpPr>
+          <p:cNvPr id="6" name="Connector 5"/>
+          <p:cNvCxnSpPr/>
+          <p:nvPr/>
+        </p:nvCxnSpPr>
+        <p:spPr>
+          <a:xfrm>
+            <a:off x="2651760" y="3200400"/>
+            <a:ext cx="548640" cy="0"/>
+          </a:xfrm>
+          <a:prstGeom prst="line">
+            <a:avLst/>
+          </a:prstGeom>
+          <a:ln w="22860">
+            <a:solidFill>
+              <a:srgbClr val="636363"/>
+            </a:solidFill>
+            <a:tailEnd type="triangle" w="med" len="med"/>
+          </a:ln>
+        </p:spPr>
+        <p:style>
+          <a:lnRef idx="2">
+            <a:schemeClr val="accent1"/>
+          </a:lnRef>
+          <a:fillRef idx="0">
+            <a:schemeClr val="accent1"/>
+          </a:fillRef>
+          <a:effectRef idx="1">
+            <a:schemeClr val="accent1"/>
+          </a:effectRef>
+          <a:fontRef idx="minor">
+            <a:schemeClr val="tx1"/>
+          </a:fontRef>
+        </p:style>
+      </p:cxnSp>
+      <p:sp>
+        <p:nvSpPr>
+          <p:cNvPr id="7" name="Rounded Rectangle 6"/>
+          <p:cNvSpPr/>
+          <p:nvPr/>
+        </p:nvSpPr>
+        <p:spPr>
+          <a:xfrm>
+            <a:off x="3200400" y="2651760"/>
+            <a:ext cx="2011680" cy="1097280"/>
           </a:xfrm>
           <a:prstGeom prst="roundRect">
             <a:avLst/>
@@ -5634,39 +4269,39 @@
           <a:p>
             <a:pPr algn="ctr"/>
             <a:r>
-              <a:rPr sz="1300" b="1" i="0">
-                <a:solidFill>
-                  <a:srgbClr val="333333"/>
-                </a:solidFill>
-                <a:latin typeface="Calibri"/>
-              </a:rPr>
-              <a:t>1</a:t>
+              <a:rPr sz="1400" b="1" i="0">
+                <a:solidFill>
+                  <a:srgbClr val="333333"/>
+                </a:solidFill>
+                <a:latin typeface="Calibri"/>
+              </a:rPr>
+              <a:t>Deduplicate</a:t>
             </a:r>
           </a:p>
           <a:p>
             <a:pPr algn="ctr"/>
             <a:r>
-              <a:rPr sz="1300" b="1" i="0">
-                <a:solidFill>
-                  <a:srgbClr val="333333"/>
-                </a:solidFill>
-                <a:latin typeface="Calibri"/>
-              </a:rPr>
-              <a:t>Ingest</a:t>
+              <a:rPr sz="1400" b="1" i="0">
+                <a:solidFill>
+                  <a:srgbClr val="333333"/>
+                </a:solidFill>
+                <a:latin typeface="Calibri"/>
+              </a:rPr>
+              <a:t>(optional)</a:t>
             </a:r>
           </a:p>
         </p:txBody>
       </p:sp>
       <p:cxnSp>
         <p:nvCxnSpPr>
-          <p:cNvPr id="6" name="Connector 5"/>
+          <p:cNvPr id="8" name="Connector 7"/>
           <p:cNvCxnSpPr/>
           <p:nvPr/>
         </p:nvCxnSpPr>
         <p:spPr>
           <a:xfrm>
-            <a:off x="2063343" y="2994660"/>
-            <a:ext cx="201168" cy="0"/>
+            <a:off x="5212080" y="3200400"/>
+            <a:ext cx="731520" cy="0"/>
           </a:xfrm>
           <a:prstGeom prst="line">
             <a:avLst/>
@@ -5695,14 +4330,14 @@
       </p:cxnSp>
       <p:sp>
         <p:nvSpPr>
-          <p:cNvPr id="7" name="Rounded Rectangle 6"/>
+          <p:cNvPr id="9" name="Rounded Rectangle 8"/>
           <p:cNvSpPr/>
           <p:nvPr/>
         </p:nvSpPr>
         <p:spPr>
           <a:xfrm>
-            <a:off x="2264511" y="2468880"/>
-            <a:ext cx="1371600" cy="1051560"/>
+            <a:off x="5943600" y="2651760"/>
+            <a:ext cx="2011680" cy="1097280"/>
           </a:xfrm>
           <a:prstGeom prst="roundRect">
             <a:avLst/>
@@ -5737,51 +4372,39 @@
           <a:p>
             <a:pPr algn="ctr"/>
             <a:r>
-              <a:rPr sz="1300" b="1" i="0">
-                <a:solidFill>
-                  <a:srgbClr val="333333"/>
-                </a:solidFill>
-                <a:latin typeface="Calibri"/>
-              </a:rPr>
-              <a:t>2</a:t>
+              <a:rPr sz="1400" b="1" i="0">
+                <a:solidFill>
+                  <a:srgbClr val="333333"/>
+                </a:solidFill>
+                <a:latin typeface="Calibri"/>
+              </a:rPr>
+              <a:t>Assemble</a:t>
             </a:r>
           </a:p>
           <a:p>
             <a:pPr algn="ctr"/>
             <a:r>
-              <a:rPr sz="1300" b="1" i="0">
-                <a:solidFill>
-                  <a:srgbClr val="333333"/>
-                </a:solidFill>
-                <a:latin typeface="Calibri"/>
-              </a:rPr>
-              <a:t>Index</a:t>
-            </a:r>
-          </a:p>
-          <a:p>
-            <a:pPr algn="ctr"/>
-            <a:r>
-              <a:rPr sz="1300" b="1" i="0">
-                <a:solidFill>
-                  <a:srgbClr val="333333"/>
-                </a:solidFill>
-                <a:latin typeface="Calibri"/>
-              </a:rPr>
-              <a:t>(RAG)</a:t>
+              <a:rPr sz="1400" b="1" i="0">
+                <a:solidFill>
+                  <a:srgbClr val="333333"/>
+                </a:solidFill>
+                <a:latin typeface="Calibri"/>
+              </a:rPr>
+              <a:t>(greedy / MIP)</a:t>
             </a:r>
           </a:p>
         </p:txBody>
       </p:sp>
       <p:cxnSp>
         <p:nvCxnSpPr>
-          <p:cNvPr id="8" name="Connector 7"/>
+          <p:cNvPr id="10" name="Connector 9"/>
           <p:cNvCxnSpPr/>
           <p:nvPr/>
         </p:nvCxnSpPr>
         <p:spPr>
           <a:xfrm>
-            <a:off x="3636111" y="2994660"/>
-            <a:ext cx="201168" cy="0"/>
+            <a:off x="7955280" y="3200400"/>
+            <a:ext cx="731520" cy="0"/>
           </a:xfrm>
           <a:prstGeom prst="line">
             <a:avLst/>
@@ -5810,14 +4433,14 @@
       </p:cxnSp>
       <p:sp>
         <p:nvSpPr>
-          <p:cNvPr id="9" name="Rounded Rectangle 8"/>
+          <p:cNvPr id="11" name="Rounded Rectangle 10"/>
           <p:cNvSpPr/>
           <p:nvPr/>
         </p:nvSpPr>
         <p:spPr>
           <a:xfrm>
-            <a:off x="3837279" y="2468880"/>
-            <a:ext cx="1371600" cy="1051560"/>
+            <a:off x="8686800" y="2651760"/>
+            <a:ext cx="2011680" cy="1097280"/>
           </a:xfrm>
           <a:prstGeom prst="roundRect">
             <a:avLst/>
@@ -5852,58 +4475,113 @@
           <a:p>
             <a:pPr algn="ctr"/>
             <a:r>
-              <a:rPr sz="1300" b="1" i="0">
-                <a:solidFill>
-                  <a:srgbClr val="333333"/>
-                </a:solidFill>
-                <a:latin typeface="Calibri"/>
-              </a:rPr>
-              <a:t>3</a:t>
+              <a:rPr sz="1400" b="1" i="0">
+                <a:solidFill>
+                  <a:srgbClr val="333333"/>
+                </a:solidFill>
+                <a:latin typeface="Calibri"/>
+              </a:rPr>
+              <a:t>Validate</a:t>
             </a:r>
           </a:p>
           <a:p>
             <a:pPr algn="ctr"/>
             <a:r>
-              <a:rPr sz="1300" b="1" i="0">
-                <a:solidFill>
-                  <a:srgbClr val="333333"/>
-                </a:solidFill>
-                <a:latin typeface="Calibri"/>
-              </a:rPr>
-              <a:t>Generate</a:t>
-            </a:r>
-          </a:p>
+              <a:rPr sz="1400" b="1" i="0">
+                <a:solidFill>
+                  <a:srgbClr val="333333"/>
+                </a:solidFill>
+                <a:latin typeface="Calibri"/>
+              </a:rPr>
+              <a:t>(optional)</a:t>
+            </a:r>
+          </a:p>
+        </p:txBody>
+      </p:sp>
+      <p:sp>
+        <p:nvSpPr>
+          <p:cNvPr id="12" name="Rectangle 11"/>
+          <p:cNvSpPr/>
+          <p:nvPr/>
+        </p:nvSpPr>
+        <p:spPr>
+          <a:xfrm>
+            <a:off x="10881360" y="2651760"/>
+            <a:ext cx="1097280" cy="1097280"/>
+          </a:xfrm>
+          <a:prstGeom prst="rect">
+            <a:avLst/>
+          </a:prstGeom>
+          <a:solidFill>
+            <a:srgbClr val="E5F5E0"/>
+          </a:solidFill>
+          <a:ln w="15875">
+            <a:solidFill>
+              <a:srgbClr val="31A354"/>
+            </a:solidFill>
+          </a:ln>
+          <a:effectLst/>
+        </p:spPr>
+        <p:style>
+          <a:lnRef idx="1">
+            <a:schemeClr val="accent1"/>
+          </a:lnRef>
+          <a:fillRef idx="3">
+            <a:schemeClr val="accent1"/>
+          </a:fillRef>
+          <a:effectRef idx="2">
+            <a:schemeClr val="accent1"/>
+          </a:effectRef>
+          <a:fontRef idx="minor">
+            <a:schemeClr val="lt1"/>
+          </a:fontRef>
+        </p:style>
+        <p:txBody>
+          <a:bodyPr rtlCol="0" anchor="ctr" wrap="square" lIns="45720" rIns="45720" tIns="27432" bIns="27432"/>
+          <a:lstStyle/>
           <a:p>
             <a:pPr algn="ctr"/>
             <a:r>
-              <a:rPr sz="1300" b="1" i="0">
-                <a:solidFill>
-                  <a:srgbClr val="333333"/>
-                </a:solidFill>
-                <a:latin typeface="Calibri"/>
-              </a:rPr>
-              <a:t>pool</a:t>
+              <a:rPr sz="1100" b="1" i="0">
+                <a:solidFill>
+                  <a:srgbClr val="333333"/>
+                </a:solidFill>
+                <a:latin typeface="Calibri"/>
+              </a:rPr>
+              <a:t>exam</a:t>
+            </a:r>
+          </a:p>
+          <a:p>
+            <a:pPr algn="ctr"/>
+            <a:r>
+              <a:rPr sz="1100" b="1" i="0">
+                <a:solidFill>
+                  <a:srgbClr val="333333"/>
+                </a:solidFill>
+                <a:latin typeface="Calibri"/>
+              </a:rPr>
+              <a:t>versions</a:t>
             </a:r>
           </a:p>
         </p:txBody>
       </p:sp>
       <p:cxnSp>
         <p:nvCxnSpPr>
-          <p:cNvPr id="10" name="Connector 9"/>
+          <p:cNvPr id="13" name="Connector 12"/>
           <p:cNvCxnSpPr/>
           <p:nvPr/>
         </p:nvCxnSpPr>
         <p:spPr>
           <a:xfrm>
-            <a:off x="5208879" y="2994660"/>
-            <a:ext cx="201168" cy="0"/>
+            <a:off x="10698480" y="3200400"/>
+            <a:ext cx="182880" cy="0"/>
           </a:xfrm>
           <a:prstGeom prst="line">
             <a:avLst/>
           </a:prstGeom>
-          <a:ln w="22860">
+          <a:ln w="20320">
             <a:solidFill>
-              <a:srgbClr val="636363"/>
+              <a:srgbClr val="31A354"/>
             </a:solidFill>
             <a:tailEnd type="triangle" w="med" len="med"/>
           </a:ln>
@@ -5925,14 +4603,172 @@
       </p:cxnSp>
       <p:sp>
         <p:nvSpPr>
-          <p:cNvPr id="11" name="Rounded Rectangle 10"/>
+          <p:cNvPr id="14" name="Rectangle 13"/>
           <p:cNvSpPr/>
           <p:nvPr/>
         </p:nvSpPr>
         <p:spPr>
           <a:xfrm>
-            <a:off x="5410047" y="2468880"/>
-            <a:ext cx="1371600" cy="1051560"/>
+            <a:off x="5943600" y="1371600"/>
+            <a:ext cx="2011680" cy="640080"/>
+          </a:xfrm>
+          <a:prstGeom prst="rect">
+            <a:avLst/>
+          </a:prstGeom>
+          <a:solidFill>
+            <a:srgbClr val="FDE0DD"/>
+          </a:solidFill>
+          <a:ln w="15875">
+            <a:solidFill>
+              <a:srgbClr val="DE2D26"/>
+            </a:solidFill>
+          </a:ln>
+          <a:effectLst/>
+        </p:spPr>
+        <p:style>
+          <a:lnRef idx="1">
+            <a:schemeClr val="accent1"/>
+          </a:lnRef>
+          <a:fillRef idx="3">
+            <a:schemeClr val="accent1"/>
+          </a:fillRef>
+          <a:effectRef idx="2">
+            <a:schemeClr val="accent1"/>
+          </a:effectRef>
+          <a:fontRef idx="minor">
+            <a:schemeClr val="lt1"/>
+          </a:fontRef>
+        </p:style>
+        <p:txBody>
+          <a:bodyPr rtlCol="0" anchor="ctr" wrap="square" lIns="45720" rIns="45720" tIns="27432" bIns="27432"/>
+          <a:lstStyle/>
+          <a:p>
+            <a:pPr algn="ctr"/>
+            <a:r>
+              <a:rPr sz="1200" b="1" i="0">
+                <a:solidFill>
+                  <a:srgbClr val="333333"/>
+                </a:solidFill>
+                <a:latin typeface="Calibri"/>
+              </a:rPr>
+              <a:t>blueprint</a:t>
+            </a:r>
+          </a:p>
+          <a:p>
+            <a:pPr algn="ctr"/>
+            <a:r>
+              <a:rPr sz="1200" b="1" i="0">
+                <a:solidFill>
+                  <a:srgbClr val="333333"/>
+                </a:solidFill>
+                <a:latin typeface="Calibri"/>
+              </a:rPr>
+              <a:t>(YAML + flags)</a:t>
+            </a:r>
+          </a:p>
+        </p:txBody>
+      </p:sp>
+      <p:cxnSp>
+        <p:nvCxnSpPr>
+          <p:cNvPr id="15" name="Connector 14"/>
+          <p:cNvCxnSpPr/>
+          <p:nvPr/>
+        </p:nvCxnSpPr>
+        <p:spPr>
+          <a:xfrm>
+            <a:off x="6949440" y="2011680"/>
+            <a:ext cx="0" cy="640080"/>
+          </a:xfrm>
+          <a:prstGeom prst="line">
+            <a:avLst/>
+          </a:prstGeom>
+          <a:ln w="20320">
+            <a:solidFill>
+              <a:srgbClr val="DE2D26"/>
+            </a:solidFill>
+            <a:tailEnd type="triangle" w="med" len="med"/>
+          </a:ln>
+        </p:spPr>
+        <p:style>
+          <a:lnRef idx="2">
+            <a:schemeClr val="accent1"/>
+          </a:lnRef>
+          <a:fillRef idx="0">
+            <a:schemeClr val="accent1"/>
+          </a:fillRef>
+          <a:effectRef idx="1">
+            <a:schemeClr val="accent1"/>
+          </a:effectRef>
+          <a:fontRef idx="minor">
+            <a:schemeClr val="tx1"/>
+          </a:fontRef>
+        </p:style>
+      </p:cxnSp>
+      <p:sp>
+        <p:nvSpPr>
+          <p:cNvPr id="16" name="Rounded Rectangle 15"/>
+          <p:cNvSpPr/>
+          <p:nvPr/>
+        </p:nvSpPr>
+        <p:spPr>
+          <a:xfrm>
+            <a:off x="640080" y="4572000"/>
+            <a:ext cx="1828800" cy="384048"/>
+          </a:xfrm>
+          <a:prstGeom prst="roundRect">
+            <a:avLst/>
+          </a:prstGeom>
+          <a:solidFill>
+            <a:srgbClr val="E5F5E0"/>
+          </a:solidFill>
+          <a:ln w="15875">
+            <a:solidFill>
+              <a:srgbClr val="31A354"/>
+            </a:solidFill>
+          </a:ln>
+          <a:effectLst/>
+        </p:spPr>
+        <p:style>
+          <a:lnRef idx="1">
+            <a:schemeClr val="accent1"/>
+          </a:lnRef>
+          <a:fillRef idx="3">
+            <a:schemeClr val="accent1"/>
+          </a:fillRef>
+          <a:effectRef idx="2">
+            <a:schemeClr val="accent1"/>
+          </a:effectRef>
+          <a:fontRef idx="minor">
+            <a:schemeClr val="lt1"/>
+          </a:fontRef>
+        </p:style>
+        <p:txBody>
+          <a:bodyPr rtlCol="0" anchor="ctr" wrap="square" lIns="45720" rIns="45720" tIns="27432" bIns="27432"/>
+          <a:lstStyle/>
+          <a:p>
+            <a:pPr algn="ctr"/>
+            <a:r>
+              <a:rPr sz="1100" b="1" i="0">
+                <a:solidFill>
+                  <a:srgbClr val="333333"/>
+                </a:solidFill>
+                <a:latin typeface="Calibri"/>
+              </a:rPr>
+              <a:t>data</a:t>
+            </a:r>
+          </a:p>
+        </p:txBody>
+      </p:sp>
+      <p:sp>
+        <p:nvSpPr>
+          <p:cNvPr id="17" name="Rounded Rectangle 16"/>
+          <p:cNvSpPr/>
+          <p:nvPr/>
+        </p:nvSpPr>
+        <p:spPr>
+          <a:xfrm>
+            <a:off x="2651760" y="4572000"/>
+            <a:ext cx="2011680" cy="384048"/>
           </a:xfrm>
           <a:prstGeom prst="roundRect">
             <a:avLst/>
@@ -5967,545 +4803,29 @@
           <a:p>
             <a:pPr algn="ctr"/>
             <a:r>
-              <a:rPr sz="1300" b="1" i="0">
-                <a:solidFill>
-                  <a:srgbClr val="333333"/>
-                </a:solidFill>
-                <a:latin typeface="Calibri"/>
-              </a:rPr>
-              <a:t>4a</a:t>
-            </a:r>
-          </a:p>
-          <a:p>
-            <a:pPr algn="ctr"/>
-            <a:r>
-              <a:rPr sz="1300" b="1" i="0">
-                <a:solidFill>
-                  <a:srgbClr val="333333"/>
-                </a:solidFill>
-                <a:latin typeface="Calibri"/>
-              </a:rPr>
-              <a:t>Dedup</a:t>
-            </a:r>
-          </a:p>
-        </p:txBody>
-      </p:sp>
-      <p:cxnSp>
-        <p:nvCxnSpPr>
-          <p:cNvPr id="12" name="Connector 11"/>
-          <p:cNvCxnSpPr/>
-          <p:nvPr/>
-        </p:nvCxnSpPr>
-        <p:spPr>
-          <a:xfrm>
-            <a:off x="6781647" y="2994660"/>
-            <a:ext cx="201168" cy="0"/>
-          </a:xfrm>
-          <a:prstGeom prst="line">
-            <a:avLst/>
-          </a:prstGeom>
-          <a:ln w="22860">
-            <a:solidFill>
-              <a:srgbClr val="636363"/>
-            </a:solidFill>
-            <a:tailEnd type="triangle" w="med" len="med"/>
-          </a:ln>
-        </p:spPr>
-        <p:style>
-          <a:lnRef idx="2">
-            <a:schemeClr val="accent1"/>
-          </a:lnRef>
-          <a:fillRef idx="0">
-            <a:schemeClr val="accent1"/>
-          </a:fillRef>
-          <a:effectRef idx="1">
-            <a:schemeClr val="accent1"/>
-          </a:effectRef>
-          <a:fontRef idx="minor">
-            <a:schemeClr val="tx1"/>
-          </a:fontRef>
-        </p:style>
-      </p:cxnSp>
-      <p:sp>
-        <p:nvSpPr>
-          <p:cNvPr id="13" name="Rounded Rectangle 12"/>
+              <a:rPr sz="1100" b="1" i="0">
+                <a:solidFill>
+                  <a:srgbClr val="333333"/>
+                </a:solidFill>
+                <a:latin typeface="Calibri"/>
+              </a:rPr>
+              <a:t>processing</a:t>
+            </a:r>
+          </a:p>
+        </p:txBody>
+      </p:sp>
+      <p:sp>
+        <p:nvSpPr>
+          <p:cNvPr id="18" name="Rounded Rectangle 17"/>
           <p:cNvSpPr/>
           <p:nvPr/>
         </p:nvSpPr>
         <p:spPr>
           <a:xfrm>
-            <a:off x="6982815" y="2468880"/>
-            <a:ext cx="1371600" cy="1051560"/>
+            <a:off x="4846320" y="4572000"/>
+            <a:ext cx="2377440" cy="384048"/>
           </a:xfrm>
           <a:prstGeom prst="roundRect">
-            <a:avLst/>
-          </a:prstGeom>
-          <a:solidFill>
-            <a:srgbClr val="DEEBF7"/>
-          </a:solidFill>
-          <a:ln w="15875">
-            <a:solidFill>
-              <a:srgbClr val="3182BD"/>
-            </a:solidFill>
-          </a:ln>
-          <a:effectLst/>
-        </p:spPr>
-        <p:style>
-          <a:lnRef idx="1">
-            <a:schemeClr val="accent1"/>
-          </a:lnRef>
-          <a:fillRef idx="3">
-            <a:schemeClr val="accent1"/>
-          </a:fillRef>
-          <a:effectRef idx="2">
-            <a:schemeClr val="accent1"/>
-          </a:effectRef>
-          <a:fontRef idx="minor">
-            <a:schemeClr val="lt1"/>
-          </a:fontRef>
-        </p:style>
-        <p:txBody>
-          <a:bodyPr rtlCol="0" anchor="ctr" wrap="square" lIns="45720" rIns="45720" tIns="27432" bIns="27432"/>
-          <a:lstStyle/>
-          <a:p>
-            <a:pPr algn="ctr"/>
-            <a:r>
-              <a:rPr sz="1300" b="1" i="0">
-                <a:solidFill>
-                  <a:srgbClr val="333333"/>
-                </a:solidFill>
-                <a:latin typeface="Calibri"/>
-              </a:rPr>
-              <a:t>4b</a:t>
-            </a:r>
-          </a:p>
-          <a:p>
-            <a:pPr algn="ctr"/>
-            <a:r>
-              <a:rPr sz="1300" b="1" i="0">
-                <a:solidFill>
-                  <a:srgbClr val="333333"/>
-                </a:solidFill>
-                <a:latin typeface="Calibri"/>
-              </a:rPr>
-              <a:t>Assemble</a:t>
-            </a:r>
-          </a:p>
-          <a:p>
-            <a:pPr algn="ctr"/>
-            <a:r>
-              <a:rPr sz="1300" b="1" i="0">
-                <a:solidFill>
-                  <a:srgbClr val="333333"/>
-                </a:solidFill>
-                <a:latin typeface="Calibri"/>
-              </a:rPr>
-              <a:t>(MIP)</a:t>
-            </a:r>
-          </a:p>
-        </p:txBody>
-      </p:sp>
-      <p:cxnSp>
-        <p:nvCxnSpPr>
-          <p:cNvPr id="14" name="Connector 13"/>
-          <p:cNvCxnSpPr/>
-          <p:nvPr/>
-        </p:nvCxnSpPr>
-        <p:spPr>
-          <a:xfrm>
-            <a:off x="8354415" y="2994660"/>
-            <a:ext cx="201168" cy="0"/>
-          </a:xfrm>
-          <a:prstGeom prst="line">
-            <a:avLst/>
-          </a:prstGeom>
-          <a:ln w="22860">
-            <a:solidFill>
-              <a:srgbClr val="636363"/>
-            </a:solidFill>
-            <a:tailEnd type="triangle" w="med" len="med"/>
-          </a:ln>
-        </p:spPr>
-        <p:style>
-          <a:lnRef idx="2">
-            <a:schemeClr val="accent1"/>
-          </a:lnRef>
-          <a:fillRef idx="0">
-            <a:schemeClr val="accent1"/>
-          </a:fillRef>
-          <a:effectRef idx="1">
-            <a:schemeClr val="accent1"/>
-          </a:effectRef>
-          <a:fontRef idx="minor">
-            <a:schemeClr val="tx1"/>
-          </a:fontRef>
-        </p:style>
-      </p:cxnSp>
-      <p:sp>
-        <p:nvSpPr>
-          <p:cNvPr id="15" name="Rounded Rectangle 14"/>
-          <p:cNvSpPr/>
-          <p:nvPr/>
-        </p:nvSpPr>
-        <p:spPr>
-          <a:xfrm>
-            <a:off x="8555583" y="2468880"/>
-            <a:ext cx="1371600" cy="1051560"/>
-          </a:xfrm>
-          <a:prstGeom prst="roundRect">
-            <a:avLst/>
-          </a:prstGeom>
-          <a:solidFill>
-            <a:srgbClr val="DEEBF7"/>
-          </a:solidFill>
-          <a:ln w="15875">
-            <a:solidFill>
-              <a:srgbClr val="3182BD"/>
-            </a:solidFill>
-          </a:ln>
-          <a:effectLst/>
-        </p:spPr>
-        <p:style>
-          <a:lnRef idx="1">
-            <a:schemeClr val="accent1"/>
-          </a:lnRef>
-          <a:fillRef idx="3">
-            <a:schemeClr val="accent1"/>
-          </a:fillRef>
-          <a:effectRef idx="2">
-            <a:schemeClr val="accent1"/>
-          </a:effectRef>
-          <a:fontRef idx="minor">
-            <a:schemeClr val="lt1"/>
-          </a:fontRef>
-        </p:style>
-        <p:txBody>
-          <a:bodyPr rtlCol="0" anchor="ctr" wrap="square" lIns="45720" rIns="45720" tIns="27432" bIns="27432"/>
-          <a:lstStyle/>
-          <a:p>
-            <a:pPr algn="ctr"/>
-            <a:r>
-              <a:rPr sz="1300" b="1" i="0">
-                <a:solidFill>
-                  <a:srgbClr val="333333"/>
-                </a:solidFill>
-                <a:latin typeface="Calibri"/>
-              </a:rPr>
-              <a:t>5</a:t>
-            </a:r>
-          </a:p>
-          <a:p>
-            <a:pPr algn="ctr"/>
-            <a:r>
-              <a:rPr sz="1300" b="1" i="0">
-                <a:solidFill>
-                  <a:srgbClr val="333333"/>
-                </a:solidFill>
-                <a:latin typeface="Calibri"/>
-              </a:rPr>
-              <a:t>Validate</a:t>
-            </a:r>
-          </a:p>
-        </p:txBody>
-      </p:sp>
-      <p:cxnSp>
-        <p:nvCxnSpPr>
-          <p:cNvPr id="16" name="Connector 15"/>
-          <p:cNvCxnSpPr/>
-          <p:nvPr/>
-        </p:nvCxnSpPr>
-        <p:spPr>
-          <a:xfrm>
-            <a:off x="9927183" y="2994660"/>
-            <a:ext cx="201168" cy="0"/>
-          </a:xfrm>
-          <a:prstGeom prst="line">
-            <a:avLst/>
-          </a:prstGeom>
-          <a:ln w="22860">
-            <a:solidFill>
-              <a:srgbClr val="636363"/>
-            </a:solidFill>
-            <a:tailEnd type="triangle" w="med" len="med"/>
-          </a:ln>
-        </p:spPr>
-        <p:style>
-          <a:lnRef idx="2">
-            <a:schemeClr val="accent1"/>
-          </a:lnRef>
-          <a:fillRef idx="0">
-            <a:schemeClr val="accent1"/>
-          </a:fillRef>
-          <a:effectRef idx="1">
-            <a:schemeClr val="accent1"/>
-          </a:effectRef>
-          <a:fontRef idx="minor">
-            <a:schemeClr val="tx1"/>
-          </a:fontRef>
-        </p:style>
-      </p:cxnSp>
-      <p:sp>
-        <p:nvSpPr>
-          <p:cNvPr id="17" name="Rounded Rectangle 16"/>
-          <p:cNvSpPr/>
-          <p:nvPr/>
-        </p:nvSpPr>
-        <p:spPr>
-          <a:xfrm>
-            <a:off x="10128351" y="2468880"/>
-            <a:ext cx="1371600" cy="1051560"/>
-          </a:xfrm>
-          <a:prstGeom prst="roundRect">
-            <a:avLst/>
-          </a:prstGeom>
-          <a:solidFill>
-            <a:srgbClr val="DEEBF7"/>
-          </a:solidFill>
-          <a:ln w="15875">
-            <a:solidFill>
-              <a:srgbClr val="3182BD"/>
-            </a:solidFill>
-          </a:ln>
-          <a:effectLst/>
-        </p:spPr>
-        <p:style>
-          <a:lnRef idx="1">
-            <a:schemeClr val="accent1"/>
-          </a:lnRef>
-          <a:fillRef idx="3">
-            <a:schemeClr val="accent1"/>
-          </a:fillRef>
-          <a:effectRef idx="2">
-            <a:schemeClr val="accent1"/>
-          </a:effectRef>
-          <a:fontRef idx="minor">
-            <a:schemeClr val="lt1"/>
-          </a:fontRef>
-        </p:style>
-        <p:txBody>
-          <a:bodyPr rtlCol="0" anchor="ctr" wrap="square" lIns="45720" rIns="45720" tIns="27432" bIns="27432"/>
-          <a:lstStyle/>
-          <a:p>
-            <a:pPr algn="ctr"/>
-            <a:r>
-              <a:rPr sz="1300" b="1" i="0">
-                <a:solidFill>
-                  <a:srgbClr val="333333"/>
-                </a:solidFill>
-                <a:latin typeface="Calibri"/>
-              </a:rPr>
-              <a:t>5</a:t>
-            </a:r>
-          </a:p>
-          <a:p>
-            <a:pPr algn="ctr"/>
-            <a:r>
-              <a:rPr sz="1300" b="1" i="0">
-                <a:solidFill>
-                  <a:srgbClr val="333333"/>
-                </a:solidFill>
-                <a:latin typeface="Calibri"/>
-              </a:rPr>
-              <a:t>Judge</a:t>
-            </a:r>
-          </a:p>
-        </p:txBody>
-      </p:sp>
-      <p:sp>
-        <p:nvSpPr>
-          <p:cNvPr id="18" name="Rectangle 17"/>
-          <p:cNvSpPr/>
-          <p:nvPr/>
-        </p:nvSpPr>
-        <p:spPr>
-          <a:xfrm>
-            <a:off x="691743" y="1417320"/>
-            <a:ext cx="1371600" cy="548640"/>
-          </a:xfrm>
-          <a:prstGeom prst="rect">
-            <a:avLst/>
-          </a:prstGeom>
-          <a:solidFill>
-            <a:srgbClr val="E5F5E0"/>
-          </a:solidFill>
-          <a:ln w="15875">
-            <a:solidFill>
-              <a:srgbClr val="31A354"/>
-            </a:solidFill>
-          </a:ln>
-          <a:effectLst/>
-        </p:spPr>
-        <p:style>
-          <a:lnRef idx="1">
-            <a:schemeClr val="accent1"/>
-          </a:lnRef>
-          <a:fillRef idx="3">
-            <a:schemeClr val="accent1"/>
-          </a:fillRef>
-          <a:effectRef idx="2">
-            <a:schemeClr val="accent1"/>
-          </a:effectRef>
-          <a:fontRef idx="minor">
-            <a:schemeClr val="lt1"/>
-          </a:fontRef>
-        </p:style>
-        <p:txBody>
-          <a:bodyPr rtlCol="0" anchor="ctr" wrap="square" lIns="45720" rIns="45720" tIns="27432" bIns="27432"/>
-          <a:lstStyle/>
-          <a:p>
-            <a:pPr algn="ctr"/>
-            <a:r>
-              <a:rPr sz="1100" b="1" i="0">
-                <a:solidFill>
-                  <a:srgbClr val="333333"/>
-                </a:solidFill>
-                <a:latin typeface="Calibri"/>
-              </a:rPr>
-              <a:t>textbook.pdf</a:t>
-            </a:r>
-          </a:p>
-        </p:txBody>
-      </p:sp>
-      <p:cxnSp>
-        <p:nvCxnSpPr>
-          <p:cNvPr id="19" name="Connector 18"/>
-          <p:cNvCxnSpPr/>
-          <p:nvPr/>
-        </p:nvCxnSpPr>
-        <p:spPr>
-          <a:xfrm>
-            <a:off x="1377543" y="1965960"/>
-            <a:ext cx="0" cy="502920"/>
-          </a:xfrm>
-          <a:prstGeom prst="line">
-            <a:avLst/>
-          </a:prstGeom>
-          <a:ln w="20320">
-            <a:solidFill>
-              <a:srgbClr val="31A354"/>
-            </a:solidFill>
-            <a:tailEnd type="triangle" w="med" len="med"/>
-          </a:ln>
-        </p:spPr>
-        <p:style>
-          <a:lnRef idx="2">
-            <a:schemeClr val="accent1"/>
-          </a:lnRef>
-          <a:fillRef idx="0">
-            <a:schemeClr val="accent1"/>
-          </a:fillRef>
-          <a:effectRef idx="1">
-            <a:schemeClr val="accent1"/>
-          </a:effectRef>
-          <a:fontRef idx="minor">
-            <a:schemeClr val="tx1"/>
-          </a:fontRef>
-        </p:style>
-      </p:cxnSp>
-      <p:sp>
-        <p:nvSpPr>
-          <p:cNvPr id="20" name="Rectangle 19"/>
-          <p:cNvSpPr/>
-          <p:nvPr/>
-        </p:nvSpPr>
-        <p:spPr>
-          <a:xfrm>
-            <a:off x="3837279" y="1417320"/>
-            <a:ext cx="1371600" cy="548640"/>
-          </a:xfrm>
-          <a:prstGeom prst="rect">
-            <a:avLst/>
-          </a:prstGeom>
-          <a:solidFill>
-            <a:srgbClr val="E5F5E0"/>
-          </a:solidFill>
-          <a:ln w="15875">
-            <a:solidFill>
-              <a:srgbClr val="31A354"/>
-            </a:solidFill>
-          </a:ln>
-          <a:effectLst/>
-        </p:spPr>
-        <p:style>
-          <a:lnRef idx="1">
-            <a:schemeClr val="accent1"/>
-          </a:lnRef>
-          <a:fillRef idx="3">
-            <a:schemeClr val="accent1"/>
-          </a:fillRef>
-          <a:effectRef idx="2">
-            <a:schemeClr val="accent1"/>
-          </a:effectRef>
-          <a:fontRef idx="minor">
-            <a:schemeClr val="lt1"/>
-          </a:fontRef>
-        </p:style>
-        <p:txBody>
-          <a:bodyPr rtlCol="0" anchor="ctr" wrap="square" lIns="45720" rIns="45720" tIns="27432" bIns="27432"/>
-          <a:lstStyle/>
-          <a:p>
-            <a:pPr algn="ctr"/>
-            <a:r>
-              <a:rPr sz="1100" b="1" i="0">
-                <a:solidFill>
-                  <a:srgbClr val="333333"/>
-                </a:solidFill>
-                <a:latin typeface="Calibri"/>
-              </a:rPr>
-              <a:t>tagged pool</a:t>
-            </a:r>
-          </a:p>
-        </p:txBody>
-      </p:sp>
-      <p:cxnSp>
-        <p:nvCxnSpPr>
-          <p:cNvPr id="21" name="Connector 20"/>
-          <p:cNvCxnSpPr/>
-          <p:nvPr/>
-        </p:nvCxnSpPr>
-        <p:spPr>
-          <a:xfrm flipV="1">
-            <a:off x="4523079" y="1965960"/>
-            <a:ext cx="0" cy="502920"/>
-          </a:xfrm>
-          <a:prstGeom prst="line">
-            <a:avLst/>
-          </a:prstGeom>
-          <a:ln w="20320">
-            <a:prstDash val="dash"/>
-            <a:solidFill>
-              <a:srgbClr val="31A354"/>
-            </a:solidFill>
-            <a:tailEnd type="triangle" w="med" len="med"/>
-          </a:ln>
-        </p:spPr>
-        <p:style>
-          <a:lnRef idx="2">
-            <a:schemeClr val="accent1"/>
-          </a:lnRef>
-          <a:fillRef idx="0">
-            <a:schemeClr val="accent1"/>
-          </a:fillRef>
-          <a:effectRef idx="1">
-            <a:schemeClr val="accent1"/>
-          </a:effectRef>
-          <a:fontRef idx="minor">
-            <a:schemeClr val="tx1"/>
-          </a:fontRef>
-        </p:style>
-      </p:cxnSp>
-      <p:sp>
-        <p:nvSpPr>
-          <p:cNvPr id="22" name="Rectangle 21"/>
-          <p:cNvSpPr/>
-          <p:nvPr/>
-        </p:nvSpPr>
-        <p:spPr>
-          <a:xfrm>
-            <a:off x="6982815" y="1417320"/>
-            <a:ext cx="1371600" cy="548640"/>
-          </a:xfrm>
-          <a:prstGeom prst="rect">
             <a:avLst/>
           </a:prstGeom>
           <a:solidFill>
@@ -6544,310 +4864,6 @@
                 </a:solidFill>
                 <a:latin typeface="Calibri"/>
               </a:rPr>
-              <a:t>blueprint.yaml</a:t>
-            </a:r>
-          </a:p>
-        </p:txBody>
-      </p:sp>
-      <p:cxnSp>
-        <p:nvCxnSpPr>
-          <p:cNvPr id="23" name="Connector 22"/>
-          <p:cNvCxnSpPr/>
-          <p:nvPr/>
-        </p:nvCxnSpPr>
-        <p:spPr>
-          <a:xfrm>
-            <a:off x="7668615" y="1965960"/>
-            <a:ext cx="0" cy="502920"/>
-          </a:xfrm>
-          <a:prstGeom prst="line">
-            <a:avLst/>
-          </a:prstGeom>
-          <a:ln w="20320">
-            <a:solidFill>
-              <a:srgbClr val="DE2D26"/>
-            </a:solidFill>
-            <a:tailEnd type="triangle" w="med" len="med"/>
-          </a:ln>
-        </p:spPr>
-        <p:style>
-          <a:lnRef idx="2">
-            <a:schemeClr val="accent1"/>
-          </a:lnRef>
-          <a:fillRef idx="0">
-            <a:schemeClr val="accent1"/>
-          </a:fillRef>
-          <a:effectRef idx="1">
-            <a:schemeClr val="accent1"/>
-          </a:effectRef>
-          <a:fontRef idx="minor">
-            <a:schemeClr val="tx1"/>
-          </a:fontRef>
-        </p:style>
-      </p:cxnSp>
-      <p:sp>
-        <p:nvSpPr>
-          <p:cNvPr id="24" name="Rectangle 23"/>
-          <p:cNvSpPr/>
-          <p:nvPr/>
-        </p:nvSpPr>
-        <p:spPr>
-          <a:xfrm>
-            <a:off x="8555583" y="3840480"/>
-            <a:ext cx="1371600" cy="548640"/>
-          </a:xfrm>
-          <a:prstGeom prst="rect">
-            <a:avLst/>
-          </a:prstGeom>
-          <a:solidFill>
-            <a:srgbClr val="E5F5E0"/>
-          </a:solidFill>
-          <a:ln w="15875">
-            <a:solidFill>
-              <a:srgbClr val="31A354"/>
-            </a:solidFill>
-          </a:ln>
-          <a:effectLst/>
-        </p:spPr>
-        <p:style>
-          <a:lnRef idx="1">
-            <a:schemeClr val="accent1"/>
-          </a:lnRef>
-          <a:fillRef idx="3">
-            <a:schemeClr val="accent1"/>
-          </a:fillRef>
-          <a:effectRef idx="2">
-            <a:schemeClr val="accent1"/>
-          </a:effectRef>
-          <a:fontRef idx="minor">
-            <a:schemeClr val="lt1"/>
-          </a:fontRef>
-        </p:style>
-        <p:txBody>
-          <a:bodyPr rtlCol="0" anchor="ctr" wrap="square" lIns="45720" rIns="45720" tIns="27432" bIns="27432"/>
-          <a:lstStyle/>
-          <a:p>
-            <a:pPr algn="ctr"/>
-            <a:r>
-              <a:rPr sz="1000" b="1" i="0">
-                <a:solidFill>
-                  <a:srgbClr val="333333"/>
-                </a:solidFill>
-                <a:latin typeface="Calibri"/>
-              </a:rPr>
-              <a:t>exam versions</a:t>
-            </a:r>
-          </a:p>
-          <a:p>
-            <a:pPr algn="ctr"/>
-            <a:r>
-              <a:rPr sz="1000" b="1" i="0">
-                <a:solidFill>
-                  <a:srgbClr val="333333"/>
-                </a:solidFill>
-                <a:latin typeface="Calibri"/>
-              </a:rPr>
-              <a:t>+ reports</a:t>
-            </a:r>
-          </a:p>
-        </p:txBody>
-      </p:sp>
-      <p:cxnSp>
-        <p:nvCxnSpPr>
-          <p:cNvPr id="25" name="Connector 24"/>
-          <p:cNvCxnSpPr/>
-          <p:nvPr/>
-        </p:nvCxnSpPr>
-        <p:spPr>
-          <a:xfrm>
-            <a:off x="9241383" y="3520440"/>
-            <a:ext cx="0" cy="320040"/>
-          </a:xfrm>
-          <a:prstGeom prst="line">
-            <a:avLst/>
-          </a:prstGeom>
-          <a:ln w="20320">
-            <a:solidFill>
-              <a:srgbClr val="31A354"/>
-            </a:solidFill>
-            <a:tailEnd type="triangle" w="med" len="med"/>
-          </a:ln>
-        </p:spPr>
-        <p:style>
-          <a:lnRef idx="2">
-            <a:schemeClr val="accent1"/>
-          </a:lnRef>
-          <a:fillRef idx="0">
-            <a:schemeClr val="accent1"/>
-          </a:fillRef>
-          <a:effectRef idx="1">
-            <a:schemeClr val="accent1"/>
-          </a:effectRef>
-          <a:fontRef idx="minor">
-            <a:schemeClr val="tx1"/>
-          </a:fontRef>
-        </p:style>
-      </p:cxnSp>
-      <p:sp>
-        <p:nvSpPr>
-          <p:cNvPr id="26" name="Rounded Rectangle 25"/>
-          <p:cNvSpPr/>
-          <p:nvPr/>
-        </p:nvSpPr>
-        <p:spPr>
-          <a:xfrm>
-            <a:off x="640080" y="5120640"/>
-            <a:ext cx="1828800" cy="384048"/>
-          </a:xfrm>
-          <a:prstGeom prst="roundRect">
-            <a:avLst/>
-          </a:prstGeom>
-          <a:solidFill>
-            <a:srgbClr val="DEEBF7"/>
-          </a:solidFill>
-          <a:ln w="15875">
-            <a:solidFill>
-              <a:srgbClr val="3182BD"/>
-            </a:solidFill>
-          </a:ln>
-          <a:effectLst/>
-        </p:spPr>
-        <p:style>
-          <a:lnRef idx="1">
-            <a:schemeClr val="accent1"/>
-          </a:lnRef>
-          <a:fillRef idx="3">
-            <a:schemeClr val="accent1"/>
-          </a:fillRef>
-          <a:effectRef idx="2">
-            <a:schemeClr val="accent1"/>
-          </a:effectRef>
-          <a:fontRef idx="minor">
-            <a:schemeClr val="lt1"/>
-          </a:fontRef>
-        </p:style>
-        <p:txBody>
-          <a:bodyPr rtlCol="0" anchor="ctr" wrap="square" lIns="45720" rIns="45720" tIns="27432" bIns="27432"/>
-          <a:lstStyle/>
-          <a:p>
-            <a:pPr algn="ctr"/>
-            <a:r>
-              <a:rPr sz="1100" b="1" i="0">
-                <a:solidFill>
-                  <a:srgbClr val="333333"/>
-                </a:solidFill>
-                <a:latin typeface="Calibri"/>
-              </a:rPr>
-              <a:t>processing stage</a:t>
-            </a:r>
-          </a:p>
-        </p:txBody>
-      </p:sp>
-      <p:sp>
-        <p:nvSpPr>
-          <p:cNvPr id="27" name="Rounded Rectangle 26"/>
-          <p:cNvSpPr/>
-          <p:nvPr/>
-        </p:nvSpPr>
-        <p:spPr>
-          <a:xfrm>
-            <a:off x="2651760" y="5120640"/>
-            <a:ext cx="1828800" cy="384048"/>
-          </a:xfrm>
-          <a:prstGeom prst="roundRect">
-            <a:avLst/>
-          </a:prstGeom>
-          <a:solidFill>
-            <a:srgbClr val="E5F5E0"/>
-          </a:solidFill>
-          <a:ln w="15875">
-            <a:solidFill>
-              <a:srgbClr val="31A354"/>
-            </a:solidFill>
-          </a:ln>
-          <a:effectLst/>
-        </p:spPr>
-        <p:style>
-          <a:lnRef idx="1">
-            <a:schemeClr val="accent1"/>
-          </a:lnRef>
-          <a:fillRef idx="3">
-            <a:schemeClr val="accent1"/>
-          </a:fillRef>
-          <a:effectRef idx="2">
-            <a:schemeClr val="accent1"/>
-          </a:effectRef>
-          <a:fontRef idx="minor">
-            <a:schemeClr val="lt1"/>
-          </a:fontRef>
-        </p:style>
-        <p:txBody>
-          <a:bodyPr rtlCol="0" anchor="ctr" wrap="square" lIns="45720" rIns="45720" tIns="27432" bIns="27432"/>
-          <a:lstStyle/>
-          <a:p>
-            <a:pPr algn="ctr"/>
-            <a:r>
-              <a:rPr sz="1100" b="1" i="0">
-                <a:solidFill>
-                  <a:srgbClr val="333333"/>
-                </a:solidFill>
-                <a:latin typeface="Calibri"/>
-              </a:rPr>
-              <a:t>data artifact</a:t>
-            </a:r>
-          </a:p>
-        </p:txBody>
-      </p:sp>
-      <p:sp>
-        <p:nvSpPr>
-          <p:cNvPr id="28" name="Rounded Rectangle 27"/>
-          <p:cNvSpPr/>
-          <p:nvPr/>
-        </p:nvSpPr>
-        <p:spPr>
-          <a:xfrm>
-            <a:off x="4663440" y="5120640"/>
-            <a:ext cx="2194560" cy="384048"/>
-          </a:xfrm>
-          <a:prstGeom prst="roundRect">
-            <a:avLst/>
-          </a:prstGeom>
-          <a:solidFill>
-            <a:srgbClr val="FDE0DD"/>
-          </a:solidFill>
-          <a:ln w="15875">
-            <a:solidFill>
-              <a:srgbClr val="DE2D26"/>
-            </a:solidFill>
-          </a:ln>
-          <a:effectLst/>
-        </p:spPr>
-        <p:style>
-          <a:lnRef idx="1">
-            <a:schemeClr val="accent1"/>
-          </a:lnRef>
-          <a:fillRef idx="3">
-            <a:schemeClr val="accent1"/>
-          </a:fillRef>
-          <a:effectRef idx="2">
-            <a:schemeClr val="accent1"/>
-          </a:effectRef>
-          <a:fontRef idx="minor">
-            <a:schemeClr val="lt1"/>
-          </a:fontRef>
-        </p:style>
-        <p:txBody>
-          <a:bodyPr rtlCol="0" anchor="ctr" wrap="square" lIns="45720" rIns="45720" tIns="27432" bIns="27432"/>
-          <a:lstStyle/>
-          <a:p>
-            <a:pPr algn="ctr"/>
-            <a:r>
-              <a:rPr sz="1100" b="1" i="0">
-                <a:solidFill>
-                  <a:srgbClr val="333333"/>
-                </a:solidFill>
-                <a:latin typeface="Calibri"/>
-              </a:rPr>
               <a:t>professor input</a:t>
             </a:r>
           </a:p>
@@ -6855,14 +4871,14 @@
       </p:sp>
       <p:sp>
         <p:nvSpPr>
-          <p:cNvPr id="29" name="TextBox 28"/>
+          <p:cNvPr id="19" name="TextBox 18"/>
           <p:cNvSpPr txBox="1"/>
           <p:nvPr/>
         </p:nvSpPr>
         <p:spPr>
           <a:xfrm>
-            <a:off x="640080" y="5669280"/>
-            <a:ext cx="10972800" cy="914400"/>
+            <a:off x="640080" y="5212080"/>
+            <a:ext cx="10972800" cy="1097280"/>
           </a:xfrm>
           <a:prstGeom prst="rect">
             <a:avLst/>
@@ -6883,7 +4899,7 @@
                 </a:solidFill>
                 <a:latin typeface="Calibri"/>
               </a:rPr>
-              <a:t>Stages 1–3 PRODUCE candidate questions (grounded in retrieved text). Stages 4–5 SELECT and VERIFY them. Each stage = one module in the quizgen package.</a:t>
+              <a:t>Dedup and validation are opt-in (--dedup / --validate). The blueprint drives assembly; each stage is one module in the quizgen package.</a:t>
             </a:r>
           </a:p>
         </p:txBody>
@@ -6980,7 +4996,7 @@
                 </a:solidFill>
                 <a:latin typeface="Calibri"/>
               </a:rPr>
-              <a:t>The data contract: one schema, exported not written</a:t>
+              <a:t>The input: a tagged question bank</a:t>
             </a:r>
           </a:p>
         </p:txBody>
@@ -7044,7 +5060,7 @@
           <a:p>
             <a:pPr>
               <a:spcAft>
-                <a:spcPts val="800"/>
+                <a:spcPts val="700"/>
               </a:spcAft>
             </a:pPr>
             <a:r>
@@ -7054,13 +5070,13 @@
                 </a:solidFill>
                 <a:latin typeface="Calibri"/>
               </a:rPr>
-              <a:t>• Every artifact is a Pydantic v2 model — the single source of truth.</a:t>
+              <a:t>• A JSON Quiz object (or a bare list) of Question items.</a:t>
             </a:r>
           </a:p>
           <a:p>
             <a:pPr>
               <a:spcAft>
-                <a:spcPts val="800"/>
+                <a:spcPts val="700"/>
               </a:spcAft>
             </a:pPr>
             <a:r>
@@ -7070,13 +5086,13 @@
                 </a:solidFill>
                 <a:latin typeface="Calibri"/>
               </a:rPr>
-              <a:t>• JSON Schema is EXPORTED from the models, so they can never drift.</a:t>
+              <a:t>• Pydantic v2 models are the single source of truth; JSON Schema is exported, not hand-written.</a:t>
             </a:r>
           </a:p>
           <a:p>
             <a:pPr>
               <a:spcAft>
-                <a:spcPts val="800"/>
+                <a:spcPts val="700"/>
               </a:spcAft>
             </a:pPr>
             <a:r>
@@ -7086,13 +5102,13 @@
                 </a:solidFill>
                 <a:latin typeface="Calibri"/>
               </a:rPr>
-              <a:t>• Three enums reused everywhere: a tag can't be a free-text typo.</a:t>
+              <a:t>• Metadata is exactly what selection reasons over:</a:t>
             </a:r>
           </a:p>
           <a:p>
             <a:pPr lvl="1">
               <a:spcAft>
-                <a:spcPts val="800"/>
+                <a:spcPts val="700"/>
               </a:spcAft>
             </a:pPr>
             <a:r>
@@ -7102,13 +5118,13 @@
                 </a:solidFill>
                 <a:latin typeface="Calibri"/>
               </a:rPr>
-              <a:t>– qtype: mcq | true_false | short_answer | cloze</a:t>
+              <a:t>– chapter → per-chapter quotas</a:t>
             </a:r>
           </a:p>
           <a:p>
             <a:pPr lvl="1">
               <a:spcAft>
-                <a:spcPts val="800"/>
+                <a:spcPts val="700"/>
               </a:spcAft>
             </a:pPr>
             <a:r>
@@ -7118,13 +5134,13 @@
                 </a:solidFill>
                 <a:latin typeface="Calibri"/>
               </a:rPr>
-              <a:t>– bloom_level: remember … create (revised Bloom)</a:t>
+              <a:t>– difficulty → easy/medium/hard mix</a:t>
             </a:r>
           </a:p>
           <a:p>
             <a:pPr lvl="1">
               <a:spcAft>
-                <a:spcPts val="800"/>
+                <a:spcPts val="700"/>
               </a:spcAft>
             </a:pPr>
             <a:r>
@@ -7134,23 +5150,39 @@
                 </a:solidFill>
                 <a:latin typeface="Calibri"/>
               </a:rPr>
-              <a:t>– difficulty: easy | medium | hard</a:t>
-            </a:r>
-          </a:p>
-          <a:p>
-            <a:pPr>
+              <a:t>– qtype → allowed-type filter</a:t>
+            </a:r>
+          </a:p>
+          <a:p>
+            <a:pPr lvl="1">
               <a:spcAft>
-                <a:spcPts val="800"/>
+                <a:spcPts val="700"/>
               </a:spcAft>
             </a:pPr>
             <a:r>
-              <a:rPr sz="1700">
-                <a:solidFill>
-                  <a:srgbClr val="333333"/>
-                </a:solidFill>
-                <a:latin typeface="Calibri"/>
-              </a:rPr>
-              <a:t>• source_ref links each question to the chunk(s) it was grounded in — the audit trail.</a:t>
+              <a:rPr sz="1500">
+                <a:solidFill>
+                  <a:srgbClr val="636363"/>
+                </a:solidFill>
+                <a:latin typeface="Calibri"/>
+              </a:rPr>
+              <a:t>– bloom_level → quality objective</a:t>
+            </a:r>
+          </a:p>
+          <a:p>
+            <a:pPr lvl="1">
+              <a:spcAft>
+                <a:spcPts val="700"/>
+              </a:spcAft>
+            </a:pPr>
+            <a:r>
+              <a:rPr sz="1500">
+                <a:solidFill>
+                  <a:srgbClr val="636363"/>
+                </a:solidFill>
+                <a:latin typeface="Calibri"/>
+              </a:rPr>
+              <a:t>– stem/answer/options → duplicate detection</a:t>
             </a:r>
           </a:p>
         </p:txBody>
@@ -7164,7 +5196,7 @@
         <p:spPr>
           <a:xfrm>
             <a:off x="6126480" y="1325880"/>
-            <a:ext cx="5486400" cy="3657600"/>
+            <a:ext cx="5486400" cy="4023360"/>
           </a:xfrm>
           <a:prstGeom prst="rect">
             <a:avLst/>
@@ -7205,7 +5237,7 @@
                 </a:solidFill>
                 <a:latin typeface="Consolas"/>
               </a:rPr>
-              <a:t>class Question(BaseModel):</a:t>
+              <a:t>{</a:t>
             </a:r>
           </a:p>
           <a:p>
@@ -7217,7 +5249,7 @@
                 </a:solidFill>
                 <a:latin typeface="Consolas"/>
               </a:rPr>
-              <a:t>    id: str            # uuid4 hex[:12]</a:t>
+              <a:t>  "chapter": 1,</a:t>
             </a:r>
           </a:p>
           <a:p>
@@ -7229,7 +5261,7 @@
                 </a:solidFill>
                 <a:latin typeface="Consolas"/>
               </a:rPr>
-              <a:t>    chapter: int</a:t>
+              <a:t>  "section": "1.2",</a:t>
             </a:r>
           </a:p>
           <a:p>
@@ -7241,7 +5273,7 @@
                 </a:solidFill>
                 <a:latin typeface="Consolas"/>
               </a:rPr>
-              <a:t>    section: str | None</a:t>
+              <a:t>  "qtype": "mcq",</a:t>
             </a:r>
           </a:p>
           <a:p>
@@ -7253,7 +5285,7 @@
                 </a:solidFill>
                 <a:latin typeface="Consolas"/>
               </a:rPr>
-              <a:t>    qtype: QuestionType</a:t>
+              <a:t>  "bloom_level": "understand",</a:t>
             </a:r>
           </a:p>
           <a:p>
@@ -7265,7 +5297,7 @@
                 </a:solidFill>
                 <a:latin typeface="Consolas"/>
               </a:rPr>
-              <a:t>    bloom_level: BloomLevel</a:t>
+              <a:t>  "difficulty": "medium",</a:t>
             </a:r>
           </a:p>
           <a:p>
@@ -7277,7 +5309,7 @@
                 </a:solidFill>
                 <a:latin typeface="Consolas"/>
               </a:rPr>
-              <a:t>    difficulty: Difficulty</a:t>
+              <a:t>  "stem": "Explain how A* uses ...",</a:t>
             </a:r>
           </a:p>
           <a:p>
@@ -7289,7 +5321,7 @@
                 </a:solidFill>
                 <a:latin typeface="Consolas"/>
               </a:rPr>
-              <a:t>    stem: str          # &gt;= 10 chars</a:t>
+              <a:t>  "options": ["A) ...", "B) ...",</a:t>
             </a:r>
           </a:p>
           <a:p>
@@ -7301,7 +5333,7 @@
                 </a:solidFill>
                 <a:latin typeface="Consolas"/>
               </a:rPr>
-              <a:t>    options: list[str] | None</a:t>
+              <a:t>              "C) ...", "D) ..."],</a:t>
             </a:r>
           </a:p>
           <a:p>
@@ -7313,7 +5345,7 @@
                 </a:solidFill>
                 <a:latin typeface="Consolas"/>
               </a:rPr>
-              <a:t>    answer: str</a:t>
+              <a:t>  "answer": "A",</a:t>
             </a:r>
           </a:p>
           <a:p>
@@ -7325,7 +5357,7 @@
                 </a:solidFill>
                 <a:latin typeface="Consolas"/>
               </a:rPr>
-              <a:t>    explanation: str   # &gt;= 10 chars</a:t>
+              <a:t>  "explanation": "A* is optimal ...",</a:t>
             </a:r>
           </a:p>
           <a:p>
@@ -7337,7 +5369,19 @@
                 </a:solidFill>
                 <a:latin typeface="Consolas"/>
               </a:rPr>
-              <a:t>    source_ref: str    # grounding</a:t>
+              <a:t>  "source_ref": "ch1_sec2_q1"</a:t>
+            </a:r>
+          </a:p>
+          <a:p>
+            <a:pPr algn="l"/>
+            <a:r>
+              <a:rPr sz="1400" b="0" i="0">
+                <a:solidFill>
+                  <a:srgbClr val="333333"/>
+                </a:solidFill>
+                <a:latin typeface="Consolas"/>
+              </a:rPr>
+              <a:t>}</a:t>
             </a:r>
           </a:p>
         </p:txBody>
@@ -7434,7 +5478,7 @@
                 </a:solidFill>
                 <a:latin typeface="Calibri"/>
               </a:rPr>
-              <a:t>Stages 1–2: ingest &amp; ground</a:t>
+              <a:t>The blueprint: a table of specifications</a:t>
             </a:r>
           </a:p>
         </p:txBody>
@@ -7469,42 +5513,134 @@
                 </a:solidFill>
                 <a:latin typeface="Calibri"/>
               </a:rPr>
-              <a:t>ingest.py  •  index.py</a:t>
-            </a:r>
-          </a:p>
-        </p:txBody>
-      </p:sp>
-      <p:sp>
-        <p:nvSpPr>
-          <p:cNvPr id="5" name="TextBox 4"/>
-          <p:cNvSpPr txBox="1"/>
-          <p:nvPr/>
-        </p:nvSpPr>
-        <p:spPr>
-          <a:xfrm>
-            <a:off x="640080" y="1188720"/>
-            <a:ext cx="5486400" cy="365760"/>
+              <a:t>blueprint.py</a:t>
+            </a:r>
+          </a:p>
+        </p:txBody>
+      </p:sp>
+      <p:sp>
+        <p:nvSpPr>
+          <p:cNvPr id="5" name="Rectangle 4"/>
+          <p:cNvSpPr/>
+          <p:nvPr/>
+        </p:nvSpPr>
+        <p:spPr>
+          <a:xfrm>
+            <a:off x="640080" y="1371600"/>
+            <a:ext cx="5394960" cy="2377440"/>
           </a:xfrm>
           <a:prstGeom prst="rect">
             <a:avLst/>
           </a:prstGeom>
-          <a:noFill/>
-        </p:spPr>
-        <p:txBody>
-          <a:bodyPr wrap="square" anchor="t">
-            <a:spAutoFit/>
-          </a:bodyPr>
-          <a:lstStyle/>
-          <a:p>
-            <a:pPr algn="l"/>
-            <a:r>
-              <a:rPr sz="1800" b="1" i="0">
-                <a:solidFill>
-                  <a:srgbClr val="3182BD"/>
-                </a:solidFill>
-                <a:latin typeface="Calibri"/>
-              </a:rPr>
-              <a:t>① INGEST</a:t>
+          <a:solidFill>
+            <a:srgbClr val="FDE0DD"/>
+          </a:solidFill>
+          <a:ln w="15875">
+            <a:solidFill>
+              <a:srgbClr val="DE2D26"/>
+            </a:solidFill>
+          </a:ln>
+          <a:effectLst/>
+        </p:spPr>
+        <p:style>
+          <a:lnRef idx="1">
+            <a:schemeClr val="accent1"/>
+          </a:lnRef>
+          <a:fillRef idx="3">
+            <a:schemeClr val="accent1"/>
+          </a:fillRef>
+          <a:effectRef idx="2">
+            <a:schemeClr val="accent1"/>
+          </a:effectRef>
+          <a:fontRef idx="minor">
+            <a:schemeClr val="lt1"/>
+          </a:fontRef>
+        </p:style>
+        <p:txBody>
+          <a:bodyPr rtlCol="0" anchor="ctr" wrap="square" lIns="45720" rIns="45720" tIns="27432" bIns="27432"/>
+          <a:lstStyle/>
+          <a:p>
+            <a:pPr algn="ctr"/>
+            <a:r>
+              <a:rPr sz="1400" b="0" i="0">
+                <a:solidFill>
+                  <a:srgbClr val="333333"/>
+                </a:solidFill>
+                <a:latin typeface="Consolas"/>
+              </a:rPr>
+              <a:t>total_questions: 20</a:t>
+            </a:r>
+          </a:p>
+          <a:p>
+            <a:pPr algn="ctr"/>
+            <a:r>
+              <a:rPr sz="1400" b="0" i="0">
+                <a:solidFill>
+                  <a:srgbClr val="333333"/>
+                </a:solidFill>
+                <a:latin typeface="Consolas"/>
+              </a:rPr>
+              <a:t>chapters: {1: 50%, 2: 30%, 3: 20%}</a:t>
+            </a:r>
+          </a:p>
+          <a:p>
+            <a:pPr algn="ctr"/>
+            <a:r>
+              <a:rPr sz="1400" b="0" i="0">
+                <a:solidFill>
+                  <a:srgbClr val="333333"/>
+                </a:solidFill>
+                <a:latin typeface="Consolas"/>
+              </a:rPr>
+              <a:t>difficulty_mix: {easy:.4, medium:.4, hard:.2}</a:t>
+            </a:r>
+          </a:p>
+          <a:p>
+            <a:pPr algn="ctr"/>
+            <a:r>
+              <a:rPr sz="1400" b="0" i="0">
+                <a:solidFill>
+                  <a:srgbClr val="333333"/>
+                </a:solidFill>
+                <a:latin typeface="Consolas"/>
+              </a:rPr>
+              <a:t>allowed_qtypes: [mcq, short_answer, ...]</a:t>
+            </a:r>
+          </a:p>
+          <a:p>
+            <a:pPr algn="ctr"/>
+            <a:r>
+              <a:rPr sz="1400" b="0" i="0">
+                <a:solidFill>
+                  <a:srgbClr val="333333"/>
+                </a:solidFill>
+                <a:latin typeface="Consolas"/>
+              </a:rPr>
+              <a:t>versions: 2</a:t>
+            </a:r>
+          </a:p>
+          <a:p>
+            <a:pPr algn="ctr"/>
+            <a:r>
+              <a:rPr sz="1400" b="0" i="0">
+                <a:solidFill>
+                  <a:srgbClr val="333333"/>
+                </a:solidFill>
+                <a:latin typeface="Consolas"/>
+              </a:rPr>
+              <a:t>selector: mip</a:t>
+            </a:r>
+          </a:p>
+          <a:p>
+            <a:pPr algn="ctr"/>
+            <a:r>
+              <a:rPr sz="1400" b="0" i="0">
+                <a:solidFill>
+                  <a:srgbClr val="333333"/>
+                </a:solidFill>
+                <a:latin typeface="Consolas"/>
+              </a:rPr>
+              <a:t>dedup_similarity: 0.85</a:t>
             </a:r>
           </a:p>
         </p:txBody>
@@ -7517,8 +5653,8 @@
         </p:nvSpPr>
         <p:spPr>
           <a:xfrm>
-            <a:off x="640080" y="1600200"/>
-            <a:ext cx="5303520" cy="2743200"/>
+            <a:off x="640080" y="4023360"/>
+            <a:ext cx="5394960" cy="2377440"/>
           </a:xfrm>
           <a:prstGeom prst="rect">
             <a:avLst/>
@@ -7537,13 +5673,13 @@
               </a:spcAft>
             </a:pPr>
             <a:r>
-              <a:rPr sz="1600">
-                <a:solidFill>
-                  <a:srgbClr val="333333"/>
-                </a:solidFill>
-                <a:latin typeface="Calibri"/>
-              </a:rPr>
-              <a:t>• PyMuPDF extracts text; the PDF table of contents gives chapter/section structure.</a:t>
+              <a:rPr sz="1500">
+                <a:solidFill>
+                  <a:srgbClr val="333333"/>
+                </a:solidFill>
+                <a:latin typeface="Calibri"/>
+              </a:rPr>
+              <a:t>• Counts may be ints, fractions, or "NN%".</a:t>
             </a:r>
           </a:p>
           <a:p>
@@ -7553,15 +5689,73 @@
               </a:spcAft>
             </a:pPr>
             <a:r>
-              <a:rPr sz="1600">
-                <a:solidFill>
-                  <a:srgbClr val="333333"/>
-                </a:solidFill>
-                <a:latin typeface="Calibri"/>
-              </a:rPr>
-              <a:t>• Sections split into overlapping ~500–800 token chunks with provenance metadata.</a:t>
-            </a:r>
-          </a:p>
+              <a:rPr sz="1500">
+                <a:solidFill>
+                  <a:srgbClr val="333333"/>
+                </a:solidFill>
+                <a:latin typeface="Calibri"/>
+              </a:rPr>
+              <a:t>• resolve() → exact integer counts that sum to the total (largest-remainder).</a:t>
+            </a:r>
+          </a:p>
+        </p:txBody>
+      </p:sp>
+      <p:sp>
+        <p:nvSpPr>
+          <p:cNvPr id="7" name="TextBox 6"/>
+          <p:cNvSpPr txBox="1"/>
+          <p:nvPr/>
+        </p:nvSpPr>
+        <p:spPr>
+          <a:xfrm>
+            <a:off x="6400800" y="1325880"/>
+            <a:ext cx="5212080" cy="457200"/>
+          </a:xfrm>
+          <a:prstGeom prst="rect">
+            <a:avLst/>
+          </a:prstGeom>
+          <a:noFill/>
+        </p:spPr>
+        <p:txBody>
+          <a:bodyPr wrap="square" anchor="t">
+            <a:spAutoFit/>
+          </a:bodyPr>
+          <a:lstStyle/>
+          <a:p>
+            <a:pPr algn="l"/>
+            <a:r>
+              <a:rPr sz="1700" b="1" i="0">
+                <a:solidFill>
+                  <a:srgbClr val="3182BD"/>
+                </a:solidFill>
+                <a:latin typeface="Calibri"/>
+              </a:rPr>
+              <a:t>YAML and/or CLI flags — flags win</a:t>
+            </a:r>
+          </a:p>
+        </p:txBody>
+      </p:sp>
+      <p:sp>
+        <p:nvSpPr>
+          <p:cNvPr id="8" name="TextBox 7"/>
+          <p:cNvSpPr txBox="1"/>
+          <p:nvPr/>
+        </p:nvSpPr>
+        <p:spPr>
+          <a:xfrm>
+            <a:off x="6400800" y="1828800"/>
+            <a:ext cx="5212080" cy="1828800"/>
+          </a:xfrm>
+          <a:prstGeom prst="rect">
+            <a:avLst/>
+          </a:prstGeom>
+          <a:noFill/>
+        </p:spPr>
+        <p:txBody>
+          <a:bodyPr wrap="square">
+            <a:spAutoFit/>
+          </a:bodyPr>
+          <a:lstStyle/>
           <a:p>
             <a:pPr>
               <a:spcAft>
@@ -7569,73 +5763,15 @@
               </a:spcAft>
             </a:pPr>
             <a:r>
-              <a:rPr sz="1600">
-                <a:solidFill>
-                  <a:srgbClr val="333333"/>
-                </a:solidFill>
-                <a:latin typeface="Calibri"/>
-              </a:rPr>
-              <a:t>• Offline fallback: a word-tokenizer shim replaces tiktoken when its vocab can't download.</a:t>
-            </a:r>
-          </a:p>
-        </p:txBody>
-      </p:sp>
-      <p:sp>
-        <p:nvSpPr>
-          <p:cNvPr id="7" name="TextBox 6"/>
-          <p:cNvSpPr txBox="1"/>
-          <p:nvPr/>
-        </p:nvSpPr>
-        <p:spPr>
-          <a:xfrm>
-            <a:off x="6400800" y="1188720"/>
-            <a:ext cx="5486400" cy="365760"/>
-          </a:xfrm>
-          <a:prstGeom prst="rect">
-            <a:avLst/>
-          </a:prstGeom>
-          <a:noFill/>
-        </p:spPr>
-        <p:txBody>
-          <a:bodyPr wrap="square" anchor="t">
-            <a:spAutoFit/>
-          </a:bodyPr>
-          <a:lstStyle/>
-          <a:p>
-            <a:pPr algn="l"/>
-            <a:r>
-              <a:rPr sz="1800" b="1" i="0">
-                <a:solidFill>
-                  <a:srgbClr val="3182BD"/>
-                </a:solidFill>
-                <a:latin typeface="Calibri"/>
-              </a:rPr>
-              <a:t>② INDEX (RAG)</a:t>
-            </a:r>
-          </a:p>
-        </p:txBody>
-      </p:sp>
-      <p:sp>
-        <p:nvSpPr>
-          <p:cNvPr id="8" name="TextBox 7"/>
-          <p:cNvSpPr txBox="1"/>
-          <p:nvPr/>
-        </p:nvSpPr>
-        <p:spPr>
-          <a:xfrm>
-            <a:off x="6400800" y="1600200"/>
-            <a:ext cx="5212080" cy="2926080"/>
-          </a:xfrm>
-          <a:prstGeom prst="rect">
-            <a:avLst/>
-          </a:prstGeom>
-          <a:noFill/>
-        </p:spPr>
-        <p:txBody>
-          <a:bodyPr wrap="square">
-            <a:spAutoFit/>
-          </a:bodyPr>
-          <a:lstStyle/>
+              <a:rPr sz="1500">
+                <a:solidFill>
+                  <a:srgbClr val="333333"/>
+                </a:solidFill>
+                <a:latin typeface="Calibri"/>
+              </a:rPr>
+              <a:t>• Keep a base blueprint.yaml, override per run.</a:t>
+            </a:r>
+          </a:p>
           <a:p>
             <a:pPr>
               <a:spcAft>
@@ -7643,85 +5779,37 @@
               </a:spcAft>
             </a:pPr>
             <a:r>
-              <a:rPr sz="1600">
-                <a:solidFill>
-                  <a:srgbClr val="333333"/>
-                </a:solidFill>
-                <a:latin typeface="Calibri"/>
-              </a:rPr>
-              <a:t>• Chunks embedded with sentence-transformers (all-MiniLM-L6-v2) into a local ChromaDB.</a:t>
-            </a:r>
-          </a:p>
-          <a:p>
-            <a:pPr>
-              <a:spcAft>
-                <a:spcPts val="800"/>
-              </a:spcAft>
-            </a:pPr>
-            <a:r>
-              <a:rPr sz="1600">
-                <a:solidFill>
-                  <a:srgbClr val="333333"/>
-                </a:solidFill>
-                <a:latin typeface="Calibri"/>
-              </a:rPr>
-              <a:t>• Top-k retrieval (filterable by chapter) supplies grounding CONTEXT to the generator.</a:t>
-            </a:r>
-          </a:p>
-          <a:p>
-            <a:pPr>
-              <a:spcAft>
-                <a:spcPts val="800"/>
-              </a:spcAft>
-            </a:pPr>
-            <a:r>
-              <a:rPr sz="1600">
-                <a:solidFill>
-                  <a:srgbClr val="333333"/>
-                </a:solidFill>
-                <a:latin typeface="Calibri"/>
-              </a:rPr>
-              <a:t>• = Retrieval-Augmented Generation: model writes only about retrieved text.</a:t>
-            </a:r>
-          </a:p>
-          <a:p>
-            <a:pPr>
-              <a:spcAft>
-                <a:spcPts val="800"/>
-              </a:spcAft>
-            </a:pPr>
-            <a:r>
-              <a:rPr sz="1600">
-                <a:solidFill>
-                  <a:srgbClr val="333333"/>
-                </a:solidFill>
-                <a:latin typeface="Calibri"/>
-              </a:rPr>
-              <a:t>• A word-overlap heuristic flags answers that don't match their context.</a:t>
-            </a:r>
-          </a:p>
-        </p:txBody>
-      </p:sp>
-      <p:sp>
-        <p:nvSpPr>
-          <p:cNvPr id="9" name="Rounded Rectangle 8"/>
+              <a:rPr sz="1500">
+                <a:solidFill>
+                  <a:srgbClr val="333333"/>
+                </a:solidFill>
+                <a:latin typeface="Calibri"/>
+              </a:rPr>
+              <a:t>• build_blueprint loads YAML → overwrites field-by-field with provided flags → validates.</a:t>
+            </a:r>
+          </a:p>
+        </p:txBody>
+      </p:sp>
+      <p:sp>
+        <p:nvSpPr>
+          <p:cNvPr id="9" name="Rectangle 8"/>
           <p:cNvSpPr/>
           <p:nvPr/>
         </p:nvSpPr>
         <p:spPr>
           <a:xfrm>
-            <a:off x="640080" y="4846320"/>
-            <a:ext cx="10972800" cy="1005840"/>
-          </a:xfrm>
-          <a:prstGeom prst="roundRect">
+            <a:off x="6400800" y="3657600"/>
+            <a:ext cx="5303520" cy="1463040"/>
+          </a:xfrm>
+          <a:prstGeom prst="rect">
             <a:avLst/>
           </a:prstGeom>
           <a:solidFill>
-            <a:srgbClr val="E5F5E0"/>
+            <a:srgbClr val="1F2D3D"/>
           </a:solidFill>
           <a:ln w="15875">
             <a:solidFill>
-              <a:srgbClr val="31A354"/>
+              <a:srgbClr val="1F2D3D"/>
             </a:solidFill>
           </a:ln>
           <a:effectLst/>
@@ -7746,13 +5834,37 @@
           <a:p>
             <a:pPr algn="ctr"/>
             <a:r>
-              <a:rPr sz="1600" b="0" i="0">
-                <a:solidFill>
-                  <a:srgbClr val="333333"/>
-                </a:solidFill>
-                <a:latin typeface="Calibri"/>
-              </a:rPr>
-              <a:t>Why it matters:  grounding makes source_ref meaningful, keeps questions factual &amp; on-topic, and gives the whole pipeline a traceable audit trail.</a:t>
+              <a:rPr sz="1300" b="0" i="0">
+                <a:solidFill>
+                  <a:srgbClr val="FFFFFF"/>
+                </a:solidFill>
+                <a:latin typeface="Consolas"/>
+              </a:rPr>
+              <a:t>python -m quizgen --pool questions.json \</a:t>
+            </a:r>
+          </a:p>
+          <a:p>
+            <a:pPr algn="ctr"/>
+            <a:r>
+              <a:rPr sz="1300" b="0" i="0">
+                <a:solidFill>
+                  <a:srgbClr val="FFFFFF"/>
+                </a:solidFill>
+                <a:latin typeface="Consolas"/>
+              </a:rPr>
+              <a:t>  --blueprint blueprint.yaml \</a:t>
+            </a:r>
+          </a:p>
+          <a:p>
+            <a:pPr algn="ctr"/>
+            <a:r>
+              <a:rPr sz="1300" b="0" i="0">
+                <a:solidFill>
+                  <a:srgbClr val="FFFFFF"/>
+                </a:solidFill>
+                <a:latin typeface="Consolas"/>
+              </a:rPr>
+              <a:t>  --versions 3 --selector greedy</a:t>
             </a:r>
           </a:p>
         </p:txBody>
@@ -7849,7 +5961,7 @@
                 </a:solidFill>
                 <a:latin typeface="Calibri"/>
               </a:rPr>
-              <a:t>Stage 3: controlled, grounded generation</a:t>
+              <a:t>Automated Test Assembly: greedy vs. MIP</a:t>
             </a:r>
           </a:p>
         </p:txBody>
@@ -7884,7 +5996,7 @@
                 </a:solidFill>
                 <a:latin typeface="Calibri"/>
               </a:rPr>
-              <a:t>bloom.py • generate.py • llm_client.py</a:t>
+              <a:t>assemble.py</a:t>
             </a:r>
           </a:p>
         </p:txBody>
@@ -7897,8 +6009,8 @@
         </p:nvSpPr>
         <p:spPr>
           <a:xfrm>
-            <a:off x="548640" y="1371600"/>
-            <a:ext cx="3566160" cy="502920"/>
+            <a:off x="640080" y="1325880"/>
+            <a:ext cx="5212080" cy="502920"/>
           </a:xfrm>
           <a:prstGeom prst="roundRect">
             <a:avLst/>
@@ -7939,7 +6051,7 @@
                 </a:solidFill>
                 <a:latin typeface="Calibri"/>
               </a:rPr>
-              <a:t>WHAT to ask  (bloom.py)</a:t>
+              <a:t>GreedySelector — fast baseline</a:t>
             </a:r>
           </a:p>
         </p:txBody>
@@ -7952,8 +6064,8 @@
         </p:nvSpPr>
         <p:spPr>
           <a:xfrm>
-            <a:off x="594360" y="1965960"/>
-            <a:ext cx="3566160" cy="3108960"/>
+            <a:off x="685800" y="1920240"/>
+            <a:ext cx="5120640" cy="1828800"/>
           </a:xfrm>
           <a:prstGeom prst="rect">
             <a:avLst/>
@@ -7978,7 +6090,7 @@
                 </a:solidFill>
                 <a:latin typeface="Calibri"/>
               </a:rPr>
-              <a:t>• Single source of truth for prompt-craft.</a:t>
+              <a:t>• Per-chapter fill, two passes (difficulty quota, then remainder).</a:t>
             </a:r>
           </a:p>
           <a:p>
@@ -7994,7 +6106,7 @@
                 </a:solidFill>
                 <a:latin typeface="Calibri"/>
               </a:rPr>
-              <a:t>• Per-level Bloom + difficulty descriptions.</a:t>
+              <a:t>• Skips duplicates &amp; already-used items.</a:t>
             </a:r>
           </a:p>
           <a:p>
@@ -8010,39 +6122,7 @@
                 </a:solidFill>
                 <a:latin typeface="Calibri"/>
               </a:rPr>
-              <a:t>• One few-shot example per Bloom level.</a:t>
-            </a:r>
-          </a:p>
-          <a:p>
-            <a:pPr>
-              <a:spcAft>
-                <a:spcPts val="600"/>
-              </a:spcAft>
-            </a:pPr>
-            <a:r>
-              <a:rPr sz="1400">
-                <a:solidFill>
-                  <a:srgbClr val="333333"/>
-                </a:solidFill>
-                <a:latin typeface="Calibri"/>
-              </a:rPr>
-              <a:t>• build_balanced_plan → ordered QuestionSpecs.</a:t>
-            </a:r>
-          </a:p>
-          <a:p>
-            <a:pPr>
-              <a:spcAft>
-                <a:spcPts val="600"/>
-              </a:spcAft>
-            </a:pPr>
-            <a:r>
-              <a:rPr sz="1400">
-                <a:solidFill>
-                  <a:srgbClr val="333333"/>
-                </a:solidFill>
-                <a:latin typeface="Calibri"/>
-              </a:rPr>
-              <a:t>• Largest-remainder makes counts EXACT.</a:t>
+              <a:t>• Fast; no optimality guarantee.</a:t>
             </a:r>
           </a:p>
         </p:txBody>
@@ -8055,8 +6135,8 @@
         </p:nvSpPr>
         <p:spPr>
           <a:xfrm>
-            <a:off x="4297680" y="1371600"/>
-            <a:ext cx="3566160" cy="502920"/>
+            <a:off x="640080" y="3749039"/>
+            <a:ext cx="5212080" cy="502920"/>
           </a:xfrm>
           <a:prstGeom prst="roundRect">
             <a:avLst/>
@@ -8097,7 +6177,7 @@
                 </a:solidFill>
                 <a:latin typeface="Calibri"/>
               </a:rPr>
-              <a:t>HOW to ask  (generate.py)</a:t>
+              <a:t>MIPSelector — exact optimisation</a:t>
             </a:r>
           </a:p>
         </p:txBody>
@@ -8110,8 +6190,8 @@
         </p:nvSpPr>
         <p:spPr>
           <a:xfrm>
-            <a:off x="4343400" y="1965960"/>
-            <a:ext cx="3566160" cy="3108960"/>
+            <a:off x="685800" y="4343400"/>
+            <a:ext cx="5120640" cy="2011680"/>
           </a:xfrm>
           <a:prstGeom prst="rect">
             <a:avLst/>
@@ -8136,7 +6216,7 @@
                 </a:solidFill>
                 <a:latin typeface="Calibri"/>
               </a:rPr>
-              <a:t>• Batched by Bloom level per LLM call.</a:t>
+              <a:t>• 0–1 program via PuLP / CBC.</a:t>
             </a:r>
           </a:p>
           <a:p>
@@ -8152,7 +6232,7 @@
                 </a:solidFill>
                 <a:latin typeface="Calibri"/>
               </a:rPr>
-              <a:t>• Explicit numbered #SPEC directives.</a:t>
+              <a:t>• Exact per-chapter AND difficulty counts.</a:t>
             </a:r>
           </a:p>
           <a:p>
@@ -8168,7 +6248,7 @@
                 </a:solidFill>
                 <a:latin typeface="Calibri"/>
               </a:rPr>
-              <a:t>• Tag COERCION: returned questions are re-tagged to the requested level.</a:t>
+              <a:t>• Disjoint versions; forbids dup pairs.</a:t>
             </a:r>
           </a:p>
           <a:p>
@@ -8184,163 +6264,21 @@
                 </a:solidFill>
                 <a:latin typeface="Calibri"/>
               </a:rPr>
-              <a:t>• → pool distribution matches the plan by construction.</a:t>
-            </a:r>
-          </a:p>
-        </p:txBody>
-      </p:sp>
-      <p:sp>
-        <p:nvSpPr>
-          <p:cNvPr id="9" name="Rounded Rectangle 8"/>
+              <a:t>• Infeasible → relax difficulty (logged), never chapter counts.</a:t>
+            </a:r>
+          </a:p>
+        </p:txBody>
+      </p:sp>
+      <p:sp>
+        <p:nvSpPr>
+          <p:cNvPr id="9" name="Rectangle 8"/>
           <p:cNvSpPr/>
           <p:nvPr/>
         </p:nvSpPr>
         <p:spPr>
           <a:xfrm>
-            <a:off x="8046720" y="1371600"/>
-            <a:ext cx="3566160" cy="502920"/>
-          </a:xfrm>
-          <a:prstGeom prst="roundRect">
-            <a:avLst/>
-          </a:prstGeom>
-          <a:solidFill>
-            <a:srgbClr val="3182BD"/>
-          </a:solidFill>
-          <a:ln w="15875">
-            <a:solidFill>
-              <a:srgbClr val="3182BD"/>
-            </a:solidFill>
-          </a:ln>
-          <a:effectLst/>
-        </p:spPr>
-        <p:style>
-          <a:lnRef idx="1">
-            <a:schemeClr val="accent1"/>
-          </a:lnRef>
-          <a:fillRef idx="3">
-            <a:schemeClr val="accent1"/>
-          </a:fillRef>
-          <a:effectRef idx="2">
-            <a:schemeClr val="accent1"/>
-          </a:effectRef>
-          <a:fontRef idx="minor">
-            <a:schemeClr val="lt1"/>
-          </a:fontRef>
-        </p:style>
-        <p:txBody>
-          <a:bodyPr rtlCol="0" anchor="ctr" wrap="square" lIns="45720" rIns="45720" tIns="27432" bIns="27432"/>
-          <a:lstStyle/>
-          <a:p>
-            <a:pPr algn="ctr"/>
-            <a:r>
-              <a:rPr sz="1400" b="1" i="0">
-                <a:solidFill>
-                  <a:srgbClr val="FFFFFF"/>
-                </a:solidFill>
-                <a:latin typeface="Calibri"/>
-              </a:rPr>
-              <a:t>VALID JSON  (llm_client)</a:t>
-            </a:r>
-          </a:p>
-        </p:txBody>
-      </p:sp>
-      <p:sp>
-        <p:nvSpPr>
-          <p:cNvPr id="10" name="TextBox 9"/>
-          <p:cNvSpPr txBox="1"/>
-          <p:nvPr/>
-        </p:nvSpPr>
-        <p:spPr>
-          <a:xfrm>
-            <a:off x="8092440" y="1965960"/>
-            <a:ext cx="3566160" cy="3108960"/>
-          </a:xfrm>
-          <a:prstGeom prst="rect">
-            <a:avLst/>
-          </a:prstGeom>
-          <a:noFill/>
-        </p:spPr>
-        <p:txBody>
-          <a:bodyPr wrap="square">
-            <a:spAutoFit/>
-          </a:bodyPr>
-          <a:lstStyle/>
-          <a:p>
-            <a:pPr>
-              <a:spcAft>
-                <a:spcPts val="600"/>
-              </a:spcAft>
-            </a:pPr>
-            <a:r>
-              <a:rPr sz="1400">
-                <a:solidFill>
-                  <a:srgbClr val="333333"/>
-                </a:solidFill>
-                <a:latin typeface="Calibri"/>
-              </a:rPr>
-              <a:t>• Swappable OpenAI-compatible client (GLM / Ollama / vLLM / OpenAI).</a:t>
-            </a:r>
-          </a:p>
-          <a:p>
-            <a:pPr>
-              <a:spcAft>
-                <a:spcPts val="600"/>
-              </a:spcAft>
-            </a:pPr>
-            <a:r>
-              <a:rPr sz="1400">
-                <a:solidFill>
-                  <a:srgbClr val="333333"/>
-                </a:solidFill>
-                <a:latin typeface="Calibri"/>
-              </a:rPr>
-              <a:t>• chat_schema: strict json_schema → json_object → outlines.</a:t>
-            </a:r>
-          </a:p>
-          <a:p>
-            <a:pPr>
-              <a:spcAft>
-                <a:spcPts val="600"/>
-              </a:spcAft>
-            </a:pPr>
-            <a:r>
-              <a:rPr sz="1400">
-                <a:solidFill>
-                  <a:srgbClr val="333333"/>
-                </a:solidFill>
-                <a:latin typeface="Calibri"/>
-              </a:rPr>
-              <a:t>• Pydantic re-validates every item.</a:t>
-            </a:r>
-          </a:p>
-          <a:p>
-            <a:pPr>
-              <a:spcAft>
-                <a:spcPts val="600"/>
-              </a:spcAft>
-            </a:pPr>
-            <a:r>
-              <a:rPr sz="1400">
-                <a:solidFill>
-                  <a:srgbClr val="333333"/>
-                </a:solidFill>
-                <a:latin typeface="Calibri"/>
-              </a:rPr>
-              <a:t>• Shape guaranteed, never facts.</a:t>
-            </a:r>
-          </a:p>
-        </p:txBody>
-      </p:sp>
-      <p:sp>
-        <p:nvSpPr>
-          <p:cNvPr id="11" name="Rectangle 10"/>
-          <p:cNvSpPr/>
-          <p:nvPr/>
-        </p:nvSpPr>
-        <p:spPr>
-          <a:xfrm>
-            <a:off x="548640" y="5257800"/>
-            <a:ext cx="11064240" cy="822960"/>
+            <a:off x="6217920" y="1554480"/>
+            <a:ext cx="5486400" cy="2743200"/>
           </a:xfrm>
           <a:prstGeom prst="rect">
             <a:avLst/>
@@ -8375,13 +6313,108 @@
           <a:p>
             <a:pPr algn="ctr"/>
             <a:r>
-              <a:rPr sz="1300" b="0" i="0">
+              <a:rPr sz="1500" b="0" i="0">
                 <a:solidFill>
                   <a:srgbClr val="333333"/>
                 </a:solidFill>
                 <a:latin typeface="Consolas"/>
               </a:rPr>
-              <a:t>#SPEC 1 | bloom=apply | difficulty=medium | qtype=mcq        #SPEC 2 | bloom=apply | difficulty=hard | qtype=short_answer</a:t>
+              <a:t>max  Σ q_i · x_iv          (quality)</a:t>
+            </a:r>
+          </a:p>
+          <a:p>
+            <a:pPr algn="ctr"/>
+            <a:r>
+              <a:rPr sz="1500" b="0" i="0">
+                <a:solidFill>
+                  <a:srgbClr val="333333"/>
+                </a:solidFill>
+                <a:latin typeface="Consolas"/>
+              </a:rPr>
+              <a:t>Σ_{chap(i)=c} x_iv = n_c    (per chapter)</a:t>
+            </a:r>
+          </a:p>
+          <a:p>
+            <a:pPr algn="ctr"/>
+            <a:r>
+              <a:rPr sz="1500" b="0" i="0">
+                <a:solidFill>
+                  <a:srgbClr val="333333"/>
+                </a:solidFill>
+                <a:latin typeface="Consolas"/>
+              </a:rPr>
+              <a:t>Σ_{diff(i)=d} x_iv = m_d    (difficulty)</a:t>
+            </a:r>
+          </a:p>
+          <a:p>
+            <a:pPr algn="ctr"/>
+            <a:r>
+              <a:rPr sz="1500" b="0" i="0">
+                <a:solidFill>
+                  <a:srgbClr val="333333"/>
+                </a:solidFill>
+                <a:latin typeface="Consolas"/>
+              </a:rPr>
+              <a:t>Σ_v  x_iv ≤ 1              (disjoint)</a:t>
+            </a:r>
+          </a:p>
+          <a:p>
+            <a:pPr algn="ctr"/>
+            <a:r>
+              <a:rPr sz="1500" b="0" i="0">
+                <a:solidFill>
+                  <a:srgbClr val="333333"/>
+                </a:solidFill>
+                <a:latin typeface="Consolas"/>
+              </a:rPr>
+              <a:t>Σ_v x_iv + Σ_v x_jv ≤ 1    (no dup pair)</a:t>
+            </a:r>
+          </a:p>
+          <a:p>
+            <a:pPr algn="ctr"/>
+            <a:r>
+              <a:rPr sz="1500" b="0" i="0">
+                <a:solidFill>
+                  <a:srgbClr val="333333"/>
+                </a:solidFill>
+                <a:latin typeface="Consolas"/>
+              </a:rPr>
+              <a:t>x_iv ∈ {0, 1}</a:t>
+            </a:r>
+          </a:p>
+        </p:txBody>
+      </p:sp>
+      <p:sp>
+        <p:nvSpPr>
+          <p:cNvPr id="10" name="TextBox 9"/>
+          <p:cNvSpPr txBox="1"/>
+          <p:nvPr/>
+        </p:nvSpPr>
+        <p:spPr>
+          <a:xfrm>
+            <a:off x="6217920" y="4480560"/>
+            <a:ext cx="5486400" cy="1463040"/>
+          </a:xfrm>
+          <a:prstGeom prst="rect">
+            <a:avLst/>
+          </a:prstGeom>
+          <a:noFill/>
+        </p:spPr>
+        <p:txBody>
+          <a:bodyPr wrap="square" anchor="t">
+            <a:spAutoFit/>
+          </a:bodyPr>
+          <a:lstStyle/>
+          <a:p>
+            <a:pPr algn="l"/>
+            <a:r>
+              <a:rPr sz="1500" b="0" i="1">
+                <a:solidFill>
+                  <a:srgbClr val="636363"/>
+                </a:solidFill>
+                <a:latin typeface="Calibri"/>
+              </a:rPr>
+              <a:t>One solve produces all parallel versions at once — provably disjoint and each individually blueprint-compliant.</a:t>
             </a:r>
           </a:p>
         </p:txBody>
@@ -8478,7 +6511,7 @@
                 </a:solidFill>
                 <a:latin typeface="Calibri"/>
               </a:rPr>
-              <a:t>Stage 4: blueprint → Automated Test Assembly</a:t>
+              <a:t>Deduplication &amp; validation</a:t>
             </a:r>
           </a:p>
         </p:txBody>
@@ -8513,136 +6546,21 @@
                 </a:solidFill>
                 <a:latin typeface="Calibri"/>
               </a:rPr>
-              <a:t>blueprint.py • assemble.py</a:t>
-            </a:r>
-          </a:p>
-        </p:txBody>
-      </p:sp>
-      <p:sp>
-        <p:nvSpPr>
-          <p:cNvPr id="5" name="Rectangle 4"/>
-          <p:cNvSpPr/>
-          <p:nvPr/>
-        </p:nvSpPr>
-        <p:spPr>
-          <a:xfrm>
-            <a:off x="548640" y="1325880"/>
-            <a:ext cx="4206240" cy="2286000"/>
-          </a:xfrm>
-          <a:prstGeom prst="rect">
-            <a:avLst/>
-          </a:prstGeom>
-          <a:solidFill>
-            <a:srgbClr val="FDE0DD"/>
-          </a:solidFill>
-          <a:ln w="15875">
-            <a:solidFill>
-              <a:srgbClr val="DE2D26"/>
-            </a:solidFill>
-          </a:ln>
-          <a:effectLst/>
-        </p:spPr>
-        <p:style>
-          <a:lnRef idx="1">
-            <a:schemeClr val="accent1"/>
-          </a:lnRef>
-          <a:fillRef idx="3">
-            <a:schemeClr val="accent1"/>
-          </a:fillRef>
-          <a:effectRef idx="2">
-            <a:schemeClr val="accent1"/>
-          </a:effectRef>
-          <a:fontRef idx="minor">
-            <a:schemeClr val="lt1"/>
-          </a:fontRef>
-        </p:style>
-        <p:txBody>
-          <a:bodyPr rtlCol="0" anchor="ctr" wrap="square" lIns="45720" rIns="45720" tIns="27432" bIns="27432"/>
-          <a:lstStyle/>
-          <a:p>
-            <a:pPr algn="ctr"/>
-            <a:r>
-              <a:rPr sz="1400" b="0" i="0">
-                <a:solidFill>
-                  <a:srgbClr val="333333"/>
-                </a:solidFill>
-                <a:latin typeface="Consolas"/>
-              </a:rPr>
-              <a:t>total_questions: 20</a:t>
-            </a:r>
-          </a:p>
-          <a:p>
-            <a:pPr algn="ctr"/>
-            <a:r>
-              <a:rPr sz="1400" b="0" i="0">
-                <a:solidFill>
-                  <a:srgbClr val="333333"/>
-                </a:solidFill>
-                <a:latin typeface="Consolas"/>
-              </a:rPr>
-              <a:t>chapters: {1: 50%, 2: 30%, 3: 20%}</a:t>
-            </a:r>
-          </a:p>
-          <a:p>
-            <a:pPr algn="ctr"/>
-            <a:r>
-              <a:rPr sz="1400" b="0" i="0">
-                <a:solidFill>
-                  <a:srgbClr val="333333"/>
-                </a:solidFill>
-                <a:latin typeface="Consolas"/>
-              </a:rPr>
-              <a:t>difficulty_mix: {easy:.4, medium:.4, hard:.2}</a:t>
-            </a:r>
-          </a:p>
-          <a:p>
-            <a:pPr algn="ctr"/>
-            <a:r>
-              <a:rPr sz="1400" b="0" i="0">
-                <a:solidFill>
-                  <a:srgbClr val="333333"/>
-                </a:solidFill>
-                <a:latin typeface="Consolas"/>
-              </a:rPr>
-              <a:t>versions: 2</a:t>
-            </a:r>
-          </a:p>
-          <a:p>
-            <a:pPr algn="ctr"/>
-            <a:r>
-              <a:rPr sz="1400" b="0" i="0">
-                <a:solidFill>
-                  <a:srgbClr val="333333"/>
-                </a:solidFill>
-                <a:latin typeface="Consolas"/>
-              </a:rPr>
-              <a:t>selector: mip</a:t>
-            </a:r>
-          </a:p>
-          <a:p>
-            <a:pPr algn="ctr"/>
-            <a:r>
-              <a:rPr sz="1400" b="0" i="0">
-                <a:solidFill>
-                  <a:srgbClr val="333333"/>
-                </a:solidFill>
-                <a:latin typeface="Consolas"/>
-              </a:rPr>
-              <a:t>dedup_similarity: 0.85</a:t>
-            </a:r>
-          </a:p>
-        </p:txBody>
-      </p:sp>
-      <p:sp>
-        <p:nvSpPr>
-          <p:cNvPr id="6" name="TextBox 5"/>
+              <a:t>similarity.py • dedup.py • validate.py</a:t>
+            </a:r>
+          </a:p>
+        </p:txBody>
+      </p:sp>
+      <p:sp>
+        <p:nvSpPr>
+          <p:cNvPr id="5" name="TextBox 4"/>
           <p:cNvSpPr txBox="1"/>
           <p:nvPr/>
         </p:nvSpPr>
         <p:spPr>
           <a:xfrm>
-            <a:off x="548640" y="3703320"/>
-            <a:ext cx="4297680" cy="2377440"/>
+            <a:off x="640080" y="1188720"/>
+            <a:ext cx="5486400" cy="365760"/>
           </a:xfrm>
           <a:prstGeom prst="rect">
             <a:avLst/>
@@ -8657,39 +6575,27 @@
           <a:p>
             <a:pPr algn="l"/>
             <a:r>
-              <a:rPr sz="1400" b="0" i="1">
-                <a:solidFill>
-                  <a:srgbClr val="636363"/>
-                </a:solidFill>
-                <a:latin typeface="Calibri"/>
-              </a:rPr>
-              <a:t>The professor edits one small YAML.</a:t>
-            </a:r>
-          </a:p>
-          <a:p>
-            <a:pPr algn="l"/>
-            <a:r>
-              <a:rPr sz="1400" b="0" i="1">
-                <a:solidFill>
-                  <a:srgbClr val="636363"/>
-                </a:solidFill>
-                <a:latin typeface="Calibri"/>
-              </a:rPr>
-              <a:t>Counts may be ints, fractions or "NN%"; resolve() turns them into exact integer counts (largest-remainder).</a:t>
-            </a:r>
-          </a:p>
-        </p:txBody>
-      </p:sp>
-      <p:sp>
-        <p:nvSpPr>
-          <p:cNvPr id="7" name="TextBox 6"/>
+              <a:rPr sz="1700" b="1" i="0">
+                <a:solidFill>
+                  <a:srgbClr val="3182BD"/>
+                </a:solidFill>
+                <a:latin typeface="Calibri"/>
+              </a:rPr>
+              <a:t>DEDUP (--dedup)</a:t>
+            </a:r>
+          </a:p>
+        </p:txBody>
+      </p:sp>
+      <p:sp>
+        <p:nvSpPr>
+          <p:cNvPr id="6" name="TextBox 5"/>
           <p:cNvSpPr txBox="1"/>
           <p:nvPr/>
         </p:nvSpPr>
         <p:spPr>
           <a:xfrm>
-            <a:off x="5029200" y="1280160"/>
-            <a:ext cx="6583680" cy="457200"/>
+            <a:off x="640080" y="1600200"/>
+            <a:ext cx="5303520" cy="2194560"/>
           </a:xfrm>
           <a:prstGeom prst="rect">
             <a:avLst/>
@@ -8697,34 +6603,70 @@
           <a:noFill/>
         </p:spPr>
         <p:txBody>
-          <a:bodyPr wrap="square" anchor="t">
+          <a:bodyPr wrap="square">
             <a:spAutoFit/>
           </a:bodyPr>
           <a:lstStyle/>
           <a:p>
-            <a:pPr algn="l"/>
-            <a:r>
-              <a:rPr sz="1500" b="1" i="0">
-                <a:solidFill>
-                  <a:srgbClr val="333333"/>
-                </a:solidFill>
-                <a:latin typeface="Calibri"/>
-              </a:rPr>
-              <a:t>Selection = optimisation.  0–1 Mixed-Integer Program (PuLP/CBC):</a:t>
-            </a:r>
-          </a:p>
-        </p:txBody>
-      </p:sp>
-      <p:sp>
-        <p:nvSpPr>
-          <p:cNvPr id="8" name="Rectangle 7"/>
+            <a:pPr>
+              <a:spcAft>
+                <a:spcPts val="700"/>
+              </a:spcAft>
+            </a:pPr>
+            <a:r>
+              <a:rPr sz="1500">
+                <a:solidFill>
+                  <a:srgbClr val="333333"/>
+                </a:solidFill>
+                <a:latin typeface="Calibri"/>
+              </a:rPr>
+              <a:t>• Token-Jaccard over stem+answer(+options) — offline, always on.</a:t>
+            </a:r>
+          </a:p>
+          <a:p>
+            <a:pPr>
+              <a:spcAft>
+                <a:spcPts val="700"/>
+              </a:spcAft>
+            </a:pPr>
+            <a:r>
+              <a:rPr sz="1500">
+                <a:solidFill>
+                  <a:srgbClr val="333333"/>
+                </a:solidFill>
+                <a:latin typeface="Calibri"/>
+              </a:rPr>
+              <a:t>• Optional embedding cosine — catches paraphrases.</a:t>
+            </a:r>
+          </a:p>
+          <a:p>
+            <a:pPr>
+              <a:spcAft>
+                <a:spcPts val="700"/>
+              </a:spcAft>
+            </a:pPr>
+            <a:r>
+              <a:rPr sz="1500">
+                <a:solidFill>
+                  <a:srgbClr val="333333"/>
+                </a:solidFill>
+                <a:latin typeface="Calibri"/>
+              </a:rPr>
+              <a:t>• Drops dups from the pool; MIP also forbids dup pairs across versions.</a:t>
+            </a:r>
+          </a:p>
+        </p:txBody>
+      </p:sp>
+      <p:sp>
+        <p:nvSpPr>
+          <p:cNvPr id="7" name="Rectangle 6"/>
           <p:cNvSpPr/>
           <p:nvPr/>
         </p:nvSpPr>
         <p:spPr>
           <a:xfrm>
-            <a:off x="5029200" y="1828800"/>
-            <a:ext cx="6583680" cy="2286000"/>
+            <a:off x="640080" y="4023360"/>
+            <a:ext cx="5212080" cy="1005840"/>
           </a:xfrm>
           <a:prstGeom prst="rect">
             <a:avLst/>
@@ -8765,81 +6707,21 @@
                 </a:solidFill>
                 <a:latin typeface="Consolas"/>
               </a:rPr>
-              <a:t>maximise   Σ  q_i · x_iv            (total quality)</a:t>
-            </a:r>
-          </a:p>
-          <a:p>
-            <a:pPr algn="ctr"/>
-            <a:r>
-              <a:rPr sz="1400" b="0" i="0">
-                <a:solidFill>
-                  <a:srgbClr val="333333"/>
-                </a:solidFill>
-                <a:latin typeface="Consolas"/>
-              </a:rPr>
-              <a:t>s.t.   Σ_{chap(i)=c}  x_iv  =  n_c    (exact per-chapter)</a:t>
-            </a:r>
-          </a:p>
-          <a:p>
-            <a:pPr algn="ctr"/>
-            <a:r>
-              <a:rPr sz="1400" b="0" i="0">
-                <a:solidFill>
-                  <a:srgbClr val="333333"/>
-                </a:solidFill>
-                <a:latin typeface="Consolas"/>
-              </a:rPr>
-              <a:t>       Σ_{diff(i)=d}  x_iv  =  m_d    (exact difficulty)</a:t>
-            </a:r>
-          </a:p>
-          <a:p>
-            <a:pPr algn="ctr"/>
-            <a:r>
-              <a:rPr sz="1400" b="0" i="0">
-                <a:solidFill>
-                  <a:srgbClr val="333333"/>
-                </a:solidFill>
-                <a:latin typeface="Consolas"/>
-              </a:rPr>
-              <a:t>       Σ_v  x_iv  ≤  1               (versions disjoint)</a:t>
-            </a:r>
-          </a:p>
-          <a:p>
-            <a:pPr algn="ctr"/>
-            <a:r>
-              <a:rPr sz="1400" b="0" i="0">
-                <a:solidFill>
-                  <a:srgbClr val="333333"/>
-                </a:solidFill>
-                <a:latin typeface="Consolas"/>
-              </a:rPr>
-              <a:t>       Σ_v x_iv + Σ_v x_jv ≤ 1       (forbid dup pairs)</a:t>
-            </a:r>
-          </a:p>
-          <a:p>
-            <a:pPr algn="ctr"/>
-            <a:r>
-              <a:rPr sz="1400" b="0" i="0">
-                <a:solidFill>
-                  <a:srgbClr val="333333"/>
-                </a:solidFill>
-                <a:latin typeface="Consolas"/>
-              </a:rPr>
-              <a:t>       x_iv ∈ {0, 1}</a:t>
-            </a:r>
-          </a:p>
-        </p:txBody>
-      </p:sp>
-      <p:sp>
-        <p:nvSpPr>
-          <p:cNvPr id="9" name="TextBox 8"/>
+              <a:t>sim(q₁,q₂) = |T(q₁) ∩ T(q₂)| / |T(q₁) ∪ T(q₂)|</a:t>
+            </a:r>
+          </a:p>
+        </p:txBody>
+      </p:sp>
+      <p:sp>
+        <p:nvSpPr>
+          <p:cNvPr id="8" name="TextBox 7"/>
           <p:cNvSpPr txBox="1"/>
           <p:nvPr/>
         </p:nvSpPr>
         <p:spPr>
           <a:xfrm>
-            <a:off x="5029200" y="4297680"/>
-            <a:ext cx="6675120" cy="2194560"/>
+            <a:off x="6400800" y="1188720"/>
+            <a:ext cx="5486400" cy="365760"/>
           </a:xfrm>
           <a:prstGeom prst="rect">
             <a:avLst/>
@@ -8847,56 +6729,275 @@
           <a:noFill/>
         </p:spPr>
         <p:txBody>
-          <a:bodyPr wrap="square">
+          <a:bodyPr wrap="square" anchor="t">
             <a:spAutoFit/>
           </a:bodyPr>
           <a:lstStyle/>
           <a:p>
-            <a:pPr>
-              <a:spcAft>
-                <a:spcPts val="600"/>
-              </a:spcAft>
-            </a:pPr>
-            <a:r>
-              <a:rPr sz="1400">
-                <a:solidFill>
-                  <a:srgbClr val="333333"/>
-                </a:solidFill>
-                <a:latin typeface="Calibri"/>
-              </a:rPr>
-              <a:t>• One solve produces all parallel versions, disjoint &amp; individually compliant.</a:t>
-            </a:r>
-          </a:p>
-          <a:p>
-            <a:pPr>
-              <a:spcAft>
-                <a:spcPts val="600"/>
-              </a:spcAft>
-            </a:pPr>
-            <a:r>
-              <a:rPr sz="1400">
-                <a:solidFill>
-                  <a:srgbClr val="333333"/>
-                </a:solidFill>
-                <a:latin typeface="Calibri"/>
-              </a:rPr>
-              <a:t>• Infeasible? difficulty equalities relax (logged); per-chapter counts never violated.</a:t>
-            </a:r>
-          </a:p>
-          <a:p>
-            <a:pPr>
-              <a:spcAft>
-                <a:spcPts val="600"/>
-              </a:spcAft>
-            </a:pPr>
-            <a:r>
-              <a:rPr sz="1400">
-                <a:solidFill>
-                  <a:srgbClr val="333333"/>
-                </a:solidFill>
-                <a:latin typeface="Calibri"/>
-              </a:rPr>
-              <a:t>• GreedySelector = fast baseline behind the same interface (config switch).</a:t>
+            <a:pPr algn="l"/>
+            <a:r>
+              <a:rPr sz="1700" b="1" i="0">
+                <a:solidFill>
+                  <a:srgbClr val="31A354"/>
+                </a:solidFill>
+                <a:latin typeface="Calibri"/>
+              </a:rPr>
+              <a:t>VALIDATE (--validate)</a:t>
+            </a:r>
+          </a:p>
+        </p:txBody>
+      </p:sp>
+      <p:sp>
+        <p:nvSpPr>
+          <p:cNvPr id="9" name="Rounded Rectangle 8"/>
+          <p:cNvSpPr/>
+          <p:nvPr/>
+        </p:nvSpPr>
+        <p:spPr>
+          <a:xfrm>
+            <a:off x="6400800" y="1691640"/>
+            <a:ext cx="2560320" cy="777240"/>
+          </a:xfrm>
+          <a:prstGeom prst="roundRect">
+            <a:avLst/>
+          </a:prstGeom>
+          <a:solidFill>
+            <a:srgbClr val="E5F5E0"/>
+          </a:solidFill>
+          <a:ln w="15875">
+            <a:solidFill>
+              <a:srgbClr val="31A354"/>
+            </a:solidFill>
+          </a:ln>
+          <a:effectLst/>
+        </p:spPr>
+        <p:style>
+          <a:lnRef idx="1">
+            <a:schemeClr val="accent1"/>
+          </a:lnRef>
+          <a:fillRef idx="3">
+            <a:schemeClr val="accent1"/>
+          </a:fillRef>
+          <a:effectRef idx="2">
+            <a:schemeClr val="accent1"/>
+          </a:effectRef>
+          <a:fontRef idx="minor">
+            <a:schemeClr val="lt1"/>
+          </a:fontRef>
+        </p:style>
+        <p:txBody>
+          <a:bodyPr rtlCol="0" anchor="ctr" wrap="square" lIns="45720" rIns="45720" tIns="27432" bIns="27432"/>
+          <a:lstStyle/>
+          <a:p>
+            <a:pPr algn="ctr"/>
+            <a:r>
+              <a:rPr sz="1300" b="1" i="0">
+                <a:solidFill>
+                  <a:srgbClr val="333333"/>
+                </a:solidFill>
+                <a:latin typeface="Calibri"/>
+              </a:rPr>
+              <a:t>Schema validity</a:t>
+            </a:r>
+          </a:p>
+        </p:txBody>
+      </p:sp>
+      <p:sp>
+        <p:nvSpPr>
+          <p:cNvPr id="10" name="Rounded Rectangle 9"/>
+          <p:cNvSpPr/>
+          <p:nvPr/>
+        </p:nvSpPr>
+        <p:spPr>
+          <a:xfrm>
+            <a:off x="9098280" y="1691640"/>
+            <a:ext cx="2560320" cy="777240"/>
+          </a:xfrm>
+          <a:prstGeom prst="roundRect">
+            <a:avLst/>
+          </a:prstGeom>
+          <a:solidFill>
+            <a:srgbClr val="DEEBF7"/>
+          </a:solidFill>
+          <a:ln w="15875">
+            <a:solidFill>
+              <a:srgbClr val="3182BD"/>
+            </a:solidFill>
+          </a:ln>
+          <a:effectLst/>
+        </p:spPr>
+        <p:style>
+          <a:lnRef idx="1">
+            <a:schemeClr val="accent1"/>
+          </a:lnRef>
+          <a:fillRef idx="3">
+            <a:schemeClr val="accent1"/>
+          </a:fillRef>
+          <a:effectRef idx="2">
+            <a:schemeClr val="accent1"/>
+          </a:effectRef>
+          <a:fontRef idx="minor">
+            <a:schemeClr val="lt1"/>
+          </a:fontRef>
+        </p:style>
+        <p:txBody>
+          <a:bodyPr rtlCol="0" anchor="ctr" wrap="square" lIns="45720" rIns="45720" tIns="27432" bIns="27432"/>
+          <a:lstStyle/>
+          <a:p>
+            <a:pPr algn="ctr"/>
+            <a:r>
+              <a:rPr sz="1300" b="1" i="0">
+                <a:solidFill>
+                  <a:srgbClr val="333333"/>
+                </a:solidFill>
+                <a:latin typeface="Calibri"/>
+              </a:rPr>
+              <a:t>Blueprint compliance</a:t>
+            </a:r>
+          </a:p>
+        </p:txBody>
+      </p:sp>
+      <p:sp>
+        <p:nvSpPr>
+          <p:cNvPr id="11" name="Rounded Rectangle 10"/>
+          <p:cNvSpPr/>
+          <p:nvPr/>
+        </p:nvSpPr>
+        <p:spPr>
+          <a:xfrm>
+            <a:off x="6400800" y="2606040"/>
+            <a:ext cx="2560320" cy="777240"/>
+          </a:xfrm>
+          <a:prstGeom prst="roundRect">
+            <a:avLst/>
+          </a:prstGeom>
+          <a:solidFill>
+            <a:srgbClr val="E5F5E0"/>
+          </a:solidFill>
+          <a:ln w="15875">
+            <a:solidFill>
+              <a:srgbClr val="31A354"/>
+            </a:solidFill>
+          </a:ln>
+          <a:effectLst/>
+        </p:spPr>
+        <p:style>
+          <a:lnRef idx="1">
+            <a:schemeClr val="accent1"/>
+          </a:lnRef>
+          <a:fillRef idx="3">
+            <a:schemeClr val="accent1"/>
+          </a:fillRef>
+          <a:effectRef idx="2">
+            <a:schemeClr val="accent1"/>
+          </a:effectRef>
+          <a:fontRef idx="minor">
+            <a:schemeClr val="lt1"/>
+          </a:fontRef>
+        </p:style>
+        <p:txBody>
+          <a:bodyPr rtlCol="0" anchor="ctr" wrap="square" lIns="45720" rIns="45720" tIns="27432" bIns="27432"/>
+          <a:lstStyle/>
+          <a:p>
+            <a:pPr algn="ctr"/>
+            <a:r>
+              <a:rPr sz="1300" b="1" i="0">
+                <a:solidFill>
+                  <a:srgbClr val="333333"/>
+                </a:solidFill>
+                <a:latin typeface="Calibri"/>
+              </a:rPr>
+              <a:t>Grounding coverage</a:t>
+            </a:r>
+          </a:p>
+        </p:txBody>
+      </p:sp>
+      <p:sp>
+        <p:nvSpPr>
+          <p:cNvPr id="12" name="Rounded Rectangle 11"/>
+          <p:cNvSpPr/>
+          <p:nvPr/>
+        </p:nvSpPr>
+        <p:spPr>
+          <a:xfrm>
+            <a:off x="9098280" y="2606040"/>
+            <a:ext cx="2560320" cy="777240"/>
+          </a:xfrm>
+          <a:prstGeom prst="roundRect">
+            <a:avLst/>
+          </a:prstGeom>
+          <a:solidFill>
+            <a:srgbClr val="DEEBF7"/>
+          </a:solidFill>
+          <a:ln w="15875">
+            <a:solidFill>
+              <a:srgbClr val="3182BD"/>
+            </a:solidFill>
+          </a:ln>
+          <a:effectLst/>
+        </p:spPr>
+        <p:style>
+          <a:lnRef idx="1">
+            <a:schemeClr val="accent1"/>
+          </a:lnRef>
+          <a:fillRef idx="3">
+            <a:schemeClr val="accent1"/>
+          </a:fillRef>
+          <a:effectRef idx="2">
+            <a:schemeClr val="accent1"/>
+          </a:effectRef>
+          <a:fontRef idx="minor">
+            <a:schemeClr val="lt1"/>
+          </a:fontRef>
+        </p:style>
+        <p:txBody>
+          <a:bodyPr rtlCol="0" anchor="ctr" wrap="square" lIns="45720" rIns="45720" tIns="27432" bIns="27432"/>
+          <a:lstStyle/>
+          <a:p>
+            <a:pPr algn="ctr"/>
+            <a:r>
+              <a:rPr sz="1300" b="1" i="0">
+                <a:solidFill>
+                  <a:srgbClr val="333333"/>
+                </a:solidFill>
+                <a:latin typeface="Calibri"/>
+              </a:rPr>
+              <a:t>Duplicate rate</a:t>
+            </a:r>
+          </a:p>
+        </p:txBody>
+      </p:sp>
+      <p:sp>
+        <p:nvSpPr>
+          <p:cNvPr id="13" name="TextBox 12"/>
+          <p:cNvSpPr txBox="1"/>
+          <p:nvPr/>
+        </p:nvSpPr>
+        <p:spPr>
+          <a:xfrm>
+            <a:off x="6400800" y="3657600"/>
+            <a:ext cx="5303520" cy="1463040"/>
+          </a:xfrm>
+          <a:prstGeom prst="rect">
+            <a:avLst/>
+          </a:prstGeom>
+          <a:noFill/>
+        </p:spPr>
+        <p:txBody>
+          <a:bodyPr wrap="square" anchor="t">
+            <a:spAutoFit/>
+          </a:bodyPr>
+          <a:lstStyle/>
+          <a:p>
+            <a:pPr algn="l"/>
+            <a:r>
+              <a:rPr sz="1400" b="0" i="1">
+                <a:solidFill>
+                  <a:srgbClr val="636363"/>
+                </a:solidFill>
+                <a:latin typeface="Calibri"/>
+              </a:rPr>
+              <a:t>Overall PASS only if no schema-invalid items and (if checked) the blueprint matches exactly. Exit code feeds CI.</a:t>
             </a:r>
           </a:p>
         </p:txBody>
@@ -8993,7 +7094,7 @@
                 </a:solidFill>
                 <a:latin typeface="Calibri"/>
               </a:rPr>
-              <a:t>Deduplication: keep versions distinct</a:t>
+              <a:t>Using it</a:t>
             </a:r>
           </a:p>
         </p:txBody>
@@ -9028,7 +7129,7 @@
                 </a:solidFill>
                 <a:latin typeface="Calibri"/>
               </a:rPr>
-              <a:t>similarity.py • dedup.py</a:t>
+              <a:t>python -m quizgen</a:t>
             </a:r>
           </a:p>
         </p:txBody>
@@ -9041,8 +7142,224 @@
         </p:nvSpPr>
         <p:spPr>
           <a:xfrm>
-            <a:off x="640080" y="1371600"/>
-            <a:ext cx="5486400" cy="3657600"/>
+            <a:off x="640080" y="1234440"/>
+            <a:ext cx="10972800" cy="365760"/>
+          </a:xfrm>
+          <a:prstGeom prst="rect">
+            <a:avLst/>
+          </a:prstGeom>
+          <a:noFill/>
+        </p:spPr>
+        <p:txBody>
+          <a:bodyPr wrap="square" anchor="t">
+            <a:spAutoFit/>
+          </a:bodyPr>
+          <a:lstStyle/>
+          <a:p>
+            <a:pPr algn="l"/>
+            <a:r>
+              <a:rPr sz="1600" b="1" i="0">
+                <a:solidFill>
+                  <a:srgbClr val="333333"/>
+                </a:solidFill>
+                <a:latin typeface="Calibri"/>
+              </a:rPr>
+              <a:t>Pure command line (no YAML):</a:t>
+            </a:r>
+          </a:p>
+        </p:txBody>
+      </p:sp>
+      <p:sp>
+        <p:nvSpPr>
+          <p:cNvPr id="6" name="Rectangle 5"/>
+          <p:cNvSpPr/>
+          <p:nvPr/>
+        </p:nvSpPr>
+        <p:spPr>
+          <a:xfrm>
+            <a:off x="640080" y="1645920"/>
+            <a:ext cx="10972800" cy="1143000"/>
+          </a:xfrm>
+          <a:prstGeom prst="rect">
+            <a:avLst/>
+          </a:prstGeom>
+          <a:solidFill>
+            <a:srgbClr val="1F2D3D"/>
+          </a:solidFill>
+          <a:ln w="15875">
+            <a:solidFill>
+              <a:srgbClr val="1F2D3D"/>
+            </a:solidFill>
+          </a:ln>
+          <a:effectLst/>
+        </p:spPr>
+        <p:style>
+          <a:lnRef idx="1">
+            <a:schemeClr val="accent1"/>
+          </a:lnRef>
+          <a:fillRef idx="3">
+            <a:schemeClr val="accent1"/>
+          </a:fillRef>
+          <a:effectRef idx="2">
+            <a:schemeClr val="accent1"/>
+          </a:effectRef>
+          <a:fontRef idx="minor">
+            <a:schemeClr val="lt1"/>
+          </a:fontRef>
+        </p:style>
+        <p:txBody>
+          <a:bodyPr rtlCol="0" anchor="ctr" wrap="square" lIns="45720" rIns="45720" tIns="27432" bIns="27432"/>
+          <a:lstStyle/>
+          <a:p>
+            <a:pPr algn="ctr"/>
+            <a:r>
+              <a:rPr sz="1500" b="0" i="0">
+                <a:solidFill>
+                  <a:srgbClr val="FFFFFF"/>
+                </a:solidFill>
+                <a:latin typeface="Consolas"/>
+              </a:rPr>
+              <a:t>python -m quizgen --pool questions.json \</a:t>
+            </a:r>
+          </a:p>
+          <a:p>
+            <a:pPr algn="ctr"/>
+            <a:r>
+              <a:rPr sz="1500" b="0" i="0">
+                <a:solidFill>
+                  <a:srgbClr val="FFFFFF"/>
+                </a:solidFill>
+                <a:latin typeface="Consolas"/>
+              </a:rPr>
+              <a:t>    --total 20 --chapters 1:10,2:6,3:4 \</a:t>
+            </a:r>
+          </a:p>
+          <a:p>
+            <a:pPr algn="ctr"/>
+            <a:r>
+              <a:rPr sz="1500" b="0" i="0">
+                <a:solidFill>
+                  <a:srgbClr val="FFFFFF"/>
+                </a:solidFill>
+                <a:latin typeface="Consolas"/>
+              </a:rPr>
+              <a:t>    --difficulty 0.4,0.4,0.2 --versions 2 --selector mip</a:t>
+            </a:r>
+          </a:p>
+        </p:txBody>
+      </p:sp>
+      <p:sp>
+        <p:nvSpPr>
+          <p:cNvPr id="7" name="TextBox 6"/>
+          <p:cNvSpPr txBox="1"/>
+          <p:nvPr/>
+        </p:nvSpPr>
+        <p:spPr>
+          <a:xfrm>
+            <a:off x="640080" y="3017520"/>
+            <a:ext cx="10972800" cy="365760"/>
+          </a:xfrm>
+          <a:prstGeom prst="rect">
+            <a:avLst/>
+          </a:prstGeom>
+          <a:noFill/>
+        </p:spPr>
+        <p:txBody>
+          <a:bodyPr wrap="square" anchor="t">
+            <a:spAutoFit/>
+          </a:bodyPr>
+          <a:lstStyle/>
+          <a:p>
+            <a:pPr algn="l"/>
+            <a:r>
+              <a:rPr sz="1600" b="1" i="0">
+                <a:solidFill>
+                  <a:srgbClr val="333333"/>
+                </a:solidFill>
+                <a:latin typeface="Calibri"/>
+              </a:rPr>
+              <a:t>Blueprint file + dedup + per-version validation report:</a:t>
+            </a:r>
+          </a:p>
+        </p:txBody>
+      </p:sp>
+      <p:sp>
+        <p:nvSpPr>
+          <p:cNvPr id="8" name="Rectangle 7"/>
+          <p:cNvSpPr/>
+          <p:nvPr/>
+        </p:nvSpPr>
+        <p:spPr>
+          <a:xfrm>
+            <a:off x="640080" y="3429000"/>
+            <a:ext cx="10972800" cy="914400"/>
+          </a:xfrm>
+          <a:prstGeom prst="rect">
+            <a:avLst/>
+          </a:prstGeom>
+          <a:solidFill>
+            <a:srgbClr val="1F2D3D"/>
+          </a:solidFill>
+          <a:ln w="15875">
+            <a:solidFill>
+              <a:srgbClr val="1F2D3D"/>
+            </a:solidFill>
+          </a:ln>
+          <a:effectLst/>
+        </p:spPr>
+        <p:style>
+          <a:lnRef idx="1">
+            <a:schemeClr val="accent1"/>
+          </a:lnRef>
+          <a:fillRef idx="3">
+            <a:schemeClr val="accent1"/>
+          </a:fillRef>
+          <a:effectRef idx="2">
+            <a:schemeClr val="accent1"/>
+          </a:effectRef>
+          <a:fontRef idx="minor">
+            <a:schemeClr val="lt1"/>
+          </a:fontRef>
+        </p:style>
+        <p:txBody>
+          <a:bodyPr rtlCol="0" anchor="ctr" wrap="square" lIns="45720" rIns="45720" tIns="27432" bIns="27432"/>
+          <a:lstStyle/>
+          <a:p>
+            <a:pPr algn="ctr"/>
+            <a:r>
+              <a:rPr sz="1500" b="0" i="0">
+                <a:solidFill>
+                  <a:srgbClr val="FFFFFF"/>
+                </a:solidFill>
+                <a:latin typeface="Consolas"/>
+              </a:rPr>
+              <a:t>python -m quizgen --pool questions.json --blueprint blueprint.yaml \</a:t>
+            </a:r>
+          </a:p>
+          <a:p>
+            <a:pPr algn="ctr"/>
+            <a:r>
+              <a:rPr sz="1500" b="0" i="0">
+                <a:solidFill>
+                  <a:srgbClr val="FFFFFF"/>
+                </a:solidFill>
+                <a:latin typeface="Consolas"/>
+              </a:rPr>
+              <a:t>    --dedup --validate --out-dir out</a:t>
+            </a:r>
+          </a:p>
+        </p:txBody>
+      </p:sp>
+      <p:sp>
+        <p:nvSpPr>
+          <p:cNvPr id="9" name="TextBox 8"/>
+          <p:cNvSpPr txBox="1"/>
+          <p:nvPr/>
+        </p:nvSpPr>
+        <p:spPr>
+          <a:xfrm>
+            <a:off x="640080" y="4663440"/>
+            <a:ext cx="10972800" cy="1645920"/>
           </a:xfrm>
           <a:prstGeom prst="rect">
             <a:avLst/>
@@ -9067,7 +7384,7 @@
                 </a:solidFill>
                 <a:latin typeface="Calibri"/>
               </a:rPr>
-              <a:t>• Near-duplicates waste blueprint slots and make versions predictable.</a:t>
+              <a:t>• Writes one Quiz JSON per version (each embeds the resolved blueprint).</a:t>
             </a:r>
           </a:p>
           <a:p>
@@ -9083,39 +7400,7 @@
                 </a:solidFill>
                 <a:latin typeface="Calibri"/>
               </a:rPr>
-              <a:t>• One API, two backends:</a:t>
-            </a:r>
-          </a:p>
-          <a:p>
-            <a:pPr lvl="1">
-              <a:spcAft>
-                <a:spcPts val="800"/>
-              </a:spcAft>
-            </a:pPr>
-            <a:r>
-              <a:rPr sz="1400">
-                <a:solidFill>
-                  <a:srgbClr val="636363"/>
-                </a:solidFill>
-                <a:latin typeface="Calibri"/>
-              </a:rPr>
-              <a:t>– Token-Jaccard over stem+answer(+options) — always available, offline.</a:t>
-            </a:r>
-          </a:p>
-          <a:p>
-            <a:pPr lvl="1">
-              <a:spcAft>
-                <a:spcPts val="800"/>
-              </a:spcAft>
-            </a:pPr>
-            <a:r>
-              <a:rPr sz="1400">
-                <a:solidFill>
-                  <a:srgbClr val="636363"/>
-                </a:solidFill>
-                <a:latin typeface="Calibri"/>
-              </a:rPr>
-              <a:t>– Embedding cosine via the RAG encoder — catches paraphrases.</a:t>
+              <a:t>• Standalone entry points too: python -m quizgen.assemble, python -m quizgen.validate.</a:t>
             </a:r>
           </a:p>
           <a:p>
@@ -9131,200 +7416,7 @@
                 </a:solidFill>
                 <a:latin typeface="Calibri"/>
               </a:rPr>
-              <a:t>• Dedup drops the later of each pair BEFORE assembly…</a:t>
-            </a:r>
-          </a:p>
-          <a:p>
-            <a:pPr>
-              <a:spcAft>
-                <a:spcPts val="800"/>
-              </a:spcAft>
-            </a:pPr>
-            <a:r>
-              <a:rPr sz="1600">
-                <a:solidFill>
-                  <a:srgbClr val="333333"/>
-                </a:solidFill>
-                <a:latin typeface="Calibri"/>
-              </a:rPr>
-              <a:t>• …and the MIP additionally forbids any surviving dup pair across versions.</a:t>
-            </a:r>
-          </a:p>
-          <a:p>
-            <a:pPr>
-              <a:spcAft>
-                <a:spcPts val="800"/>
-              </a:spcAft>
-            </a:pPr>
-            <a:r>
-              <a:rPr sz="1600">
-                <a:solidFill>
-                  <a:srgbClr val="333333"/>
-                </a:solidFill>
-                <a:latin typeface="Calibri"/>
-              </a:rPr>
-              <a:t>• Degrades gracefully: no encoder ⇒ token backend automatically.</a:t>
-            </a:r>
-          </a:p>
-        </p:txBody>
-      </p:sp>
-      <p:sp>
-        <p:nvSpPr>
-          <p:cNvPr id="6" name="Rectangle 5"/>
-          <p:cNvSpPr/>
-          <p:nvPr/>
-        </p:nvSpPr>
-        <p:spPr>
-          <a:xfrm>
-            <a:off x="6492240" y="1554480"/>
-            <a:ext cx="5029200" cy="1188720"/>
-          </a:xfrm>
-          <a:prstGeom prst="rect">
-            <a:avLst/>
-          </a:prstGeom>
-          <a:solidFill>
-            <a:srgbClr val="F0F0F2"/>
-          </a:solidFill>
-          <a:ln w="15875">
-            <a:solidFill>
-              <a:srgbClr val="636363"/>
-            </a:solidFill>
-          </a:ln>
-          <a:effectLst/>
-        </p:spPr>
-        <p:style>
-          <a:lnRef idx="1">
-            <a:schemeClr val="accent1"/>
-          </a:lnRef>
-          <a:fillRef idx="3">
-            <a:schemeClr val="accent1"/>
-          </a:fillRef>
-          <a:effectRef idx="2">
-            <a:schemeClr val="accent1"/>
-          </a:effectRef>
-          <a:fontRef idx="minor">
-            <a:schemeClr val="lt1"/>
-          </a:fontRef>
-        </p:style>
-        <p:txBody>
-          <a:bodyPr rtlCol="0" anchor="ctr" wrap="square" lIns="45720" rIns="45720" tIns="27432" bIns="27432"/>
-          <a:lstStyle/>
-          <a:p>
-            <a:pPr algn="ctr"/>
-            <a:r>
-              <a:rPr sz="1500" b="0" i="0">
-                <a:solidFill>
-                  <a:srgbClr val="333333"/>
-                </a:solidFill>
-                <a:latin typeface="Consolas"/>
-              </a:rPr>
-              <a:t>sim(q₁,q₂) = |T(q₁) ∩ T(q₂)|</a:t>
-            </a:r>
-          </a:p>
-          <a:p>
-            <a:pPr algn="ctr"/>
-            <a:r>
-              <a:rPr sz="1500" b="0" i="0">
-                <a:solidFill>
-                  <a:srgbClr val="333333"/>
-                </a:solidFill>
-                <a:latin typeface="Consolas"/>
-              </a:rPr>
-              <a:t>               ────────────────</a:t>
-            </a:r>
-          </a:p>
-          <a:p>
-            <a:pPr algn="ctr"/>
-            <a:r>
-              <a:rPr sz="1500" b="0" i="0">
-                <a:solidFill>
-                  <a:srgbClr val="333333"/>
-                </a:solidFill>
-                <a:latin typeface="Consolas"/>
-              </a:rPr>
-              <a:t>               |T(q₁) ∪ T(q₂)|</a:t>
-            </a:r>
-          </a:p>
-        </p:txBody>
-      </p:sp>
-      <p:sp>
-        <p:nvSpPr>
-          <p:cNvPr id="7" name="Rounded Rectangle 6"/>
-          <p:cNvSpPr/>
-          <p:nvPr/>
-        </p:nvSpPr>
-        <p:spPr>
-          <a:xfrm>
-            <a:off x="6492240" y="3017520"/>
-            <a:ext cx="5029200" cy="2194560"/>
-          </a:xfrm>
-          <a:prstGeom prst="roundRect">
-            <a:avLst/>
-          </a:prstGeom>
-          <a:solidFill>
-            <a:srgbClr val="E5F5E0"/>
-          </a:solidFill>
-          <a:ln w="15875">
-            <a:solidFill>
-              <a:srgbClr val="31A354"/>
-            </a:solidFill>
-          </a:ln>
-          <a:effectLst/>
-        </p:spPr>
-        <p:style>
-          <a:lnRef idx="1">
-            <a:schemeClr val="accent1"/>
-          </a:lnRef>
-          <a:fillRef idx="3">
-            <a:schemeClr val="accent1"/>
-          </a:fillRef>
-          <a:effectRef idx="2">
-            <a:schemeClr val="accent1"/>
-          </a:effectRef>
-          <a:fontRef idx="minor">
-            <a:schemeClr val="lt1"/>
-          </a:fontRef>
-        </p:style>
-        <p:txBody>
-          <a:bodyPr rtlCol="0" anchor="ctr" wrap="square" lIns="45720" rIns="45720" tIns="27432" bIns="27432"/>
-          <a:lstStyle/>
-          <a:p>
-            <a:pPr algn="ctr"/>
-            <a:r>
-              <a:rPr sz="1500" b="0" i="0">
-                <a:solidFill>
-                  <a:srgbClr val="333333"/>
-                </a:solidFill>
-                <a:latin typeface="Calibri"/>
-              </a:rPr>
-              <a:t>Two layers of protection:</a:t>
-            </a:r>
-          </a:p>
-          <a:p>
-            <a:pPr algn="ctr"/>
-          </a:p>
-          <a:p>
-            <a:pPr algn="ctr"/>
-            <a:r>
-              <a:rPr sz="1500" b="0" i="0">
-                <a:solidFill>
-                  <a:srgbClr val="333333"/>
-                </a:solidFill>
-                <a:latin typeface="Calibri"/>
-              </a:rPr>
-              <a:t>1.  remove dups from the POOL (dedup.py)</a:t>
-            </a:r>
-          </a:p>
-          <a:p>
-            <a:pPr algn="ctr"/>
-            <a:r>
-              <a:rPr sz="1500" b="0" i="0">
-                <a:solidFill>
-                  <a:srgbClr val="333333"/>
-                </a:solidFill>
-                <a:latin typeface="Calibri"/>
-              </a:rPr>
-              <a:t>2.  forbid dup PAIRS across versions (MIP constraint)</a:t>
+              <a:t>• Exits non-zero on any non-compliant version → composes in scripts &amp; CI.</a:t>
             </a:r>
           </a:p>
         </p:txBody>
@@ -9421,7 +7513,7 @@
                 </a:solidFill>
                 <a:latin typeface="Calibri"/>
               </a:rPr>
-              <a:t>Stage 5: validate &amp; (optionally) judge</a:t>
+              <a:t>Where each technique comes from</a:t>
             </a:r>
           </a:p>
         </p:txBody>
@@ -9456,62 +7548,27 @@
                 </a:solidFill>
                 <a:latin typeface="Calibri"/>
               </a:rPr>
-              <a:t>validate.py • judge.py</a:t>
-            </a:r>
-          </a:p>
-        </p:txBody>
-      </p:sp>
-      <p:sp>
-        <p:nvSpPr>
-          <p:cNvPr id="5" name="TextBox 4"/>
-          <p:cNvSpPr txBox="1"/>
-          <p:nvPr/>
-        </p:nvSpPr>
-        <p:spPr>
-          <a:xfrm>
-            <a:off x="640080" y="1188720"/>
-            <a:ext cx="10972800" cy="365760"/>
-          </a:xfrm>
-          <a:prstGeom prst="rect">
-            <a:avLst/>
-          </a:prstGeom>
-          <a:noFill/>
-        </p:spPr>
-        <p:txBody>
-          <a:bodyPr wrap="square" anchor="t">
-            <a:spAutoFit/>
-          </a:bodyPr>
-          <a:lstStyle/>
-          <a:p>
-            <a:pPr algn="l"/>
-            <a:r>
-              <a:rPr sz="1700" b="1" i="0">
-                <a:solidFill>
-                  <a:srgbClr val="333333"/>
-                </a:solidFill>
-                <a:latin typeface="Calibri"/>
-              </a:rPr>
-              <a:t>Four-dimension validation report (the overall gate = PASS/FAIL):</a:t>
-            </a:r>
-          </a:p>
-        </p:txBody>
-      </p:sp>
-      <p:sp>
-        <p:nvSpPr>
-          <p:cNvPr id="6" name="Rounded Rectangle 5"/>
+              <a:t>TECHNIQUE → SOURCE LINEAGE</a:t>
+            </a:r>
+          </a:p>
+        </p:txBody>
+      </p:sp>
+      <p:sp>
+        <p:nvSpPr>
+          <p:cNvPr id="5" name="Rounded Rectangle 4"/>
           <p:cNvSpPr/>
           <p:nvPr/>
         </p:nvSpPr>
         <p:spPr>
           <a:xfrm>
-            <a:off x="640080" y="1691640"/>
-            <a:ext cx="5394960" cy="1143000"/>
+            <a:off x="640080" y="1371600"/>
+            <a:ext cx="4937760" cy="530352"/>
           </a:xfrm>
           <a:prstGeom prst="roundRect">
             <a:avLst/>
           </a:prstGeom>
           <a:solidFill>
-            <a:srgbClr val="DEEBF7"/>
+            <a:srgbClr val="3182BD"/>
           </a:solidFill>
           <a:ln w="15875">
             <a:solidFill>
@@ -9540,112 +7597,33 @@
           <a:p>
             <a:pPr algn="ctr"/>
             <a:r>
-              <a:rPr sz="1600" b="1" i="0">
-                <a:solidFill>
-                  <a:srgbClr val="333333"/>
-                </a:solidFill>
-                <a:latin typeface="Calibri"/>
-              </a:rPr>
-              <a:t>Schema validity</a:t>
-            </a:r>
-          </a:p>
-          <a:p>
-            <a:pPr algn="ctr"/>
-            <a:r>
-              <a:rPr sz="1200">
-                <a:solidFill>
-                  <a:srgbClr val="636363"/>
-                </a:solidFill>
-                <a:latin typeface="Calibri"/>
-              </a:rPr>
-              <a:t>every question round-trips through the Question model</a:t>
-            </a:r>
-          </a:p>
-        </p:txBody>
-      </p:sp>
-      <p:sp>
-        <p:nvSpPr>
-          <p:cNvPr id="7" name="Rounded Rectangle 6"/>
+              <a:rPr sz="1400" b="1" i="0">
+                <a:solidFill>
+                  <a:srgbClr val="FFFFFF"/>
+                </a:solidFill>
+                <a:latin typeface="Calibri"/>
+              </a:rPr>
+              <a:t>Implemented in code</a:t>
+            </a:r>
+          </a:p>
+        </p:txBody>
+      </p:sp>
+      <p:sp>
+        <p:nvSpPr>
+          <p:cNvPr id="6" name="Rounded Rectangle 5"/>
           <p:cNvSpPr/>
           <p:nvPr/>
         </p:nvSpPr>
         <p:spPr>
           <a:xfrm>
-            <a:off x="6309360" y="1691640"/>
-            <a:ext cx="5394960" cy="1143000"/>
+            <a:off x="5669280" y="1371600"/>
+            <a:ext cx="5943600" cy="530352"/>
           </a:xfrm>
           <a:prstGeom prst="roundRect">
             <a:avLst/>
           </a:prstGeom>
           <a:solidFill>
-            <a:srgbClr val="E5F5E0"/>
-          </a:solidFill>
-          <a:ln w="15875">
-            <a:solidFill>
-              <a:srgbClr val="31A354"/>
-            </a:solidFill>
-          </a:ln>
-          <a:effectLst/>
-        </p:spPr>
-        <p:style>
-          <a:lnRef idx="1">
-            <a:schemeClr val="accent1"/>
-          </a:lnRef>
-          <a:fillRef idx="3">
-            <a:schemeClr val="accent1"/>
-          </a:fillRef>
-          <a:effectRef idx="2">
-            <a:schemeClr val="accent1"/>
-          </a:effectRef>
-          <a:fontRef idx="minor">
-            <a:schemeClr val="lt1"/>
-          </a:fontRef>
-        </p:style>
-        <p:txBody>
-          <a:bodyPr rtlCol="0" anchor="ctr" wrap="square" lIns="45720" rIns="45720" tIns="27432" bIns="27432"/>
-          <a:lstStyle/>
-          <a:p>
-            <a:pPr algn="ctr"/>
-            <a:r>
-              <a:rPr sz="1600" b="1" i="0">
-                <a:solidFill>
-                  <a:srgbClr val="333333"/>
-                </a:solidFill>
-                <a:latin typeface="Calibri"/>
-              </a:rPr>
-              <a:t>Blueprint compliance</a:t>
-            </a:r>
-          </a:p>
-          <a:p>
-            <a:pPr algn="ctr"/>
-            <a:r>
-              <a:rPr sz="1200">
-                <a:solidFill>
-                  <a:srgbClr val="636363"/>
-                </a:solidFill>
-                <a:latin typeface="Calibri"/>
-              </a:rPr>
-              <a:t>per-chapter, difficulty, total &amp; qtypes match EXACTLY</a:t>
-            </a:r>
-          </a:p>
-        </p:txBody>
-      </p:sp>
-      <p:sp>
-        <p:nvSpPr>
-          <p:cNvPr id="8" name="Rounded Rectangle 7"/>
-          <p:cNvSpPr/>
-          <p:nvPr/>
-        </p:nvSpPr>
-        <p:spPr>
-          <a:xfrm>
-            <a:off x="640080" y="3017520"/>
-            <a:ext cx="5394960" cy="1143000"/>
-          </a:xfrm>
-          <a:prstGeom prst="roundRect">
-            <a:avLst/>
-          </a:prstGeom>
-          <a:solidFill>
-            <a:srgbClr val="DEEBF7"/>
+            <a:srgbClr val="3182BD"/>
           </a:solidFill>
           <a:ln w="15875">
             <a:solidFill>
@@ -9674,49 +7652,37 @@
           <a:p>
             <a:pPr algn="ctr"/>
             <a:r>
-              <a:rPr sz="1600" b="1" i="0">
-                <a:solidFill>
-                  <a:srgbClr val="333333"/>
-                </a:solidFill>
-                <a:latin typeface="Calibri"/>
-              </a:rPr>
-              <a:t>Grounding coverage</a:t>
-            </a:r>
-          </a:p>
-          <a:p>
-            <a:pPr algn="ctr"/>
-            <a:r>
-              <a:rPr sz="1200">
-                <a:solidFill>
-                  <a:srgbClr val="636363"/>
-                </a:solidFill>
-                <a:latin typeface="Calibri"/>
-              </a:rPr>
-              <a:t>share traceable to source; answer words overlap passage</a:t>
-            </a:r>
-          </a:p>
-        </p:txBody>
-      </p:sp>
-      <p:sp>
-        <p:nvSpPr>
-          <p:cNvPr id="9" name="Rounded Rectangle 8"/>
+              <a:rPr sz="1400" b="1" i="0">
+                <a:solidFill>
+                  <a:srgbClr val="FFFFFF"/>
+                </a:solidFill>
+                <a:latin typeface="Calibri"/>
+              </a:rPr>
+              <a:t>Source lineage</a:t>
+            </a:r>
+          </a:p>
+        </p:txBody>
+      </p:sp>
+      <p:sp>
+        <p:nvSpPr>
+          <p:cNvPr id="7" name="Rectangle 6"/>
           <p:cNvSpPr/>
           <p:nvPr/>
         </p:nvSpPr>
         <p:spPr>
           <a:xfrm>
-            <a:off x="6309360" y="3017520"/>
-            <a:ext cx="5394960" cy="1143000"/>
-          </a:xfrm>
-          <a:prstGeom prst="roundRect">
+            <a:off x="640080" y="1901952"/>
+            <a:ext cx="4937760" cy="530352"/>
+          </a:xfrm>
+          <a:prstGeom prst="rect">
             <a:avLst/>
           </a:prstGeom>
           <a:solidFill>
-            <a:srgbClr val="E5F5E0"/>
+            <a:srgbClr val="F0F0F2"/>
           </a:solidFill>
           <a:ln w="15875">
             <a:solidFill>
-              <a:srgbClr val="31A354"/>
+              <a:srgbClr val="636363"/>
             </a:solidFill>
           </a:ln>
           <a:effectLst/>
@@ -9741,49 +7707,37 @@
           <a:p>
             <a:pPr algn="ctr"/>
             <a:r>
-              <a:rPr sz="1600" b="1" i="0">
-                <a:solidFill>
-                  <a:srgbClr val="333333"/>
-                </a:solidFill>
-                <a:latin typeface="Calibri"/>
-              </a:rPr>
-              <a:t>Duplicate rate</a:t>
-            </a:r>
-          </a:p>
-          <a:p>
-            <a:pPr algn="ctr"/>
-            <a:r>
-              <a:rPr sz="1200">
-                <a:solidFill>
-                  <a:srgbClr val="636363"/>
-                </a:solidFill>
-                <a:latin typeface="Calibri"/>
-              </a:rPr>
-              <a:t>share of questions involved in a near-duplicate pair</a:t>
-            </a:r>
-          </a:p>
-        </p:txBody>
-      </p:sp>
-      <p:sp>
-        <p:nvSpPr>
-          <p:cNvPr id="10" name="Rounded Rectangle 9"/>
+              <a:rPr sz="1200" b="0" i="0">
+                <a:solidFill>
+                  <a:srgbClr val="333333"/>
+                </a:solidFill>
+                <a:latin typeface="Calibri"/>
+              </a:rPr>
+              <a:t>Test assembly as 0–1 MIP</a:t>
+            </a:r>
+          </a:p>
+        </p:txBody>
+      </p:sp>
+      <p:sp>
+        <p:nvSpPr>
+          <p:cNvPr id="8" name="Rectangle 7"/>
           <p:cNvSpPr/>
           <p:nvPr/>
         </p:nvSpPr>
         <p:spPr>
           <a:xfrm>
-            <a:off x="640080" y="4572000"/>
-            <a:ext cx="10972800" cy="1463040"/>
-          </a:xfrm>
-          <a:prstGeom prst="roundRect">
+            <a:off x="5669280" y="1901952"/>
+            <a:ext cx="5943600" cy="530352"/>
+          </a:xfrm>
+          <a:prstGeom prst="rect">
             <a:avLst/>
           </a:prstGeom>
           <a:solidFill>
-            <a:srgbClr val="FDE0DD"/>
+            <a:srgbClr val="F0F0F2"/>
           </a:solidFill>
           <a:ln w="15875">
             <a:solidFill>
-              <a:srgbClr val="DE2D26"/>
+              <a:srgbClr val="636363"/>
             </a:solidFill>
           </a:ln>
           <a:effectLst/>
@@ -9808,13 +7762,708 @@
           <a:p>
             <a:pPr algn="ctr"/>
             <a:r>
-              <a:rPr sz="1500" b="0" i="0">
-                <a:solidFill>
-                  <a:srgbClr val="333333"/>
-                </a:solidFill>
-                <a:latin typeface="Calibri"/>
-              </a:rPr>
-              <a:t>LLM-as-JUDGE (opt-in):  a SEPARATE model call rates each finished question 1–5 on answerability, correctness, clarity &amp; Bloom-match, and flags weak items for human review. It only reads questions — never rewrites them — so generate &amp; judge stay cleanly separable.</a:t>
+              <a:rPr sz="1200" b="0" i="0">
+                <a:solidFill>
+                  <a:srgbClr val="333333"/>
+                </a:solidFill>
+                <a:latin typeface="Calibri"/>
+              </a:rPr>
+              <a:t>van der Linden 2005 — optimal test design</a:t>
+            </a:r>
+          </a:p>
+        </p:txBody>
+      </p:sp>
+      <p:sp>
+        <p:nvSpPr>
+          <p:cNvPr id="9" name="Rectangle 8"/>
+          <p:cNvSpPr/>
+          <p:nvPr/>
+        </p:nvSpPr>
+        <p:spPr>
+          <a:xfrm>
+            <a:off x="640080" y="2432304"/>
+            <a:ext cx="4937760" cy="530352"/>
+          </a:xfrm>
+          <a:prstGeom prst="rect">
+            <a:avLst/>
+          </a:prstGeom>
+          <a:solidFill>
+            <a:srgbClr val="FFFFFF"/>
+          </a:solidFill>
+          <a:ln w="15875">
+            <a:solidFill>
+              <a:srgbClr val="636363"/>
+            </a:solidFill>
+          </a:ln>
+          <a:effectLst/>
+        </p:spPr>
+        <p:style>
+          <a:lnRef idx="1">
+            <a:schemeClr val="accent1"/>
+          </a:lnRef>
+          <a:fillRef idx="3">
+            <a:schemeClr val="accent1"/>
+          </a:fillRef>
+          <a:effectRef idx="2">
+            <a:schemeClr val="accent1"/>
+          </a:effectRef>
+          <a:fontRef idx="minor">
+            <a:schemeClr val="lt1"/>
+          </a:fontRef>
+        </p:style>
+        <p:txBody>
+          <a:bodyPr rtlCol="0" anchor="ctr" wrap="square" lIns="45720" rIns="45720" tIns="27432" bIns="27432"/>
+          <a:lstStyle/>
+          <a:p>
+            <a:pPr algn="ctr"/>
+            <a:r>
+              <a:rPr sz="1200" b="0" i="0">
+                <a:solidFill>
+                  <a:srgbClr val="333333"/>
+                </a:solidFill>
+                <a:latin typeface="Calibri"/>
+              </a:rPr>
+              <a:t>Quality-weighted selection</a:t>
+            </a:r>
+          </a:p>
+        </p:txBody>
+      </p:sp>
+      <p:sp>
+        <p:nvSpPr>
+          <p:cNvPr id="10" name="Rectangle 9"/>
+          <p:cNvSpPr/>
+          <p:nvPr/>
+        </p:nvSpPr>
+        <p:spPr>
+          <a:xfrm>
+            <a:off x="5669280" y="2432304"/>
+            <a:ext cx="5943600" cy="530352"/>
+          </a:xfrm>
+          <a:prstGeom prst="rect">
+            <a:avLst/>
+          </a:prstGeom>
+          <a:solidFill>
+            <a:srgbClr val="FFFFFF"/>
+          </a:solidFill>
+          <a:ln w="15875">
+            <a:solidFill>
+              <a:srgbClr val="636363"/>
+            </a:solidFill>
+          </a:ln>
+          <a:effectLst/>
+        </p:spPr>
+        <p:style>
+          <a:lnRef idx="1">
+            <a:schemeClr val="accent1"/>
+          </a:lnRef>
+          <a:fillRef idx="3">
+            <a:schemeClr val="accent1"/>
+          </a:fillRef>
+          <a:effectRef idx="2">
+            <a:schemeClr val="accent1"/>
+          </a:effectRef>
+          <a:fontRef idx="minor">
+            <a:schemeClr val="lt1"/>
+          </a:fontRef>
+        </p:style>
+        <p:txBody>
+          <a:bodyPr rtlCol="0" anchor="ctr" wrap="square" lIns="45720" rIns="45720" tIns="27432" bIns="27432"/>
+          <a:lstStyle/>
+          <a:p>
+            <a:pPr algn="ctr"/>
+            <a:r>
+              <a:rPr sz="1200" b="0" i="0">
+                <a:solidFill>
+                  <a:srgbClr val="333333"/>
+                </a:solidFill>
+                <a:latin typeface="Calibri"/>
+              </a:rPr>
+              <a:t>van der Linden 2005 (objective in ATA)</a:t>
+            </a:r>
+          </a:p>
+        </p:txBody>
+      </p:sp>
+      <p:sp>
+        <p:nvSpPr>
+          <p:cNvPr id="11" name="Rectangle 10"/>
+          <p:cNvSpPr/>
+          <p:nvPr/>
+        </p:nvSpPr>
+        <p:spPr>
+          <a:xfrm>
+            <a:off x="640080" y="2962656"/>
+            <a:ext cx="4937760" cy="530352"/>
+          </a:xfrm>
+          <a:prstGeom prst="rect">
+            <a:avLst/>
+          </a:prstGeom>
+          <a:solidFill>
+            <a:srgbClr val="F0F0F2"/>
+          </a:solidFill>
+          <a:ln w="15875">
+            <a:solidFill>
+              <a:srgbClr val="636363"/>
+            </a:solidFill>
+          </a:ln>
+          <a:effectLst/>
+        </p:spPr>
+        <p:style>
+          <a:lnRef idx="1">
+            <a:schemeClr val="accent1"/>
+          </a:lnRef>
+          <a:fillRef idx="3">
+            <a:schemeClr val="accent1"/>
+          </a:fillRef>
+          <a:effectRef idx="2">
+            <a:schemeClr val="accent1"/>
+          </a:effectRef>
+          <a:fontRef idx="minor">
+            <a:schemeClr val="lt1"/>
+          </a:fontRef>
+        </p:style>
+        <p:txBody>
+          <a:bodyPr rtlCol="0" anchor="ctr" wrap="square" lIns="45720" rIns="45720" tIns="27432" bIns="27432"/>
+          <a:lstStyle/>
+          <a:p>
+            <a:pPr algn="ctr"/>
+            <a:r>
+              <a:rPr sz="1200" b="0" i="0">
+                <a:solidFill>
+                  <a:srgbClr val="333333"/>
+                </a:solidFill>
+                <a:latin typeface="Calibri"/>
+              </a:rPr>
+              <a:t>Test blueprint</a:t>
+            </a:r>
+          </a:p>
+        </p:txBody>
+      </p:sp>
+      <p:sp>
+        <p:nvSpPr>
+          <p:cNvPr id="12" name="Rectangle 11"/>
+          <p:cNvSpPr/>
+          <p:nvPr/>
+        </p:nvSpPr>
+        <p:spPr>
+          <a:xfrm>
+            <a:off x="5669280" y="2962656"/>
+            <a:ext cx="5943600" cy="530352"/>
+          </a:xfrm>
+          <a:prstGeom prst="rect">
+            <a:avLst/>
+          </a:prstGeom>
+          <a:solidFill>
+            <a:srgbClr val="F0F0F2"/>
+          </a:solidFill>
+          <a:ln w="15875">
+            <a:solidFill>
+              <a:srgbClr val="636363"/>
+            </a:solidFill>
+          </a:ln>
+          <a:effectLst/>
+        </p:spPr>
+        <p:style>
+          <a:lnRef idx="1">
+            <a:schemeClr val="accent1"/>
+          </a:lnRef>
+          <a:fillRef idx="3">
+            <a:schemeClr val="accent1"/>
+          </a:fillRef>
+          <a:effectRef idx="2">
+            <a:schemeClr val="accent1"/>
+          </a:effectRef>
+          <a:fontRef idx="minor">
+            <a:schemeClr val="lt1"/>
+          </a:fontRef>
+        </p:style>
+        <p:txBody>
+          <a:bodyPr rtlCol="0" anchor="ctr" wrap="square" lIns="45720" rIns="45720" tIns="27432" bIns="27432"/>
+          <a:lstStyle/>
+          <a:p>
+            <a:pPr algn="ctr"/>
+            <a:r>
+              <a:rPr sz="1200" b="0" i="0">
+                <a:solidFill>
+                  <a:srgbClr val="333333"/>
+                </a:solidFill>
+                <a:latin typeface="Calibri"/>
+              </a:rPr>
+              <a:t>classical table-of-specifications design</a:t>
+            </a:r>
+          </a:p>
+        </p:txBody>
+      </p:sp>
+      <p:sp>
+        <p:nvSpPr>
+          <p:cNvPr id="13" name="Rectangle 12"/>
+          <p:cNvSpPr/>
+          <p:nvPr/>
+        </p:nvSpPr>
+        <p:spPr>
+          <a:xfrm>
+            <a:off x="640080" y="3493008"/>
+            <a:ext cx="4937760" cy="530352"/>
+          </a:xfrm>
+          <a:prstGeom prst="rect">
+            <a:avLst/>
+          </a:prstGeom>
+          <a:solidFill>
+            <a:srgbClr val="FFFFFF"/>
+          </a:solidFill>
+          <a:ln w="15875">
+            <a:solidFill>
+              <a:srgbClr val="636363"/>
+            </a:solidFill>
+          </a:ln>
+          <a:effectLst/>
+        </p:spPr>
+        <p:style>
+          <a:lnRef idx="1">
+            <a:schemeClr val="accent1"/>
+          </a:lnRef>
+          <a:fillRef idx="3">
+            <a:schemeClr val="accent1"/>
+          </a:fillRef>
+          <a:effectRef idx="2">
+            <a:schemeClr val="accent1"/>
+          </a:effectRef>
+          <a:fontRef idx="minor">
+            <a:schemeClr val="lt1"/>
+          </a:fontRef>
+        </p:style>
+        <p:txBody>
+          <a:bodyPr rtlCol="0" anchor="ctr" wrap="square" lIns="45720" rIns="45720" tIns="27432" bIns="27432"/>
+          <a:lstStyle/>
+          <a:p>
+            <a:pPr algn="ctr"/>
+            <a:r>
+              <a:rPr sz="1200" b="0" i="0">
+                <a:solidFill>
+                  <a:srgbClr val="333333"/>
+                </a:solidFill>
+                <a:latin typeface="Calibri"/>
+              </a:rPr>
+              <a:t>Bloom-level metadata</a:t>
+            </a:r>
+          </a:p>
+        </p:txBody>
+      </p:sp>
+      <p:sp>
+        <p:nvSpPr>
+          <p:cNvPr id="14" name="Rectangle 13"/>
+          <p:cNvSpPr/>
+          <p:nvPr/>
+        </p:nvSpPr>
+        <p:spPr>
+          <a:xfrm>
+            <a:off x="5669280" y="3493008"/>
+            <a:ext cx="5943600" cy="530352"/>
+          </a:xfrm>
+          <a:prstGeom prst="rect">
+            <a:avLst/>
+          </a:prstGeom>
+          <a:solidFill>
+            <a:srgbClr val="FFFFFF"/>
+          </a:solidFill>
+          <a:ln w="15875">
+            <a:solidFill>
+              <a:srgbClr val="636363"/>
+            </a:solidFill>
+          </a:ln>
+          <a:effectLst/>
+        </p:spPr>
+        <p:style>
+          <a:lnRef idx="1">
+            <a:schemeClr val="accent1"/>
+          </a:lnRef>
+          <a:fillRef idx="3">
+            <a:schemeClr val="accent1"/>
+          </a:fillRef>
+          <a:effectRef idx="2">
+            <a:schemeClr val="accent1"/>
+          </a:effectRef>
+          <a:fontRef idx="minor">
+            <a:schemeClr val="lt1"/>
+          </a:fontRef>
+        </p:style>
+        <p:txBody>
+          <a:bodyPr rtlCol="0" anchor="ctr" wrap="square" lIns="45720" rIns="45720" tIns="27432" bIns="27432"/>
+          <a:lstStyle/>
+          <a:p>
+            <a:pPr algn="ctr"/>
+            <a:r>
+              <a:rPr sz="1200" b="0" i="0">
+                <a:solidFill>
+                  <a:srgbClr val="333333"/>
+                </a:solidFill>
+                <a:latin typeface="Calibri"/>
+              </a:rPr>
+              <a:t>Anderson &amp; Krathwohl 2001 (revised Bloom)</a:t>
+            </a:r>
+          </a:p>
+        </p:txBody>
+      </p:sp>
+      <p:sp>
+        <p:nvSpPr>
+          <p:cNvPr id="15" name="Rectangle 14"/>
+          <p:cNvSpPr/>
+          <p:nvPr/>
+        </p:nvSpPr>
+        <p:spPr>
+          <a:xfrm>
+            <a:off x="640080" y="4023360"/>
+            <a:ext cx="4937760" cy="530352"/>
+          </a:xfrm>
+          <a:prstGeom prst="rect">
+            <a:avLst/>
+          </a:prstGeom>
+          <a:solidFill>
+            <a:srgbClr val="F0F0F2"/>
+          </a:solidFill>
+          <a:ln w="15875">
+            <a:solidFill>
+              <a:srgbClr val="636363"/>
+            </a:solidFill>
+          </a:ln>
+          <a:effectLst/>
+        </p:spPr>
+        <p:style>
+          <a:lnRef idx="1">
+            <a:schemeClr val="accent1"/>
+          </a:lnRef>
+          <a:fillRef idx="3">
+            <a:schemeClr val="accent1"/>
+          </a:fillRef>
+          <a:effectRef idx="2">
+            <a:schemeClr val="accent1"/>
+          </a:effectRef>
+          <a:fontRef idx="minor">
+            <a:schemeClr val="lt1"/>
+          </a:fontRef>
+        </p:style>
+        <p:txBody>
+          <a:bodyPr rtlCol="0" anchor="ctr" wrap="square" lIns="45720" rIns="45720" tIns="27432" bIns="27432"/>
+          <a:lstStyle/>
+          <a:p>
+            <a:pPr algn="ctr"/>
+            <a:r>
+              <a:rPr sz="1200" b="0" i="0">
+                <a:solidFill>
+                  <a:srgbClr val="333333"/>
+                </a:solidFill>
+                <a:latin typeface="Calibri"/>
+              </a:rPr>
+              <a:t>Semantic dedup (embeddings)</a:t>
+            </a:r>
+          </a:p>
+        </p:txBody>
+      </p:sp>
+      <p:sp>
+        <p:nvSpPr>
+          <p:cNvPr id="16" name="Rectangle 15"/>
+          <p:cNvSpPr/>
+          <p:nvPr/>
+        </p:nvSpPr>
+        <p:spPr>
+          <a:xfrm>
+            <a:off x="5669280" y="4023360"/>
+            <a:ext cx="5943600" cy="530352"/>
+          </a:xfrm>
+          <a:prstGeom prst="rect">
+            <a:avLst/>
+          </a:prstGeom>
+          <a:solidFill>
+            <a:srgbClr val="F0F0F2"/>
+          </a:solidFill>
+          <a:ln w="15875">
+            <a:solidFill>
+              <a:srgbClr val="636363"/>
+            </a:solidFill>
+          </a:ln>
+          <a:effectLst/>
+        </p:spPr>
+        <p:style>
+          <a:lnRef idx="1">
+            <a:schemeClr val="accent1"/>
+          </a:lnRef>
+          <a:fillRef idx="3">
+            <a:schemeClr val="accent1"/>
+          </a:fillRef>
+          <a:effectRef idx="2">
+            <a:schemeClr val="accent1"/>
+          </a:effectRef>
+          <a:fontRef idx="minor">
+            <a:schemeClr val="lt1"/>
+          </a:fontRef>
+        </p:style>
+        <p:txBody>
+          <a:bodyPr rtlCol="0" anchor="ctr" wrap="square" lIns="45720" rIns="45720" tIns="27432" bIns="27432"/>
+          <a:lstStyle/>
+          <a:p>
+            <a:pPr algn="ctr"/>
+            <a:r>
+              <a:rPr sz="1200" b="0" i="0">
+                <a:solidFill>
+                  <a:srgbClr val="333333"/>
+                </a:solidFill>
+                <a:latin typeface="Calibri"/>
+              </a:rPr>
+              <a:t>Sentence-BERT (Reimers &amp; Gurevych 2019)</a:t>
+            </a:r>
+          </a:p>
+        </p:txBody>
+      </p:sp>
+      <p:sp>
+        <p:nvSpPr>
+          <p:cNvPr id="17" name="Rectangle 16"/>
+          <p:cNvSpPr/>
+          <p:nvPr/>
+        </p:nvSpPr>
+        <p:spPr>
+          <a:xfrm>
+            <a:off x="640080" y="4553712"/>
+            <a:ext cx="4937760" cy="530352"/>
+          </a:xfrm>
+          <a:prstGeom prst="rect">
+            <a:avLst/>
+          </a:prstGeom>
+          <a:solidFill>
+            <a:srgbClr val="FFFFFF"/>
+          </a:solidFill>
+          <a:ln w="15875">
+            <a:solidFill>
+              <a:srgbClr val="636363"/>
+            </a:solidFill>
+          </a:ln>
+          <a:effectLst/>
+        </p:spPr>
+        <p:style>
+          <a:lnRef idx="1">
+            <a:schemeClr val="accent1"/>
+          </a:lnRef>
+          <a:fillRef idx="3">
+            <a:schemeClr val="accent1"/>
+          </a:fillRef>
+          <a:effectRef idx="2">
+            <a:schemeClr val="accent1"/>
+          </a:effectRef>
+          <a:fontRef idx="minor">
+            <a:schemeClr val="lt1"/>
+          </a:fontRef>
+        </p:style>
+        <p:txBody>
+          <a:bodyPr rtlCol="0" anchor="ctr" wrap="square" lIns="45720" rIns="45720" tIns="27432" bIns="27432"/>
+          <a:lstStyle/>
+          <a:p>
+            <a:pPr algn="ctr"/>
+            <a:r>
+              <a:rPr sz="1200" b="0" i="0">
+                <a:solidFill>
+                  <a:srgbClr val="333333"/>
+                </a:solidFill>
+                <a:latin typeface="Calibri"/>
+              </a:rPr>
+              <a:t>Largest-remainder counts</a:t>
+            </a:r>
+          </a:p>
+        </p:txBody>
+      </p:sp>
+      <p:sp>
+        <p:nvSpPr>
+          <p:cNvPr id="18" name="Rectangle 17"/>
+          <p:cNvSpPr/>
+          <p:nvPr/>
+        </p:nvSpPr>
+        <p:spPr>
+          <a:xfrm>
+            <a:off x="5669280" y="4553712"/>
+            <a:ext cx="5943600" cy="530352"/>
+          </a:xfrm>
+          <a:prstGeom prst="rect">
+            <a:avLst/>
+          </a:prstGeom>
+          <a:solidFill>
+            <a:srgbClr val="FFFFFF"/>
+          </a:solidFill>
+          <a:ln w="15875">
+            <a:solidFill>
+              <a:srgbClr val="636363"/>
+            </a:solidFill>
+          </a:ln>
+          <a:effectLst/>
+        </p:spPr>
+        <p:style>
+          <a:lnRef idx="1">
+            <a:schemeClr val="accent1"/>
+          </a:lnRef>
+          <a:fillRef idx="3">
+            <a:schemeClr val="accent1"/>
+          </a:fillRef>
+          <a:effectRef idx="2">
+            <a:schemeClr val="accent1"/>
+          </a:effectRef>
+          <a:fontRef idx="minor">
+            <a:schemeClr val="lt1"/>
+          </a:fontRef>
+        </p:style>
+        <p:txBody>
+          <a:bodyPr rtlCol="0" anchor="ctr" wrap="square" lIns="45720" rIns="45720" tIns="27432" bIns="27432"/>
+          <a:lstStyle/>
+          <a:p>
+            <a:pPr algn="ctr"/>
+            <a:r>
+              <a:rPr sz="1200" b="0" i="0">
+                <a:solidFill>
+                  <a:srgbClr val="333333"/>
+                </a:solidFill>
+                <a:latin typeface="Calibri"/>
+              </a:rPr>
+              <a:t>Hamilton apportionment (engineering)</a:t>
+            </a:r>
+          </a:p>
+        </p:txBody>
+      </p:sp>
+      <p:sp>
+        <p:nvSpPr>
+          <p:cNvPr id="19" name="Rectangle 18"/>
+          <p:cNvSpPr/>
+          <p:nvPr/>
+        </p:nvSpPr>
+        <p:spPr>
+          <a:xfrm>
+            <a:off x="640080" y="5084064"/>
+            <a:ext cx="4937760" cy="530352"/>
+          </a:xfrm>
+          <a:prstGeom prst="rect">
+            <a:avLst/>
+          </a:prstGeom>
+          <a:solidFill>
+            <a:srgbClr val="F0F0F2"/>
+          </a:solidFill>
+          <a:ln w="15875">
+            <a:solidFill>
+              <a:srgbClr val="636363"/>
+            </a:solidFill>
+          </a:ln>
+          <a:effectLst/>
+        </p:spPr>
+        <p:style>
+          <a:lnRef idx="1">
+            <a:schemeClr val="accent1"/>
+          </a:lnRef>
+          <a:fillRef idx="3">
+            <a:schemeClr val="accent1"/>
+          </a:fillRef>
+          <a:effectRef idx="2">
+            <a:schemeClr val="accent1"/>
+          </a:effectRef>
+          <a:fontRef idx="minor">
+            <a:schemeClr val="lt1"/>
+          </a:fontRef>
+        </p:style>
+        <p:txBody>
+          <a:bodyPr rtlCol="0" anchor="ctr" wrap="square" lIns="45720" rIns="45720" tIns="27432" bIns="27432"/>
+          <a:lstStyle/>
+          <a:p>
+            <a:pPr algn="ctr"/>
+            <a:r>
+              <a:rPr sz="1200" b="0" i="0">
+                <a:solidFill>
+                  <a:srgbClr val="333333"/>
+                </a:solidFill>
+                <a:latin typeface="Calibri"/>
+              </a:rPr>
+              <a:t>Greedy baseline, token Jaccard</a:t>
+            </a:r>
+          </a:p>
+        </p:txBody>
+      </p:sp>
+      <p:sp>
+        <p:nvSpPr>
+          <p:cNvPr id="20" name="Rectangle 19"/>
+          <p:cNvSpPr/>
+          <p:nvPr/>
+        </p:nvSpPr>
+        <p:spPr>
+          <a:xfrm>
+            <a:off x="5669280" y="5084064"/>
+            <a:ext cx="5943600" cy="530352"/>
+          </a:xfrm>
+          <a:prstGeom prst="rect">
+            <a:avLst/>
+          </a:prstGeom>
+          <a:solidFill>
+            <a:srgbClr val="F0F0F2"/>
+          </a:solidFill>
+          <a:ln w="15875">
+            <a:solidFill>
+              <a:srgbClr val="636363"/>
+            </a:solidFill>
+          </a:ln>
+          <a:effectLst/>
+        </p:spPr>
+        <p:style>
+          <a:lnRef idx="1">
+            <a:schemeClr val="accent1"/>
+          </a:lnRef>
+          <a:fillRef idx="3">
+            <a:schemeClr val="accent1"/>
+          </a:fillRef>
+          <a:effectRef idx="2">
+            <a:schemeClr val="accent1"/>
+          </a:effectRef>
+          <a:fontRef idx="minor">
+            <a:schemeClr val="lt1"/>
+          </a:fontRef>
+        </p:style>
+        <p:txBody>
+          <a:bodyPr rtlCol="0" anchor="ctr" wrap="square" lIns="45720" rIns="45720" tIns="27432" bIns="27432"/>
+          <a:lstStyle/>
+          <a:p>
+            <a:pPr algn="ctr"/>
+            <a:r>
+              <a:rPr sz="1200" b="0" i="0">
+                <a:solidFill>
+                  <a:srgbClr val="333333"/>
+                </a:solidFill>
+                <a:latin typeface="Calibri"/>
+              </a:rPr>
+              <a:t>project-specific engineering</a:t>
+            </a:r>
+          </a:p>
+        </p:txBody>
+      </p:sp>
+      <p:sp>
+        <p:nvSpPr>
+          <p:cNvPr id="21" name="TextBox 20"/>
+          <p:cNvSpPr txBox="1"/>
+          <p:nvPr/>
+        </p:nvSpPr>
+        <p:spPr>
+          <a:xfrm>
+            <a:off x="640080" y="6355080"/>
+            <a:ext cx="11338560" cy="365760"/>
+          </a:xfrm>
+          <a:prstGeom prst="rect">
+            <a:avLst/>
+          </a:prstGeom>
+          <a:noFill/>
+        </p:spPr>
+        <p:txBody>
+          <a:bodyPr wrap="square" anchor="t">
+            <a:spAutoFit/>
+          </a:bodyPr>
+          <a:lstStyle/>
+          <a:p>
+            <a:pPr algn="l"/>
+            <a:r>
+              <a:rPr sz="1100" b="0" i="1">
+                <a:solidFill>
+                  <a:srgbClr val="DE2D26"/>
+                </a:solidFill>
+                <a:latin typeface="Calibri"/>
+              </a:rPr>
+              <a:t>Note: replace these keys with the thesis's exact bibliography.</a:t>
             </a:r>
           </a:p>
         </p:txBody>

--- a/docs/quizgen_slides.pptx
+++ b/docs/quizgen_slides.pptx
@@ -15,6 +15,7 @@
     <p:sldId id="263" r:id="rId14"/>
     <p:sldId id="264" r:id="rId15"/>
     <p:sldId id="265" r:id="rId16"/>
+    <p:sldId id="266" r:id="rId17"/>
   </p:sldIdLst>
   <p:sldSz cx="12191695" cy="6858000" type="screen4x3"/>
   <p:notesSz cx="6858000" cy="9144000"/>
@@ -3112,7 +3113,7 @@
             <a:avLst/>
           </a:prstGeom>
           <a:solidFill>
-            <a:srgbClr val="1F2D3D"/>
+            <a:srgbClr val="FFFFFF"/>
           </a:solidFill>
           <a:ln>
             <a:noFill/>
@@ -3149,14 +3150,14 @@
         </p:nvSpPr>
         <p:spPr>
           <a:xfrm>
-            <a:off x="0" y="4297680"/>
-            <a:ext cx="12191695" cy="109728"/>
+            <a:off x="0" y="0"/>
+            <a:ext cx="12191695" cy="1737360"/>
           </a:xfrm>
           <a:prstGeom prst="rect">
             <a:avLst/>
           </a:prstGeom>
           <a:solidFill>
-            <a:srgbClr val="3182BD"/>
+            <a:srgbClr val="002F5E"/>
           </a:solidFill>
           <a:ln>
             <a:noFill/>
@@ -3187,14 +3188,172 @@
       </p:sp>
       <p:sp>
         <p:nvSpPr>
-          <p:cNvPr id="4" name="TextBox 3"/>
+          <p:cNvPr id="4" name="Rectangle 3"/>
+          <p:cNvSpPr/>
+          <p:nvPr/>
+        </p:nvSpPr>
+        <p:spPr>
+          <a:xfrm>
+            <a:off x="0" y="1737360"/>
+            <a:ext cx="12191695" cy="82296"/>
+          </a:xfrm>
+          <a:prstGeom prst="rect">
+            <a:avLst/>
+          </a:prstGeom>
+          <a:solidFill>
+            <a:srgbClr val="00B1EB"/>
+          </a:solidFill>
+          <a:ln>
+            <a:noFill/>
+          </a:ln>
+          <a:effectLst/>
+        </p:spPr>
+        <p:style>
+          <a:lnRef idx="1">
+            <a:schemeClr val="accent1"/>
+          </a:lnRef>
+          <a:fillRef idx="3">
+            <a:schemeClr val="accent1"/>
+          </a:fillRef>
+          <a:effectRef idx="2">
+            <a:schemeClr val="accent1"/>
+          </a:effectRef>
+          <a:fontRef idx="minor">
+            <a:schemeClr val="lt1"/>
+          </a:fontRef>
+        </p:style>
+        <p:txBody>
+          <a:bodyPr rtlCol="0" anchor="ctr"/>
+          <a:lstStyle/>
+          <a:p>
+            <a:pPr algn="ctr"/>
+          </a:p>
+        </p:txBody>
+      </p:sp>
+      <p:sp>
+        <p:nvSpPr>
+          <p:cNvPr id="5" name="Rectangle 4"/>
+          <p:cNvSpPr/>
+          <p:nvPr/>
+        </p:nvSpPr>
+        <p:spPr>
+          <a:xfrm>
+            <a:off x="0" y="6693408"/>
+            <a:ext cx="12191695" cy="164592"/>
+          </a:xfrm>
+          <a:prstGeom prst="rect">
+            <a:avLst/>
+          </a:prstGeom>
+          <a:solidFill>
+            <a:srgbClr val="00B1EB"/>
+          </a:solidFill>
+          <a:ln>
+            <a:noFill/>
+          </a:ln>
+          <a:effectLst/>
+        </p:spPr>
+        <p:style>
+          <a:lnRef idx="1">
+            <a:schemeClr val="accent1"/>
+          </a:lnRef>
+          <a:fillRef idx="3">
+            <a:schemeClr val="accent1"/>
+          </a:fillRef>
+          <a:effectRef idx="2">
+            <a:schemeClr val="accent1"/>
+          </a:effectRef>
+          <a:fontRef idx="minor">
+            <a:schemeClr val="lt1"/>
+          </a:fontRef>
+        </p:style>
+        <p:txBody>
+          <a:bodyPr rtlCol="0" anchor="ctr"/>
+          <a:lstStyle/>
+          <a:p>
+            <a:pPr algn="ctr"/>
+          </a:p>
+        </p:txBody>
+      </p:sp>
+      <p:sp>
+        <p:nvSpPr>
+          <p:cNvPr id="6" name="TextBox 5"/>
           <p:cNvSpPr txBox="1"/>
           <p:nvPr/>
         </p:nvSpPr>
         <p:spPr>
           <a:xfrm>
-            <a:off x="731520" y="1828800"/>
-            <a:ext cx="10698480" cy="1097280"/>
+            <a:off x="731520" y="502920"/>
+            <a:ext cx="9601200" cy="731520"/>
+          </a:xfrm>
+          <a:prstGeom prst="rect">
+            <a:avLst/>
+          </a:prstGeom>
+          <a:noFill/>
+        </p:spPr>
+        <p:txBody>
+          <a:bodyPr wrap="square" anchor="ctr">
+            <a:spAutoFit/>
+          </a:bodyPr>
+          <a:lstStyle/>
+          <a:p>
+            <a:pPr algn="l"/>
+            <a:r>
+              <a:rPr sz="1500" b="0" i="0">
+                <a:solidFill>
+                  <a:srgbClr val="FFFFFF"/>
+                </a:solidFill>
+                <a:latin typeface="Calibri"/>
+              </a:rPr>
+              <a:t>Friedrich-Alexander-Universität Erlangen-Nürnberg  ·  KWARC</a:t>
+            </a:r>
+          </a:p>
+        </p:txBody>
+      </p:sp>
+      <p:sp>
+        <p:nvSpPr>
+          <p:cNvPr id="7" name="TextBox 6"/>
+          <p:cNvSpPr txBox="1"/>
+          <p:nvPr/>
+        </p:nvSpPr>
+        <p:spPr>
+          <a:xfrm>
+            <a:off x="10698480" y="457200"/>
+            <a:ext cx="1280160" cy="822960"/>
+          </a:xfrm>
+          <a:prstGeom prst="rect">
+            <a:avLst/>
+          </a:prstGeom>
+          <a:noFill/>
+        </p:spPr>
+        <p:txBody>
+          <a:bodyPr wrap="square" anchor="ctr">
+            <a:spAutoFit/>
+          </a:bodyPr>
+          <a:lstStyle/>
+          <a:p>
+            <a:pPr algn="r"/>
+            <a:r>
+              <a:rPr sz="3400" b="1" i="0">
+                <a:solidFill>
+                  <a:srgbClr val="FFFFFF"/>
+                </a:solidFill>
+                <a:latin typeface="Calibri"/>
+              </a:rPr>
+              <a:t>FAU</a:t>
+            </a:r>
+          </a:p>
+        </p:txBody>
+      </p:sp>
+      <p:sp>
+        <p:nvSpPr>
+          <p:cNvPr id="8" name="TextBox 7"/>
+          <p:cNvSpPr txBox="1"/>
+          <p:nvPr/>
+        </p:nvSpPr>
+        <p:spPr>
+          <a:xfrm>
+            <a:off x="731520" y="2286000"/>
+            <a:ext cx="10698480" cy="1005840"/>
           </a:xfrm>
           <a:prstGeom prst="rect">
             <a:avLst/>
@@ -3209,9 +3368,9 @@
           <a:p>
             <a:pPr algn="l"/>
             <a:r>
-              <a:rPr sz="6600" b="1" i="0">
-                <a:solidFill>
-                  <a:srgbClr val="FFFFFF"/>
+              <a:rPr sz="6000" b="1" i="0">
+                <a:solidFill>
+                  <a:srgbClr val="002F5E"/>
                 </a:solidFill>
                 <a:latin typeface="Calibri"/>
               </a:rPr>
@@ -3222,14 +3381,14 @@
       </p:sp>
       <p:sp>
         <p:nvSpPr>
-          <p:cNvPr id="5" name="TextBox 4"/>
+          <p:cNvPr id="9" name="TextBox 8"/>
           <p:cNvSpPr txBox="1"/>
           <p:nvPr/>
         </p:nvSpPr>
         <p:spPr>
           <a:xfrm>
-            <a:off x="777240" y="2971800"/>
-            <a:ext cx="10698480" cy="1188720"/>
+            <a:off x="777240" y="3383280"/>
+            <a:ext cx="10698480" cy="640080"/>
           </a:xfrm>
           <a:prstGeom prst="rect">
             <a:avLst/>
@@ -3244,39 +3403,27 @@
           <a:p>
             <a:pPr algn="l"/>
             <a:r>
-              <a:rPr sz="2600" b="0" i="0">
-                <a:solidFill>
-                  <a:srgbClr val="DEEBF7"/>
-                </a:solidFill>
-                <a:latin typeface="Calibri"/>
-              </a:rPr>
-              <a:t>Automated Test Assembly from a question bank</a:t>
-            </a:r>
-          </a:p>
-          <a:p>
-            <a:pPr algn="l"/>
-            <a:r>
-              <a:rPr sz="2600" b="0" i="0">
-                <a:solidFill>
-                  <a:srgbClr val="DEEBF7"/>
-                </a:solidFill>
-                <a:latin typeface="Calibri"/>
-              </a:rPr>
-              <a:t>Select blueprint-compliant exams — no generation, no LLM</a:t>
-            </a:r>
-          </a:p>
-        </p:txBody>
-      </p:sp>
-      <p:sp>
-        <p:nvSpPr>
-          <p:cNvPr id="6" name="TextBox 5"/>
+              <a:rPr sz="2700" b="0" i="0">
+                <a:solidFill>
+                  <a:srgbClr val="222222"/>
+                </a:solidFill>
+                <a:latin typeface="Calibri"/>
+              </a:rPr>
+              <a:t>Automated Test Assembly from a Question Bank</a:t>
+            </a:r>
+          </a:p>
+        </p:txBody>
+      </p:sp>
+      <p:sp>
+        <p:nvSpPr>
+          <p:cNvPr id="10" name="TextBox 9"/>
           <p:cNvSpPr txBox="1"/>
           <p:nvPr/>
         </p:nvSpPr>
         <p:spPr>
           <a:xfrm>
-            <a:off x="777240" y="4572000"/>
-            <a:ext cx="10698480" cy="1280160"/>
+            <a:off x="777240" y="4023360"/>
+            <a:ext cx="10698480" cy="548640"/>
           </a:xfrm>
           <a:prstGeom prst="rect">
             <a:avLst/>
@@ -3291,25 +3438,95 @@
           <a:p>
             <a:pPr algn="l"/>
             <a:r>
-              <a:rPr sz="1600" b="0" i="0">
-                <a:solidFill>
-                  <a:srgbClr val="FFFFFF"/>
-                </a:solidFill>
-                <a:latin typeface="Calibri"/>
-              </a:rPr>
-              <a:t>Question bank (JSON)   •   Blueprint (YAML + flags)   •   Greedy / MIP selection</a:t>
-            </a:r>
-          </a:p>
+              <a:rPr sz="1600" b="0" i="1">
+                <a:solidFill>
+                  <a:srgbClr val="636363"/>
+                </a:solidFill>
+                <a:latin typeface="Calibri"/>
+              </a:rPr>
+              <a:t>Selecting blueprint-compliant exams from a pool of tagged questions via optimisation</a:t>
+            </a:r>
+          </a:p>
+        </p:txBody>
+      </p:sp>
+      <p:sp>
+        <p:nvSpPr>
+          <p:cNvPr id="11" name="TextBox 10"/>
+          <p:cNvSpPr txBox="1"/>
+          <p:nvPr/>
+        </p:nvSpPr>
+        <p:spPr>
+          <a:xfrm>
+            <a:off x="777240" y="4937760"/>
+            <a:ext cx="10698480" cy="457200"/>
+          </a:xfrm>
+          <a:prstGeom prst="rect">
+            <a:avLst/>
+          </a:prstGeom>
+          <a:noFill/>
+        </p:spPr>
+        <p:txBody>
+          <a:bodyPr wrap="square" anchor="t">
+            <a:spAutoFit/>
+          </a:bodyPr>
+          <a:lstStyle/>
           <a:p>
             <a:pPr algn="l"/>
             <a:r>
-              <a:rPr sz="1600" b="0" i="0">
-                <a:solidFill>
-                  <a:srgbClr val="FFFFFF"/>
-                </a:solidFill>
-                <a:latin typeface="Calibri"/>
-              </a:rPr>
-              <a:t>Master's Thesis — KWARC Group, FAU Erlangen-Nürnberg</a:t>
+              <a:rPr sz="1800" b="1" i="0">
+                <a:solidFill>
+                  <a:srgbClr val="222222"/>
+                </a:solidFill>
+                <a:latin typeface="Calibri"/>
+              </a:rPr>
+              <a:t>Master's Thesis — Implementation Overview</a:t>
+            </a:r>
+          </a:p>
+        </p:txBody>
+      </p:sp>
+      <p:sp>
+        <p:nvSpPr>
+          <p:cNvPr id="12" name="TextBox 11"/>
+          <p:cNvSpPr txBox="1"/>
+          <p:nvPr/>
+        </p:nvSpPr>
+        <p:spPr>
+          <a:xfrm>
+            <a:off x="777240" y="5486400"/>
+            <a:ext cx="10698480" cy="822960"/>
+          </a:xfrm>
+          <a:prstGeom prst="rect">
+            <a:avLst/>
+          </a:prstGeom>
+          <a:noFill/>
+        </p:spPr>
+        <p:txBody>
+          <a:bodyPr wrap="square" anchor="t">
+            <a:spAutoFit/>
+          </a:bodyPr>
+          <a:lstStyle/>
+          <a:p>
+            <a:pPr algn="l"/>
+            <a:r>
+              <a:rPr sz="1400" b="0" i="0">
+                <a:solidFill>
+                  <a:srgbClr val="636363"/>
+                </a:solidFill>
+                <a:latin typeface="Calibri"/>
+              </a:rPr>
+              <a:t>Jiniku Hayashi    ·    Advisor: Prof. Michael Kohlhase</a:t>
+            </a:r>
+          </a:p>
+          <a:p>
+            <a:pPr algn="l"/>
+            <a:r>
+              <a:rPr sz="1400" b="0" i="0">
+                <a:solidFill>
+                  <a:srgbClr val="636363"/>
+                </a:solidFill>
+                <a:latin typeface="Calibri"/>
+              </a:rPr>
+              <a:t>KWARC Group · FAU Erlangen-Nürnberg</a:t>
             </a:r>
           </a:p>
         </p:txBody>
@@ -3341,13 +3558,13 @@
         <p:spPr>
           <a:xfrm>
             <a:off x="0" y="0"/>
-            <a:ext cx="12191695" cy="6858000"/>
+            <a:ext cx="12191695" cy="914400"/>
           </a:xfrm>
           <a:prstGeom prst="rect">
             <a:avLst/>
           </a:prstGeom>
           <a:solidFill>
-            <a:srgbClr val="1F2D3D"/>
+            <a:srgbClr val="002F5E"/>
           </a:solidFill>
           <a:ln>
             <a:noFill/>
@@ -3378,55 +3595,20 @@
       </p:sp>
       <p:sp>
         <p:nvSpPr>
-          <p:cNvPr id="3" name="TextBox 2"/>
-          <p:cNvSpPr txBox="1"/>
-          <p:nvPr/>
-        </p:nvSpPr>
-        <p:spPr>
-          <a:xfrm>
-            <a:off x="731520" y="640080"/>
-            <a:ext cx="10972800" cy="822960"/>
-          </a:xfrm>
-          <a:prstGeom prst="rect">
-            <a:avLst/>
-          </a:prstGeom>
-          <a:noFill/>
-        </p:spPr>
-        <p:txBody>
-          <a:bodyPr wrap="square" anchor="t">
-            <a:spAutoFit/>
-          </a:bodyPr>
-          <a:lstStyle/>
-          <a:p>
-            <a:pPr algn="l"/>
-            <a:r>
-              <a:rPr sz="4000" b="1" i="0">
-                <a:solidFill>
-                  <a:srgbClr val="FFFFFF"/>
-                </a:solidFill>
-                <a:latin typeface="Calibri"/>
-              </a:rPr>
-              <a:t>Takeaways</a:t>
-            </a:r>
-          </a:p>
-        </p:txBody>
-      </p:sp>
-      <p:sp>
-        <p:nvSpPr>
-          <p:cNvPr id="4" name="Rectangle 3"/>
+          <p:cNvPr id="3" name="Rectangle 2"/>
           <p:cNvSpPr/>
           <p:nvPr/>
         </p:nvSpPr>
         <p:spPr>
           <a:xfrm>
-            <a:off x="777240" y="1508760"/>
-            <a:ext cx="2926080" cy="73152"/>
+            <a:off x="0" y="914400"/>
+            <a:ext cx="12191695" cy="54864"/>
           </a:xfrm>
           <a:prstGeom prst="rect">
             <a:avLst/>
           </a:prstGeom>
           <a:solidFill>
-            <a:srgbClr val="3182BD"/>
+            <a:srgbClr val="00B1EB"/>
           </a:solidFill>
           <a:ln>
             <a:noFill/>
@@ -3457,14 +3639,1403 @@
       </p:sp>
       <p:sp>
         <p:nvSpPr>
+          <p:cNvPr id="4" name="TextBox 3"/>
+          <p:cNvSpPr txBox="1"/>
+          <p:nvPr/>
+        </p:nvSpPr>
+        <p:spPr>
+          <a:xfrm>
+            <a:off x="457200" y="109728"/>
+            <a:ext cx="10058400" cy="713232"/>
+          </a:xfrm>
+          <a:prstGeom prst="rect">
+            <a:avLst/>
+          </a:prstGeom>
+          <a:noFill/>
+        </p:spPr>
+        <p:txBody>
+          <a:bodyPr wrap="square" anchor="ctr">
+            <a:spAutoFit/>
+          </a:bodyPr>
+          <a:lstStyle/>
+          <a:p>
+            <a:pPr algn="l"/>
+            <a:r>
+              <a:rPr sz="2800" b="1" i="0">
+                <a:solidFill>
+                  <a:srgbClr val="FFFFFF"/>
+                </a:solidFill>
+                <a:latin typeface="Calibri"/>
+              </a:rPr>
+              <a:t>Where each technique comes from</a:t>
+            </a:r>
+          </a:p>
+        </p:txBody>
+      </p:sp>
+      <p:sp>
+        <p:nvSpPr>
           <p:cNvPr id="5" name="TextBox 4"/>
           <p:cNvSpPr txBox="1"/>
           <p:nvPr/>
         </p:nvSpPr>
         <p:spPr>
           <a:xfrm>
-            <a:off x="822960" y="1920240"/>
-            <a:ext cx="10607040" cy="4389120"/>
+            <a:off x="10881360" y="164592"/>
+            <a:ext cx="1188720" cy="640080"/>
+          </a:xfrm>
+          <a:prstGeom prst="rect">
+            <a:avLst/>
+          </a:prstGeom>
+          <a:noFill/>
+        </p:spPr>
+        <p:txBody>
+          <a:bodyPr wrap="square" anchor="ctr">
+            <a:spAutoFit/>
+          </a:bodyPr>
+          <a:lstStyle/>
+          <a:p>
+            <a:pPr algn="r"/>
+            <a:r>
+              <a:rPr sz="2600" b="1" i="0">
+                <a:solidFill>
+                  <a:srgbClr val="00B1EB"/>
+                </a:solidFill>
+                <a:latin typeface="Calibri"/>
+              </a:rPr>
+              <a:t>FAU</a:t>
+            </a:r>
+          </a:p>
+        </p:txBody>
+      </p:sp>
+      <p:sp>
+        <p:nvSpPr>
+          <p:cNvPr id="6" name="TextBox 5"/>
+          <p:cNvSpPr txBox="1"/>
+          <p:nvPr/>
+        </p:nvSpPr>
+        <p:spPr>
+          <a:xfrm>
+            <a:off x="475488" y="-18288"/>
+            <a:ext cx="9144000" cy="256032"/>
+          </a:xfrm>
+          <a:prstGeom prst="rect">
+            <a:avLst/>
+          </a:prstGeom>
+          <a:noFill/>
+        </p:spPr>
+        <p:txBody>
+          <a:bodyPr wrap="square" anchor="t">
+            <a:spAutoFit/>
+          </a:bodyPr>
+          <a:lstStyle/>
+          <a:p>
+            <a:pPr algn="l"/>
+            <a:r>
+              <a:rPr sz="1100" b="1" i="0">
+                <a:solidFill>
+                  <a:srgbClr val="00B1EB"/>
+                </a:solidFill>
+                <a:latin typeface="Calibri"/>
+              </a:rPr>
+              <a:t>TECHNIQUE → SOURCE LINEAGE</a:t>
+            </a:r>
+          </a:p>
+        </p:txBody>
+      </p:sp>
+      <p:sp>
+        <p:nvSpPr>
+          <p:cNvPr id="7" name="Rectangle 6"/>
+          <p:cNvSpPr/>
+          <p:nvPr/>
+        </p:nvSpPr>
+        <p:spPr>
+          <a:xfrm>
+            <a:off x="0" y="6565392"/>
+            <a:ext cx="12191695" cy="18288"/>
+          </a:xfrm>
+          <a:prstGeom prst="rect">
+            <a:avLst/>
+          </a:prstGeom>
+          <a:solidFill>
+            <a:srgbClr val="00B1EB"/>
+          </a:solidFill>
+          <a:ln>
+            <a:noFill/>
+          </a:ln>
+          <a:effectLst/>
+        </p:spPr>
+        <p:style>
+          <a:lnRef idx="1">
+            <a:schemeClr val="accent1"/>
+          </a:lnRef>
+          <a:fillRef idx="3">
+            <a:schemeClr val="accent1"/>
+          </a:fillRef>
+          <a:effectRef idx="2">
+            <a:schemeClr val="accent1"/>
+          </a:effectRef>
+          <a:fontRef idx="minor">
+            <a:schemeClr val="lt1"/>
+          </a:fontRef>
+        </p:style>
+        <p:txBody>
+          <a:bodyPr rtlCol="0" anchor="ctr"/>
+          <a:lstStyle/>
+          <a:p>
+            <a:pPr algn="ctr"/>
+          </a:p>
+        </p:txBody>
+      </p:sp>
+      <p:sp>
+        <p:nvSpPr>
+          <p:cNvPr id="8" name="TextBox 7"/>
+          <p:cNvSpPr txBox="1"/>
+          <p:nvPr/>
+        </p:nvSpPr>
+        <p:spPr>
+          <a:xfrm>
+            <a:off x="457200" y="6583680"/>
+            <a:ext cx="2743200" cy="256032"/>
+          </a:xfrm>
+          <a:prstGeom prst="rect">
+            <a:avLst/>
+          </a:prstGeom>
+          <a:noFill/>
+        </p:spPr>
+        <p:txBody>
+          <a:bodyPr wrap="square" anchor="t">
+            <a:spAutoFit/>
+          </a:bodyPr>
+          <a:lstStyle/>
+          <a:p>
+            <a:pPr algn="l"/>
+            <a:r>
+              <a:rPr sz="900" b="0" i="0">
+                <a:solidFill>
+                  <a:srgbClr val="002F5E"/>
+                </a:solidFill>
+                <a:latin typeface="Calibri"/>
+              </a:rPr>
+              <a:t>J. Hayashi</a:t>
+            </a:r>
+          </a:p>
+        </p:txBody>
+      </p:sp>
+      <p:sp>
+        <p:nvSpPr>
+          <p:cNvPr id="9" name="TextBox 8"/>
+          <p:cNvSpPr txBox="1"/>
+          <p:nvPr/>
+        </p:nvSpPr>
+        <p:spPr>
+          <a:xfrm>
+            <a:off x="3200400" y="6583680"/>
+            <a:ext cx="5760720" cy="256032"/>
+          </a:xfrm>
+          <a:prstGeom prst="rect">
+            <a:avLst/>
+          </a:prstGeom>
+          <a:noFill/>
+        </p:spPr>
+        <p:txBody>
+          <a:bodyPr wrap="square" anchor="t">
+            <a:spAutoFit/>
+          </a:bodyPr>
+          <a:lstStyle/>
+          <a:p>
+            <a:pPr algn="ctr"/>
+            <a:r>
+              <a:rPr sz="900" b="0" i="0">
+                <a:solidFill>
+                  <a:srgbClr val="636363"/>
+                </a:solidFill>
+                <a:latin typeface="Calibri"/>
+              </a:rPr>
+              <a:t>quizgen — Automated Test Assembly</a:t>
+            </a:r>
+          </a:p>
+        </p:txBody>
+      </p:sp>
+      <p:sp>
+        <p:nvSpPr>
+          <p:cNvPr id="10" name="TextBox 9"/>
+          <p:cNvSpPr txBox="1"/>
+          <p:nvPr/>
+        </p:nvSpPr>
+        <p:spPr>
+          <a:xfrm>
+            <a:off x="8778240" y="6583680"/>
+            <a:ext cx="2926080" cy="256032"/>
+          </a:xfrm>
+          <a:prstGeom prst="rect">
+            <a:avLst/>
+          </a:prstGeom>
+          <a:noFill/>
+        </p:spPr>
+        <p:txBody>
+          <a:bodyPr wrap="square" anchor="t">
+            <a:spAutoFit/>
+          </a:bodyPr>
+          <a:lstStyle/>
+          <a:p>
+            <a:pPr algn="r"/>
+            <a:r>
+              <a:rPr sz="900" b="0" i="0">
+                <a:solidFill>
+                  <a:srgbClr val="002F5E"/>
+                </a:solidFill>
+                <a:latin typeface="Calibri"/>
+              </a:rPr>
+              <a:t>FAU Erlangen-Nürnberg   9</a:t>
+            </a:r>
+          </a:p>
+        </p:txBody>
+      </p:sp>
+      <p:sp>
+        <p:nvSpPr>
+          <p:cNvPr id="11" name="Rounded Rectangle 10"/>
+          <p:cNvSpPr/>
+          <p:nvPr/>
+        </p:nvSpPr>
+        <p:spPr>
+          <a:xfrm>
+            <a:off x="640080" y="1280160"/>
+            <a:ext cx="5120640" cy="502920"/>
+          </a:xfrm>
+          <a:prstGeom prst="roundRect">
+            <a:avLst/>
+          </a:prstGeom>
+          <a:solidFill>
+            <a:srgbClr val="002F5E"/>
+          </a:solidFill>
+          <a:ln w="15875">
+            <a:solidFill>
+              <a:srgbClr val="002F5E"/>
+            </a:solidFill>
+          </a:ln>
+          <a:effectLst/>
+        </p:spPr>
+        <p:style>
+          <a:lnRef idx="1">
+            <a:schemeClr val="accent1"/>
+          </a:lnRef>
+          <a:fillRef idx="3">
+            <a:schemeClr val="accent1"/>
+          </a:fillRef>
+          <a:effectRef idx="2">
+            <a:schemeClr val="accent1"/>
+          </a:effectRef>
+          <a:fontRef idx="minor">
+            <a:schemeClr val="lt1"/>
+          </a:fontRef>
+        </p:style>
+        <p:txBody>
+          <a:bodyPr rtlCol="0" anchor="ctr" wrap="square" lIns="45720" rIns="45720" tIns="27432" bIns="27432"/>
+          <a:lstStyle/>
+          <a:p>
+            <a:pPr algn="ctr"/>
+            <a:r>
+              <a:rPr sz="1400" b="1" i="0">
+                <a:solidFill>
+                  <a:srgbClr val="FFFFFF"/>
+                </a:solidFill>
+                <a:latin typeface="Calibri"/>
+              </a:rPr>
+              <a:t>Implemented in code</a:t>
+            </a:r>
+          </a:p>
+        </p:txBody>
+      </p:sp>
+      <p:sp>
+        <p:nvSpPr>
+          <p:cNvPr id="12" name="Rounded Rectangle 11"/>
+          <p:cNvSpPr/>
+          <p:nvPr/>
+        </p:nvSpPr>
+        <p:spPr>
+          <a:xfrm>
+            <a:off x="5852160" y="1280160"/>
+            <a:ext cx="5760720" cy="502920"/>
+          </a:xfrm>
+          <a:prstGeom prst="roundRect">
+            <a:avLst/>
+          </a:prstGeom>
+          <a:solidFill>
+            <a:srgbClr val="002F5E"/>
+          </a:solidFill>
+          <a:ln w="15875">
+            <a:solidFill>
+              <a:srgbClr val="002F5E"/>
+            </a:solidFill>
+          </a:ln>
+          <a:effectLst/>
+        </p:spPr>
+        <p:style>
+          <a:lnRef idx="1">
+            <a:schemeClr val="accent1"/>
+          </a:lnRef>
+          <a:fillRef idx="3">
+            <a:schemeClr val="accent1"/>
+          </a:fillRef>
+          <a:effectRef idx="2">
+            <a:schemeClr val="accent1"/>
+          </a:effectRef>
+          <a:fontRef idx="minor">
+            <a:schemeClr val="lt1"/>
+          </a:fontRef>
+        </p:style>
+        <p:txBody>
+          <a:bodyPr rtlCol="0" anchor="ctr" wrap="square" lIns="45720" rIns="45720" tIns="27432" bIns="27432"/>
+          <a:lstStyle/>
+          <a:p>
+            <a:pPr algn="ctr"/>
+            <a:r>
+              <a:rPr sz="1400" b="1" i="0">
+                <a:solidFill>
+                  <a:srgbClr val="FFFFFF"/>
+                </a:solidFill>
+                <a:latin typeface="Calibri"/>
+              </a:rPr>
+              <a:t>Source lineage</a:t>
+            </a:r>
+          </a:p>
+        </p:txBody>
+      </p:sp>
+      <p:sp>
+        <p:nvSpPr>
+          <p:cNvPr id="13" name="Rectangle 12"/>
+          <p:cNvSpPr/>
+          <p:nvPr/>
+        </p:nvSpPr>
+        <p:spPr>
+          <a:xfrm>
+            <a:off x="640080" y="1783080"/>
+            <a:ext cx="5120640" cy="502920"/>
+          </a:xfrm>
+          <a:prstGeom prst="rect">
+            <a:avLst/>
+          </a:prstGeom>
+          <a:solidFill>
+            <a:srgbClr val="F0F0F2"/>
+          </a:solidFill>
+          <a:ln w="15875">
+            <a:solidFill>
+              <a:srgbClr val="636363"/>
+            </a:solidFill>
+          </a:ln>
+          <a:effectLst/>
+        </p:spPr>
+        <p:style>
+          <a:lnRef idx="1">
+            <a:schemeClr val="accent1"/>
+          </a:lnRef>
+          <a:fillRef idx="3">
+            <a:schemeClr val="accent1"/>
+          </a:fillRef>
+          <a:effectRef idx="2">
+            <a:schemeClr val="accent1"/>
+          </a:effectRef>
+          <a:fontRef idx="minor">
+            <a:schemeClr val="lt1"/>
+          </a:fontRef>
+        </p:style>
+        <p:txBody>
+          <a:bodyPr rtlCol="0" anchor="ctr" wrap="square" lIns="45720" rIns="45720" tIns="27432" bIns="27432"/>
+          <a:lstStyle/>
+          <a:p>
+            <a:pPr algn="ctr"/>
+            <a:r>
+              <a:rPr sz="1200" b="0" i="0">
+                <a:solidFill>
+                  <a:srgbClr val="222222"/>
+                </a:solidFill>
+                <a:latin typeface="Calibri"/>
+              </a:rPr>
+              <a:t>Test assembly as 0–1 MIP</a:t>
+            </a:r>
+          </a:p>
+        </p:txBody>
+      </p:sp>
+      <p:sp>
+        <p:nvSpPr>
+          <p:cNvPr id="14" name="Rectangle 13"/>
+          <p:cNvSpPr/>
+          <p:nvPr/>
+        </p:nvSpPr>
+        <p:spPr>
+          <a:xfrm>
+            <a:off x="5852160" y="1783080"/>
+            <a:ext cx="5760720" cy="502920"/>
+          </a:xfrm>
+          <a:prstGeom prst="rect">
+            <a:avLst/>
+          </a:prstGeom>
+          <a:solidFill>
+            <a:srgbClr val="F0F0F2"/>
+          </a:solidFill>
+          <a:ln w="15875">
+            <a:solidFill>
+              <a:srgbClr val="636363"/>
+            </a:solidFill>
+          </a:ln>
+          <a:effectLst/>
+        </p:spPr>
+        <p:style>
+          <a:lnRef idx="1">
+            <a:schemeClr val="accent1"/>
+          </a:lnRef>
+          <a:fillRef idx="3">
+            <a:schemeClr val="accent1"/>
+          </a:fillRef>
+          <a:effectRef idx="2">
+            <a:schemeClr val="accent1"/>
+          </a:effectRef>
+          <a:fontRef idx="minor">
+            <a:schemeClr val="lt1"/>
+          </a:fontRef>
+        </p:style>
+        <p:txBody>
+          <a:bodyPr rtlCol="0" anchor="ctr" wrap="square" lIns="45720" rIns="45720" tIns="27432" bIns="27432"/>
+          <a:lstStyle/>
+          <a:p>
+            <a:pPr algn="ctr"/>
+            <a:r>
+              <a:rPr sz="1200" b="0" i="0">
+                <a:solidFill>
+                  <a:srgbClr val="222222"/>
+                </a:solidFill>
+                <a:latin typeface="Calibri"/>
+              </a:rPr>
+              <a:t>van der Linden 2005 — optimal test design</a:t>
+            </a:r>
+          </a:p>
+        </p:txBody>
+      </p:sp>
+      <p:sp>
+        <p:nvSpPr>
+          <p:cNvPr id="15" name="Rectangle 14"/>
+          <p:cNvSpPr/>
+          <p:nvPr/>
+        </p:nvSpPr>
+        <p:spPr>
+          <a:xfrm>
+            <a:off x="640080" y="2286000"/>
+            <a:ext cx="5120640" cy="502920"/>
+          </a:xfrm>
+          <a:prstGeom prst="rect">
+            <a:avLst/>
+          </a:prstGeom>
+          <a:solidFill>
+            <a:srgbClr val="FFFFFF"/>
+          </a:solidFill>
+          <a:ln w="15875">
+            <a:solidFill>
+              <a:srgbClr val="636363"/>
+            </a:solidFill>
+          </a:ln>
+          <a:effectLst/>
+        </p:spPr>
+        <p:style>
+          <a:lnRef idx="1">
+            <a:schemeClr val="accent1"/>
+          </a:lnRef>
+          <a:fillRef idx="3">
+            <a:schemeClr val="accent1"/>
+          </a:fillRef>
+          <a:effectRef idx="2">
+            <a:schemeClr val="accent1"/>
+          </a:effectRef>
+          <a:fontRef idx="minor">
+            <a:schemeClr val="lt1"/>
+          </a:fontRef>
+        </p:style>
+        <p:txBody>
+          <a:bodyPr rtlCol="0" anchor="ctr" wrap="square" lIns="45720" rIns="45720" tIns="27432" bIns="27432"/>
+          <a:lstStyle/>
+          <a:p>
+            <a:pPr algn="ctr"/>
+            <a:r>
+              <a:rPr sz="1200" b="0" i="0">
+                <a:solidFill>
+                  <a:srgbClr val="222222"/>
+                </a:solidFill>
+                <a:latin typeface="Calibri"/>
+              </a:rPr>
+              <a:t>Quality-weighted selection</a:t>
+            </a:r>
+          </a:p>
+        </p:txBody>
+      </p:sp>
+      <p:sp>
+        <p:nvSpPr>
+          <p:cNvPr id="16" name="Rectangle 15"/>
+          <p:cNvSpPr/>
+          <p:nvPr/>
+        </p:nvSpPr>
+        <p:spPr>
+          <a:xfrm>
+            <a:off x="5852160" y="2286000"/>
+            <a:ext cx="5760720" cy="502920"/>
+          </a:xfrm>
+          <a:prstGeom prst="rect">
+            <a:avLst/>
+          </a:prstGeom>
+          <a:solidFill>
+            <a:srgbClr val="FFFFFF"/>
+          </a:solidFill>
+          <a:ln w="15875">
+            <a:solidFill>
+              <a:srgbClr val="636363"/>
+            </a:solidFill>
+          </a:ln>
+          <a:effectLst/>
+        </p:spPr>
+        <p:style>
+          <a:lnRef idx="1">
+            <a:schemeClr val="accent1"/>
+          </a:lnRef>
+          <a:fillRef idx="3">
+            <a:schemeClr val="accent1"/>
+          </a:fillRef>
+          <a:effectRef idx="2">
+            <a:schemeClr val="accent1"/>
+          </a:effectRef>
+          <a:fontRef idx="minor">
+            <a:schemeClr val="lt1"/>
+          </a:fontRef>
+        </p:style>
+        <p:txBody>
+          <a:bodyPr rtlCol="0" anchor="ctr" wrap="square" lIns="45720" rIns="45720" tIns="27432" bIns="27432"/>
+          <a:lstStyle/>
+          <a:p>
+            <a:pPr algn="ctr"/>
+            <a:r>
+              <a:rPr sz="1200" b="0" i="0">
+                <a:solidFill>
+                  <a:srgbClr val="222222"/>
+                </a:solidFill>
+                <a:latin typeface="Calibri"/>
+              </a:rPr>
+              <a:t>van der Linden 2005 (objective in ATA)</a:t>
+            </a:r>
+          </a:p>
+        </p:txBody>
+      </p:sp>
+      <p:sp>
+        <p:nvSpPr>
+          <p:cNvPr id="17" name="Rectangle 16"/>
+          <p:cNvSpPr/>
+          <p:nvPr/>
+        </p:nvSpPr>
+        <p:spPr>
+          <a:xfrm>
+            <a:off x="640080" y="2788920"/>
+            <a:ext cx="5120640" cy="502920"/>
+          </a:xfrm>
+          <a:prstGeom prst="rect">
+            <a:avLst/>
+          </a:prstGeom>
+          <a:solidFill>
+            <a:srgbClr val="F0F0F2"/>
+          </a:solidFill>
+          <a:ln w="15875">
+            <a:solidFill>
+              <a:srgbClr val="636363"/>
+            </a:solidFill>
+          </a:ln>
+          <a:effectLst/>
+        </p:spPr>
+        <p:style>
+          <a:lnRef idx="1">
+            <a:schemeClr val="accent1"/>
+          </a:lnRef>
+          <a:fillRef idx="3">
+            <a:schemeClr val="accent1"/>
+          </a:fillRef>
+          <a:effectRef idx="2">
+            <a:schemeClr val="accent1"/>
+          </a:effectRef>
+          <a:fontRef idx="minor">
+            <a:schemeClr val="lt1"/>
+          </a:fontRef>
+        </p:style>
+        <p:txBody>
+          <a:bodyPr rtlCol="0" anchor="ctr" wrap="square" lIns="45720" rIns="45720" tIns="27432" bIns="27432"/>
+          <a:lstStyle/>
+          <a:p>
+            <a:pPr algn="ctr"/>
+            <a:r>
+              <a:rPr sz="1200" b="0" i="0">
+                <a:solidFill>
+                  <a:srgbClr val="222222"/>
+                </a:solidFill>
+                <a:latin typeface="Calibri"/>
+              </a:rPr>
+              <a:t>Test blueprint / type &amp; difficulty mix</a:t>
+            </a:r>
+          </a:p>
+        </p:txBody>
+      </p:sp>
+      <p:sp>
+        <p:nvSpPr>
+          <p:cNvPr id="18" name="Rectangle 17"/>
+          <p:cNvSpPr/>
+          <p:nvPr/>
+        </p:nvSpPr>
+        <p:spPr>
+          <a:xfrm>
+            <a:off x="5852160" y="2788920"/>
+            <a:ext cx="5760720" cy="502920"/>
+          </a:xfrm>
+          <a:prstGeom prst="rect">
+            <a:avLst/>
+          </a:prstGeom>
+          <a:solidFill>
+            <a:srgbClr val="F0F0F2"/>
+          </a:solidFill>
+          <a:ln w="15875">
+            <a:solidFill>
+              <a:srgbClr val="636363"/>
+            </a:solidFill>
+          </a:ln>
+          <a:effectLst/>
+        </p:spPr>
+        <p:style>
+          <a:lnRef idx="1">
+            <a:schemeClr val="accent1"/>
+          </a:lnRef>
+          <a:fillRef idx="3">
+            <a:schemeClr val="accent1"/>
+          </a:fillRef>
+          <a:effectRef idx="2">
+            <a:schemeClr val="accent1"/>
+          </a:effectRef>
+          <a:fontRef idx="minor">
+            <a:schemeClr val="lt1"/>
+          </a:fontRef>
+        </p:style>
+        <p:txBody>
+          <a:bodyPr rtlCol="0" anchor="ctr" wrap="square" lIns="45720" rIns="45720" tIns="27432" bIns="27432"/>
+          <a:lstStyle/>
+          <a:p>
+            <a:pPr algn="ctr"/>
+            <a:r>
+              <a:rPr sz="1200" b="0" i="0">
+                <a:solidFill>
+                  <a:srgbClr val="222222"/>
+                </a:solidFill>
+                <a:latin typeface="Calibri"/>
+              </a:rPr>
+              <a:t>classical table-of-specifications design</a:t>
+            </a:r>
+          </a:p>
+        </p:txBody>
+      </p:sp>
+      <p:sp>
+        <p:nvSpPr>
+          <p:cNvPr id="19" name="Rectangle 18"/>
+          <p:cNvSpPr/>
+          <p:nvPr/>
+        </p:nvSpPr>
+        <p:spPr>
+          <a:xfrm>
+            <a:off x="640080" y="3291840"/>
+            <a:ext cx="5120640" cy="502920"/>
+          </a:xfrm>
+          <a:prstGeom prst="rect">
+            <a:avLst/>
+          </a:prstGeom>
+          <a:solidFill>
+            <a:srgbClr val="FFFFFF"/>
+          </a:solidFill>
+          <a:ln w="15875">
+            <a:solidFill>
+              <a:srgbClr val="636363"/>
+            </a:solidFill>
+          </a:ln>
+          <a:effectLst/>
+        </p:spPr>
+        <p:style>
+          <a:lnRef idx="1">
+            <a:schemeClr val="accent1"/>
+          </a:lnRef>
+          <a:fillRef idx="3">
+            <a:schemeClr val="accent1"/>
+          </a:fillRef>
+          <a:effectRef idx="2">
+            <a:schemeClr val="accent1"/>
+          </a:effectRef>
+          <a:fontRef idx="minor">
+            <a:schemeClr val="lt1"/>
+          </a:fontRef>
+        </p:style>
+        <p:txBody>
+          <a:bodyPr rtlCol="0" anchor="ctr" wrap="square" lIns="45720" rIns="45720" tIns="27432" bIns="27432"/>
+          <a:lstStyle/>
+          <a:p>
+            <a:pPr algn="ctr"/>
+            <a:r>
+              <a:rPr sz="1200" b="0" i="0">
+                <a:solidFill>
+                  <a:srgbClr val="222222"/>
+                </a:solidFill>
+                <a:latin typeface="Calibri"/>
+              </a:rPr>
+              <a:t>Bloom-level metadata</a:t>
+            </a:r>
+          </a:p>
+        </p:txBody>
+      </p:sp>
+      <p:sp>
+        <p:nvSpPr>
+          <p:cNvPr id="20" name="Rectangle 19"/>
+          <p:cNvSpPr/>
+          <p:nvPr/>
+        </p:nvSpPr>
+        <p:spPr>
+          <a:xfrm>
+            <a:off x="5852160" y="3291840"/>
+            <a:ext cx="5760720" cy="502920"/>
+          </a:xfrm>
+          <a:prstGeom prst="rect">
+            <a:avLst/>
+          </a:prstGeom>
+          <a:solidFill>
+            <a:srgbClr val="FFFFFF"/>
+          </a:solidFill>
+          <a:ln w="15875">
+            <a:solidFill>
+              <a:srgbClr val="636363"/>
+            </a:solidFill>
+          </a:ln>
+          <a:effectLst/>
+        </p:spPr>
+        <p:style>
+          <a:lnRef idx="1">
+            <a:schemeClr val="accent1"/>
+          </a:lnRef>
+          <a:fillRef idx="3">
+            <a:schemeClr val="accent1"/>
+          </a:fillRef>
+          <a:effectRef idx="2">
+            <a:schemeClr val="accent1"/>
+          </a:effectRef>
+          <a:fontRef idx="minor">
+            <a:schemeClr val="lt1"/>
+          </a:fontRef>
+        </p:style>
+        <p:txBody>
+          <a:bodyPr rtlCol="0" anchor="ctr" wrap="square" lIns="45720" rIns="45720" tIns="27432" bIns="27432"/>
+          <a:lstStyle/>
+          <a:p>
+            <a:pPr algn="ctr"/>
+            <a:r>
+              <a:rPr sz="1200" b="0" i="0">
+                <a:solidFill>
+                  <a:srgbClr val="222222"/>
+                </a:solidFill>
+                <a:latin typeface="Calibri"/>
+              </a:rPr>
+              <a:t>Anderson &amp; Krathwohl 2001 (revised Bloom)</a:t>
+            </a:r>
+          </a:p>
+        </p:txBody>
+      </p:sp>
+      <p:sp>
+        <p:nvSpPr>
+          <p:cNvPr id="21" name="Rectangle 20"/>
+          <p:cNvSpPr/>
+          <p:nvPr/>
+        </p:nvSpPr>
+        <p:spPr>
+          <a:xfrm>
+            <a:off x="640080" y="3794760"/>
+            <a:ext cx="5120640" cy="502920"/>
+          </a:xfrm>
+          <a:prstGeom prst="rect">
+            <a:avLst/>
+          </a:prstGeom>
+          <a:solidFill>
+            <a:srgbClr val="F0F0F2"/>
+          </a:solidFill>
+          <a:ln w="15875">
+            <a:solidFill>
+              <a:srgbClr val="636363"/>
+            </a:solidFill>
+          </a:ln>
+          <a:effectLst/>
+        </p:spPr>
+        <p:style>
+          <a:lnRef idx="1">
+            <a:schemeClr val="accent1"/>
+          </a:lnRef>
+          <a:fillRef idx="3">
+            <a:schemeClr val="accent1"/>
+          </a:fillRef>
+          <a:effectRef idx="2">
+            <a:schemeClr val="accent1"/>
+          </a:effectRef>
+          <a:fontRef idx="minor">
+            <a:schemeClr val="lt1"/>
+          </a:fontRef>
+        </p:style>
+        <p:txBody>
+          <a:bodyPr rtlCol="0" anchor="ctr" wrap="square" lIns="45720" rIns="45720" tIns="27432" bIns="27432"/>
+          <a:lstStyle/>
+          <a:p>
+            <a:pPr algn="ctr"/>
+            <a:r>
+              <a:rPr sz="1200" b="0" i="0">
+                <a:solidFill>
+                  <a:srgbClr val="222222"/>
+                </a:solidFill>
+                <a:latin typeface="Calibri"/>
+              </a:rPr>
+              <a:t>Semantic dedup (embeddings)</a:t>
+            </a:r>
+          </a:p>
+        </p:txBody>
+      </p:sp>
+      <p:sp>
+        <p:nvSpPr>
+          <p:cNvPr id="22" name="Rectangle 21"/>
+          <p:cNvSpPr/>
+          <p:nvPr/>
+        </p:nvSpPr>
+        <p:spPr>
+          <a:xfrm>
+            <a:off x="5852160" y="3794760"/>
+            <a:ext cx="5760720" cy="502920"/>
+          </a:xfrm>
+          <a:prstGeom prst="rect">
+            <a:avLst/>
+          </a:prstGeom>
+          <a:solidFill>
+            <a:srgbClr val="F0F0F2"/>
+          </a:solidFill>
+          <a:ln w="15875">
+            <a:solidFill>
+              <a:srgbClr val="636363"/>
+            </a:solidFill>
+          </a:ln>
+          <a:effectLst/>
+        </p:spPr>
+        <p:style>
+          <a:lnRef idx="1">
+            <a:schemeClr val="accent1"/>
+          </a:lnRef>
+          <a:fillRef idx="3">
+            <a:schemeClr val="accent1"/>
+          </a:fillRef>
+          <a:effectRef idx="2">
+            <a:schemeClr val="accent1"/>
+          </a:effectRef>
+          <a:fontRef idx="minor">
+            <a:schemeClr val="lt1"/>
+          </a:fontRef>
+        </p:style>
+        <p:txBody>
+          <a:bodyPr rtlCol="0" anchor="ctr" wrap="square" lIns="45720" rIns="45720" tIns="27432" bIns="27432"/>
+          <a:lstStyle/>
+          <a:p>
+            <a:pPr algn="ctr"/>
+            <a:r>
+              <a:rPr sz="1200" b="0" i="0">
+                <a:solidFill>
+                  <a:srgbClr val="222222"/>
+                </a:solidFill>
+                <a:latin typeface="Calibri"/>
+              </a:rPr>
+              <a:t>Sentence-BERT (Reimers &amp; Gurevych 2019)</a:t>
+            </a:r>
+          </a:p>
+        </p:txBody>
+      </p:sp>
+      <p:sp>
+        <p:nvSpPr>
+          <p:cNvPr id="23" name="Rectangle 22"/>
+          <p:cNvSpPr/>
+          <p:nvPr/>
+        </p:nvSpPr>
+        <p:spPr>
+          <a:xfrm>
+            <a:off x="640080" y="4297680"/>
+            <a:ext cx="5120640" cy="502920"/>
+          </a:xfrm>
+          <a:prstGeom prst="rect">
+            <a:avLst/>
+          </a:prstGeom>
+          <a:solidFill>
+            <a:srgbClr val="FFFFFF"/>
+          </a:solidFill>
+          <a:ln w="15875">
+            <a:solidFill>
+              <a:srgbClr val="636363"/>
+            </a:solidFill>
+          </a:ln>
+          <a:effectLst/>
+        </p:spPr>
+        <p:style>
+          <a:lnRef idx="1">
+            <a:schemeClr val="accent1"/>
+          </a:lnRef>
+          <a:fillRef idx="3">
+            <a:schemeClr val="accent1"/>
+          </a:fillRef>
+          <a:effectRef idx="2">
+            <a:schemeClr val="accent1"/>
+          </a:effectRef>
+          <a:fontRef idx="minor">
+            <a:schemeClr val="lt1"/>
+          </a:fontRef>
+        </p:style>
+        <p:txBody>
+          <a:bodyPr rtlCol="0" anchor="ctr" wrap="square" lIns="45720" rIns="45720" tIns="27432" bIns="27432"/>
+          <a:lstStyle/>
+          <a:p>
+            <a:pPr algn="ctr"/>
+            <a:r>
+              <a:rPr sz="1200" b="0" i="0">
+                <a:solidFill>
+                  <a:srgbClr val="222222"/>
+                </a:solidFill>
+                <a:latin typeface="Calibri"/>
+              </a:rPr>
+              <a:t>Largest-remainder counts</a:t>
+            </a:r>
+          </a:p>
+        </p:txBody>
+      </p:sp>
+      <p:sp>
+        <p:nvSpPr>
+          <p:cNvPr id="24" name="Rectangle 23"/>
+          <p:cNvSpPr/>
+          <p:nvPr/>
+        </p:nvSpPr>
+        <p:spPr>
+          <a:xfrm>
+            <a:off x="5852160" y="4297680"/>
+            <a:ext cx="5760720" cy="502920"/>
+          </a:xfrm>
+          <a:prstGeom prst="rect">
+            <a:avLst/>
+          </a:prstGeom>
+          <a:solidFill>
+            <a:srgbClr val="FFFFFF"/>
+          </a:solidFill>
+          <a:ln w="15875">
+            <a:solidFill>
+              <a:srgbClr val="636363"/>
+            </a:solidFill>
+          </a:ln>
+          <a:effectLst/>
+        </p:spPr>
+        <p:style>
+          <a:lnRef idx="1">
+            <a:schemeClr val="accent1"/>
+          </a:lnRef>
+          <a:fillRef idx="3">
+            <a:schemeClr val="accent1"/>
+          </a:fillRef>
+          <a:effectRef idx="2">
+            <a:schemeClr val="accent1"/>
+          </a:effectRef>
+          <a:fontRef idx="minor">
+            <a:schemeClr val="lt1"/>
+          </a:fontRef>
+        </p:style>
+        <p:txBody>
+          <a:bodyPr rtlCol="0" anchor="ctr" wrap="square" lIns="45720" rIns="45720" tIns="27432" bIns="27432"/>
+          <a:lstStyle/>
+          <a:p>
+            <a:pPr algn="ctr"/>
+            <a:r>
+              <a:rPr sz="1200" b="0" i="0">
+                <a:solidFill>
+                  <a:srgbClr val="222222"/>
+                </a:solidFill>
+                <a:latin typeface="Calibri"/>
+              </a:rPr>
+              <a:t>Hamilton apportionment (engineering)</a:t>
+            </a:r>
+          </a:p>
+        </p:txBody>
+      </p:sp>
+      <p:sp>
+        <p:nvSpPr>
+          <p:cNvPr id="25" name="Rectangle 24"/>
+          <p:cNvSpPr/>
+          <p:nvPr/>
+        </p:nvSpPr>
+        <p:spPr>
+          <a:xfrm>
+            <a:off x="640080" y="4800600"/>
+            <a:ext cx="5120640" cy="502920"/>
+          </a:xfrm>
+          <a:prstGeom prst="rect">
+            <a:avLst/>
+          </a:prstGeom>
+          <a:solidFill>
+            <a:srgbClr val="F0F0F2"/>
+          </a:solidFill>
+          <a:ln w="15875">
+            <a:solidFill>
+              <a:srgbClr val="636363"/>
+            </a:solidFill>
+          </a:ln>
+          <a:effectLst/>
+        </p:spPr>
+        <p:style>
+          <a:lnRef idx="1">
+            <a:schemeClr val="accent1"/>
+          </a:lnRef>
+          <a:fillRef idx="3">
+            <a:schemeClr val="accent1"/>
+          </a:fillRef>
+          <a:effectRef idx="2">
+            <a:schemeClr val="accent1"/>
+          </a:effectRef>
+          <a:fontRef idx="minor">
+            <a:schemeClr val="lt1"/>
+          </a:fontRef>
+        </p:style>
+        <p:txBody>
+          <a:bodyPr rtlCol="0" anchor="ctr" wrap="square" lIns="45720" rIns="45720" tIns="27432" bIns="27432"/>
+          <a:lstStyle/>
+          <a:p>
+            <a:pPr algn="ctr"/>
+            <a:r>
+              <a:rPr sz="1200" b="0" i="0">
+                <a:solidFill>
+                  <a:srgbClr val="222222"/>
+                </a:solidFill>
+                <a:latin typeface="Calibri"/>
+              </a:rPr>
+              <a:t>Greedy baseline, token Jaccard</a:t>
+            </a:r>
+          </a:p>
+        </p:txBody>
+      </p:sp>
+      <p:sp>
+        <p:nvSpPr>
+          <p:cNvPr id="26" name="Rectangle 25"/>
+          <p:cNvSpPr/>
+          <p:nvPr/>
+        </p:nvSpPr>
+        <p:spPr>
+          <a:xfrm>
+            <a:off x="5852160" y="4800600"/>
+            <a:ext cx="5760720" cy="502920"/>
+          </a:xfrm>
+          <a:prstGeom prst="rect">
+            <a:avLst/>
+          </a:prstGeom>
+          <a:solidFill>
+            <a:srgbClr val="F0F0F2"/>
+          </a:solidFill>
+          <a:ln w="15875">
+            <a:solidFill>
+              <a:srgbClr val="636363"/>
+            </a:solidFill>
+          </a:ln>
+          <a:effectLst/>
+        </p:spPr>
+        <p:style>
+          <a:lnRef idx="1">
+            <a:schemeClr val="accent1"/>
+          </a:lnRef>
+          <a:fillRef idx="3">
+            <a:schemeClr val="accent1"/>
+          </a:fillRef>
+          <a:effectRef idx="2">
+            <a:schemeClr val="accent1"/>
+          </a:effectRef>
+          <a:fontRef idx="minor">
+            <a:schemeClr val="lt1"/>
+          </a:fontRef>
+        </p:style>
+        <p:txBody>
+          <a:bodyPr rtlCol="0" anchor="ctr" wrap="square" lIns="45720" rIns="45720" tIns="27432" bIns="27432"/>
+          <a:lstStyle/>
+          <a:p>
+            <a:pPr algn="ctr"/>
+            <a:r>
+              <a:rPr sz="1200" b="0" i="0">
+                <a:solidFill>
+                  <a:srgbClr val="222222"/>
+                </a:solidFill>
+                <a:latin typeface="Calibri"/>
+              </a:rPr>
+              <a:t>project-specific engineering</a:t>
+            </a:r>
+          </a:p>
+        </p:txBody>
+      </p:sp>
+      <p:sp>
+        <p:nvSpPr>
+          <p:cNvPr id="27" name="TextBox 26"/>
+          <p:cNvSpPr txBox="1"/>
+          <p:nvPr/>
+        </p:nvSpPr>
+        <p:spPr>
+          <a:xfrm>
+            <a:off x="640080" y="6126480"/>
+            <a:ext cx="11338560" cy="365760"/>
+          </a:xfrm>
+          <a:prstGeom prst="rect">
+            <a:avLst/>
+          </a:prstGeom>
+          <a:noFill/>
+        </p:spPr>
+        <p:txBody>
+          <a:bodyPr wrap="square" anchor="t">
+            <a:spAutoFit/>
+          </a:bodyPr>
+          <a:lstStyle/>
+          <a:p>
+            <a:pPr algn="l"/>
+            <a:r>
+              <a:rPr sz="1100" b="0" i="1">
+                <a:solidFill>
+                  <a:srgbClr val="636363"/>
+                </a:solidFill>
+                <a:latin typeface="Calibri"/>
+              </a:rPr>
+              <a:t>See docs/references.bib for the full, verified bibliography.</a:t>
+            </a:r>
+          </a:p>
+        </p:txBody>
+      </p:sp>
+    </p:spTree>
+  </p:cSld>
+  <p:clrMapOvr>
+    <a:masterClrMapping/>
+  </p:clrMapOvr>
+</p:sld>
+</file>
+
+<file path=ppt/slides/slide11.xml><?xml version="1.0" encoding="utf-8"?>
+<p:sld xmlns:a="http://schemas.openxmlformats.org/drawingml/2006/main" xmlns:p="http://schemas.openxmlformats.org/presentationml/2006/main" xmlns:r="http://schemas.openxmlformats.org/officeDocument/2006/relationships">
+  <p:cSld>
+    <p:spTree>
+      <p:nvGrpSpPr>
+        <p:cNvPr id="1" name=""/>
+        <p:cNvGrpSpPr/>
+        <p:nvPr/>
+      </p:nvGrpSpPr>
+      <p:grpSpPr/>
+      <p:sp>
+        <p:nvSpPr>
+          <p:cNvPr id="2" name="Rectangle 1"/>
+          <p:cNvSpPr/>
+          <p:nvPr/>
+        </p:nvSpPr>
+        <p:spPr>
+          <a:xfrm>
+            <a:off x="0" y="0"/>
+            <a:ext cx="12191695" cy="6858000"/>
+          </a:xfrm>
+          <a:prstGeom prst="rect">
+            <a:avLst/>
+          </a:prstGeom>
+          <a:solidFill>
+            <a:srgbClr val="002F5E"/>
+          </a:solidFill>
+          <a:ln>
+            <a:noFill/>
+          </a:ln>
+          <a:effectLst/>
+        </p:spPr>
+        <p:style>
+          <a:lnRef idx="1">
+            <a:schemeClr val="accent1"/>
+          </a:lnRef>
+          <a:fillRef idx="3">
+            <a:schemeClr val="accent1"/>
+          </a:fillRef>
+          <a:effectRef idx="2">
+            <a:schemeClr val="accent1"/>
+          </a:effectRef>
+          <a:fontRef idx="minor">
+            <a:schemeClr val="lt1"/>
+          </a:fontRef>
+        </p:style>
+        <p:txBody>
+          <a:bodyPr rtlCol="0" anchor="ctr"/>
+          <a:lstStyle/>
+          <a:p>
+            <a:pPr algn="ctr"/>
+          </a:p>
+        </p:txBody>
+      </p:sp>
+      <p:sp>
+        <p:nvSpPr>
+          <p:cNvPr id="3" name="Rectangle 2"/>
+          <p:cNvSpPr/>
+          <p:nvPr/>
+        </p:nvSpPr>
+        <p:spPr>
+          <a:xfrm>
+            <a:off x="0" y="6693408"/>
+            <a:ext cx="12191695" cy="164592"/>
+          </a:xfrm>
+          <a:prstGeom prst="rect">
+            <a:avLst/>
+          </a:prstGeom>
+          <a:solidFill>
+            <a:srgbClr val="00B1EB"/>
+          </a:solidFill>
+          <a:ln>
+            <a:noFill/>
+          </a:ln>
+          <a:effectLst/>
+        </p:spPr>
+        <p:style>
+          <a:lnRef idx="1">
+            <a:schemeClr val="accent1"/>
+          </a:lnRef>
+          <a:fillRef idx="3">
+            <a:schemeClr val="accent1"/>
+          </a:fillRef>
+          <a:effectRef idx="2">
+            <a:schemeClr val="accent1"/>
+          </a:effectRef>
+          <a:fontRef idx="minor">
+            <a:schemeClr val="lt1"/>
+          </a:fontRef>
+        </p:style>
+        <p:txBody>
+          <a:bodyPr rtlCol="0" anchor="ctr"/>
+          <a:lstStyle/>
+          <a:p>
+            <a:pPr algn="ctr"/>
+          </a:p>
+        </p:txBody>
+      </p:sp>
+      <p:sp>
+        <p:nvSpPr>
+          <p:cNvPr id="4" name="TextBox 3"/>
+          <p:cNvSpPr txBox="1"/>
+          <p:nvPr/>
+        </p:nvSpPr>
+        <p:spPr>
+          <a:xfrm>
+            <a:off x="10698480" y="457200"/>
+            <a:ext cx="1280160" cy="822960"/>
+          </a:xfrm>
+          <a:prstGeom prst="rect">
+            <a:avLst/>
+          </a:prstGeom>
+          <a:noFill/>
+        </p:spPr>
+        <p:txBody>
+          <a:bodyPr wrap="square" anchor="t">
+            <a:spAutoFit/>
+          </a:bodyPr>
+          <a:lstStyle/>
+          <a:p>
+            <a:pPr algn="r"/>
+            <a:r>
+              <a:rPr sz="3000" b="1" i="0">
+                <a:solidFill>
+                  <a:srgbClr val="FFFFFF"/>
+                </a:solidFill>
+                <a:latin typeface="Calibri"/>
+              </a:rPr>
+              <a:t>FAU</a:t>
+            </a:r>
+          </a:p>
+        </p:txBody>
+      </p:sp>
+      <p:sp>
+        <p:nvSpPr>
+          <p:cNvPr id="5" name="TextBox 4"/>
+          <p:cNvSpPr txBox="1"/>
+          <p:nvPr/>
+        </p:nvSpPr>
+        <p:spPr>
+          <a:xfrm>
+            <a:off x="731520" y="640080"/>
+            <a:ext cx="10058400" cy="822960"/>
+          </a:xfrm>
+          <a:prstGeom prst="rect">
+            <a:avLst/>
+          </a:prstGeom>
+          <a:noFill/>
+        </p:spPr>
+        <p:txBody>
+          <a:bodyPr wrap="square" anchor="t">
+            <a:spAutoFit/>
+          </a:bodyPr>
+          <a:lstStyle/>
+          <a:p>
+            <a:pPr algn="l"/>
+            <a:r>
+              <a:rPr sz="4000" b="1" i="0">
+                <a:solidFill>
+                  <a:srgbClr val="FFFFFF"/>
+                </a:solidFill>
+                <a:latin typeface="Calibri"/>
+              </a:rPr>
+              <a:t>Takeaways</a:t>
+            </a:r>
+          </a:p>
+        </p:txBody>
+      </p:sp>
+      <p:sp>
+        <p:nvSpPr>
+          <p:cNvPr id="6" name="Rectangle 5"/>
+          <p:cNvSpPr/>
+          <p:nvPr/>
+        </p:nvSpPr>
+        <p:spPr>
+          <a:xfrm>
+            <a:off x="777240" y="1508760"/>
+            <a:ext cx="2926080" cy="73152"/>
+          </a:xfrm>
+          <a:prstGeom prst="rect">
+            <a:avLst/>
+          </a:prstGeom>
+          <a:solidFill>
+            <a:srgbClr val="00B1EB"/>
+          </a:solidFill>
+          <a:ln>
+            <a:noFill/>
+          </a:ln>
+          <a:effectLst/>
+        </p:spPr>
+        <p:style>
+          <a:lnRef idx="1">
+            <a:schemeClr val="accent1"/>
+          </a:lnRef>
+          <a:fillRef idx="3">
+            <a:schemeClr val="accent1"/>
+          </a:fillRef>
+          <a:effectRef idx="2">
+            <a:schemeClr val="accent1"/>
+          </a:effectRef>
+          <a:fontRef idx="minor">
+            <a:schemeClr val="lt1"/>
+          </a:fontRef>
+        </p:style>
+        <p:txBody>
+          <a:bodyPr rtlCol="0" anchor="ctr"/>
+          <a:lstStyle/>
+          <a:p>
+            <a:pPr algn="ctr"/>
+          </a:p>
+        </p:txBody>
+      </p:sp>
+      <p:sp>
+        <p:nvSpPr>
+          <p:cNvPr id="7" name="TextBox 6"/>
+          <p:cNvSpPr txBox="1"/>
+          <p:nvPr/>
+        </p:nvSpPr>
+        <p:spPr>
+          <a:xfrm>
+            <a:off x="822960" y="1874519"/>
+            <a:ext cx="10607040" cy="4480560"/>
           </a:xfrm>
           <a:prstGeom prst="rect">
             <a:avLst/>
@@ -3479,11 +5050,11 @@
           <a:p>
             <a:pPr>
               <a:spcAft>
-                <a:spcPts val="1600"/>
+                <a:spcPts val="1400"/>
               </a:spcAft>
             </a:pPr>
             <a:r>
-              <a:rPr sz="2200">
+              <a:rPr sz="2100">
                 <a:solidFill>
                   <a:srgbClr val="FFFFFF"/>
                 </a:solidFill>
@@ -3495,11 +5066,11 @@
           <a:p>
             <a:pPr>
               <a:spcAft>
-                <a:spcPts val="1600"/>
+                <a:spcPts val="1400"/>
               </a:spcAft>
             </a:pPr>
             <a:r>
-              <a:rPr sz="2200">
+              <a:rPr sz="2100">
                 <a:solidFill>
                   <a:srgbClr val="FFFFFF"/>
                 </a:solidFill>
@@ -3511,27 +5082,27 @@
           <a:p>
             <a:pPr>
               <a:spcAft>
-                <a:spcPts val="1600"/>
+                <a:spcPts val="1400"/>
               </a:spcAft>
             </a:pPr>
             <a:r>
-              <a:rPr sz="2200">
+              <a:rPr sz="2100">
                 <a:solidFill>
                   <a:srgbClr val="FFFFFF"/>
                 </a:solidFill>
                 <a:latin typeface="Calibri"/>
               </a:rPr>
-              <a:t>→  Constraints from YAML and/or CLI flags (flags override).</a:t>
+              <a:t>→  qtype_mix pins the format balance (else the exam goes all-MCQ).</a:t>
             </a:r>
           </a:p>
           <a:p>
             <a:pPr>
               <a:spcAft>
-                <a:spcPts val="1600"/>
+                <a:spcPts val="1400"/>
               </a:spcAft>
             </a:pPr>
             <a:r>
-              <a:rPr sz="2200">
+              <a:rPr sz="2100">
                 <a:solidFill>
                   <a:srgbClr val="FFFFFF"/>
                 </a:solidFill>
@@ -3543,11 +5114,11 @@
           <a:p>
             <a:pPr>
               <a:spcAft>
-                <a:spcPts val="1600"/>
+                <a:spcPts val="1400"/>
               </a:spcAft>
             </a:pPr>
             <a:r>
-              <a:rPr sz="2200">
+              <a:rPr sz="2100">
                 <a:solidFill>
                   <a:srgbClr val="FFFFFF"/>
                 </a:solidFill>
@@ -3559,11 +5130,11 @@
           <a:p>
             <a:pPr>
               <a:spcAft>
-                <a:spcPts val="1600"/>
+                <a:spcPts val="1400"/>
               </a:spcAft>
             </a:pPr>
             <a:r>
-              <a:rPr sz="2200">
+              <a:rPr sz="2100">
                 <a:solidFill>
                   <a:srgbClr val="FFFFFF"/>
                 </a:solidFill>
@@ -3601,13 +5172,13 @@
         <p:spPr>
           <a:xfrm>
             <a:off x="0" y="0"/>
-            <a:ext cx="12191695" cy="1051560"/>
+            <a:ext cx="12191695" cy="914400"/>
           </a:xfrm>
           <a:prstGeom prst="rect">
             <a:avLst/>
           </a:prstGeom>
           <a:solidFill>
-            <a:srgbClr val="1F2D3D"/>
+            <a:srgbClr val="002F5E"/>
           </a:solidFill>
           <a:ln>
             <a:noFill/>
@@ -3638,14 +5209,58 @@
       </p:sp>
       <p:sp>
         <p:nvSpPr>
-          <p:cNvPr id="3" name="TextBox 2"/>
+          <p:cNvPr id="3" name="Rectangle 2"/>
+          <p:cNvSpPr/>
+          <p:nvPr/>
+        </p:nvSpPr>
+        <p:spPr>
+          <a:xfrm>
+            <a:off x="0" y="914400"/>
+            <a:ext cx="12191695" cy="54864"/>
+          </a:xfrm>
+          <a:prstGeom prst="rect">
+            <a:avLst/>
+          </a:prstGeom>
+          <a:solidFill>
+            <a:srgbClr val="00B1EB"/>
+          </a:solidFill>
+          <a:ln>
+            <a:noFill/>
+          </a:ln>
+          <a:effectLst/>
+        </p:spPr>
+        <p:style>
+          <a:lnRef idx="1">
+            <a:schemeClr val="accent1"/>
+          </a:lnRef>
+          <a:fillRef idx="3">
+            <a:schemeClr val="accent1"/>
+          </a:fillRef>
+          <a:effectRef idx="2">
+            <a:schemeClr val="accent1"/>
+          </a:effectRef>
+          <a:fontRef idx="minor">
+            <a:schemeClr val="lt1"/>
+          </a:fontRef>
+        </p:style>
+        <p:txBody>
+          <a:bodyPr rtlCol="0" anchor="ctr"/>
+          <a:lstStyle/>
+          <a:p>
+            <a:pPr algn="ctr"/>
+          </a:p>
+        </p:txBody>
+      </p:sp>
+      <p:sp>
+        <p:nvSpPr>
+          <p:cNvPr id="4" name="TextBox 3"/>
           <p:cNvSpPr txBox="1"/>
           <p:nvPr/>
         </p:nvSpPr>
         <p:spPr>
           <a:xfrm>
-            <a:off x="502920" y="164592"/>
-            <a:ext cx="11155680" cy="731520"/>
+            <a:off x="457200" y="109728"/>
+            <a:ext cx="10058400" cy="713232"/>
           </a:xfrm>
           <a:prstGeom prst="rect">
             <a:avLst/>
@@ -3660,7 +5275,7 @@
           <a:p>
             <a:pPr algn="l"/>
             <a:r>
-              <a:rPr sz="3000" b="1" i="0">
+              <a:rPr sz="2800" b="1" i="0">
                 <a:solidFill>
                   <a:srgbClr val="FFFFFF"/>
                 </a:solidFill>
@@ -3673,14 +5288,49 @@
       </p:sp>
       <p:sp>
         <p:nvSpPr>
-          <p:cNvPr id="4" name="TextBox 3"/>
+          <p:cNvPr id="5" name="TextBox 4"/>
           <p:cNvSpPr txBox="1"/>
           <p:nvPr/>
         </p:nvSpPr>
         <p:spPr>
           <a:xfrm>
-            <a:off x="530352" y="18288"/>
-            <a:ext cx="10972800" cy="274320"/>
+            <a:off x="10881360" y="164592"/>
+            <a:ext cx="1188720" cy="640080"/>
+          </a:xfrm>
+          <a:prstGeom prst="rect">
+            <a:avLst/>
+          </a:prstGeom>
+          <a:noFill/>
+        </p:spPr>
+        <p:txBody>
+          <a:bodyPr wrap="square" anchor="ctr">
+            <a:spAutoFit/>
+          </a:bodyPr>
+          <a:lstStyle/>
+          <a:p>
+            <a:pPr algn="r"/>
+            <a:r>
+              <a:rPr sz="2600" b="1" i="0">
+                <a:solidFill>
+                  <a:srgbClr val="00B1EB"/>
+                </a:solidFill>
+                <a:latin typeface="Calibri"/>
+              </a:rPr>
+              <a:t>FAU</a:t>
+            </a:r>
+          </a:p>
+        </p:txBody>
+      </p:sp>
+      <p:sp>
+        <p:nvSpPr>
+          <p:cNvPr id="6" name="TextBox 5"/>
+          <p:cNvSpPr txBox="1"/>
+          <p:nvPr/>
+        </p:nvSpPr>
+        <p:spPr>
+          <a:xfrm>
+            <a:off x="475488" y="-18288"/>
+            <a:ext cx="9144000" cy="256032"/>
           </a:xfrm>
           <a:prstGeom prst="rect">
             <a:avLst/>
@@ -3695,9 +5345,9 @@
           <a:p>
             <a:pPr algn="l"/>
             <a:r>
-              <a:rPr sz="1200" b="1" i="0">
-                <a:solidFill>
-                  <a:srgbClr val="DEEBF7"/>
+              <a:rPr sz="1100" b="1" i="0">
+                <a:solidFill>
+                  <a:srgbClr val="00B1EB"/>
                 </a:solidFill>
                 <a:latin typeface="Calibri"/>
               </a:rPr>
@@ -3708,14 +5358,58 @@
       </p:sp>
       <p:sp>
         <p:nvSpPr>
-          <p:cNvPr id="5" name="TextBox 4"/>
+          <p:cNvPr id="7" name="Rectangle 6"/>
+          <p:cNvSpPr/>
+          <p:nvPr/>
+        </p:nvSpPr>
+        <p:spPr>
+          <a:xfrm>
+            <a:off x="0" y="6565392"/>
+            <a:ext cx="12191695" cy="18288"/>
+          </a:xfrm>
+          <a:prstGeom prst="rect">
+            <a:avLst/>
+          </a:prstGeom>
+          <a:solidFill>
+            <a:srgbClr val="00B1EB"/>
+          </a:solidFill>
+          <a:ln>
+            <a:noFill/>
+          </a:ln>
+          <a:effectLst/>
+        </p:spPr>
+        <p:style>
+          <a:lnRef idx="1">
+            <a:schemeClr val="accent1"/>
+          </a:lnRef>
+          <a:fillRef idx="3">
+            <a:schemeClr val="accent1"/>
+          </a:fillRef>
+          <a:effectRef idx="2">
+            <a:schemeClr val="accent1"/>
+          </a:effectRef>
+          <a:fontRef idx="minor">
+            <a:schemeClr val="lt1"/>
+          </a:fontRef>
+        </p:style>
+        <p:txBody>
+          <a:bodyPr rtlCol="0" anchor="ctr"/>
+          <a:lstStyle/>
+          <a:p>
+            <a:pPr algn="ctr"/>
+          </a:p>
+        </p:txBody>
+      </p:sp>
+      <p:sp>
+        <p:nvSpPr>
+          <p:cNvPr id="8" name="TextBox 7"/>
           <p:cNvSpPr txBox="1"/>
           <p:nvPr/>
         </p:nvSpPr>
         <p:spPr>
           <a:xfrm>
-            <a:off x="502920" y="1234440"/>
-            <a:ext cx="11155680" cy="731520"/>
+            <a:off x="457200" y="6583680"/>
+            <a:ext cx="2743200" cy="256032"/>
           </a:xfrm>
           <a:prstGeom prst="rect">
             <a:avLst/>
@@ -3730,6 +5424,111 @@
           <a:p>
             <a:pPr algn="l"/>
             <a:r>
+              <a:rPr sz="900" b="0" i="0">
+                <a:solidFill>
+                  <a:srgbClr val="002F5E"/>
+                </a:solidFill>
+                <a:latin typeface="Calibri"/>
+              </a:rPr>
+              <a:t>J. Hayashi</a:t>
+            </a:r>
+          </a:p>
+        </p:txBody>
+      </p:sp>
+      <p:sp>
+        <p:nvSpPr>
+          <p:cNvPr id="9" name="TextBox 8"/>
+          <p:cNvSpPr txBox="1"/>
+          <p:nvPr/>
+        </p:nvSpPr>
+        <p:spPr>
+          <a:xfrm>
+            <a:off x="3200400" y="6583680"/>
+            <a:ext cx="5760720" cy="256032"/>
+          </a:xfrm>
+          <a:prstGeom prst="rect">
+            <a:avLst/>
+          </a:prstGeom>
+          <a:noFill/>
+        </p:spPr>
+        <p:txBody>
+          <a:bodyPr wrap="square" anchor="t">
+            <a:spAutoFit/>
+          </a:bodyPr>
+          <a:lstStyle/>
+          <a:p>
+            <a:pPr algn="ctr"/>
+            <a:r>
+              <a:rPr sz="900" b="0" i="0">
+                <a:solidFill>
+                  <a:srgbClr val="636363"/>
+                </a:solidFill>
+                <a:latin typeface="Calibri"/>
+              </a:rPr>
+              <a:t>quizgen — Automated Test Assembly</a:t>
+            </a:r>
+          </a:p>
+        </p:txBody>
+      </p:sp>
+      <p:sp>
+        <p:nvSpPr>
+          <p:cNvPr id="10" name="TextBox 9"/>
+          <p:cNvSpPr txBox="1"/>
+          <p:nvPr/>
+        </p:nvSpPr>
+        <p:spPr>
+          <a:xfrm>
+            <a:off x="8778240" y="6583680"/>
+            <a:ext cx="2926080" cy="256032"/>
+          </a:xfrm>
+          <a:prstGeom prst="rect">
+            <a:avLst/>
+          </a:prstGeom>
+          <a:noFill/>
+        </p:spPr>
+        <p:txBody>
+          <a:bodyPr wrap="square" anchor="t">
+            <a:spAutoFit/>
+          </a:bodyPr>
+          <a:lstStyle/>
+          <a:p>
+            <a:pPr algn="r"/>
+            <a:r>
+              <a:rPr sz="900" b="0" i="0">
+                <a:solidFill>
+                  <a:srgbClr val="002F5E"/>
+                </a:solidFill>
+                <a:latin typeface="Calibri"/>
+              </a:rPr>
+              <a:t>FAU Erlangen-Nürnberg   1</a:t>
+            </a:r>
+          </a:p>
+        </p:txBody>
+      </p:sp>
+      <p:sp>
+        <p:nvSpPr>
+          <p:cNvPr id="11" name="TextBox 10"/>
+          <p:cNvSpPr txBox="1"/>
+          <p:nvPr/>
+        </p:nvSpPr>
+        <p:spPr>
+          <a:xfrm>
+            <a:off x="502920" y="1188720"/>
+            <a:ext cx="11155680" cy="731520"/>
+          </a:xfrm>
+          <a:prstGeom prst="rect">
+            <a:avLst/>
+          </a:prstGeom>
+          <a:noFill/>
+        </p:spPr>
+        <p:txBody>
+          <a:bodyPr wrap="square" anchor="t">
+            <a:spAutoFit/>
+          </a:bodyPr>
+          <a:lstStyle/>
+          <a:p>
+            <a:pPr algn="l"/>
+            <a:r>
               <a:rPr sz="1800" b="0" i="1">
                 <a:solidFill>
                   <a:srgbClr val="636363"/>
@@ -3743,13 +5542,13 @@
       </p:sp>
       <p:sp>
         <p:nvSpPr>
-          <p:cNvPr id="6" name="Rounded Rectangle 5"/>
+          <p:cNvPr id="12" name="Rounded Rectangle 11"/>
           <p:cNvSpPr/>
           <p:nvPr/>
         </p:nvSpPr>
         <p:spPr>
           <a:xfrm>
-            <a:off x="640080" y="2148840"/>
+            <a:off x="640080" y="2057400"/>
             <a:ext cx="4846320" cy="914400"/>
           </a:xfrm>
           <a:prstGeom prst="roundRect">
@@ -3787,7 +5586,7 @@
             <a:r>
               <a:rPr sz="1500" b="1" i="0">
                 <a:solidFill>
-                  <a:srgbClr val="333333"/>
+                  <a:srgbClr val="222222"/>
                 </a:solidFill>
                 <a:latin typeface="Calibri"/>
               </a:rPr>
@@ -3798,13 +5597,13 @@
       </p:sp>
       <p:sp>
         <p:nvSpPr>
-          <p:cNvPr id="7" name="Rounded Rectangle 6"/>
+          <p:cNvPr id="13" name="Rounded Rectangle 12"/>
           <p:cNvSpPr/>
           <p:nvPr/>
         </p:nvSpPr>
         <p:spPr>
           <a:xfrm>
-            <a:off x="6675120" y="2148840"/>
+            <a:off x="6675120" y="2057400"/>
             <a:ext cx="4846320" cy="914400"/>
           </a:xfrm>
           <a:prstGeom prst="roundRect">
@@ -3815,7 +5614,7 @@
           </a:solidFill>
           <a:ln w="15875">
             <a:solidFill>
-              <a:srgbClr val="3182BD"/>
+              <a:srgbClr val="002F5E"/>
             </a:solidFill>
           </a:ln>
           <a:effectLst/>
@@ -3842,7 +5641,7 @@
             <a:r>
               <a:rPr sz="1500" b="1" i="0">
                 <a:solidFill>
-                  <a:srgbClr val="333333"/>
+                  <a:srgbClr val="222222"/>
                 </a:solidFill>
                 <a:latin typeface="Calibri"/>
               </a:rPr>
@@ -3853,13 +5652,13 @@
       </p:sp>
       <p:cxnSp>
         <p:nvCxnSpPr>
-          <p:cNvPr id="8" name="Connector 7"/>
+          <p:cNvPr id="14" name="Connector 13"/>
           <p:cNvCxnSpPr/>
           <p:nvPr/>
         </p:nvCxnSpPr>
         <p:spPr>
           <a:xfrm>
-            <a:off x="5486400" y="2606040"/>
+            <a:off x="5486400" y="2514600"/>
             <a:ext cx="1188720" cy="0"/>
           </a:xfrm>
           <a:prstGeom prst="line">
@@ -3867,7 +5666,7 @@
           </a:prstGeom>
           <a:ln w="31750">
             <a:solidFill>
-              <a:srgbClr val="636363"/>
+              <a:srgbClr val="00B1EB"/>
             </a:solidFill>
             <a:tailEnd type="triangle" w="med" len="med"/>
           </a:ln>
@@ -3889,13 +5688,13 @@
       </p:cxnSp>
       <p:sp>
         <p:nvSpPr>
-          <p:cNvPr id="9" name="TextBox 8"/>
+          <p:cNvPr id="15" name="TextBox 14"/>
           <p:cNvSpPr txBox="1"/>
           <p:nvPr/>
         </p:nvSpPr>
         <p:spPr>
           <a:xfrm>
-            <a:off x="640080" y="3429000"/>
+            <a:off x="640080" y="3337560"/>
             <a:ext cx="10972800" cy="2834640"/>
           </a:xfrm>
           <a:prstGeom prst="rect">
@@ -3917,11 +5716,11 @@
             <a:r>
               <a:rPr sz="1800">
                 <a:solidFill>
-                  <a:srgbClr val="333333"/>
-                </a:solidFill>
-                <a:latin typeface="Calibri"/>
-              </a:rPr>
-              <a:t>• Hitting counts exactly (per chapter, per difficulty, N versions) is a combinatorial optimisation problem — not a prompting problem.</a:t>
+                  <a:srgbClr val="222222"/>
+                </a:solidFill>
+                <a:latin typeface="Calibri"/>
+              </a:rPr>
+              <a:t>• Hitting counts exactly (per chapter, per difficulty, per type, N versions) is a combinatorial optimisation problem — not a prompting problem.</a:t>
             </a:r>
           </a:p>
           <a:p>
@@ -3933,7 +5732,7 @@
             <a:r>
               <a:rPr sz="1800">
                 <a:solidFill>
-                  <a:srgbClr val="333333"/>
+                  <a:srgbClr val="222222"/>
                 </a:solidFill>
                 <a:latin typeface="Calibri"/>
               </a:rPr>
@@ -3949,7 +5748,7 @@
             <a:r>
               <a:rPr sz="1800">
                 <a:solidFill>
-                  <a:srgbClr val="333333"/>
+                  <a:srgbClr val="222222"/>
                 </a:solidFill>
                 <a:latin typeface="Calibri"/>
               </a:rPr>
@@ -3965,7 +5764,7 @@
             <a:r>
               <a:rPr sz="1800">
                 <a:solidFill>
-                  <a:srgbClr val="333333"/>
+                  <a:srgbClr val="222222"/>
                 </a:solidFill>
                 <a:latin typeface="Calibri"/>
               </a:rPr>
@@ -3981,7 +5780,7 @@
             <a:r>
               <a:rPr sz="1800">
                 <a:solidFill>
-                  <a:srgbClr val="333333"/>
+                  <a:srgbClr val="222222"/>
                 </a:solidFill>
                 <a:latin typeface="Calibri"/>
               </a:rPr>
@@ -4017,13 +5816,13 @@
         <p:spPr>
           <a:xfrm>
             <a:off x="0" y="0"/>
-            <a:ext cx="12191695" cy="1051560"/>
+            <a:ext cx="12191695" cy="914400"/>
           </a:xfrm>
           <a:prstGeom prst="rect">
             <a:avLst/>
           </a:prstGeom>
           <a:solidFill>
-            <a:srgbClr val="1F2D3D"/>
+            <a:srgbClr val="002F5E"/>
           </a:solidFill>
           <a:ln>
             <a:noFill/>
@@ -4054,14 +5853,58 @@
       </p:sp>
       <p:sp>
         <p:nvSpPr>
-          <p:cNvPr id="3" name="TextBox 2"/>
+          <p:cNvPr id="3" name="Rectangle 2"/>
+          <p:cNvSpPr/>
+          <p:nvPr/>
+        </p:nvSpPr>
+        <p:spPr>
+          <a:xfrm>
+            <a:off x="0" y="914400"/>
+            <a:ext cx="12191695" cy="54864"/>
+          </a:xfrm>
+          <a:prstGeom prst="rect">
+            <a:avLst/>
+          </a:prstGeom>
+          <a:solidFill>
+            <a:srgbClr val="00B1EB"/>
+          </a:solidFill>
+          <a:ln>
+            <a:noFill/>
+          </a:ln>
+          <a:effectLst/>
+        </p:spPr>
+        <p:style>
+          <a:lnRef idx="1">
+            <a:schemeClr val="accent1"/>
+          </a:lnRef>
+          <a:fillRef idx="3">
+            <a:schemeClr val="accent1"/>
+          </a:fillRef>
+          <a:effectRef idx="2">
+            <a:schemeClr val="accent1"/>
+          </a:effectRef>
+          <a:fontRef idx="minor">
+            <a:schemeClr val="lt1"/>
+          </a:fontRef>
+        </p:style>
+        <p:txBody>
+          <a:bodyPr rtlCol="0" anchor="ctr"/>
+          <a:lstStyle/>
+          <a:p>
+            <a:pPr algn="ctr"/>
+          </a:p>
+        </p:txBody>
+      </p:sp>
+      <p:sp>
+        <p:nvSpPr>
+          <p:cNvPr id="4" name="TextBox 3"/>
           <p:cNvSpPr txBox="1"/>
           <p:nvPr/>
         </p:nvSpPr>
         <p:spPr>
           <a:xfrm>
-            <a:off x="502920" y="164592"/>
-            <a:ext cx="11155680" cy="731520"/>
+            <a:off x="457200" y="109728"/>
+            <a:ext cx="10058400" cy="713232"/>
           </a:xfrm>
           <a:prstGeom prst="rect">
             <a:avLst/>
@@ -4076,7 +5919,7 @@
           <a:p>
             <a:pPr algn="l"/>
             <a:r>
-              <a:rPr sz="3000" b="1" i="0">
+              <a:rPr sz="2800" b="1" i="0">
                 <a:solidFill>
                   <a:srgbClr val="FFFFFF"/>
                 </a:solidFill>
@@ -4089,14 +5932,49 @@
       </p:sp>
       <p:sp>
         <p:nvSpPr>
-          <p:cNvPr id="4" name="TextBox 3"/>
+          <p:cNvPr id="5" name="TextBox 4"/>
           <p:cNvSpPr txBox="1"/>
           <p:nvPr/>
         </p:nvSpPr>
         <p:spPr>
           <a:xfrm>
-            <a:off x="530352" y="18288"/>
-            <a:ext cx="10972800" cy="274320"/>
+            <a:off x="10881360" y="164592"/>
+            <a:ext cx="1188720" cy="640080"/>
+          </a:xfrm>
+          <a:prstGeom prst="rect">
+            <a:avLst/>
+          </a:prstGeom>
+          <a:noFill/>
+        </p:spPr>
+        <p:txBody>
+          <a:bodyPr wrap="square" anchor="ctr">
+            <a:spAutoFit/>
+          </a:bodyPr>
+          <a:lstStyle/>
+          <a:p>
+            <a:pPr algn="r"/>
+            <a:r>
+              <a:rPr sz="2600" b="1" i="0">
+                <a:solidFill>
+                  <a:srgbClr val="00B1EB"/>
+                </a:solidFill>
+                <a:latin typeface="Calibri"/>
+              </a:rPr>
+              <a:t>FAU</a:t>
+            </a:r>
+          </a:p>
+        </p:txBody>
+      </p:sp>
+      <p:sp>
+        <p:nvSpPr>
+          <p:cNvPr id="6" name="TextBox 5"/>
+          <p:cNvSpPr txBox="1"/>
+          <p:nvPr/>
+        </p:nvSpPr>
+        <p:spPr>
+          <a:xfrm>
+            <a:off x="475488" y="-18288"/>
+            <a:ext cx="9144000" cy="256032"/>
           </a:xfrm>
           <a:prstGeom prst="rect">
             <a:avLst/>
@@ -4111,9 +5989,9 @@
           <a:p>
             <a:pPr algn="l"/>
             <a:r>
-              <a:rPr sz="1200" b="1" i="0">
-                <a:solidFill>
-                  <a:srgbClr val="DEEBF7"/>
+              <a:rPr sz="1100" b="1" i="0">
+                <a:solidFill>
+                  <a:srgbClr val="00B1EB"/>
                 </a:solidFill>
                 <a:latin typeface="Calibri"/>
               </a:rPr>
@@ -4124,13 +6002,162 @@
       </p:sp>
       <p:sp>
         <p:nvSpPr>
-          <p:cNvPr id="5" name="Rectangle 4"/>
+          <p:cNvPr id="7" name="Rectangle 6"/>
           <p:cNvSpPr/>
           <p:nvPr/>
         </p:nvSpPr>
         <p:spPr>
           <a:xfrm>
-            <a:off x="640080" y="2651760"/>
+            <a:off x="0" y="6565392"/>
+            <a:ext cx="12191695" cy="18288"/>
+          </a:xfrm>
+          <a:prstGeom prst="rect">
+            <a:avLst/>
+          </a:prstGeom>
+          <a:solidFill>
+            <a:srgbClr val="00B1EB"/>
+          </a:solidFill>
+          <a:ln>
+            <a:noFill/>
+          </a:ln>
+          <a:effectLst/>
+        </p:spPr>
+        <p:style>
+          <a:lnRef idx="1">
+            <a:schemeClr val="accent1"/>
+          </a:lnRef>
+          <a:fillRef idx="3">
+            <a:schemeClr val="accent1"/>
+          </a:fillRef>
+          <a:effectRef idx="2">
+            <a:schemeClr val="accent1"/>
+          </a:effectRef>
+          <a:fontRef idx="minor">
+            <a:schemeClr val="lt1"/>
+          </a:fontRef>
+        </p:style>
+        <p:txBody>
+          <a:bodyPr rtlCol="0" anchor="ctr"/>
+          <a:lstStyle/>
+          <a:p>
+            <a:pPr algn="ctr"/>
+          </a:p>
+        </p:txBody>
+      </p:sp>
+      <p:sp>
+        <p:nvSpPr>
+          <p:cNvPr id="8" name="TextBox 7"/>
+          <p:cNvSpPr txBox="1"/>
+          <p:nvPr/>
+        </p:nvSpPr>
+        <p:spPr>
+          <a:xfrm>
+            <a:off x="457200" y="6583680"/>
+            <a:ext cx="2743200" cy="256032"/>
+          </a:xfrm>
+          <a:prstGeom prst="rect">
+            <a:avLst/>
+          </a:prstGeom>
+          <a:noFill/>
+        </p:spPr>
+        <p:txBody>
+          <a:bodyPr wrap="square" anchor="t">
+            <a:spAutoFit/>
+          </a:bodyPr>
+          <a:lstStyle/>
+          <a:p>
+            <a:pPr algn="l"/>
+            <a:r>
+              <a:rPr sz="900" b="0" i="0">
+                <a:solidFill>
+                  <a:srgbClr val="002F5E"/>
+                </a:solidFill>
+                <a:latin typeface="Calibri"/>
+              </a:rPr>
+              <a:t>J. Hayashi</a:t>
+            </a:r>
+          </a:p>
+        </p:txBody>
+      </p:sp>
+      <p:sp>
+        <p:nvSpPr>
+          <p:cNvPr id="9" name="TextBox 8"/>
+          <p:cNvSpPr txBox="1"/>
+          <p:nvPr/>
+        </p:nvSpPr>
+        <p:spPr>
+          <a:xfrm>
+            <a:off x="3200400" y="6583680"/>
+            <a:ext cx="5760720" cy="256032"/>
+          </a:xfrm>
+          <a:prstGeom prst="rect">
+            <a:avLst/>
+          </a:prstGeom>
+          <a:noFill/>
+        </p:spPr>
+        <p:txBody>
+          <a:bodyPr wrap="square" anchor="t">
+            <a:spAutoFit/>
+          </a:bodyPr>
+          <a:lstStyle/>
+          <a:p>
+            <a:pPr algn="ctr"/>
+            <a:r>
+              <a:rPr sz="900" b="0" i="0">
+                <a:solidFill>
+                  <a:srgbClr val="636363"/>
+                </a:solidFill>
+                <a:latin typeface="Calibri"/>
+              </a:rPr>
+              <a:t>quizgen — Automated Test Assembly</a:t>
+            </a:r>
+          </a:p>
+        </p:txBody>
+      </p:sp>
+      <p:sp>
+        <p:nvSpPr>
+          <p:cNvPr id="10" name="TextBox 9"/>
+          <p:cNvSpPr txBox="1"/>
+          <p:nvPr/>
+        </p:nvSpPr>
+        <p:spPr>
+          <a:xfrm>
+            <a:off x="8778240" y="6583680"/>
+            <a:ext cx="2926080" cy="256032"/>
+          </a:xfrm>
+          <a:prstGeom prst="rect">
+            <a:avLst/>
+          </a:prstGeom>
+          <a:noFill/>
+        </p:spPr>
+        <p:txBody>
+          <a:bodyPr wrap="square" anchor="t">
+            <a:spAutoFit/>
+          </a:bodyPr>
+          <a:lstStyle/>
+          <a:p>
+            <a:pPr algn="r"/>
+            <a:r>
+              <a:rPr sz="900" b="0" i="0">
+                <a:solidFill>
+                  <a:srgbClr val="002F5E"/>
+                </a:solidFill>
+                <a:latin typeface="Calibri"/>
+              </a:rPr>
+              <a:t>FAU Erlangen-Nürnberg   2</a:t>
+            </a:r>
+          </a:p>
+        </p:txBody>
+      </p:sp>
+      <p:sp>
+        <p:nvSpPr>
+          <p:cNvPr id="11" name="Rectangle 10"/>
+          <p:cNvSpPr/>
+          <p:nvPr/>
+        </p:nvSpPr>
+        <p:spPr>
+          <a:xfrm>
+            <a:off x="640080" y="2743200"/>
             <a:ext cx="2011680" cy="1097280"/>
           </a:xfrm>
           <a:prstGeom prst="rect">
@@ -4168,7 +6195,7 @@
             <a:r>
               <a:rPr sz="1400" b="1" i="0">
                 <a:solidFill>
-                  <a:srgbClr val="333333"/>
+                  <a:srgbClr val="222222"/>
                 </a:solidFill>
                 <a:latin typeface="Calibri"/>
               </a:rPr>
@@ -4180,7 +6207,7 @@
             <a:r>
               <a:rPr sz="1400" b="1" i="0">
                 <a:solidFill>
-                  <a:srgbClr val="333333"/>
+                  <a:srgbClr val="222222"/>
                 </a:solidFill>
                 <a:latin typeface="Calibri"/>
               </a:rPr>
@@ -4191,13 +6218,13 @@
       </p:sp>
       <p:cxnSp>
         <p:nvCxnSpPr>
-          <p:cNvPr id="6" name="Connector 5"/>
+          <p:cNvPr id="12" name="Connector 11"/>
           <p:cNvCxnSpPr/>
           <p:nvPr/>
         </p:nvCxnSpPr>
         <p:spPr>
           <a:xfrm>
-            <a:off x="2651760" y="3200400"/>
+            <a:off x="2651760" y="3291840"/>
             <a:ext cx="548640" cy="0"/>
           </a:xfrm>
           <a:prstGeom prst="line">
@@ -4227,13 +6254,13 @@
       </p:cxnSp>
       <p:sp>
         <p:nvSpPr>
-          <p:cNvPr id="7" name="Rounded Rectangle 6"/>
+          <p:cNvPr id="13" name="Rounded Rectangle 12"/>
           <p:cNvSpPr/>
           <p:nvPr/>
         </p:nvSpPr>
         <p:spPr>
           <a:xfrm>
-            <a:off x="3200400" y="2651760"/>
+            <a:off x="3200400" y="2743200"/>
             <a:ext cx="2011680" cy="1097280"/>
           </a:xfrm>
           <a:prstGeom prst="roundRect">
@@ -4244,7 +6271,7 @@
           </a:solidFill>
           <a:ln w="15875">
             <a:solidFill>
-              <a:srgbClr val="3182BD"/>
+              <a:srgbClr val="002F5E"/>
             </a:solidFill>
           </a:ln>
           <a:effectLst/>
@@ -4271,7 +6298,7 @@
             <a:r>
               <a:rPr sz="1400" b="1" i="0">
                 <a:solidFill>
-                  <a:srgbClr val="333333"/>
+                  <a:srgbClr val="222222"/>
                 </a:solidFill>
                 <a:latin typeface="Calibri"/>
               </a:rPr>
@@ -4283,7 +6310,7 @@
             <a:r>
               <a:rPr sz="1400" b="1" i="0">
                 <a:solidFill>
-                  <a:srgbClr val="333333"/>
+                  <a:srgbClr val="222222"/>
                 </a:solidFill>
                 <a:latin typeface="Calibri"/>
               </a:rPr>
@@ -4294,13 +6321,13 @@
       </p:sp>
       <p:cxnSp>
         <p:nvCxnSpPr>
-          <p:cNvPr id="8" name="Connector 7"/>
+          <p:cNvPr id="14" name="Connector 13"/>
           <p:cNvCxnSpPr/>
           <p:nvPr/>
         </p:nvCxnSpPr>
         <p:spPr>
           <a:xfrm>
-            <a:off x="5212080" y="3200400"/>
+            <a:off x="5212080" y="3291840"/>
             <a:ext cx="731520" cy="0"/>
           </a:xfrm>
           <a:prstGeom prst="line">
@@ -4330,13 +6357,13 @@
       </p:cxnSp>
       <p:sp>
         <p:nvSpPr>
-          <p:cNvPr id="9" name="Rounded Rectangle 8"/>
+          <p:cNvPr id="15" name="Rounded Rectangle 14"/>
           <p:cNvSpPr/>
           <p:nvPr/>
         </p:nvSpPr>
         <p:spPr>
           <a:xfrm>
-            <a:off x="5943600" y="2651760"/>
+            <a:off x="5943600" y="2743200"/>
             <a:ext cx="2011680" cy="1097280"/>
           </a:xfrm>
           <a:prstGeom prst="roundRect">
@@ -4347,7 +6374,7 @@
           </a:solidFill>
           <a:ln w="15875">
             <a:solidFill>
-              <a:srgbClr val="3182BD"/>
+              <a:srgbClr val="002F5E"/>
             </a:solidFill>
           </a:ln>
           <a:effectLst/>
@@ -4374,7 +6401,7 @@
             <a:r>
               <a:rPr sz="1400" b="1" i="0">
                 <a:solidFill>
-                  <a:srgbClr val="333333"/>
+                  <a:srgbClr val="222222"/>
                 </a:solidFill>
                 <a:latin typeface="Calibri"/>
               </a:rPr>
@@ -4386,7 +6413,7 @@
             <a:r>
               <a:rPr sz="1400" b="1" i="0">
                 <a:solidFill>
-                  <a:srgbClr val="333333"/>
+                  <a:srgbClr val="222222"/>
                 </a:solidFill>
                 <a:latin typeface="Calibri"/>
               </a:rPr>
@@ -4397,13 +6424,13 @@
       </p:sp>
       <p:cxnSp>
         <p:nvCxnSpPr>
-          <p:cNvPr id="10" name="Connector 9"/>
+          <p:cNvPr id="16" name="Connector 15"/>
           <p:cNvCxnSpPr/>
           <p:nvPr/>
         </p:nvCxnSpPr>
         <p:spPr>
           <a:xfrm>
-            <a:off x="7955280" y="3200400"/>
+            <a:off x="7955280" y="3291840"/>
             <a:ext cx="731520" cy="0"/>
           </a:xfrm>
           <a:prstGeom prst="line">
@@ -4433,13 +6460,13 @@
       </p:cxnSp>
       <p:sp>
         <p:nvSpPr>
-          <p:cNvPr id="11" name="Rounded Rectangle 10"/>
+          <p:cNvPr id="17" name="Rounded Rectangle 16"/>
           <p:cNvSpPr/>
           <p:nvPr/>
         </p:nvSpPr>
         <p:spPr>
           <a:xfrm>
-            <a:off x="8686800" y="2651760"/>
+            <a:off x="8686800" y="2743200"/>
             <a:ext cx="2011680" cy="1097280"/>
           </a:xfrm>
           <a:prstGeom prst="roundRect">
@@ -4450,7 +6477,7 @@
           </a:solidFill>
           <a:ln w="15875">
             <a:solidFill>
-              <a:srgbClr val="3182BD"/>
+              <a:srgbClr val="002F5E"/>
             </a:solidFill>
           </a:ln>
           <a:effectLst/>
@@ -4477,7 +6504,7 @@
             <a:r>
               <a:rPr sz="1400" b="1" i="0">
                 <a:solidFill>
-                  <a:srgbClr val="333333"/>
+                  <a:srgbClr val="222222"/>
                 </a:solidFill>
                 <a:latin typeface="Calibri"/>
               </a:rPr>
@@ -4489,7 +6516,7 @@
             <a:r>
               <a:rPr sz="1400" b="1" i="0">
                 <a:solidFill>
-                  <a:srgbClr val="333333"/>
+                  <a:srgbClr val="222222"/>
                 </a:solidFill>
                 <a:latin typeface="Calibri"/>
               </a:rPr>
@@ -4500,13 +6527,13 @@
       </p:sp>
       <p:sp>
         <p:nvSpPr>
-          <p:cNvPr id="12" name="Rectangle 11"/>
+          <p:cNvPr id="18" name="Rectangle 17"/>
           <p:cNvSpPr/>
           <p:nvPr/>
         </p:nvSpPr>
         <p:spPr>
           <a:xfrm>
-            <a:off x="10881360" y="2651760"/>
+            <a:off x="10881360" y="2743200"/>
             <a:ext cx="1097280" cy="1097280"/>
           </a:xfrm>
           <a:prstGeom prst="rect">
@@ -4544,7 +6571,7 @@
             <a:r>
               <a:rPr sz="1100" b="1" i="0">
                 <a:solidFill>
-                  <a:srgbClr val="333333"/>
+                  <a:srgbClr val="222222"/>
                 </a:solidFill>
                 <a:latin typeface="Calibri"/>
               </a:rPr>
@@ -4556,7 +6583,7 @@
             <a:r>
               <a:rPr sz="1100" b="1" i="0">
                 <a:solidFill>
-                  <a:srgbClr val="333333"/>
+                  <a:srgbClr val="222222"/>
                 </a:solidFill>
                 <a:latin typeface="Calibri"/>
               </a:rPr>
@@ -4567,13 +6594,13 @@
       </p:sp>
       <p:cxnSp>
         <p:nvCxnSpPr>
-          <p:cNvPr id="13" name="Connector 12"/>
+          <p:cNvPr id="19" name="Connector 18"/>
           <p:cNvCxnSpPr/>
           <p:nvPr/>
         </p:nvCxnSpPr>
         <p:spPr>
           <a:xfrm>
-            <a:off x="10698480" y="3200400"/>
+            <a:off x="10698480" y="3291840"/>
             <a:ext cx="182880" cy="0"/>
           </a:xfrm>
           <a:prstGeom prst="line">
@@ -4603,13 +6630,13 @@
       </p:cxnSp>
       <p:sp>
         <p:nvSpPr>
-          <p:cNvPr id="14" name="Rectangle 13"/>
+          <p:cNvPr id="20" name="Rectangle 19"/>
           <p:cNvSpPr/>
           <p:nvPr/>
         </p:nvSpPr>
         <p:spPr>
           <a:xfrm>
-            <a:off x="5943600" y="1371600"/>
+            <a:off x="5943600" y="1463040"/>
             <a:ext cx="2011680" cy="640080"/>
           </a:xfrm>
           <a:prstGeom prst="rect">
@@ -4647,7 +6674,7 @@
             <a:r>
               <a:rPr sz="1200" b="1" i="0">
                 <a:solidFill>
-                  <a:srgbClr val="333333"/>
+                  <a:srgbClr val="222222"/>
                 </a:solidFill>
                 <a:latin typeface="Calibri"/>
               </a:rPr>
@@ -4659,7 +6686,7 @@
             <a:r>
               <a:rPr sz="1200" b="1" i="0">
                 <a:solidFill>
-                  <a:srgbClr val="333333"/>
+                  <a:srgbClr val="222222"/>
                 </a:solidFill>
                 <a:latin typeface="Calibri"/>
               </a:rPr>
@@ -4670,13 +6697,13 @@
       </p:sp>
       <p:cxnSp>
         <p:nvCxnSpPr>
-          <p:cNvPr id="15" name="Connector 14"/>
+          <p:cNvPr id="21" name="Connector 20"/>
           <p:cNvCxnSpPr/>
           <p:nvPr/>
         </p:nvCxnSpPr>
         <p:spPr>
           <a:xfrm>
-            <a:off x="6949440" y="2011680"/>
+            <a:off x="6949440" y="2103120"/>
             <a:ext cx="0" cy="640080"/>
           </a:xfrm>
           <a:prstGeom prst="line">
@@ -4706,13 +6733,13 @@
       </p:cxnSp>
       <p:sp>
         <p:nvSpPr>
-          <p:cNvPr id="16" name="Rounded Rectangle 15"/>
+          <p:cNvPr id="22" name="Rounded Rectangle 21"/>
           <p:cNvSpPr/>
           <p:nvPr/>
         </p:nvSpPr>
         <p:spPr>
           <a:xfrm>
-            <a:off x="640080" y="4572000"/>
+            <a:off x="640080" y="4663440"/>
             <a:ext cx="1828800" cy="384048"/>
           </a:xfrm>
           <a:prstGeom prst="roundRect">
@@ -4750,7 +6777,7 @@
             <a:r>
               <a:rPr sz="1100" b="1" i="0">
                 <a:solidFill>
-                  <a:srgbClr val="333333"/>
+                  <a:srgbClr val="222222"/>
                 </a:solidFill>
                 <a:latin typeface="Calibri"/>
               </a:rPr>
@@ -4761,13 +6788,13 @@
       </p:sp>
       <p:sp>
         <p:nvSpPr>
-          <p:cNvPr id="17" name="Rounded Rectangle 16"/>
+          <p:cNvPr id="23" name="Rounded Rectangle 22"/>
           <p:cNvSpPr/>
           <p:nvPr/>
         </p:nvSpPr>
         <p:spPr>
           <a:xfrm>
-            <a:off x="2651760" y="4572000"/>
+            <a:off x="2651760" y="4663440"/>
             <a:ext cx="2011680" cy="384048"/>
           </a:xfrm>
           <a:prstGeom prst="roundRect">
@@ -4778,7 +6805,7 @@
           </a:solidFill>
           <a:ln w="15875">
             <a:solidFill>
-              <a:srgbClr val="3182BD"/>
+              <a:srgbClr val="002F5E"/>
             </a:solidFill>
           </a:ln>
           <a:effectLst/>
@@ -4805,7 +6832,7 @@
             <a:r>
               <a:rPr sz="1100" b="1" i="0">
                 <a:solidFill>
-                  <a:srgbClr val="333333"/>
+                  <a:srgbClr val="222222"/>
                 </a:solidFill>
                 <a:latin typeface="Calibri"/>
               </a:rPr>
@@ -4816,13 +6843,13 @@
       </p:sp>
       <p:sp>
         <p:nvSpPr>
-          <p:cNvPr id="18" name="Rounded Rectangle 17"/>
+          <p:cNvPr id="24" name="Rounded Rectangle 23"/>
           <p:cNvSpPr/>
           <p:nvPr/>
         </p:nvSpPr>
         <p:spPr>
           <a:xfrm>
-            <a:off x="4846320" y="4572000"/>
+            <a:off x="4846320" y="4663440"/>
             <a:ext cx="2377440" cy="384048"/>
           </a:xfrm>
           <a:prstGeom prst="roundRect">
@@ -4860,7 +6887,7 @@
             <a:r>
               <a:rPr sz="1100" b="1" i="0">
                 <a:solidFill>
-                  <a:srgbClr val="333333"/>
+                  <a:srgbClr val="222222"/>
                 </a:solidFill>
                 <a:latin typeface="Calibri"/>
               </a:rPr>
@@ -4871,13 +6898,13 @@
       </p:sp>
       <p:sp>
         <p:nvSpPr>
-          <p:cNvPr id="19" name="TextBox 18"/>
+          <p:cNvPr id="25" name="TextBox 24"/>
           <p:cNvSpPr txBox="1"/>
           <p:nvPr/>
         </p:nvSpPr>
         <p:spPr>
           <a:xfrm>
-            <a:off x="640080" y="5212080"/>
+            <a:off x="640080" y="5303520"/>
             <a:ext cx="10972800" cy="1097280"/>
           </a:xfrm>
           <a:prstGeom prst="rect">
@@ -4931,13 +6958,13 @@
         <p:spPr>
           <a:xfrm>
             <a:off x="0" y="0"/>
-            <a:ext cx="12191695" cy="1051560"/>
+            <a:ext cx="12191695" cy="914400"/>
           </a:xfrm>
           <a:prstGeom prst="rect">
             <a:avLst/>
           </a:prstGeom>
           <a:solidFill>
-            <a:srgbClr val="1F2D3D"/>
+            <a:srgbClr val="002F5E"/>
           </a:solidFill>
           <a:ln>
             <a:noFill/>
@@ -4968,14 +6995,58 @@
       </p:sp>
       <p:sp>
         <p:nvSpPr>
-          <p:cNvPr id="3" name="TextBox 2"/>
+          <p:cNvPr id="3" name="Rectangle 2"/>
+          <p:cNvSpPr/>
+          <p:nvPr/>
+        </p:nvSpPr>
+        <p:spPr>
+          <a:xfrm>
+            <a:off x="0" y="914400"/>
+            <a:ext cx="12191695" cy="54864"/>
+          </a:xfrm>
+          <a:prstGeom prst="rect">
+            <a:avLst/>
+          </a:prstGeom>
+          <a:solidFill>
+            <a:srgbClr val="00B1EB"/>
+          </a:solidFill>
+          <a:ln>
+            <a:noFill/>
+          </a:ln>
+          <a:effectLst/>
+        </p:spPr>
+        <p:style>
+          <a:lnRef idx="1">
+            <a:schemeClr val="accent1"/>
+          </a:lnRef>
+          <a:fillRef idx="3">
+            <a:schemeClr val="accent1"/>
+          </a:fillRef>
+          <a:effectRef idx="2">
+            <a:schemeClr val="accent1"/>
+          </a:effectRef>
+          <a:fontRef idx="minor">
+            <a:schemeClr val="lt1"/>
+          </a:fontRef>
+        </p:style>
+        <p:txBody>
+          <a:bodyPr rtlCol="0" anchor="ctr"/>
+          <a:lstStyle/>
+          <a:p>
+            <a:pPr algn="ctr"/>
+          </a:p>
+        </p:txBody>
+      </p:sp>
+      <p:sp>
+        <p:nvSpPr>
+          <p:cNvPr id="4" name="TextBox 3"/>
           <p:cNvSpPr txBox="1"/>
           <p:nvPr/>
         </p:nvSpPr>
         <p:spPr>
           <a:xfrm>
-            <a:off x="502920" y="164592"/>
-            <a:ext cx="11155680" cy="731520"/>
+            <a:off x="457200" y="109728"/>
+            <a:ext cx="10058400" cy="713232"/>
           </a:xfrm>
           <a:prstGeom prst="rect">
             <a:avLst/>
@@ -4990,7 +7061,7 @@
           <a:p>
             <a:pPr algn="l"/>
             <a:r>
-              <a:rPr sz="3000" b="1" i="0">
+              <a:rPr sz="2800" b="1" i="0">
                 <a:solidFill>
                   <a:srgbClr val="FFFFFF"/>
                 </a:solidFill>
@@ -5003,14 +7074,49 @@
       </p:sp>
       <p:sp>
         <p:nvSpPr>
-          <p:cNvPr id="4" name="TextBox 3"/>
+          <p:cNvPr id="5" name="TextBox 4"/>
           <p:cNvSpPr txBox="1"/>
           <p:nvPr/>
         </p:nvSpPr>
         <p:spPr>
           <a:xfrm>
-            <a:off x="530352" y="18288"/>
-            <a:ext cx="10972800" cy="274320"/>
+            <a:off x="10881360" y="164592"/>
+            <a:ext cx="1188720" cy="640080"/>
+          </a:xfrm>
+          <a:prstGeom prst="rect">
+            <a:avLst/>
+          </a:prstGeom>
+          <a:noFill/>
+        </p:spPr>
+        <p:txBody>
+          <a:bodyPr wrap="square" anchor="ctr">
+            <a:spAutoFit/>
+          </a:bodyPr>
+          <a:lstStyle/>
+          <a:p>
+            <a:pPr algn="r"/>
+            <a:r>
+              <a:rPr sz="2600" b="1" i="0">
+                <a:solidFill>
+                  <a:srgbClr val="00B1EB"/>
+                </a:solidFill>
+                <a:latin typeface="Calibri"/>
+              </a:rPr>
+              <a:t>FAU</a:t>
+            </a:r>
+          </a:p>
+        </p:txBody>
+      </p:sp>
+      <p:sp>
+        <p:nvSpPr>
+          <p:cNvPr id="6" name="TextBox 5"/>
+          <p:cNvSpPr txBox="1"/>
+          <p:nvPr/>
+        </p:nvSpPr>
+        <p:spPr>
+          <a:xfrm>
+            <a:off x="475488" y="-18288"/>
+            <a:ext cx="9144000" cy="256032"/>
           </a:xfrm>
           <a:prstGeom prst="rect">
             <a:avLst/>
@@ -5025,9 +7131,9 @@
           <a:p>
             <a:pPr algn="l"/>
             <a:r>
-              <a:rPr sz="1200" b="1" i="0">
-                <a:solidFill>
-                  <a:srgbClr val="DEEBF7"/>
+              <a:rPr sz="1100" b="1" i="0">
+                <a:solidFill>
+                  <a:srgbClr val="00B1EB"/>
                 </a:solidFill>
                 <a:latin typeface="Calibri"/>
               </a:rPr>
@@ -5038,13 +7144,162 @@
       </p:sp>
       <p:sp>
         <p:nvSpPr>
-          <p:cNvPr id="5" name="TextBox 4"/>
+          <p:cNvPr id="7" name="Rectangle 6"/>
+          <p:cNvSpPr/>
+          <p:nvPr/>
+        </p:nvSpPr>
+        <p:spPr>
+          <a:xfrm>
+            <a:off x="0" y="6565392"/>
+            <a:ext cx="12191695" cy="18288"/>
+          </a:xfrm>
+          <a:prstGeom prst="rect">
+            <a:avLst/>
+          </a:prstGeom>
+          <a:solidFill>
+            <a:srgbClr val="00B1EB"/>
+          </a:solidFill>
+          <a:ln>
+            <a:noFill/>
+          </a:ln>
+          <a:effectLst/>
+        </p:spPr>
+        <p:style>
+          <a:lnRef idx="1">
+            <a:schemeClr val="accent1"/>
+          </a:lnRef>
+          <a:fillRef idx="3">
+            <a:schemeClr val="accent1"/>
+          </a:fillRef>
+          <a:effectRef idx="2">
+            <a:schemeClr val="accent1"/>
+          </a:effectRef>
+          <a:fontRef idx="minor">
+            <a:schemeClr val="lt1"/>
+          </a:fontRef>
+        </p:style>
+        <p:txBody>
+          <a:bodyPr rtlCol="0" anchor="ctr"/>
+          <a:lstStyle/>
+          <a:p>
+            <a:pPr algn="ctr"/>
+          </a:p>
+        </p:txBody>
+      </p:sp>
+      <p:sp>
+        <p:nvSpPr>
+          <p:cNvPr id="8" name="TextBox 7"/>
           <p:cNvSpPr txBox="1"/>
           <p:nvPr/>
         </p:nvSpPr>
         <p:spPr>
           <a:xfrm>
-            <a:off x="640080" y="1325880"/>
+            <a:off x="457200" y="6583680"/>
+            <a:ext cx="2743200" cy="256032"/>
+          </a:xfrm>
+          <a:prstGeom prst="rect">
+            <a:avLst/>
+          </a:prstGeom>
+          <a:noFill/>
+        </p:spPr>
+        <p:txBody>
+          <a:bodyPr wrap="square" anchor="t">
+            <a:spAutoFit/>
+          </a:bodyPr>
+          <a:lstStyle/>
+          <a:p>
+            <a:pPr algn="l"/>
+            <a:r>
+              <a:rPr sz="900" b="0" i="0">
+                <a:solidFill>
+                  <a:srgbClr val="002F5E"/>
+                </a:solidFill>
+                <a:latin typeface="Calibri"/>
+              </a:rPr>
+              <a:t>J. Hayashi</a:t>
+            </a:r>
+          </a:p>
+        </p:txBody>
+      </p:sp>
+      <p:sp>
+        <p:nvSpPr>
+          <p:cNvPr id="9" name="TextBox 8"/>
+          <p:cNvSpPr txBox="1"/>
+          <p:nvPr/>
+        </p:nvSpPr>
+        <p:spPr>
+          <a:xfrm>
+            <a:off x="3200400" y="6583680"/>
+            <a:ext cx="5760720" cy="256032"/>
+          </a:xfrm>
+          <a:prstGeom prst="rect">
+            <a:avLst/>
+          </a:prstGeom>
+          <a:noFill/>
+        </p:spPr>
+        <p:txBody>
+          <a:bodyPr wrap="square" anchor="t">
+            <a:spAutoFit/>
+          </a:bodyPr>
+          <a:lstStyle/>
+          <a:p>
+            <a:pPr algn="ctr"/>
+            <a:r>
+              <a:rPr sz="900" b="0" i="0">
+                <a:solidFill>
+                  <a:srgbClr val="636363"/>
+                </a:solidFill>
+                <a:latin typeface="Calibri"/>
+              </a:rPr>
+              <a:t>quizgen — Automated Test Assembly</a:t>
+            </a:r>
+          </a:p>
+        </p:txBody>
+      </p:sp>
+      <p:sp>
+        <p:nvSpPr>
+          <p:cNvPr id="10" name="TextBox 9"/>
+          <p:cNvSpPr txBox="1"/>
+          <p:nvPr/>
+        </p:nvSpPr>
+        <p:spPr>
+          <a:xfrm>
+            <a:off x="8778240" y="6583680"/>
+            <a:ext cx="2926080" cy="256032"/>
+          </a:xfrm>
+          <a:prstGeom prst="rect">
+            <a:avLst/>
+          </a:prstGeom>
+          <a:noFill/>
+        </p:spPr>
+        <p:txBody>
+          <a:bodyPr wrap="square" anchor="t">
+            <a:spAutoFit/>
+          </a:bodyPr>
+          <a:lstStyle/>
+          <a:p>
+            <a:pPr algn="r"/>
+            <a:r>
+              <a:rPr sz="900" b="0" i="0">
+                <a:solidFill>
+                  <a:srgbClr val="002F5E"/>
+                </a:solidFill>
+                <a:latin typeface="Calibri"/>
+              </a:rPr>
+              <a:t>FAU Erlangen-Nürnberg   3</a:t>
+            </a:r>
+          </a:p>
+        </p:txBody>
+      </p:sp>
+      <p:sp>
+        <p:nvSpPr>
+          <p:cNvPr id="11" name="TextBox 10"/>
+          <p:cNvSpPr txBox="1"/>
+          <p:nvPr/>
+        </p:nvSpPr>
+        <p:spPr>
+          <a:xfrm>
+            <a:off x="640080" y="1280160"/>
             <a:ext cx="5212080" cy="4572000"/>
           </a:xfrm>
           <a:prstGeom prst="rect">
@@ -5066,7 +7321,7 @@
             <a:r>
               <a:rPr sz="1700">
                 <a:solidFill>
-                  <a:srgbClr val="333333"/>
+                  <a:srgbClr val="222222"/>
                 </a:solidFill>
                 <a:latin typeface="Calibri"/>
               </a:rPr>
@@ -5082,7 +7337,7 @@
             <a:r>
               <a:rPr sz="1700">
                 <a:solidFill>
-                  <a:srgbClr val="333333"/>
+                  <a:srgbClr val="222222"/>
                 </a:solidFill>
                 <a:latin typeface="Calibri"/>
               </a:rPr>
@@ -5098,7 +7353,7 @@
             <a:r>
               <a:rPr sz="1700">
                 <a:solidFill>
-                  <a:srgbClr val="333333"/>
+                  <a:srgbClr val="222222"/>
                 </a:solidFill>
                 <a:latin typeface="Calibri"/>
               </a:rPr>
@@ -5150,7 +7405,7 @@
                 </a:solidFill>
                 <a:latin typeface="Calibri"/>
               </a:rPr>
-              <a:t>– qtype → allowed-type filter</a:t>
+              <a:t>– qtype → type filter &amp; type mix</a:t>
             </a:r>
           </a:p>
           <a:p>
@@ -5189,13 +7444,13 @@
       </p:sp>
       <p:sp>
         <p:nvSpPr>
-          <p:cNvPr id="6" name="Rectangle 5"/>
+          <p:cNvPr id="12" name="Rectangle 11"/>
           <p:cNvSpPr/>
           <p:nvPr/>
         </p:nvSpPr>
         <p:spPr>
           <a:xfrm>
-            <a:off x="6126480" y="1325880"/>
+            <a:off x="6126480" y="1280160"/>
             <a:ext cx="5486400" cy="4023360"/>
           </a:xfrm>
           <a:prstGeom prst="rect">
@@ -5233,7 +7488,7 @@
             <a:r>
               <a:rPr sz="1400" b="0" i="0">
                 <a:solidFill>
-                  <a:srgbClr val="333333"/>
+                  <a:srgbClr val="222222"/>
                 </a:solidFill>
                 <a:latin typeface="Consolas"/>
               </a:rPr>
@@ -5245,7 +7500,7 @@
             <a:r>
               <a:rPr sz="1400" b="0" i="0">
                 <a:solidFill>
-                  <a:srgbClr val="333333"/>
+                  <a:srgbClr val="222222"/>
                 </a:solidFill>
                 <a:latin typeface="Consolas"/>
               </a:rPr>
@@ -5257,7 +7512,7 @@
             <a:r>
               <a:rPr sz="1400" b="0" i="0">
                 <a:solidFill>
-                  <a:srgbClr val="333333"/>
+                  <a:srgbClr val="222222"/>
                 </a:solidFill>
                 <a:latin typeface="Consolas"/>
               </a:rPr>
@@ -5269,7 +7524,7 @@
             <a:r>
               <a:rPr sz="1400" b="0" i="0">
                 <a:solidFill>
-                  <a:srgbClr val="333333"/>
+                  <a:srgbClr val="222222"/>
                 </a:solidFill>
                 <a:latin typeface="Consolas"/>
               </a:rPr>
@@ -5281,7 +7536,7 @@
             <a:r>
               <a:rPr sz="1400" b="0" i="0">
                 <a:solidFill>
-                  <a:srgbClr val="333333"/>
+                  <a:srgbClr val="222222"/>
                 </a:solidFill>
                 <a:latin typeface="Consolas"/>
               </a:rPr>
@@ -5293,7 +7548,7 @@
             <a:r>
               <a:rPr sz="1400" b="0" i="0">
                 <a:solidFill>
-                  <a:srgbClr val="333333"/>
+                  <a:srgbClr val="222222"/>
                 </a:solidFill>
                 <a:latin typeface="Consolas"/>
               </a:rPr>
@@ -5305,7 +7560,7 @@
             <a:r>
               <a:rPr sz="1400" b="0" i="0">
                 <a:solidFill>
-                  <a:srgbClr val="333333"/>
+                  <a:srgbClr val="222222"/>
                 </a:solidFill>
                 <a:latin typeface="Consolas"/>
               </a:rPr>
@@ -5317,7 +7572,7 @@
             <a:r>
               <a:rPr sz="1400" b="0" i="0">
                 <a:solidFill>
-                  <a:srgbClr val="333333"/>
+                  <a:srgbClr val="222222"/>
                 </a:solidFill>
                 <a:latin typeface="Consolas"/>
               </a:rPr>
@@ -5329,7 +7584,7 @@
             <a:r>
               <a:rPr sz="1400" b="0" i="0">
                 <a:solidFill>
-                  <a:srgbClr val="333333"/>
+                  <a:srgbClr val="222222"/>
                 </a:solidFill>
                 <a:latin typeface="Consolas"/>
               </a:rPr>
@@ -5341,7 +7596,7 @@
             <a:r>
               <a:rPr sz="1400" b="0" i="0">
                 <a:solidFill>
-                  <a:srgbClr val="333333"/>
+                  <a:srgbClr val="222222"/>
                 </a:solidFill>
                 <a:latin typeface="Consolas"/>
               </a:rPr>
@@ -5353,7 +7608,7 @@
             <a:r>
               <a:rPr sz="1400" b="0" i="0">
                 <a:solidFill>
-                  <a:srgbClr val="333333"/>
+                  <a:srgbClr val="222222"/>
                 </a:solidFill>
                 <a:latin typeface="Consolas"/>
               </a:rPr>
@@ -5365,7 +7620,7 @@
             <a:r>
               <a:rPr sz="1400" b="0" i="0">
                 <a:solidFill>
-                  <a:srgbClr val="333333"/>
+                  <a:srgbClr val="222222"/>
                 </a:solidFill>
                 <a:latin typeface="Consolas"/>
               </a:rPr>
@@ -5377,7 +7632,7 @@
             <a:r>
               <a:rPr sz="1400" b="0" i="0">
                 <a:solidFill>
-                  <a:srgbClr val="333333"/>
+                  <a:srgbClr val="222222"/>
                 </a:solidFill>
                 <a:latin typeface="Consolas"/>
               </a:rPr>
@@ -5413,13 +7668,13 @@
         <p:spPr>
           <a:xfrm>
             <a:off x="0" y="0"/>
-            <a:ext cx="12191695" cy="1051560"/>
+            <a:ext cx="12191695" cy="914400"/>
           </a:xfrm>
           <a:prstGeom prst="rect">
             <a:avLst/>
           </a:prstGeom>
           <a:solidFill>
-            <a:srgbClr val="1F2D3D"/>
+            <a:srgbClr val="002F5E"/>
           </a:solidFill>
           <a:ln>
             <a:noFill/>
@@ -5450,14 +7705,58 @@
       </p:sp>
       <p:sp>
         <p:nvSpPr>
-          <p:cNvPr id="3" name="TextBox 2"/>
+          <p:cNvPr id="3" name="Rectangle 2"/>
+          <p:cNvSpPr/>
+          <p:nvPr/>
+        </p:nvSpPr>
+        <p:spPr>
+          <a:xfrm>
+            <a:off x="0" y="914400"/>
+            <a:ext cx="12191695" cy="54864"/>
+          </a:xfrm>
+          <a:prstGeom prst="rect">
+            <a:avLst/>
+          </a:prstGeom>
+          <a:solidFill>
+            <a:srgbClr val="00B1EB"/>
+          </a:solidFill>
+          <a:ln>
+            <a:noFill/>
+          </a:ln>
+          <a:effectLst/>
+        </p:spPr>
+        <p:style>
+          <a:lnRef idx="1">
+            <a:schemeClr val="accent1"/>
+          </a:lnRef>
+          <a:fillRef idx="3">
+            <a:schemeClr val="accent1"/>
+          </a:fillRef>
+          <a:effectRef idx="2">
+            <a:schemeClr val="accent1"/>
+          </a:effectRef>
+          <a:fontRef idx="minor">
+            <a:schemeClr val="lt1"/>
+          </a:fontRef>
+        </p:style>
+        <p:txBody>
+          <a:bodyPr rtlCol="0" anchor="ctr"/>
+          <a:lstStyle/>
+          <a:p>
+            <a:pPr algn="ctr"/>
+          </a:p>
+        </p:txBody>
+      </p:sp>
+      <p:sp>
+        <p:nvSpPr>
+          <p:cNvPr id="4" name="TextBox 3"/>
           <p:cNvSpPr txBox="1"/>
           <p:nvPr/>
         </p:nvSpPr>
         <p:spPr>
           <a:xfrm>
-            <a:off x="502920" y="164592"/>
-            <a:ext cx="11155680" cy="731520"/>
+            <a:off x="457200" y="109728"/>
+            <a:ext cx="10058400" cy="713232"/>
           </a:xfrm>
           <a:prstGeom prst="rect">
             <a:avLst/>
@@ -5472,7 +7771,7 @@
           <a:p>
             <a:pPr algn="l"/>
             <a:r>
-              <a:rPr sz="3000" b="1" i="0">
+              <a:rPr sz="2800" b="1" i="0">
                 <a:solidFill>
                   <a:srgbClr val="FFFFFF"/>
                 </a:solidFill>
@@ -5485,14 +7784,49 @@
       </p:sp>
       <p:sp>
         <p:nvSpPr>
-          <p:cNvPr id="4" name="TextBox 3"/>
+          <p:cNvPr id="5" name="TextBox 4"/>
           <p:cNvSpPr txBox="1"/>
           <p:nvPr/>
         </p:nvSpPr>
         <p:spPr>
           <a:xfrm>
-            <a:off x="530352" y="18288"/>
-            <a:ext cx="10972800" cy="274320"/>
+            <a:off x="10881360" y="164592"/>
+            <a:ext cx="1188720" cy="640080"/>
+          </a:xfrm>
+          <a:prstGeom prst="rect">
+            <a:avLst/>
+          </a:prstGeom>
+          <a:noFill/>
+        </p:spPr>
+        <p:txBody>
+          <a:bodyPr wrap="square" anchor="ctr">
+            <a:spAutoFit/>
+          </a:bodyPr>
+          <a:lstStyle/>
+          <a:p>
+            <a:pPr algn="r"/>
+            <a:r>
+              <a:rPr sz="2600" b="1" i="0">
+                <a:solidFill>
+                  <a:srgbClr val="00B1EB"/>
+                </a:solidFill>
+                <a:latin typeface="Calibri"/>
+              </a:rPr>
+              <a:t>FAU</a:t>
+            </a:r>
+          </a:p>
+        </p:txBody>
+      </p:sp>
+      <p:sp>
+        <p:nvSpPr>
+          <p:cNvPr id="6" name="TextBox 5"/>
+          <p:cNvSpPr txBox="1"/>
+          <p:nvPr/>
+        </p:nvSpPr>
+        <p:spPr>
+          <a:xfrm>
+            <a:off x="475488" y="-18288"/>
+            <a:ext cx="9144000" cy="256032"/>
           </a:xfrm>
           <a:prstGeom prst="rect">
             <a:avLst/>
@@ -5507,9 +7841,9 @@
           <a:p>
             <a:pPr algn="l"/>
             <a:r>
-              <a:rPr sz="1200" b="1" i="0">
-                <a:solidFill>
-                  <a:srgbClr val="DEEBF7"/>
+              <a:rPr sz="1100" b="1" i="0">
+                <a:solidFill>
+                  <a:srgbClr val="00B1EB"/>
                 </a:solidFill>
                 <a:latin typeface="Calibri"/>
               </a:rPr>
@@ -5520,14 +7854,163 @@
       </p:sp>
       <p:sp>
         <p:nvSpPr>
-          <p:cNvPr id="5" name="Rectangle 4"/>
+          <p:cNvPr id="7" name="Rectangle 6"/>
           <p:cNvSpPr/>
           <p:nvPr/>
         </p:nvSpPr>
         <p:spPr>
           <a:xfrm>
-            <a:off x="640080" y="1371600"/>
-            <a:ext cx="5394960" cy="2377440"/>
+            <a:off x="0" y="6565392"/>
+            <a:ext cx="12191695" cy="18288"/>
+          </a:xfrm>
+          <a:prstGeom prst="rect">
+            <a:avLst/>
+          </a:prstGeom>
+          <a:solidFill>
+            <a:srgbClr val="00B1EB"/>
+          </a:solidFill>
+          <a:ln>
+            <a:noFill/>
+          </a:ln>
+          <a:effectLst/>
+        </p:spPr>
+        <p:style>
+          <a:lnRef idx="1">
+            <a:schemeClr val="accent1"/>
+          </a:lnRef>
+          <a:fillRef idx="3">
+            <a:schemeClr val="accent1"/>
+          </a:fillRef>
+          <a:effectRef idx="2">
+            <a:schemeClr val="accent1"/>
+          </a:effectRef>
+          <a:fontRef idx="minor">
+            <a:schemeClr val="lt1"/>
+          </a:fontRef>
+        </p:style>
+        <p:txBody>
+          <a:bodyPr rtlCol="0" anchor="ctr"/>
+          <a:lstStyle/>
+          <a:p>
+            <a:pPr algn="ctr"/>
+          </a:p>
+        </p:txBody>
+      </p:sp>
+      <p:sp>
+        <p:nvSpPr>
+          <p:cNvPr id="8" name="TextBox 7"/>
+          <p:cNvSpPr txBox="1"/>
+          <p:nvPr/>
+        </p:nvSpPr>
+        <p:spPr>
+          <a:xfrm>
+            <a:off x="457200" y="6583680"/>
+            <a:ext cx="2743200" cy="256032"/>
+          </a:xfrm>
+          <a:prstGeom prst="rect">
+            <a:avLst/>
+          </a:prstGeom>
+          <a:noFill/>
+        </p:spPr>
+        <p:txBody>
+          <a:bodyPr wrap="square" anchor="t">
+            <a:spAutoFit/>
+          </a:bodyPr>
+          <a:lstStyle/>
+          <a:p>
+            <a:pPr algn="l"/>
+            <a:r>
+              <a:rPr sz="900" b="0" i="0">
+                <a:solidFill>
+                  <a:srgbClr val="002F5E"/>
+                </a:solidFill>
+                <a:latin typeface="Calibri"/>
+              </a:rPr>
+              <a:t>J. Hayashi</a:t>
+            </a:r>
+          </a:p>
+        </p:txBody>
+      </p:sp>
+      <p:sp>
+        <p:nvSpPr>
+          <p:cNvPr id="9" name="TextBox 8"/>
+          <p:cNvSpPr txBox="1"/>
+          <p:nvPr/>
+        </p:nvSpPr>
+        <p:spPr>
+          <a:xfrm>
+            <a:off x="3200400" y="6583680"/>
+            <a:ext cx="5760720" cy="256032"/>
+          </a:xfrm>
+          <a:prstGeom prst="rect">
+            <a:avLst/>
+          </a:prstGeom>
+          <a:noFill/>
+        </p:spPr>
+        <p:txBody>
+          <a:bodyPr wrap="square" anchor="t">
+            <a:spAutoFit/>
+          </a:bodyPr>
+          <a:lstStyle/>
+          <a:p>
+            <a:pPr algn="ctr"/>
+            <a:r>
+              <a:rPr sz="900" b="0" i="0">
+                <a:solidFill>
+                  <a:srgbClr val="636363"/>
+                </a:solidFill>
+                <a:latin typeface="Calibri"/>
+              </a:rPr>
+              <a:t>quizgen — Automated Test Assembly</a:t>
+            </a:r>
+          </a:p>
+        </p:txBody>
+      </p:sp>
+      <p:sp>
+        <p:nvSpPr>
+          <p:cNvPr id="10" name="TextBox 9"/>
+          <p:cNvSpPr txBox="1"/>
+          <p:nvPr/>
+        </p:nvSpPr>
+        <p:spPr>
+          <a:xfrm>
+            <a:off x="8778240" y="6583680"/>
+            <a:ext cx="2926080" cy="256032"/>
+          </a:xfrm>
+          <a:prstGeom prst="rect">
+            <a:avLst/>
+          </a:prstGeom>
+          <a:noFill/>
+        </p:spPr>
+        <p:txBody>
+          <a:bodyPr wrap="square" anchor="t">
+            <a:spAutoFit/>
+          </a:bodyPr>
+          <a:lstStyle/>
+          <a:p>
+            <a:pPr algn="r"/>
+            <a:r>
+              <a:rPr sz="900" b="0" i="0">
+                <a:solidFill>
+                  <a:srgbClr val="002F5E"/>
+                </a:solidFill>
+                <a:latin typeface="Calibri"/>
+              </a:rPr>
+              <a:t>FAU Erlangen-Nürnberg   4</a:t>
+            </a:r>
+          </a:p>
+        </p:txBody>
+      </p:sp>
+      <p:sp>
+        <p:nvSpPr>
+          <p:cNvPr id="11" name="Rectangle 10"/>
+          <p:cNvSpPr/>
+          <p:nvPr/>
+        </p:nvSpPr>
+        <p:spPr>
+          <a:xfrm>
+            <a:off x="640080" y="1280160"/>
+            <a:ext cx="5486400" cy="2468880"/>
           </a:xfrm>
           <a:prstGeom prst="rect">
             <a:avLst/>
@@ -5564,7 +8047,7 @@
             <a:r>
               <a:rPr sz="1400" b="0" i="0">
                 <a:solidFill>
-                  <a:srgbClr val="333333"/>
+                  <a:srgbClr val="222222"/>
                 </a:solidFill>
                 <a:latin typeface="Consolas"/>
               </a:rPr>
@@ -5576,7 +8059,7 @@
             <a:r>
               <a:rPr sz="1400" b="0" i="0">
                 <a:solidFill>
-                  <a:srgbClr val="333333"/>
+                  <a:srgbClr val="222222"/>
                 </a:solidFill>
                 <a:latin typeface="Consolas"/>
               </a:rPr>
@@ -5588,7 +8071,7 @@
             <a:r>
               <a:rPr sz="1400" b="0" i="0">
                 <a:solidFill>
-                  <a:srgbClr val="333333"/>
+                  <a:srgbClr val="222222"/>
                 </a:solidFill>
                 <a:latin typeface="Consolas"/>
               </a:rPr>
@@ -5600,11 +8083,11 @@
             <a:r>
               <a:rPr sz="1400" b="0" i="0">
                 <a:solidFill>
-                  <a:srgbClr val="333333"/>
+                  <a:srgbClr val="222222"/>
                 </a:solidFill>
                 <a:latin typeface="Consolas"/>
               </a:rPr>
-              <a:t>allowed_qtypes: [mcq, short_answer, ...]</a:t>
+              <a:t>qtype_mix: {mcq:.4, true_false:.2,</a:t>
             </a:r>
           </a:p>
           <a:p>
@@ -5612,10 +8095,22 @@
             <a:r>
               <a:rPr sz="1400" b="0" i="0">
                 <a:solidFill>
-                  <a:srgbClr val="333333"/>
+                  <a:srgbClr val="222222"/>
                 </a:solidFill>
                 <a:latin typeface="Consolas"/>
               </a:rPr>
+              <a:t>            short_answer:.2, cloze:.2}</a:t>
+            </a:r>
+          </a:p>
+          <a:p>
+            <a:pPr algn="ctr"/>
+            <a:r>
+              <a:rPr sz="1400" b="0" i="0">
+                <a:solidFill>
+                  <a:srgbClr val="222222"/>
+                </a:solidFill>
+                <a:latin typeface="Consolas"/>
+              </a:rPr>
               <a:t>versions: 2</a:t>
             </a:r>
           </a:p>
@@ -5624,7 +8119,7 @@
             <a:r>
               <a:rPr sz="1400" b="0" i="0">
                 <a:solidFill>
-                  <a:srgbClr val="333333"/>
+                  <a:srgbClr val="222222"/>
                 </a:solidFill>
                 <a:latin typeface="Consolas"/>
               </a:rPr>
@@ -5636,7 +8131,7 @@
             <a:r>
               <a:rPr sz="1400" b="0" i="0">
                 <a:solidFill>
-                  <a:srgbClr val="333333"/>
+                  <a:srgbClr val="222222"/>
                 </a:solidFill>
                 <a:latin typeface="Consolas"/>
               </a:rPr>
@@ -5647,14 +8142,14 @@
       </p:sp>
       <p:sp>
         <p:nvSpPr>
-          <p:cNvPr id="6" name="TextBox 5"/>
+          <p:cNvPr id="12" name="TextBox 11"/>
           <p:cNvSpPr txBox="1"/>
           <p:nvPr/>
         </p:nvSpPr>
         <p:spPr>
           <a:xfrm>
-            <a:off x="640080" y="4023360"/>
-            <a:ext cx="5394960" cy="2377440"/>
+            <a:off x="640080" y="3931920"/>
+            <a:ext cx="5486400" cy="2377440"/>
           </a:xfrm>
           <a:prstGeom prst="rect">
             <a:avLst/>
@@ -5675,7 +8170,7 @@
             <a:r>
               <a:rPr sz="1500">
                 <a:solidFill>
-                  <a:srgbClr val="333333"/>
+                  <a:srgbClr val="222222"/>
                 </a:solidFill>
                 <a:latin typeface="Calibri"/>
               </a:rPr>
@@ -5691,7 +8186,7 @@
             <a:r>
               <a:rPr sz="1500">
                 <a:solidFill>
-                  <a:srgbClr val="333333"/>
+                  <a:srgbClr val="222222"/>
                 </a:solidFill>
                 <a:latin typeface="Calibri"/>
               </a:rPr>
@@ -5702,14 +8197,14 @@
       </p:sp>
       <p:sp>
         <p:nvSpPr>
-          <p:cNvPr id="7" name="TextBox 6"/>
+          <p:cNvPr id="13" name="TextBox 12"/>
           <p:cNvSpPr txBox="1"/>
           <p:nvPr/>
         </p:nvSpPr>
         <p:spPr>
           <a:xfrm>
-            <a:off x="6400800" y="1325880"/>
-            <a:ext cx="5212080" cy="457200"/>
+            <a:off x="6400800" y="1280160"/>
+            <a:ext cx="5303520" cy="457200"/>
           </a:xfrm>
           <a:prstGeom prst="rect">
             <a:avLst/>
@@ -5726,25 +8221,25 @@
             <a:r>
               <a:rPr sz="1700" b="1" i="0">
                 <a:solidFill>
-                  <a:srgbClr val="3182BD"/>
-                </a:solidFill>
-                <a:latin typeface="Calibri"/>
-              </a:rPr>
-              <a:t>YAML and/or CLI flags — flags win</a:t>
-            </a:r>
-          </a:p>
-        </p:txBody>
-      </p:sp>
-      <p:sp>
-        <p:nvSpPr>
-          <p:cNvPr id="8" name="TextBox 7"/>
+                  <a:srgbClr val="002F5E"/>
+                </a:solidFill>
+                <a:latin typeface="Calibri"/>
+              </a:rPr>
+              <a:t>qtype_mix pins the format balance</a:t>
+            </a:r>
+          </a:p>
+        </p:txBody>
+      </p:sp>
+      <p:sp>
+        <p:nvSpPr>
+          <p:cNvPr id="14" name="TextBox 13"/>
           <p:cNvSpPr txBox="1"/>
           <p:nvPr/>
         </p:nvSpPr>
         <p:spPr>
           <a:xfrm>
-            <a:off x="6400800" y="1828800"/>
-            <a:ext cx="5212080" cy="1828800"/>
+            <a:off x="6400800" y="1783080"/>
+            <a:ext cx="5303520" cy="2011680"/>
           </a:xfrm>
           <a:prstGeom prst="rect">
             <a:avLst/>
@@ -5759,57 +8254,108 @@
           <a:p>
             <a:pPr>
               <a:spcAft>
-                <a:spcPts val="800"/>
+                <a:spcPts val="700"/>
               </a:spcAft>
             </a:pPr>
             <a:r>
-              <a:rPr sz="1500">
-                <a:solidFill>
-                  <a:srgbClr val="333333"/>
-                </a:solidFill>
-                <a:latin typeface="Calibri"/>
-              </a:rPr>
-              <a:t>• Keep a base blueprint.yaml, override per run.</a:t>
+              <a:rPr sz="1400">
+                <a:solidFill>
+                  <a:srgbClr val="222222"/>
+                </a:solidFill>
+                <a:latin typeface="Calibri"/>
+              </a:rPr>
+              <a:t>• Here → 8 mcq / 4 true_false / 4 short_answer / 4 cloze.</a:t>
             </a:r>
           </a:p>
           <a:p>
             <a:pPr>
               <a:spcAft>
-                <a:spcPts val="800"/>
+                <a:spcPts val="700"/>
               </a:spcAft>
             </a:pPr>
             <a:r>
-              <a:rPr sz="1500">
-                <a:solidFill>
-                  <a:srgbClr val="333333"/>
-                </a:solidFill>
-                <a:latin typeface="Calibri"/>
-              </a:rPr>
-              <a:t>• build_blueprint loads YAML → overwrites field-by-field with provided flags → validates.</a:t>
-            </a:r>
-          </a:p>
-        </p:txBody>
-      </p:sp>
-      <p:sp>
-        <p:nvSpPr>
-          <p:cNvPr id="9" name="Rectangle 8"/>
+              <a:rPr sz="1400">
+                <a:solidFill>
+                  <a:srgbClr val="222222"/>
+                </a:solidFill>
+                <a:latin typeface="Calibri"/>
+              </a:rPr>
+              <a:t>• Without it the exam tends to come out ALL multiple-choice (MCQs score highest under the quality objective).</a:t>
+            </a:r>
+          </a:p>
+          <a:p>
+            <a:pPr>
+              <a:spcAft>
+                <a:spcPts val="700"/>
+              </a:spcAft>
+            </a:pPr>
+            <a:r>
+              <a:rPr sz="1400">
+                <a:solidFill>
+                  <a:srgbClr val="222222"/>
+                </a:solidFill>
+                <a:latin typeface="Calibri"/>
+              </a:rPr>
+              <a:t>• Different from allowed_qtypes, which only filters which formats are permitted.</a:t>
+            </a:r>
+          </a:p>
+        </p:txBody>
+      </p:sp>
+      <p:sp>
+        <p:nvSpPr>
+          <p:cNvPr id="15" name="TextBox 14"/>
+          <p:cNvSpPr txBox="1"/>
+          <p:nvPr/>
+        </p:nvSpPr>
+        <p:spPr>
+          <a:xfrm>
+            <a:off x="6400800" y="3931920"/>
+            <a:ext cx="5303520" cy="411480"/>
+          </a:xfrm>
+          <a:prstGeom prst="rect">
+            <a:avLst/>
+          </a:prstGeom>
+          <a:noFill/>
+        </p:spPr>
+        <p:txBody>
+          <a:bodyPr wrap="square" anchor="t">
+            <a:spAutoFit/>
+          </a:bodyPr>
+          <a:lstStyle/>
+          <a:p>
+            <a:pPr algn="l"/>
+            <a:r>
+              <a:rPr sz="1600" b="1" i="0">
+                <a:solidFill>
+                  <a:srgbClr val="3182BD"/>
+                </a:solidFill>
+                <a:latin typeface="Calibri"/>
+              </a:rPr>
+              <a:t>YAML and/or CLI flags — flags win</a:t>
+            </a:r>
+          </a:p>
+        </p:txBody>
+      </p:sp>
+      <p:sp>
+        <p:nvSpPr>
+          <p:cNvPr id="16" name="Rectangle 15"/>
           <p:cNvSpPr/>
           <p:nvPr/>
         </p:nvSpPr>
         <p:spPr>
           <a:xfrm>
-            <a:off x="6400800" y="3657600"/>
-            <a:ext cx="5303520" cy="1463040"/>
+            <a:off x="6400800" y="4389120"/>
+            <a:ext cx="5303520" cy="1371600"/>
           </a:xfrm>
           <a:prstGeom prst="rect">
             <a:avLst/>
           </a:prstGeom>
           <a:solidFill>
-            <a:srgbClr val="1F2D3D"/>
+            <a:srgbClr val="002F5E"/>
           </a:solidFill>
           <a:ln w="15875">
             <a:solidFill>
-              <a:srgbClr val="1F2D3D"/>
+              <a:srgbClr val="002F5E"/>
             </a:solidFill>
           </a:ln>
           <a:effectLst/>
@@ -5896,13 +8442,13 @@
         <p:spPr>
           <a:xfrm>
             <a:off x="0" y="0"/>
-            <a:ext cx="12191695" cy="1051560"/>
+            <a:ext cx="12191695" cy="914400"/>
           </a:xfrm>
           <a:prstGeom prst="rect">
             <a:avLst/>
           </a:prstGeom>
           <a:solidFill>
-            <a:srgbClr val="1F2D3D"/>
+            <a:srgbClr val="002F5E"/>
           </a:solidFill>
           <a:ln>
             <a:noFill/>
@@ -5933,14 +8479,58 @@
       </p:sp>
       <p:sp>
         <p:nvSpPr>
-          <p:cNvPr id="3" name="TextBox 2"/>
+          <p:cNvPr id="3" name="Rectangle 2"/>
+          <p:cNvSpPr/>
+          <p:nvPr/>
+        </p:nvSpPr>
+        <p:spPr>
+          <a:xfrm>
+            <a:off x="0" y="914400"/>
+            <a:ext cx="12191695" cy="54864"/>
+          </a:xfrm>
+          <a:prstGeom prst="rect">
+            <a:avLst/>
+          </a:prstGeom>
+          <a:solidFill>
+            <a:srgbClr val="00B1EB"/>
+          </a:solidFill>
+          <a:ln>
+            <a:noFill/>
+          </a:ln>
+          <a:effectLst/>
+        </p:spPr>
+        <p:style>
+          <a:lnRef idx="1">
+            <a:schemeClr val="accent1"/>
+          </a:lnRef>
+          <a:fillRef idx="3">
+            <a:schemeClr val="accent1"/>
+          </a:fillRef>
+          <a:effectRef idx="2">
+            <a:schemeClr val="accent1"/>
+          </a:effectRef>
+          <a:fontRef idx="minor">
+            <a:schemeClr val="lt1"/>
+          </a:fontRef>
+        </p:style>
+        <p:txBody>
+          <a:bodyPr rtlCol="0" anchor="ctr"/>
+          <a:lstStyle/>
+          <a:p>
+            <a:pPr algn="ctr"/>
+          </a:p>
+        </p:txBody>
+      </p:sp>
+      <p:sp>
+        <p:nvSpPr>
+          <p:cNvPr id="4" name="TextBox 3"/>
           <p:cNvSpPr txBox="1"/>
           <p:nvPr/>
         </p:nvSpPr>
         <p:spPr>
           <a:xfrm>
-            <a:off x="502920" y="164592"/>
-            <a:ext cx="11155680" cy="731520"/>
+            <a:off x="457200" y="109728"/>
+            <a:ext cx="10058400" cy="713232"/>
           </a:xfrm>
           <a:prstGeom prst="rect">
             <a:avLst/>
@@ -5955,7 +8545,7 @@
           <a:p>
             <a:pPr algn="l"/>
             <a:r>
-              <a:rPr sz="3000" b="1" i="0">
+              <a:rPr sz="2800" b="1" i="0">
                 <a:solidFill>
                   <a:srgbClr val="FFFFFF"/>
                 </a:solidFill>
@@ -5968,14 +8558,49 @@
       </p:sp>
       <p:sp>
         <p:nvSpPr>
-          <p:cNvPr id="4" name="TextBox 3"/>
+          <p:cNvPr id="5" name="TextBox 4"/>
           <p:cNvSpPr txBox="1"/>
           <p:nvPr/>
         </p:nvSpPr>
         <p:spPr>
           <a:xfrm>
-            <a:off x="530352" y="18288"/>
-            <a:ext cx="10972800" cy="274320"/>
+            <a:off x="10881360" y="164592"/>
+            <a:ext cx="1188720" cy="640080"/>
+          </a:xfrm>
+          <a:prstGeom prst="rect">
+            <a:avLst/>
+          </a:prstGeom>
+          <a:noFill/>
+        </p:spPr>
+        <p:txBody>
+          <a:bodyPr wrap="square" anchor="ctr">
+            <a:spAutoFit/>
+          </a:bodyPr>
+          <a:lstStyle/>
+          <a:p>
+            <a:pPr algn="r"/>
+            <a:r>
+              <a:rPr sz="2600" b="1" i="0">
+                <a:solidFill>
+                  <a:srgbClr val="00B1EB"/>
+                </a:solidFill>
+                <a:latin typeface="Calibri"/>
+              </a:rPr>
+              <a:t>FAU</a:t>
+            </a:r>
+          </a:p>
+        </p:txBody>
+      </p:sp>
+      <p:sp>
+        <p:nvSpPr>
+          <p:cNvPr id="6" name="TextBox 5"/>
+          <p:cNvSpPr txBox="1"/>
+          <p:nvPr/>
+        </p:nvSpPr>
+        <p:spPr>
+          <a:xfrm>
+            <a:off x="475488" y="-18288"/>
+            <a:ext cx="9144000" cy="256032"/>
           </a:xfrm>
           <a:prstGeom prst="rect">
             <a:avLst/>
@@ -5990,9 +8615,9 @@
           <a:p>
             <a:pPr algn="l"/>
             <a:r>
-              <a:rPr sz="1200" b="1" i="0">
-                <a:solidFill>
-                  <a:srgbClr val="DEEBF7"/>
+              <a:rPr sz="1100" b="1" i="0">
+                <a:solidFill>
+                  <a:srgbClr val="00B1EB"/>
                 </a:solidFill>
                 <a:latin typeface="Calibri"/>
               </a:rPr>
@@ -6003,13 +8628,162 @@
       </p:sp>
       <p:sp>
         <p:nvSpPr>
-          <p:cNvPr id="5" name="Rounded Rectangle 4"/>
+          <p:cNvPr id="7" name="Rectangle 6"/>
           <p:cNvSpPr/>
           <p:nvPr/>
         </p:nvSpPr>
         <p:spPr>
           <a:xfrm>
-            <a:off x="640080" y="1325880"/>
+            <a:off x="0" y="6565392"/>
+            <a:ext cx="12191695" cy="18288"/>
+          </a:xfrm>
+          <a:prstGeom prst="rect">
+            <a:avLst/>
+          </a:prstGeom>
+          <a:solidFill>
+            <a:srgbClr val="00B1EB"/>
+          </a:solidFill>
+          <a:ln>
+            <a:noFill/>
+          </a:ln>
+          <a:effectLst/>
+        </p:spPr>
+        <p:style>
+          <a:lnRef idx="1">
+            <a:schemeClr val="accent1"/>
+          </a:lnRef>
+          <a:fillRef idx="3">
+            <a:schemeClr val="accent1"/>
+          </a:fillRef>
+          <a:effectRef idx="2">
+            <a:schemeClr val="accent1"/>
+          </a:effectRef>
+          <a:fontRef idx="minor">
+            <a:schemeClr val="lt1"/>
+          </a:fontRef>
+        </p:style>
+        <p:txBody>
+          <a:bodyPr rtlCol="0" anchor="ctr"/>
+          <a:lstStyle/>
+          <a:p>
+            <a:pPr algn="ctr"/>
+          </a:p>
+        </p:txBody>
+      </p:sp>
+      <p:sp>
+        <p:nvSpPr>
+          <p:cNvPr id="8" name="TextBox 7"/>
+          <p:cNvSpPr txBox="1"/>
+          <p:nvPr/>
+        </p:nvSpPr>
+        <p:spPr>
+          <a:xfrm>
+            <a:off x="457200" y="6583680"/>
+            <a:ext cx="2743200" cy="256032"/>
+          </a:xfrm>
+          <a:prstGeom prst="rect">
+            <a:avLst/>
+          </a:prstGeom>
+          <a:noFill/>
+        </p:spPr>
+        <p:txBody>
+          <a:bodyPr wrap="square" anchor="t">
+            <a:spAutoFit/>
+          </a:bodyPr>
+          <a:lstStyle/>
+          <a:p>
+            <a:pPr algn="l"/>
+            <a:r>
+              <a:rPr sz="900" b="0" i="0">
+                <a:solidFill>
+                  <a:srgbClr val="002F5E"/>
+                </a:solidFill>
+                <a:latin typeface="Calibri"/>
+              </a:rPr>
+              <a:t>J. Hayashi</a:t>
+            </a:r>
+          </a:p>
+        </p:txBody>
+      </p:sp>
+      <p:sp>
+        <p:nvSpPr>
+          <p:cNvPr id="9" name="TextBox 8"/>
+          <p:cNvSpPr txBox="1"/>
+          <p:nvPr/>
+        </p:nvSpPr>
+        <p:spPr>
+          <a:xfrm>
+            <a:off x="3200400" y="6583680"/>
+            <a:ext cx="5760720" cy="256032"/>
+          </a:xfrm>
+          <a:prstGeom prst="rect">
+            <a:avLst/>
+          </a:prstGeom>
+          <a:noFill/>
+        </p:spPr>
+        <p:txBody>
+          <a:bodyPr wrap="square" anchor="t">
+            <a:spAutoFit/>
+          </a:bodyPr>
+          <a:lstStyle/>
+          <a:p>
+            <a:pPr algn="ctr"/>
+            <a:r>
+              <a:rPr sz="900" b="0" i="0">
+                <a:solidFill>
+                  <a:srgbClr val="636363"/>
+                </a:solidFill>
+                <a:latin typeface="Calibri"/>
+              </a:rPr>
+              <a:t>quizgen — Automated Test Assembly</a:t>
+            </a:r>
+          </a:p>
+        </p:txBody>
+      </p:sp>
+      <p:sp>
+        <p:nvSpPr>
+          <p:cNvPr id="10" name="TextBox 9"/>
+          <p:cNvSpPr txBox="1"/>
+          <p:nvPr/>
+        </p:nvSpPr>
+        <p:spPr>
+          <a:xfrm>
+            <a:off x="8778240" y="6583680"/>
+            <a:ext cx="2926080" cy="256032"/>
+          </a:xfrm>
+          <a:prstGeom prst="rect">
+            <a:avLst/>
+          </a:prstGeom>
+          <a:noFill/>
+        </p:spPr>
+        <p:txBody>
+          <a:bodyPr wrap="square" anchor="t">
+            <a:spAutoFit/>
+          </a:bodyPr>
+          <a:lstStyle/>
+          <a:p>
+            <a:pPr algn="r"/>
+            <a:r>
+              <a:rPr sz="900" b="0" i="0">
+                <a:solidFill>
+                  <a:srgbClr val="002F5E"/>
+                </a:solidFill>
+                <a:latin typeface="Calibri"/>
+              </a:rPr>
+              <a:t>FAU Erlangen-Nürnberg   5</a:t>
+            </a:r>
+          </a:p>
+        </p:txBody>
+      </p:sp>
+      <p:sp>
+        <p:nvSpPr>
+          <p:cNvPr id="11" name="Rounded Rectangle 10"/>
+          <p:cNvSpPr/>
+          <p:nvPr/>
+        </p:nvSpPr>
+        <p:spPr>
+          <a:xfrm>
+            <a:off x="640080" y="1280160"/>
             <a:ext cx="5212080" cy="502920"/>
           </a:xfrm>
           <a:prstGeom prst="roundRect">
@@ -6058,13 +8832,13 @@
       </p:sp>
       <p:sp>
         <p:nvSpPr>
-          <p:cNvPr id="6" name="TextBox 5"/>
+          <p:cNvPr id="12" name="TextBox 11"/>
           <p:cNvSpPr txBox="1"/>
           <p:nvPr/>
         </p:nvSpPr>
         <p:spPr>
           <a:xfrm>
-            <a:off x="685800" y="1920240"/>
+            <a:off x="685800" y="1874519"/>
             <a:ext cx="5120640" cy="1828800"/>
           </a:xfrm>
           <a:prstGeom prst="rect">
@@ -6086,11 +8860,11 @@
             <a:r>
               <a:rPr sz="1400">
                 <a:solidFill>
-                  <a:srgbClr val="333333"/>
-                </a:solidFill>
-                <a:latin typeface="Calibri"/>
-              </a:rPr>
-              <a:t>• Per-chapter fill, two passes (difficulty quota, then remainder).</a:t>
+                  <a:srgbClr val="222222"/>
+                </a:solidFill>
+                <a:latin typeface="Calibri"/>
+              </a:rPr>
+              <a:t>• Per-chapter fill; tiered passes favour open difficulty &amp; type quotas.</a:t>
             </a:r>
           </a:p>
           <a:p>
@@ -6102,7 +8876,7 @@
             <a:r>
               <a:rPr sz="1400">
                 <a:solidFill>
-                  <a:srgbClr val="333333"/>
+                  <a:srgbClr val="222222"/>
                 </a:solidFill>
                 <a:latin typeface="Calibri"/>
               </a:rPr>
@@ -6118,7 +8892,7 @@
             <a:r>
               <a:rPr sz="1400">
                 <a:solidFill>
-                  <a:srgbClr val="333333"/>
+                  <a:srgbClr val="222222"/>
                 </a:solidFill>
                 <a:latin typeface="Calibri"/>
               </a:rPr>
@@ -6129,24 +8903,24 @@
       </p:sp>
       <p:sp>
         <p:nvSpPr>
-          <p:cNvPr id="7" name="Rounded Rectangle 6"/>
+          <p:cNvPr id="13" name="Rounded Rectangle 12"/>
           <p:cNvSpPr/>
           <p:nvPr/>
         </p:nvSpPr>
         <p:spPr>
           <a:xfrm>
-            <a:off x="640080" y="3749039"/>
+            <a:off x="640080" y="3703320"/>
             <a:ext cx="5212080" cy="502920"/>
           </a:xfrm>
           <a:prstGeom prst="roundRect">
             <a:avLst/>
           </a:prstGeom>
           <a:solidFill>
-            <a:srgbClr val="3182BD"/>
+            <a:srgbClr val="002F5E"/>
           </a:solidFill>
           <a:ln w="15875">
             <a:solidFill>
-              <a:srgbClr val="3182BD"/>
+              <a:srgbClr val="002F5E"/>
             </a:solidFill>
           </a:ln>
           <a:effectLst/>
@@ -6184,13 +8958,13 @@
       </p:sp>
       <p:sp>
         <p:nvSpPr>
-          <p:cNvPr id="8" name="TextBox 7"/>
+          <p:cNvPr id="14" name="TextBox 13"/>
           <p:cNvSpPr txBox="1"/>
           <p:nvPr/>
         </p:nvSpPr>
         <p:spPr>
           <a:xfrm>
-            <a:off x="685800" y="4343400"/>
+            <a:off x="685800" y="4297680"/>
             <a:ext cx="5120640" cy="2011680"/>
           </a:xfrm>
           <a:prstGeom prst="rect">
@@ -6212,7 +8986,7 @@
             <a:r>
               <a:rPr sz="1400">
                 <a:solidFill>
-                  <a:srgbClr val="333333"/>
+                  <a:srgbClr val="222222"/>
                 </a:solidFill>
                 <a:latin typeface="Calibri"/>
               </a:rPr>
@@ -6228,11 +9002,11 @@
             <a:r>
               <a:rPr sz="1400">
                 <a:solidFill>
-                  <a:srgbClr val="333333"/>
-                </a:solidFill>
-                <a:latin typeface="Calibri"/>
-              </a:rPr>
-              <a:t>• Exact per-chapter AND difficulty counts.</a:t>
+                  <a:srgbClr val="222222"/>
+                </a:solidFill>
+                <a:latin typeface="Calibri"/>
+              </a:rPr>
+              <a:t>• Exact per-chapter, difficulty AND question-type counts.</a:t>
             </a:r>
           </a:p>
           <a:p>
@@ -6244,7 +9018,7 @@
             <a:r>
               <a:rPr sz="1400">
                 <a:solidFill>
-                  <a:srgbClr val="333333"/>
+                  <a:srgbClr val="222222"/>
                 </a:solidFill>
                 <a:latin typeface="Calibri"/>
               </a:rPr>
@@ -6260,25 +9034,25 @@
             <a:r>
               <a:rPr sz="1400">
                 <a:solidFill>
-                  <a:srgbClr val="333333"/>
-                </a:solidFill>
-                <a:latin typeface="Calibri"/>
-              </a:rPr>
-              <a:t>• Infeasible → relax difficulty (logged), never chapter counts.</a:t>
-            </a:r>
-          </a:p>
-        </p:txBody>
-      </p:sp>
-      <p:sp>
-        <p:nvSpPr>
-          <p:cNvPr id="9" name="Rectangle 8"/>
+                  <a:srgbClr val="222222"/>
+                </a:solidFill>
+                <a:latin typeface="Calibri"/>
+              </a:rPr>
+              <a:t>• Infeasible → relax type, then difficulty (logged); never chapter counts.</a:t>
+            </a:r>
+          </a:p>
+        </p:txBody>
+      </p:sp>
+      <p:sp>
+        <p:nvSpPr>
+          <p:cNvPr id="15" name="Rectangle 14"/>
           <p:cNvSpPr/>
           <p:nvPr/>
         </p:nvSpPr>
         <p:spPr>
           <a:xfrm>
-            <a:off x="6217920" y="1554480"/>
-            <a:ext cx="5486400" cy="2743200"/>
+            <a:off x="6217920" y="1463040"/>
+            <a:ext cx="5486400" cy="2834640"/>
           </a:xfrm>
           <a:prstGeom prst="rect">
             <a:avLst/>
@@ -6313,9 +9087,9 @@
           <a:p>
             <a:pPr algn="ctr"/>
             <a:r>
-              <a:rPr sz="1500" b="0" i="0">
-                <a:solidFill>
-                  <a:srgbClr val="333333"/>
+              <a:rPr sz="1400" b="0" i="0">
+                <a:solidFill>
+                  <a:srgbClr val="222222"/>
                 </a:solidFill>
                 <a:latin typeface="Consolas"/>
               </a:rPr>
@@ -6325,9 +9099,9 @@
           <a:p>
             <a:pPr algn="ctr"/>
             <a:r>
-              <a:rPr sz="1500" b="0" i="0">
-                <a:solidFill>
-                  <a:srgbClr val="333333"/>
+              <a:rPr sz="1400" b="0" i="0">
+                <a:solidFill>
+                  <a:srgbClr val="222222"/>
                 </a:solidFill>
                 <a:latin typeface="Consolas"/>
               </a:rPr>
@@ -6337,9 +9111,9 @@
           <a:p>
             <a:pPr algn="ctr"/>
             <a:r>
-              <a:rPr sz="1500" b="0" i="0">
-                <a:solidFill>
-                  <a:srgbClr val="333333"/>
+              <a:rPr sz="1400" b="0" i="0">
+                <a:solidFill>
+                  <a:srgbClr val="222222"/>
                 </a:solidFill>
                 <a:latin typeface="Consolas"/>
               </a:rPr>
@@ -6349,21 +9123,33 @@
           <a:p>
             <a:pPr algn="ctr"/>
             <a:r>
-              <a:rPr sz="1500" b="0" i="0">
-                <a:solidFill>
-                  <a:srgbClr val="333333"/>
+              <a:rPr sz="1400" b="0" i="0">
+                <a:solidFill>
+                  <a:srgbClr val="222222"/>
                 </a:solidFill>
                 <a:latin typeface="Consolas"/>
               </a:rPr>
+              <a:t>Σ_{type(i)=p} x_iv = k_p    (question type)</a:t>
+            </a:r>
+          </a:p>
+          <a:p>
+            <a:pPr algn="ctr"/>
+            <a:r>
+              <a:rPr sz="1400" b="0" i="0">
+                <a:solidFill>
+                  <a:srgbClr val="222222"/>
+                </a:solidFill>
+                <a:latin typeface="Consolas"/>
+              </a:rPr>
               <a:t>Σ_v  x_iv ≤ 1              (disjoint)</a:t>
             </a:r>
           </a:p>
           <a:p>
             <a:pPr algn="ctr"/>
             <a:r>
-              <a:rPr sz="1500" b="0" i="0">
-                <a:solidFill>
-                  <a:srgbClr val="333333"/>
+              <a:rPr sz="1400" b="0" i="0">
+                <a:solidFill>
+                  <a:srgbClr val="222222"/>
                 </a:solidFill>
                 <a:latin typeface="Consolas"/>
               </a:rPr>
@@ -6373,9 +9159,9 @@
           <a:p>
             <a:pPr algn="ctr"/>
             <a:r>
-              <a:rPr sz="1500" b="0" i="0">
-                <a:solidFill>
-                  <a:srgbClr val="333333"/>
+              <a:rPr sz="1400" b="0" i="0">
+                <a:solidFill>
+                  <a:srgbClr val="222222"/>
                 </a:solidFill>
                 <a:latin typeface="Consolas"/>
               </a:rPr>
@@ -6386,13 +9172,13 @@
       </p:sp>
       <p:sp>
         <p:nvSpPr>
-          <p:cNvPr id="10" name="TextBox 9"/>
+          <p:cNvPr id="16" name="TextBox 15"/>
           <p:cNvSpPr txBox="1"/>
           <p:nvPr/>
         </p:nvSpPr>
         <p:spPr>
           <a:xfrm>
-            <a:off x="6217920" y="4480560"/>
+            <a:off x="6217920" y="4434840"/>
             <a:ext cx="5486400" cy="1463040"/>
           </a:xfrm>
           <a:prstGeom prst="rect">
@@ -6446,13 +9232,13 @@
         <p:spPr>
           <a:xfrm>
             <a:off x="0" y="0"/>
-            <a:ext cx="12191695" cy="1051560"/>
+            <a:ext cx="12191695" cy="914400"/>
           </a:xfrm>
           <a:prstGeom prst="rect">
             <a:avLst/>
           </a:prstGeom>
           <a:solidFill>
-            <a:srgbClr val="1F2D3D"/>
+            <a:srgbClr val="002F5E"/>
           </a:solidFill>
           <a:ln>
             <a:noFill/>
@@ -6483,201 +9269,23 @@
       </p:sp>
       <p:sp>
         <p:nvSpPr>
-          <p:cNvPr id="3" name="TextBox 2"/>
-          <p:cNvSpPr txBox="1"/>
-          <p:nvPr/>
-        </p:nvSpPr>
-        <p:spPr>
-          <a:xfrm>
-            <a:off x="502920" y="164592"/>
-            <a:ext cx="11155680" cy="731520"/>
-          </a:xfrm>
-          <a:prstGeom prst="rect">
-            <a:avLst/>
-          </a:prstGeom>
-          <a:noFill/>
-        </p:spPr>
-        <p:txBody>
-          <a:bodyPr wrap="square" anchor="ctr">
-            <a:spAutoFit/>
-          </a:bodyPr>
-          <a:lstStyle/>
-          <a:p>
-            <a:pPr algn="l"/>
-            <a:r>
-              <a:rPr sz="3000" b="1" i="0">
-                <a:solidFill>
-                  <a:srgbClr val="FFFFFF"/>
-                </a:solidFill>
-                <a:latin typeface="Calibri"/>
-              </a:rPr>
-              <a:t>Deduplication &amp; validation</a:t>
-            </a:r>
-          </a:p>
-        </p:txBody>
-      </p:sp>
-      <p:sp>
-        <p:nvSpPr>
-          <p:cNvPr id="4" name="TextBox 3"/>
-          <p:cNvSpPr txBox="1"/>
-          <p:nvPr/>
-        </p:nvSpPr>
-        <p:spPr>
-          <a:xfrm>
-            <a:off x="530352" y="18288"/>
-            <a:ext cx="10972800" cy="274320"/>
-          </a:xfrm>
-          <a:prstGeom prst="rect">
-            <a:avLst/>
-          </a:prstGeom>
-          <a:noFill/>
-        </p:spPr>
-        <p:txBody>
-          <a:bodyPr wrap="square" anchor="t">
-            <a:spAutoFit/>
-          </a:bodyPr>
-          <a:lstStyle/>
-          <a:p>
-            <a:pPr algn="l"/>
-            <a:r>
-              <a:rPr sz="1200" b="1" i="0">
-                <a:solidFill>
-                  <a:srgbClr val="DEEBF7"/>
-                </a:solidFill>
-                <a:latin typeface="Calibri"/>
-              </a:rPr>
-              <a:t>similarity.py • dedup.py • validate.py</a:t>
-            </a:r>
-          </a:p>
-        </p:txBody>
-      </p:sp>
-      <p:sp>
-        <p:nvSpPr>
-          <p:cNvPr id="5" name="TextBox 4"/>
-          <p:cNvSpPr txBox="1"/>
-          <p:nvPr/>
-        </p:nvSpPr>
-        <p:spPr>
-          <a:xfrm>
-            <a:off x="640080" y="1188720"/>
-            <a:ext cx="5486400" cy="365760"/>
-          </a:xfrm>
-          <a:prstGeom prst="rect">
-            <a:avLst/>
-          </a:prstGeom>
-          <a:noFill/>
-        </p:spPr>
-        <p:txBody>
-          <a:bodyPr wrap="square" anchor="t">
-            <a:spAutoFit/>
-          </a:bodyPr>
-          <a:lstStyle/>
-          <a:p>
-            <a:pPr algn="l"/>
-            <a:r>
-              <a:rPr sz="1700" b="1" i="0">
-                <a:solidFill>
-                  <a:srgbClr val="3182BD"/>
-                </a:solidFill>
-                <a:latin typeface="Calibri"/>
-              </a:rPr>
-              <a:t>DEDUP (--dedup)</a:t>
-            </a:r>
-          </a:p>
-        </p:txBody>
-      </p:sp>
-      <p:sp>
-        <p:nvSpPr>
-          <p:cNvPr id="6" name="TextBox 5"/>
-          <p:cNvSpPr txBox="1"/>
-          <p:nvPr/>
-        </p:nvSpPr>
-        <p:spPr>
-          <a:xfrm>
-            <a:off x="640080" y="1600200"/>
-            <a:ext cx="5303520" cy="2194560"/>
-          </a:xfrm>
-          <a:prstGeom prst="rect">
-            <a:avLst/>
-          </a:prstGeom>
-          <a:noFill/>
-        </p:spPr>
-        <p:txBody>
-          <a:bodyPr wrap="square">
-            <a:spAutoFit/>
-          </a:bodyPr>
-          <a:lstStyle/>
-          <a:p>
-            <a:pPr>
-              <a:spcAft>
-                <a:spcPts val="700"/>
-              </a:spcAft>
-            </a:pPr>
-            <a:r>
-              <a:rPr sz="1500">
-                <a:solidFill>
-                  <a:srgbClr val="333333"/>
-                </a:solidFill>
-                <a:latin typeface="Calibri"/>
-              </a:rPr>
-              <a:t>• Token-Jaccard over stem+answer(+options) — offline, always on.</a:t>
-            </a:r>
-          </a:p>
-          <a:p>
-            <a:pPr>
-              <a:spcAft>
-                <a:spcPts val="700"/>
-              </a:spcAft>
-            </a:pPr>
-            <a:r>
-              <a:rPr sz="1500">
-                <a:solidFill>
-                  <a:srgbClr val="333333"/>
-                </a:solidFill>
-                <a:latin typeface="Calibri"/>
-              </a:rPr>
-              <a:t>• Optional embedding cosine — catches paraphrases.</a:t>
-            </a:r>
-          </a:p>
-          <a:p>
-            <a:pPr>
-              <a:spcAft>
-                <a:spcPts val="700"/>
-              </a:spcAft>
-            </a:pPr>
-            <a:r>
-              <a:rPr sz="1500">
-                <a:solidFill>
-                  <a:srgbClr val="333333"/>
-                </a:solidFill>
-                <a:latin typeface="Calibri"/>
-              </a:rPr>
-              <a:t>• Drops dups from the pool; MIP also forbids dup pairs across versions.</a:t>
-            </a:r>
-          </a:p>
-        </p:txBody>
-      </p:sp>
-      <p:sp>
-        <p:nvSpPr>
-          <p:cNvPr id="7" name="Rectangle 6"/>
+          <p:cNvPr id="3" name="Rectangle 2"/>
           <p:cNvSpPr/>
           <p:nvPr/>
         </p:nvSpPr>
         <p:spPr>
           <a:xfrm>
-            <a:off x="640080" y="4023360"/>
-            <a:ext cx="5212080" cy="1005840"/>
+            <a:off x="0" y="914400"/>
+            <a:ext cx="12191695" cy="54864"/>
           </a:xfrm>
           <a:prstGeom prst="rect">
             <a:avLst/>
           </a:prstGeom>
           <a:solidFill>
-            <a:srgbClr val="F0F0F2"/>
+            <a:srgbClr val="00B1EB"/>
           </a:solidFill>
-          <a:ln w="15875">
-            <a:solidFill>
-              <a:srgbClr val="636363"/>
-            </a:solidFill>
+          <a:ln>
+            <a:noFill/>
           </a:ln>
           <a:effectLst/>
         </p:spPr>
@@ -6696,32 +9304,93 @@
           </a:fontRef>
         </p:style>
         <p:txBody>
-          <a:bodyPr rtlCol="0" anchor="ctr" wrap="square" lIns="45720" rIns="45720" tIns="27432" bIns="27432"/>
-          <a:lstStyle/>
-          <a:p>
-            <a:pPr algn="ctr"/>
-            <a:r>
-              <a:rPr sz="1400" b="0" i="0">
-                <a:solidFill>
-                  <a:srgbClr val="333333"/>
-                </a:solidFill>
-                <a:latin typeface="Consolas"/>
-              </a:rPr>
-              <a:t>sim(q₁,q₂) = |T(q₁) ∩ T(q₂)| / |T(q₁) ∪ T(q₂)|</a:t>
-            </a:r>
-          </a:p>
-        </p:txBody>
-      </p:sp>
-      <p:sp>
-        <p:nvSpPr>
-          <p:cNvPr id="8" name="TextBox 7"/>
+          <a:bodyPr rtlCol="0" anchor="ctr"/>
+          <a:lstStyle/>
+          <a:p>
+            <a:pPr algn="ctr"/>
+          </a:p>
+        </p:txBody>
+      </p:sp>
+      <p:sp>
+        <p:nvSpPr>
+          <p:cNvPr id="4" name="TextBox 3"/>
           <p:cNvSpPr txBox="1"/>
           <p:nvPr/>
         </p:nvSpPr>
         <p:spPr>
           <a:xfrm>
-            <a:off x="6400800" y="1188720"/>
-            <a:ext cx="5486400" cy="365760"/>
+            <a:off x="457200" y="109728"/>
+            <a:ext cx="10058400" cy="713232"/>
+          </a:xfrm>
+          <a:prstGeom prst="rect">
+            <a:avLst/>
+          </a:prstGeom>
+          <a:noFill/>
+        </p:spPr>
+        <p:txBody>
+          <a:bodyPr wrap="square" anchor="ctr">
+            <a:spAutoFit/>
+          </a:bodyPr>
+          <a:lstStyle/>
+          <a:p>
+            <a:pPr algn="l"/>
+            <a:r>
+              <a:rPr sz="2800" b="1" i="0">
+                <a:solidFill>
+                  <a:srgbClr val="FFFFFF"/>
+                </a:solidFill>
+                <a:latin typeface="Calibri"/>
+              </a:rPr>
+              <a:t>Balanced formats, not all multiple-choice</a:t>
+            </a:r>
+          </a:p>
+        </p:txBody>
+      </p:sp>
+      <p:sp>
+        <p:nvSpPr>
+          <p:cNvPr id="5" name="TextBox 4"/>
+          <p:cNvSpPr txBox="1"/>
+          <p:nvPr/>
+        </p:nvSpPr>
+        <p:spPr>
+          <a:xfrm>
+            <a:off x="10881360" y="164592"/>
+            <a:ext cx="1188720" cy="640080"/>
+          </a:xfrm>
+          <a:prstGeom prst="rect">
+            <a:avLst/>
+          </a:prstGeom>
+          <a:noFill/>
+        </p:spPr>
+        <p:txBody>
+          <a:bodyPr wrap="square" anchor="ctr">
+            <a:spAutoFit/>
+          </a:bodyPr>
+          <a:lstStyle/>
+          <a:p>
+            <a:pPr algn="r"/>
+            <a:r>
+              <a:rPr sz="2600" b="1" i="0">
+                <a:solidFill>
+                  <a:srgbClr val="00B1EB"/>
+                </a:solidFill>
+                <a:latin typeface="Calibri"/>
+              </a:rPr>
+              <a:t>FAU</a:t>
+            </a:r>
+          </a:p>
+        </p:txBody>
+      </p:sp>
+      <p:sp>
+        <p:nvSpPr>
+          <p:cNvPr id="6" name="TextBox 5"/>
+          <p:cNvSpPr txBox="1"/>
+          <p:nvPr/>
+        </p:nvSpPr>
+        <p:spPr>
+          <a:xfrm>
+            <a:off x="475488" y="-18288"/>
+            <a:ext cx="9144000" cy="256032"/>
           </a:xfrm>
           <a:prstGeom prst="rect">
             <a:avLst/>
@@ -6736,29 +9405,405 @@
           <a:p>
             <a:pPr algn="l"/>
             <a:r>
-              <a:rPr sz="1700" b="1" i="0">
-                <a:solidFill>
-                  <a:srgbClr val="31A354"/>
-                </a:solidFill>
-                <a:latin typeface="Calibri"/>
-              </a:rPr>
-              <a:t>VALIDATE (--validate)</a:t>
-            </a:r>
-          </a:p>
-        </p:txBody>
-      </p:sp>
-      <p:sp>
-        <p:nvSpPr>
-          <p:cNvPr id="9" name="Rounded Rectangle 8"/>
+              <a:rPr sz="1100" b="1" i="0">
+                <a:solidFill>
+                  <a:srgbClr val="00B1EB"/>
+                </a:solidFill>
+                <a:latin typeface="Calibri"/>
+              </a:rPr>
+              <a:t>WHY qtype_mix MATTERS</a:t>
+            </a:r>
+          </a:p>
+        </p:txBody>
+      </p:sp>
+      <p:sp>
+        <p:nvSpPr>
+          <p:cNvPr id="7" name="Rectangle 6"/>
           <p:cNvSpPr/>
           <p:nvPr/>
         </p:nvSpPr>
         <p:spPr>
           <a:xfrm>
-            <a:off x="6400800" y="1691640"/>
-            <a:ext cx="2560320" cy="777240"/>
+            <a:off x="0" y="6565392"/>
+            <a:ext cx="12191695" cy="18288"/>
+          </a:xfrm>
+          <a:prstGeom prst="rect">
+            <a:avLst/>
+          </a:prstGeom>
+          <a:solidFill>
+            <a:srgbClr val="00B1EB"/>
+          </a:solidFill>
+          <a:ln>
+            <a:noFill/>
+          </a:ln>
+          <a:effectLst/>
+        </p:spPr>
+        <p:style>
+          <a:lnRef idx="1">
+            <a:schemeClr val="accent1"/>
+          </a:lnRef>
+          <a:fillRef idx="3">
+            <a:schemeClr val="accent1"/>
+          </a:fillRef>
+          <a:effectRef idx="2">
+            <a:schemeClr val="accent1"/>
+          </a:effectRef>
+          <a:fontRef idx="minor">
+            <a:schemeClr val="lt1"/>
+          </a:fontRef>
+        </p:style>
+        <p:txBody>
+          <a:bodyPr rtlCol="0" anchor="ctr"/>
+          <a:lstStyle/>
+          <a:p>
+            <a:pPr algn="ctr"/>
+          </a:p>
+        </p:txBody>
+      </p:sp>
+      <p:sp>
+        <p:nvSpPr>
+          <p:cNvPr id="8" name="TextBox 7"/>
+          <p:cNvSpPr txBox="1"/>
+          <p:nvPr/>
+        </p:nvSpPr>
+        <p:spPr>
+          <a:xfrm>
+            <a:off x="457200" y="6583680"/>
+            <a:ext cx="2743200" cy="256032"/>
+          </a:xfrm>
+          <a:prstGeom prst="rect">
+            <a:avLst/>
+          </a:prstGeom>
+          <a:noFill/>
+        </p:spPr>
+        <p:txBody>
+          <a:bodyPr wrap="square" anchor="t">
+            <a:spAutoFit/>
+          </a:bodyPr>
+          <a:lstStyle/>
+          <a:p>
+            <a:pPr algn="l"/>
+            <a:r>
+              <a:rPr sz="900" b="0" i="0">
+                <a:solidFill>
+                  <a:srgbClr val="002F5E"/>
+                </a:solidFill>
+                <a:latin typeface="Calibri"/>
+              </a:rPr>
+              <a:t>J. Hayashi</a:t>
+            </a:r>
+          </a:p>
+        </p:txBody>
+      </p:sp>
+      <p:sp>
+        <p:nvSpPr>
+          <p:cNvPr id="9" name="TextBox 8"/>
+          <p:cNvSpPr txBox="1"/>
+          <p:nvPr/>
+        </p:nvSpPr>
+        <p:spPr>
+          <a:xfrm>
+            <a:off x="3200400" y="6583680"/>
+            <a:ext cx="5760720" cy="256032"/>
+          </a:xfrm>
+          <a:prstGeom prst="rect">
+            <a:avLst/>
+          </a:prstGeom>
+          <a:noFill/>
+        </p:spPr>
+        <p:txBody>
+          <a:bodyPr wrap="square" anchor="t">
+            <a:spAutoFit/>
+          </a:bodyPr>
+          <a:lstStyle/>
+          <a:p>
+            <a:pPr algn="ctr"/>
+            <a:r>
+              <a:rPr sz="900" b="0" i="0">
+                <a:solidFill>
+                  <a:srgbClr val="636363"/>
+                </a:solidFill>
+                <a:latin typeface="Calibri"/>
+              </a:rPr>
+              <a:t>quizgen — Automated Test Assembly</a:t>
+            </a:r>
+          </a:p>
+        </p:txBody>
+      </p:sp>
+      <p:sp>
+        <p:nvSpPr>
+          <p:cNvPr id="10" name="TextBox 9"/>
+          <p:cNvSpPr txBox="1"/>
+          <p:nvPr/>
+        </p:nvSpPr>
+        <p:spPr>
+          <a:xfrm>
+            <a:off x="8778240" y="6583680"/>
+            <a:ext cx="2926080" cy="256032"/>
+          </a:xfrm>
+          <a:prstGeom prst="rect">
+            <a:avLst/>
+          </a:prstGeom>
+          <a:noFill/>
+        </p:spPr>
+        <p:txBody>
+          <a:bodyPr wrap="square" anchor="t">
+            <a:spAutoFit/>
+          </a:bodyPr>
+          <a:lstStyle/>
+          <a:p>
+            <a:pPr algn="r"/>
+            <a:r>
+              <a:rPr sz="900" b="0" i="0">
+                <a:solidFill>
+                  <a:srgbClr val="002F5E"/>
+                </a:solidFill>
+                <a:latin typeface="Calibri"/>
+              </a:rPr>
+              <a:t>FAU Erlangen-Nürnberg   6</a:t>
+            </a:r>
+          </a:p>
+        </p:txBody>
+      </p:sp>
+      <p:sp>
+        <p:nvSpPr>
+          <p:cNvPr id="11" name="TextBox 10"/>
+          <p:cNvSpPr txBox="1"/>
+          <p:nvPr/>
+        </p:nvSpPr>
+        <p:spPr>
+          <a:xfrm>
+            <a:off x="640080" y="1188720"/>
+            <a:ext cx="10972800" cy="731520"/>
+          </a:xfrm>
+          <a:prstGeom prst="rect">
+            <a:avLst/>
+          </a:prstGeom>
+          <a:noFill/>
+        </p:spPr>
+        <p:txBody>
+          <a:bodyPr wrap="square" anchor="t">
+            <a:spAutoFit/>
+          </a:bodyPr>
+          <a:lstStyle/>
+          <a:p>
+            <a:pPr algn="l"/>
+            <a:r>
+              <a:rPr sz="1700" b="0" i="0">
+                <a:solidFill>
+                  <a:srgbClr val="222222"/>
+                </a:solidFill>
+                <a:latin typeface="Calibri"/>
+              </a:rPr>
+              <a:t>The quality objective rewards well-formed MCQs (+0.2). With no constraint on the type distribution, the optimiser fills every free slot with MCQs.</a:t>
+            </a:r>
+          </a:p>
+        </p:txBody>
+      </p:sp>
+      <p:sp>
+        <p:nvSpPr>
+          <p:cNvPr id="12" name="Rounded Rectangle 11"/>
+          <p:cNvSpPr/>
+          <p:nvPr/>
+        </p:nvSpPr>
+        <p:spPr>
+          <a:xfrm>
+            <a:off x="640080" y="2286000"/>
+            <a:ext cx="5212080" cy="548640"/>
           </a:xfrm>
           <a:prstGeom prst="roundRect">
+            <a:avLst/>
+          </a:prstGeom>
+          <a:solidFill>
+            <a:srgbClr val="DE2D26"/>
+          </a:solidFill>
+          <a:ln w="15875">
+            <a:solidFill>
+              <a:srgbClr val="DE2D26"/>
+            </a:solidFill>
+          </a:ln>
+          <a:effectLst/>
+        </p:spPr>
+        <p:style>
+          <a:lnRef idx="1">
+            <a:schemeClr val="accent1"/>
+          </a:lnRef>
+          <a:fillRef idx="3">
+            <a:schemeClr val="accent1"/>
+          </a:fillRef>
+          <a:effectRef idx="2">
+            <a:schemeClr val="accent1"/>
+          </a:effectRef>
+          <a:fontRef idx="minor">
+            <a:schemeClr val="lt1"/>
+          </a:fontRef>
+        </p:style>
+        <p:txBody>
+          <a:bodyPr rtlCol="0" anchor="ctr" wrap="square" lIns="45720" rIns="45720" tIns="27432" bIns="27432"/>
+          <a:lstStyle/>
+          <a:p>
+            <a:pPr algn="ctr"/>
+            <a:r>
+              <a:rPr sz="1500" b="1" i="0">
+                <a:solidFill>
+                  <a:srgbClr val="FFFFFF"/>
+                </a:solidFill>
+                <a:latin typeface="Calibri"/>
+              </a:rPr>
+              <a:t>Without qtype_mix</a:t>
+            </a:r>
+          </a:p>
+        </p:txBody>
+      </p:sp>
+      <p:sp>
+        <p:nvSpPr>
+          <p:cNvPr id="13" name="Rectangle 12"/>
+          <p:cNvSpPr/>
+          <p:nvPr/>
+        </p:nvSpPr>
+        <p:spPr>
+          <a:xfrm>
+            <a:off x="640080" y="2926080"/>
+            <a:ext cx="5212080" cy="1463040"/>
+          </a:xfrm>
+          <a:prstGeom prst="rect">
+            <a:avLst/>
+          </a:prstGeom>
+          <a:solidFill>
+            <a:srgbClr val="FDE0DD"/>
+          </a:solidFill>
+          <a:ln w="15875">
+            <a:solidFill>
+              <a:srgbClr val="DE2D26"/>
+            </a:solidFill>
+          </a:ln>
+          <a:effectLst/>
+        </p:spPr>
+        <p:style>
+          <a:lnRef idx="1">
+            <a:schemeClr val="accent1"/>
+          </a:lnRef>
+          <a:fillRef idx="3">
+            <a:schemeClr val="accent1"/>
+          </a:fillRef>
+          <a:effectRef idx="2">
+            <a:schemeClr val="accent1"/>
+          </a:effectRef>
+          <a:fontRef idx="minor">
+            <a:schemeClr val="lt1"/>
+          </a:fontRef>
+        </p:style>
+        <p:txBody>
+          <a:bodyPr rtlCol="0" anchor="ctr" wrap="square" lIns="45720" rIns="45720" tIns="27432" bIns="27432"/>
+          <a:lstStyle/>
+          <a:p>
+            <a:pPr algn="ctr"/>
+            <a:r>
+              <a:rPr sz="1500" b="0" i="0">
+                <a:solidFill>
+                  <a:srgbClr val="222222"/>
+                </a:solidFill>
+                <a:latin typeface="Calibri"/>
+              </a:rPr>
+              <a:t>v1: mcq 18 · short_answer 1 · cloze 1</a:t>
+            </a:r>
+          </a:p>
+          <a:p>
+            <a:pPr algn="ctr"/>
+            <a:r>
+              <a:rPr sz="1500" b="0" i="0">
+                <a:solidFill>
+                  <a:srgbClr val="222222"/>
+                </a:solidFill>
+                <a:latin typeface="Calibri"/>
+              </a:rPr>
+              <a:t>v2: mcq 19 · short_answer 1</a:t>
+            </a:r>
+          </a:p>
+          <a:p>
+            <a:pPr algn="ctr"/>
+          </a:p>
+          <a:p>
+            <a:pPr algn="ctr"/>
+            <a:r>
+              <a:rPr sz="1500" b="0" i="0">
+                <a:solidFill>
+                  <a:srgbClr val="222222"/>
+                </a:solidFill>
+                <a:latin typeface="Calibri"/>
+              </a:rPr>
+              <a:t>→ effectively all MCQ</a:t>
+            </a:r>
+          </a:p>
+        </p:txBody>
+      </p:sp>
+      <p:sp>
+        <p:nvSpPr>
+          <p:cNvPr id="14" name="Rounded Rectangle 13"/>
+          <p:cNvSpPr/>
+          <p:nvPr/>
+        </p:nvSpPr>
+        <p:spPr>
+          <a:xfrm>
+            <a:off x="6400800" y="2286000"/>
+            <a:ext cx="5212080" cy="548640"/>
+          </a:xfrm>
+          <a:prstGeom prst="roundRect">
+            <a:avLst/>
+          </a:prstGeom>
+          <a:solidFill>
+            <a:srgbClr val="31A354"/>
+          </a:solidFill>
+          <a:ln w="15875">
+            <a:solidFill>
+              <a:srgbClr val="31A354"/>
+            </a:solidFill>
+          </a:ln>
+          <a:effectLst/>
+        </p:spPr>
+        <p:style>
+          <a:lnRef idx="1">
+            <a:schemeClr val="accent1"/>
+          </a:lnRef>
+          <a:fillRef idx="3">
+            <a:schemeClr val="accent1"/>
+          </a:fillRef>
+          <a:effectRef idx="2">
+            <a:schemeClr val="accent1"/>
+          </a:effectRef>
+          <a:fontRef idx="minor">
+            <a:schemeClr val="lt1"/>
+          </a:fontRef>
+        </p:style>
+        <p:txBody>
+          <a:bodyPr rtlCol="0" anchor="ctr" wrap="square" lIns="45720" rIns="45720" tIns="27432" bIns="27432"/>
+          <a:lstStyle/>
+          <a:p>
+            <a:pPr algn="ctr"/>
+            <a:r>
+              <a:rPr sz="1500" b="1" i="0">
+                <a:solidFill>
+                  <a:srgbClr val="FFFFFF"/>
+                </a:solidFill>
+                <a:latin typeface="Calibri"/>
+              </a:rPr>
+              <a:t>With qtype_mix (0.4/0.2/0.2/0.2)</a:t>
+            </a:r>
+          </a:p>
+        </p:txBody>
+      </p:sp>
+      <p:sp>
+        <p:nvSpPr>
+          <p:cNvPr id="15" name="Rectangle 14"/>
+          <p:cNvSpPr/>
+          <p:nvPr/>
+        </p:nvSpPr>
+        <p:spPr>
+          <a:xfrm>
+            <a:off x="6400800" y="2926080"/>
+            <a:ext cx="5212080" cy="1463040"/>
+          </a:xfrm>
+          <a:prstGeom prst="rect">
             <a:avLst/>
           </a:prstGeom>
           <a:solidFill>
@@ -6791,192 +9836,54 @@
           <a:p>
             <a:pPr algn="ctr"/>
             <a:r>
-              <a:rPr sz="1300" b="1" i="0">
-                <a:solidFill>
-                  <a:srgbClr val="333333"/>
-                </a:solidFill>
-                <a:latin typeface="Calibri"/>
-              </a:rPr>
-              <a:t>Schema validity</a:t>
-            </a:r>
-          </a:p>
-        </p:txBody>
-      </p:sp>
-      <p:sp>
-        <p:nvSpPr>
-          <p:cNvPr id="10" name="Rounded Rectangle 9"/>
-          <p:cNvSpPr/>
-          <p:nvPr/>
-        </p:nvSpPr>
-        <p:spPr>
-          <a:xfrm>
-            <a:off x="9098280" y="1691640"/>
-            <a:ext cx="2560320" cy="777240"/>
-          </a:xfrm>
-          <a:prstGeom prst="roundRect">
-            <a:avLst/>
-          </a:prstGeom>
-          <a:solidFill>
-            <a:srgbClr val="DEEBF7"/>
-          </a:solidFill>
-          <a:ln w="15875">
-            <a:solidFill>
-              <a:srgbClr val="3182BD"/>
-            </a:solidFill>
-          </a:ln>
-          <a:effectLst/>
-        </p:spPr>
-        <p:style>
-          <a:lnRef idx="1">
-            <a:schemeClr val="accent1"/>
-          </a:lnRef>
-          <a:fillRef idx="3">
-            <a:schemeClr val="accent1"/>
-          </a:fillRef>
-          <a:effectRef idx="2">
-            <a:schemeClr val="accent1"/>
-          </a:effectRef>
-          <a:fontRef idx="minor">
-            <a:schemeClr val="lt1"/>
-          </a:fontRef>
-        </p:style>
-        <p:txBody>
-          <a:bodyPr rtlCol="0" anchor="ctr" wrap="square" lIns="45720" rIns="45720" tIns="27432" bIns="27432"/>
-          <a:lstStyle/>
-          <a:p>
-            <a:pPr algn="ctr"/>
-            <a:r>
-              <a:rPr sz="1300" b="1" i="0">
-                <a:solidFill>
-                  <a:srgbClr val="333333"/>
-                </a:solidFill>
-                <a:latin typeface="Calibri"/>
-              </a:rPr>
-              <a:t>Blueprint compliance</a:t>
-            </a:r>
-          </a:p>
-        </p:txBody>
-      </p:sp>
-      <p:sp>
-        <p:nvSpPr>
-          <p:cNvPr id="11" name="Rounded Rectangle 10"/>
-          <p:cNvSpPr/>
-          <p:nvPr/>
-        </p:nvSpPr>
-        <p:spPr>
-          <a:xfrm>
-            <a:off x="6400800" y="2606040"/>
-            <a:ext cx="2560320" cy="777240"/>
-          </a:xfrm>
-          <a:prstGeom prst="roundRect">
-            <a:avLst/>
-          </a:prstGeom>
-          <a:solidFill>
-            <a:srgbClr val="E5F5E0"/>
-          </a:solidFill>
-          <a:ln w="15875">
-            <a:solidFill>
-              <a:srgbClr val="31A354"/>
-            </a:solidFill>
-          </a:ln>
-          <a:effectLst/>
-        </p:spPr>
-        <p:style>
-          <a:lnRef idx="1">
-            <a:schemeClr val="accent1"/>
-          </a:lnRef>
-          <a:fillRef idx="3">
-            <a:schemeClr val="accent1"/>
-          </a:fillRef>
-          <a:effectRef idx="2">
-            <a:schemeClr val="accent1"/>
-          </a:effectRef>
-          <a:fontRef idx="minor">
-            <a:schemeClr val="lt1"/>
-          </a:fontRef>
-        </p:style>
-        <p:txBody>
-          <a:bodyPr rtlCol="0" anchor="ctr" wrap="square" lIns="45720" rIns="45720" tIns="27432" bIns="27432"/>
-          <a:lstStyle/>
-          <a:p>
-            <a:pPr algn="ctr"/>
-            <a:r>
-              <a:rPr sz="1300" b="1" i="0">
-                <a:solidFill>
-                  <a:srgbClr val="333333"/>
-                </a:solidFill>
-                <a:latin typeface="Calibri"/>
-              </a:rPr>
-              <a:t>Grounding coverage</a:t>
-            </a:r>
-          </a:p>
-        </p:txBody>
-      </p:sp>
-      <p:sp>
-        <p:nvSpPr>
-          <p:cNvPr id="12" name="Rounded Rectangle 11"/>
-          <p:cNvSpPr/>
-          <p:nvPr/>
-        </p:nvSpPr>
-        <p:spPr>
-          <a:xfrm>
-            <a:off x="9098280" y="2606040"/>
-            <a:ext cx="2560320" cy="777240"/>
-          </a:xfrm>
-          <a:prstGeom prst="roundRect">
-            <a:avLst/>
-          </a:prstGeom>
-          <a:solidFill>
-            <a:srgbClr val="DEEBF7"/>
-          </a:solidFill>
-          <a:ln w="15875">
-            <a:solidFill>
-              <a:srgbClr val="3182BD"/>
-            </a:solidFill>
-          </a:ln>
-          <a:effectLst/>
-        </p:spPr>
-        <p:style>
-          <a:lnRef idx="1">
-            <a:schemeClr val="accent1"/>
-          </a:lnRef>
-          <a:fillRef idx="3">
-            <a:schemeClr val="accent1"/>
-          </a:fillRef>
-          <a:effectRef idx="2">
-            <a:schemeClr val="accent1"/>
-          </a:effectRef>
-          <a:fontRef idx="minor">
-            <a:schemeClr val="lt1"/>
-          </a:fontRef>
-        </p:style>
-        <p:txBody>
-          <a:bodyPr rtlCol="0" anchor="ctr" wrap="square" lIns="45720" rIns="45720" tIns="27432" bIns="27432"/>
-          <a:lstStyle/>
-          <a:p>
-            <a:pPr algn="ctr"/>
-            <a:r>
-              <a:rPr sz="1300" b="1" i="0">
-                <a:solidFill>
-                  <a:srgbClr val="333333"/>
-                </a:solidFill>
-                <a:latin typeface="Calibri"/>
-              </a:rPr>
-              <a:t>Duplicate rate</a:t>
-            </a:r>
-          </a:p>
-        </p:txBody>
-      </p:sp>
-      <p:sp>
-        <p:nvSpPr>
-          <p:cNvPr id="13" name="TextBox 12"/>
+              <a:rPr sz="1500" b="0" i="0">
+                <a:solidFill>
+                  <a:srgbClr val="222222"/>
+                </a:solidFill>
+                <a:latin typeface="Calibri"/>
+              </a:rPr>
+              <a:t>v1: mcq 8 · true_false 4 · short_answer 4 · cloze 4</a:t>
+            </a:r>
+          </a:p>
+          <a:p>
+            <a:pPr algn="ctr"/>
+            <a:r>
+              <a:rPr sz="1500" b="0" i="0">
+                <a:solidFill>
+                  <a:srgbClr val="222222"/>
+                </a:solidFill>
+                <a:latin typeface="Calibri"/>
+              </a:rPr>
+              <a:t>v2: mcq 8 · true_false 4 · short_answer 4 · cloze 4</a:t>
+            </a:r>
+          </a:p>
+          <a:p>
+            <a:pPr algn="ctr"/>
+          </a:p>
+          <a:p>
+            <a:pPr algn="ctr"/>
+            <a:r>
+              <a:rPr sz="1500" b="0" i="0">
+                <a:solidFill>
+                  <a:srgbClr val="222222"/>
+                </a:solidFill>
+                <a:latin typeface="Calibri"/>
+              </a:rPr>
+              <a:t>→ exact, balanced, still optimal</a:t>
+            </a:r>
+          </a:p>
+        </p:txBody>
+      </p:sp>
+      <p:sp>
+        <p:nvSpPr>
+          <p:cNvPr id="16" name="TextBox 15"/>
           <p:cNvSpPr txBox="1"/>
           <p:nvPr/>
         </p:nvSpPr>
         <p:spPr>
           <a:xfrm>
-            <a:off x="6400800" y="3657600"/>
-            <a:ext cx="5303520" cy="1463040"/>
+            <a:off x="640080" y="4846320"/>
+            <a:ext cx="10972800" cy="1280160"/>
           </a:xfrm>
           <a:prstGeom prst="rect">
             <a:avLst/>
@@ -6991,13 +9898,13 @@
           <a:p>
             <a:pPr algn="l"/>
             <a:r>
-              <a:rPr sz="1400" b="0" i="1">
+              <a:rPr sz="1600" b="0" i="1">
                 <a:solidFill>
                   <a:srgbClr val="636363"/>
                 </a:solidFill>
                 <a:latin typeface="Calibri"/>
               </a:rPr>
-              <a:t>Overall PASS only if no schema-invalid items and (if checked) the blueprint matches exactly. Exit code feeds CI.</a:t>
+              <a:t>The fix is a constraint, not a hack: qtype_mix is the question-type analogue of difficulty_mix, resolved to exact counts (largest-remainder) and enforced per version by both selectors. Pool stays mixed; the mix becomes guaranteed.</a:t>
             </a:r>
           </a:p>
         </p:txBody>
@@ -7029,13 +9936,13 @@
         <p:spPr>
           <a:xfrm>
             <a:off x="0" y="0"/>
-            <a:ext cx="12191695" cy="1051560"/>
+            <a:ext cx="12191695" cy="914400"/>
           </a:xfrm>
           <a:prstGeom prst="rect">
             <a:avLst/>
           </a:prstGeom>
           <a:solidFill>
-            <a:srgbClr val="1F2D3D"/>
+            <a:srgbClr val="002F5E"/>
           </a:solidFill>
           <a:ln>
             <a:noFill/>
@@ -7066,130 +9973,23 @@
       </p:sp>
       <p:sp>
         <p:nvSpPr>
-          <p:cNvPr id="3" name="TextBox 2"/>
-          <p:cNvSpPr txBox="1"/>
-          <p:nvPr/>
-        </p:nvSpPr>
-        <p:spPr>
-          <a:xfrm>
-            <a:off x="502920" y="164592"/>
-            <a:ext cx="11155680" cy="731520"/>
-          </a:xfrm>
-          <a:prstGeom prst="rect">
-            <a:avLst/>
-          </a:prstGeom>
-          <a:noFill/>
-        </p:spPr>
-        <p:txBody>
-          <a:bodyPr wrap="square" anchor="ctr">
-            <a:spAutoFit/>
-          </a:bodyPr>
-          <a:lstStyle/>
-          <a:p>
-            <a:pPr algn="l"/>
-            <a:r>
-              <a:rPr sz="3000" b="1" i="0">
-                <a:solidFill>
-                  <a:srgbClr val="FFFFFF"/>
-                </a:solidFill>
-                <a:latin typeface="Calibri"/>
-              </a:rPr>
-              <a:t>Using it</a:t>
-            </a:r>
-          </a:p>
-        </p:txBody>
-      </p:sp>
-      <p:sp>
-        <p:nvSpPr>
-          <p:cNvPr id="4" name="TextBox 3"/>
-          <p:cNvSpPr txBox="1"/>
-          <p:nvPr/>
-        </p:nvSpPr>
-        <p:spPr>
-          <a:xfrm>
-            <a:off x="530352" y="18288"/>
-            <a:ext cx="10972800" cy="274320"/>
-          </a:xfrm>
-          <a:prstGeom prst="rect">
-            <a:avLst/>
-          </a:prstGeom>
-          <a:noFill/>
-        </p:spPr>
-        <p:txBody>
-          <a:bodyPr wrap="square" anchor="t">
-            <a:spAutoFit/>
-          </a:bodyPr>
-          <a:lstStyle/>
-          <a:p>
-            <a:pPr algn="l"/>
-            <a:r>
-              <a:rPr sz="1200" b="1" i="0">
-                <a:solidFill>
-                  <a:srgbClr val="DEEBF7"/>
-                </a:solidFill>
-                <a:latin typeface="Calibri"/>
-              </a:rPr>
-              <a:t>python -m quizgen</a:t>
-            </a:r>
-          </a:p>
-        </p:txBody>
-      </p:sp>
-      <p:sp>
-        <p:nvSpPr>
-          <p:cNvPr id="5" name="TextBox 4"/>
-          <p:cNvSpPr txBox="1"/>
-          <p:nvPr/>
-        </p:nvSpPr>
-        <p:spPr>
-          <a:xfrm>
-            <a:off x="640080" y="1234440"/>
-            <a:ext cx="10972800" cy="365760"/>
-          </a:xfrm>
-          <a:prstGeom prst="rect">
-            <a:avLst/>
-          </a:prstGeom>
-          <a:noFill/>
-        </p:spPr>
-        <p:txBody>
-          <a:bodyPr wrap="square" anchor="t">
-            <a:spAutoFit/>
-          </a:bodyPr>
-          <a:lstStyle/>
-          <a:p>
-            <a:pPr algn="l"/>
-            <a:r>
-              <a:rPr sz="1600" b="1" i="0">
-                <a:solidFill>
-                  <a:srgbClr val="333333"/>
-                </a:solidFill>
-                <a:latin typeface="Calibri"/>
-              </a:rPr>
-              <a:t>Pure command line (no YAML):</a:t>
-            </a:r>
-          </a:p>
-        </p:txBody>
-      </p:sp>
-      <p:sp>
-        <p:nvSpPr>
-          <p:cNvPr id="6" name="Rectangle 5"/>
+          <p:cNvPr id="3" name="Rectangle 2"/>
           <p:cNvSpPr/>
           <p:nvPr/>
         </p:nvSpPr>
         <p:spPr>
           <a:xfrm>
-            <a:off x="640080" y="1645920"/>
-            <a:ext cx="10972800" cy="1143000"/>
+            <a:off x="0" y="914400"/>
+            <a:ext cx="12191695" cy="54864"/>
           </a:xfrm>
           <a:prstGeom prst="rect">
             <a:avLst/>
           </a:prstGeom>
           <a:solidFill>
-            <a:srgbClr val="1F2D3D"/>
+            <a:srgbClr val="00B1EB"/>
           </a:solidFill>
-          <a:ln w="15875">
-            <a:solidFill>
-              <a:srgbClr val="1F2D3D"/>
-            </a:solidFill>
+          <a:ln>
+            <a:noFill/>
           </a:ln>
           <a:effectLst/>
         </p:spPr>
@@ -7208,56 +10008,93 @@
           </a:fontRef>
         </p:style>
         <p:txBody>
-          <a:bodyPr rtlCol="0" anchor="ctr" wrap="square" lIns="45720" rIns="45720" tIns="27432" bIns="27432"/>
-          <a:lstStyle/>
-          <a:p>
-            <a:pPr algn="ctr"/>
-            <a:r>
-              <a:rPr sz="1500" b="0" i="0">
+          <a:bodyPr rtlCol="0" anchor="ctr"/>
+          <a:lstStyle/>
+          <a:p>
+            <a:pPr algn="ctr"/>
+          </a:p>
+        </p:txBody>
+      </p:sp>
+      <p:sp>
+        <p:nvSpPr>
+          <p:cNvPr id="4" name="TextBox 3"/>
+          <p:cNvSpPr txBox="1"/>
+          <p:nvPr/>
+        </p:nvSpPr>
+        <p:spPr>
+          <a:xfrm>
+            <a:off x="457200" y="109728"/>
+            <a:ext cx="10058400" cy="713232"/>
+          </a:xfrm>
+          <a:prstGeom prst="rect">
+            <a:avLst/>
+          </a:prstGeom>
+          <a:noFill/>
+        </p:spPr>
+        <p:txBody>
+          <a:bodyPr wrap="square" anchor="ctr">
+            <a:spAutoFit/>
+          </a:bodyPr>
+          <a:lstStyle/>
+          <a:p>
+            <a:pPr algn="l"/>
+            <a:r>
+              <a:rPr sz="2800" b="1" i="0">
                 <a:solidFill>
                   <a:srgbClr val="FFFFFF"/>
                 </a:solidFill>
-                <a:latin typeface="Consolas"/>
-              </a:rPr>
-              <a:t>python -m quizgen --pool questions.json \</a:t>
-            </a:r>
-          </a:p>
-          <a:p>
-            <a:pPr algn="ctr"/>
-            <a:r>
-              <a:rPr sz="1500" b="0" i="0">
-                <a:solidFill>
-                  <a:srgbClr val="FFFFFF"/>
-                </a:solidFill>
-                <a:latin typeface="Consolas"/>
-              </a:rPr>
-              <a:t>    --total 20 --chapters 1:10,2:6,3:4 \</a:t>
-            </a:r>
-          </a:p>
-          <a:p>
-            <a:pPr algn="ctr"/>
-            <a:r>
-              <a:rPr sz="1500" b="0" i="0">
-                <a:solidFill>
-                  <a:srgbClr val="FFFFFF"/>
-                </a:solidFill>
-                <a:latin typeface="Consolas"/>
-              </a:rPr>
-              <a:t>    --difficulty 0.4,0.4,0.2 --versions 2 --selector mip</a:t>
-            </a:r>
-          </a:p>
-        </p:txBody>
-      </p:sp>
-      <p:sp>
-        <p:nvSpPr>
-          <p:cNvPr id="7" name="TextBox 6"/>
+                <a:latin typeface="Calibri"/>
+              </a:rPr>
+              <a:t>Deduplication &amp; validation</a:t>
+            </a:r>
+          </a:p>
+        </p:txBody>
+      </p:sp>
+      <p:sp>
+        <p:nvSpPr>
+          <p:cNvPr id="5" name="TextBox 4"/>
           <p:cNvSpPr txBox="1"/>
           <p:nvPr/>
         </p:nvSpPr>
         <p:spPr>
           <a:xfrm>
-            <a:off x="640080" y="3017520"/>
-            <a:ext cx="10972800" cy="365760"/>
+            <a:off x="10881360" y="164592"/>
+            <a:ext cx="1188720" cy="640080"/>
+          </a:xfrm>
+          <a:prstGeom prst="rect">
+            <a:avLst/>
+          </a:prstGeom>
+          <a:noFill/>
+        </p:spPr>
+        <p:txBody>
+          <a:bodyPr wrap="square" anchor="ctr">
+            <a:spAutoFit/>
+          </a:bodyPr>
+          <a:lstStyle/>
+          <a:p>
+            <a:pPr algn="r"/>
+            <a:r>
+              <a:rPr sz="2600" b="1" i="0">
+                <a:solidFill>
+                  <a:srgbClr val="00B1EB"/>
+                </a:solidFill>
+                <a:latin typeface="Calibri"/>
+              </a:rPr>
+              <a:t>FAU</a:t>
+            </a:r>
+          </a:p>
+        </p:txBody>
+      </p:sp>
+      <p:sp>
+        <p:nvSpPr>
+          <p:cNvPr id="6" name="TextBox 5"/>
+          <p:cNvSpPr txBox="1"/>
+          <p:nvPr/>
+        </p:nvSpPr>
+        <p:spPr>
+          <a:xfrm>
+            <a:off x="475488" y="-18288"/>
+            <a:ext cx="9144000" cy="256032"/>
           </a:xfrm>
           <a:prstGeom prst="rect">
             <a:avLst/>
@@ -7272,38 +10109,36 @@
           <a:p>
             <a:pPr algn="l"/>
             <a:r>
-              <a:rPr sz="1600" b="1" i="0">
-                <a:solidFill>
-                  <a:srgbClr val="333333"/>
-                </a:solidFill>
-                <a:latin typeface="Calibri"/>
-              </a:rPr>
-              <a:t>Blueprint file + dedup + per-version validation report:</a:t>
-            </a:r>
-          </a:p>
-        </p:txBody>
-      </p:sp>
-      <p:sp>
-        <p:nvSpPr>
-          <p:cNvPr id="8" name="Rectangle 7"/>
+              <a:rPr sz="1100" b="1" i="0">
+                <a:solidFill>
+                  <a:srgbClr val="00B1EB"/>
+                </a:solidFill>
+                <a:latin typeface="Calibri"/>
+              </a:rPr>
+              <a:t>similarity.py • dedup.py • validate.py</a:t>
+            </a:r>
+          </a:p>
+        </p:txBody>
+      </p:sp>
+      <p:sp>
+        <p:nvSpPr>
+          <p:cNvPr id="7" name="Rectangle 6"/>
           <p:cNvSpPr/>
           <p:nvPr/>
         </p:nvSpPr>
         <p:spPr>
           <a:xfrm>
-            <a:off x="640080" y="3429000"/>
-            <a:ext cx="10972800" cy="914400"/>
+            <a:off x="0" y="6565392"/>
+            <a:ext cx="12191695" cy="18288"/>
           </a:xfrm>
           <a:prstGeom prst="rect">
             <a:avLst/>
           </a:prstGeom>
           <a:solidFill>
-            <a:srgbClr val="1F2D3D"/>
+            <a:srgbClr val="00B1EB"/>
           </a:solidFill>
-          <a:ln w="15875">
-            <a:solidFill>
-              <a:srgbClr val="1F2D3D"/>
-            </a:solidFill>
+          <a:ln>
+            <a:noFill/>
           </a:ln>
           <a:effectLst/>
         </p:spPr>
@@ -7322,30 +10157,44 @@
           </a:fontRef>
         </p:style>
         <p:txBody>
-          <a:bodyPr rtlCol="0" anchor="ctr" wrap="square" lIns="45720" rIns="45720" tIns="27432" bIns="27432"/>
-          <a:lstStyle/>
-          <a:p>
-            <a:pPr algn="ctr"/>
-            <a:r>
-              <a:rPr sz="1500" b="0" i="0">
-                <a:solidFill>
-                  <a:srgbClr val="FFFFFF"/>
-                </a:solidFill>
-                <a:latin typeface="Consolas"/>
-              </a:rPr>
-              <a:t>python -m quizgen --pool questions.json --blueprint blueprint.yaml \</a:t>
-            </a:r>
-          </a:p>
-          <a:p>
-            <a:pPr algn="ctr"/>
-            <a:r>
-              <a:rPr sz="1500" b="0" i="0">
-                <a:solidFill>
-                  <a:srgbClr val="FFFFFF"/>
-                </a:solidFill>
-                <a:latin typeface="Consolas"/>
-              </a:rPr>
-              <a:t>    --dedup --validate --out-dir out</a:t>
+          <a:bodyPr rtlCol="0" anchor="ctr"/>
+          <a:lstStyle/>
+          <a:p>
+            <a:pPr algn="ctr"/>
+          </a:p>
+        </p:txBody>
+      </p:sp>
+      <p:sp>
+        <p:nvSpPr>
+          <p:cNvPr id="8" name="TextBox 7"/>
+          <p:cNvSpPr txBox="1"/>
+          <p:nvPr/>
+        </p:nvSpPr>
+        <p:spPr>
+          <a:xfrm>
+            <a:off x="457200" y="6583680"/>
+            <a:ext cx="2743200" cy="256032"/>
+          </a:xfrm>
+          <a:prstGeom prst="rect">
+            <a:avLst/>
+          </a:prstGeom>
+          <a:noFill/>
+        </p:spPr>
+        <p:txBody>
+          <a:bodyPr wrap="square" anchor="t">
+            <a:spAutoFit/>
+          </a:bodyPr>
+          <a:lstStyle/>
+          <a:p>
+            <a:pPr algn="l"/>
+            <a:r>
+              <a:rPr sz="900" b="0" i="0">
+                <a:solidFill>
+                  <a:srgbClr val="002F5E"/>
+                </a:solidFill>
+                <a:latin typeface="Calibri"/>
+              </a:rPr>
+              <a:t>J. Hayashi</a:t>
             </a:r>
           </a:p>
         </p:txBody>
@@ -7358,8 +10207,113 @@
         </p:nvSpPr>
         <p:spPr>
           <a:xfrm>
-            <a:off x="640080" y="4663440"/>
-            <a:ext cx="10972800" cy="1645920"/>
+            <a:off x="3200400" y="6583680"/>
+            <a:ext cx="5760720" cy="256032"/>
+          </a:xfrm>
+          <a:prstGeom prst="rect">
+            <a:avLst/>
+          </a:prstGeom>
+          <a:noFill/>
+        </p:spPr>
+        <p:txBody>
+          <a:bodyPr wrap="square" anchor="t">
+            <a:spAutoFit/>
+          </a:bodyPr>
+          <a:lstStyle/>
+          <a:p>
+            <a:pPr algn="ctr"/>
+            <a:r>
+              <a:rPr sz="900" b="0" i="0">
+                <a:solidFill>
+                  <a:srgbClr val="636363"/>
+                </a:solidFill>
+                <a:latin typeface="Calibri"/>
+              </a:rPr>
+              <a:t>quizgen — Automated Test Assembly</a:t>
+            </a:r>
+          </a:p>
+        </p:txBody>
+      </p:sp>
+      <p:sp>
+        <p:nvSpPr>
+          <p:cNvPr id="10" name="TextBox 9"/>
+          <p:cNvSpPr txBox="1"/>
+          <p:nvPr/>
+        </p:nvSpPr>
+        <p:spPr>
+          <a:xfrm>
+            <a:off x="8778240" y="6583680"/>
+            <a:ext cx="2926080" cy="256032"/>
+          </a:xfrm>
+          <a:prstGeom prst="rect">
+            <a:avLst/>
+          </a:prstGeom>
+          <a:noFill/>
+        </p:spPr>
+        <p:txBody>
+          <a:bodyPr wrap="square" anchor="t">
+            <a:spAutoFit/>
+          </a:bodyPr>
+          <a:lstStyle/>
+          <a:p>
+            <a:pPr algn="r"/>
+            <a:r>
+              <a:rPr sz="900" b="0" i="0">
+                <a:solidFill>
+                  <a:srgbClr val="002F5E"/>
+                </a:solidFill>
+                <a:latin typeface="Calibri"/>
+              </a:rPr>
+              <a:t>FAU Erlangen-Nürnberg   7</a:t>
+            </a:r>
+          </a:p>
+        </p:txBody>
+      </p:sp>
+      <p:sp>
+        <p:nvSpPr>
+          <p:cNvPr id="11" name="TextBox 10"/>
+          <p:cNvSpPr txBox="1"/>
+          <p:nvPr/>
+        </p:nvSpPr>
+        <p:spPr>
+          <a:xfrm>
+            <a:off x="640080" y="1143000"/>
+            <a:ext cx="5486400" cy="365760"/>
+          </a:xfrm>
+          <a:prstGeom prst="rect">
+            <a:avLst/>
+          </a:prstGeom>
+          <a:noFill/>
+        </p:spPr>
+        <p:txBody>
+          <a:bodyPr wrap="square" anchor="t">
+            <a:spAutoFit/>
+          </a:bodyPr>
+          <a:lstStyle/>
+          <a:p>
+            <a:pPr algn="l"/>
+            <a:r>
+              <a:rPr sz="1700" b="1" i="0">
+                <a:solidFill>
+                  <a:srgbClr val="002F5E"/>
+                </a:solidFill>
+                <a:latin typeface="Calibri"/>
+              </a:rPr>
+              <a:t>DEDUP (--dedup)</a:t>
+            </a:r>
+          </a:p>
+        </p:txBody>
+      </p:sp>
+      <p:sp>
+        <p:nvSpPr>
+          <p:cNvPr id="12" name="TextBox 11"/>
+          <p:cNvSpPr txBox="1"/>
+          <p:nvPr/>
+        </p:nvSpPr>
+        <p:spPr>
+          <a:xfrm>
+            <a:off x="640080" y="1554480"/>
+            <a:ext cx="5303520" cy="2194560"/>
           </a:xfrm>
           <a:prstGeom prst="rect">
             <a:avLst/>
@@ -7374,49 +10328,406 @@
           <a:p>
             <a:pPr>
               <a:spcAft>
-                <a:spcPts val="800"/>
+                <a:spcPts val="700"/>
               </a:spcAft>
             </a:pPr>
             <a:r>
-              <a:rPr sz="1600">
-                <a:solidFill>
-                  <a:srgbClr val="333333"/>
-                </a:solidFill>
-                <a:latin typeface="Calibri"/>
-              </a:rPr>
-              <a:t>• Writes one Quiz JSON per version (each embeds the resolved blueprint).</a:t>
+              <a:rPr sz="1500">
+                <a:solidFill>
+                  <a:srgbClr val="222222"/>
+                </a:solidFill>
+                <a:latin typeface="Calibri"/>
+              </a:rPr>
+              <a:t>• Token-Jaccard over stem+answer(+options) — offline, always on.</a:t>
             </a:r>
           </a:p>
           <a:p>
             <a:pPr>
               <a:spcAft>
-                <a:spcPts val="800"/>
+                <a:spcPts val="700"/>
               </a:spcAft>
             </a:pPr>
             <a:r>
-              <a:rPr sz="1600">
-                <a:solidFill>
-                  <a:srgbClr val="333333"/>
-                </a:solidFill>
-                <a:latin typeface="Calibri"/>
-              </a:rPr>
-              <a:t>• Standalone entry points too: python -m quizgen.assemble, python -m quizgen.validate.</a:t>
+              <a:rPr sz="1500">
+                <a:solidFill>
+                  <a:srgbClr val="222222"/>
+                </a:solidFill>
+                <a:latin typeface="Calibri"/>
+              </a:rPr>
+              <a:t>• Optional embedding cosine — catches paraphrases.</a:t>
             </a:r>
           </a:p>
           <a:p>
             <a:pPr>
               <a:spcAft>
-                <a:spcPts val="800"/>
+                <a:spcPts val="700"/>
               </a:spcAft>
             </a:pPr>
             <a:r>
-              <a:rPr sz="1600">
-                <a:solidFill>
-                  <a:srgbClr val="333333"/>
-                </a:solidFill>
-                <a:latin typeface="Calibri"/>
-              </a:rPr>
-              <a:t>• Exits non-zero on any non-compliant version → composes in scripts &amp; CI.</a:t>
+              <a:rPr sz="1500">
+                <a:solidFill>
+                  <a:srgbClr val="222222"/>
+                </a:solidFill>
+                <a:latin typeface="Calibri"/>
+              </a:rPr>
+              <a:t>• Drops dups from the pool; MIP also forbids dup pairs across versions.</a:t>
+            </a:r>
+          </a:p>
+        </p:txBody>
+      </p:sp>
+      <p:sp>
+        <p:nvSpPr>
+          <p:cNvPr id="13" name="Rectangle 12"/>
+          <p:cNvSpPr/>
+          <p:nvPr/>
+        </p:nvSpPr>
+        <p:spPr>
+          <a:xfrm>
+            <a:off x="640080" y="3931920"/>
+            <a:ext cx="5212080" cy="1005840"/>
+          </a:xfrm>
+          <a:prstGeom prst="rect">
+            <a:avLst/>
+          </a:prstGeom>
+          <a:solidFill>
+            <a:srgbClr val="F0F0F2"/>
+          </a:solidFill>
+          <a:ln w="15875">
+            <a:solidFill>
+              <a:srgbClr val="636363"/>
+            </a:solidFill>
+          </a:ln>
+          <a:effectLst/>
+        </p:spPr>
+        <p:style>
+          <a:lnRef idx="1">
+            <a:schemeClr val="accent1"/>
+          </a:lnRef>
+          <a:fillRef idx="3">
+            <a:schemeClr val="accent1"/>
+          </a:fillRef>
+          <a:effectRef idx="2">
+            <a:schemeClr val="accent1"/>
+          </a:effectRef>
+          <a:fontRef idx="minor">
+            <a:schemeClr val="lt1"/>
+          </a:fontRef>
+        </p:style>
+        <p:txBody>
+          <a:bodyPr rtlCol="0" anchor="ctr" wrap="square" lIns="45720" rIns="45720" tIns="27432" bIns="27432"/>
+          <a:lstStyle/>
+          <a:p>
+            <a:pPr algn="ctr"/>
+            <a:r>
+              <a:rPr sz="1400" b="0" i="0">
+                <a:solidFill>
+                  <a:srgbClr val="222222"/>
+                </a:solidFill>
+                <a:latin typeface="Consolas"/>
+              </a:rPr>
+              <a:t>sim(q₁,q₂) = |T(q₁) ∩ T(q₂)| / |T(q₁) ∪ T(q₂)|</a:t>
+            </a:r>
+          </a:p>
+        </p:txBody>
+      </p:sp>
+      <p:sp>
+        <p:nvSpPr>
+          <p:cNvPr id="14" name="TextBox 13"/>
+          <p:cNvSpPr txBox="1"/>
+          <p:nvPr/>
+        </p:nvSpPr>
+        <p:spPr>
+          <a:xfrm>
+            <a:off x="6400800" y="1143000"/>
+            <a:ext cx="5486400" cy="365760"/>
+          </a:xfrm>
+          <a:prstGeom prst="rect">
+            <a:avLst/>
+          </a:prstGeom>
+          <a:noFill/>
+        </p:spPr>
+        <p:txBody>
+          <a:bodyPr wrap="square" anchor="t">
+            <a:spAutoFit/>
+          </a:bodyPr>
+          <a:lstStyle/>
+          <a:p>
+            <a:pPr algn="l"/>
+            <a:r>
+              <a:rPr sz="1700" b="1" i="0">
+                <a:solidFill>
+                  <a:srgbClr val="31A354"/>
+                </a:solidFill>
+                <a:latin typeface="Calibri"/>
+              </a:rPr>
+              <a:t>VALIDATE (--validate)</a:t>
+            </a:r>
+          </a:p>
+        </p:txBody>
+      </p:sp>
+      <p:sp>
+        <p:nvSpPr>
+          <p:cNvPr id="15" name="Rounded Rectangle 14"/>
+          <p:cNvSpPr/>
+          <p:nvPr/>
+        </p:nvSpPr>
+        <p:spPr>
+          <a:xfrm>
+            <a:off x="6400800" y="1645920"/>
+            <a:ext cx="2560320" cy="822960"/>
+          </a:xfrm>
+          <a:prstGeom prst="roundRect">
+            <a:avLst/>
+          </a:prstGeom>
+          <a:solidFill>
+            <a:srgbClr val="E5F5E0"/>
+          </a:solidFill>
+          <a:ln w="15875">
+            <a:solidFill>
+              <a:srgbClr val="31A354"/>
+            </a:solidFill>
+          </a:ln>
+          <a:effectLst/>
+        </p:spPr>
+        <p:style>
+          <a:lnRef idx="1">
+            <a:schemeClr val="accent1"/>
+          </a:lnRef>
+          <a:fillRef idx="3">
+            <a:schemeClr val="accent1"/>
+          </a:fillRef>
+          <a:effectRef idx="2">
+            <a:schemeClr val="accent1"/>
+          </a:effectRef>
+          <a:fontRef idx="minor">
+            <a:schemeClr val="lt1"/>
+          </a:fontRef>
+        </p:style>
+        <p:txBody>
+          <a:bodyPr rtlCol="0" anchor="ctr" wrap="square" lIns="45720" rIns="45720" tIns="27432" bIns="27432"/>
+          <a:lstStyle/>
+          <a:p>
+            <a:pPr algn="ctr"/>
+            <a:r>
+              <a:rPr sz="1200" b="1" i="0">
+                <a:solidFill>
+                  <a:srgbClr val="222222"/>
+                </a:solidFill>
+                <a:latin typeface="Calibri"/>
+              </a:rPr>
+              <a:t>Schema validity</a:t>
+            </a:r>
+          </a:p>
+        </p:txBody>
+      </p:sp>
+      <p:sp>
+        <p:nvSpPr>
+          <p:cNvPr id="16" name="Rounded Rectangle 15"/>
+          <p:cNvSpPr/>
+          <p:nvPr/>
+        </p:nvSpPr>
+        <p:spPr>
+          <a:xfrm>
+            <a:off x="9098280" y="1645920"/>
+            <a:ext cx="2560320" cy="822960"/>
+          </a:xfrm>
+          <a:prstGeom prst="roundRect">
+            <a:avLst/>
+          </a:prstGeom>
+          <a:solidFill>
+            <a:srgbClr val="DEEBF7"/>
+          </a:solidFill>
+          <a:ln w="15875">
+            <a:solidFill>
+              <a:srgbClr val="002F5E"/>
+            </a:solidFill>
+          </a:ln>
+          <a:effectLst/>
+        </p:spPr>
+        <p:style>
+          <a:lnRef idx="1">
+            <a:schemeClr val="accent1"/>
+          </a:lnRef>
+          <a:fillRef idx="3">
+            <a:schemeClr val="accent1"/>
+          </a:fillRef>
+          <a:effectRef idx="2">
+            <a:schemeClr val="accent1"/>
+          </a:effectRef>
+          <a:fontRef idx="minor">
+            <a:schemeClr val="lt1"/>
+          </a:fontRef>
+        </p:style>
+        <p:txBody>
+          <a:bodyPr rtlCol="0" anchor="ctr" wrap="square" lIns="45720" rIns="45720" tIns="27432" bIns="27432"/>
+          <a:lstStyle/>
+          <a:p>
+            <a:pPr algn="ctr"/>
+            <a:r>
+              <a:rPr sz="1200" b="1" i="0">
+                <a:solidFill>
+                  <a:srgbClr val="222222"/>
+                </a:solidFill>
+                <a:latin typeface="Calibri"/>
+              </a:rPr>
+              <a:t>Blueprint compliance</a:t>
+            </a:r>
+          </a:p>
+          <a:p>
+            <a:pPr algn="ctr"/>
+            <a:r>
+              <a:rPr sz="1200" b="1" i="0">
+                <a:solidFill>
+                  <a:srgbClr val="222222"/>
+                </a:solidFill>
+                <a:latin typeface="Calibri"/>
+              </a:rPr>
+              <a:t>(chapter · difficulty · type)</a:t>
+            </a:r>
+          </a:p>
+        </p:txBody>
+      </p:sp>
+      <p:sp>
+        <p:nvSpPr>
+          <p:cNvPr id="17" name="Rounded Rectangle 16"/>
+          <p:cNvSpPr/>
+          <p:nvPr/>
+        </p:nvSpPr>
+        <p:spPr>
+          <a:xfrm>
+            <a:off x="6400800" y="2606040"/>
+            <a:ext cx="2560320" cy="822960"/>
+          </a:xfrm>
+          <a:prstGeom prst="roundRect">
+            <a:avLst/>
+          </a:prstGeom>
+          <a:solidFill>
+            <a:srgbClr val="E5F5E0"/>
+          </a:solidFill>
+          <a:ln w="15875">
+            <a:solidFill>
+              <a:srgbClr val="31A354"/>
+            </a:solidFill>
+          </a:ln>
+          <a:effectLst/>
+        </p:spPr>
+        <p:style>
+          <a:lnRef idx="1">
+            <a:schemeClr val="accent1"/>
+          </a:lnRef>
+          <a:fillRef idx="3">
+            <a:schemeClr val="accent1"/>
+          </a:fillRef>
+          <a:effectRef idx="2">
+            <a:schemeClr val="accent1"/>
+          </a:effectRef>
+          <a:fontRef idx="minor">
+            <a:schemeClr val="lt1"/>
+          </a:fontRef>
+        </p:style>
+        <p:txBody>
+          <a:bodyPr rtlCol="0" anchor="ctr" wrap="square" lIns="45720" rIns="45720" tIns="27432" bIns="27432"/>
+          <a:lstStyle/>
+          <a:p>
+            <a:pPr algn="ctr"/>
+            <a:r>
+              <a:rPr sz="1200" b="1" i="0">
+                <a:solidFill>
+                  <a:srgbClr val="222222"/>
+                </a:solidFill>
+                <a:latin typeface="Calibri"/>
+              </a:rPr>
+              <a:t>Grounding coverage</a:t>
+            </a:r>
+          </a:p>
+        </p:txBody>
+      </p:sp>
+      <p:sp>
+        <p:nvSpPr>
+          <p:cNvPr id="18" name="Rounded Rectangle 17"/>
+          <p:cNvSpPr/>
+          <p:nvPr/>
+        </p:nvSpPr>
+        <p:spPr>
+          <a:xfrm>
+            <a:off x="9098280" y="2606040"/>
+            <a:ext cx="2560320" cy="822960"/>
+          </a:xfrm>
+          <a:prstGeom prst="roundRect">
+            <a:avLst/>
+          </a:prstGeom>
+          <a:solidFill>
+            <a:srgbClr val="DEEBF7"/>
+          </a:solidFill>
+          <a:ln w="15875">
+            <a:solidFill>
+              <a:srgbClr val="002F5E"/>
+            </a:solidFill>
+          </a:ln>
+          <a:effectLst/>
+        </p:spPr>
+        <p:style>
+          <a:lnRef idx="1">
+            <a:schemeClr val="accent1"/>
+          </a:lnRef>
+          <a:fillRef idx="3">
+            <a:schemeClr val="accent1"/>
+          </a:fillRef>
+          <a:effectRef idx="2">
+            <a:schemeClr val="accent1"/>
+          </a:effectRef>
+          <a:fontRef idx="minor">
+            <a:schemeClr val="lt1"/>
+          </a:fontRef>
+        </p:style>
+        <p:txBody>
+          <a:bodyPr rtlCol="0" anchor="ctr" wrap="square" lIns="45720" rIns="45720" tIns="27432" bIns="27432"/>
+          <a:lstStyle/>
+          <a:p>
+            <a:pPr algn="ctr"/>
+            <a:r>
+              <a:rPr sz="1200" b="1" i="0">
+                <a:solidFill>
+                  <a:srgbClr val="222222"/>
+                </a:solidFill>
+                <a:latin typeface="Calibri"/>
+              </a:rPr>
+              <a:t>Duplicate rate</a:t>
+            </a:r>
+          </a:p>
+        </p:txBody>
+      </p:sp>
+      <p:sp>
+        <p:nvSpPr>
+          <p:cNvPr id="19" name="TextBox 18"/>
+          <p:cNvSpPr txBox="1"/>
+          <p:nvPr/>
+        </p:nvSpPr>
+        <p:spPr>
+          <a:xfrm>
+            <a:off x="6400800" y="3703320"/>
+            <a:ext cx="5303520" cy="1463040"/>
+          </a:xfrm>
+          <a:prstGeom prst="rect">
+            <a:avLst/>
+          </a:prstGeom>
+          <a:noFill/>
+        </p:spPr>
+        <p:txBody>
+          <a:bodyPr wrap="square" anchor="t">
+            <a:spAutoFit/>
+          </a:bodyPr>
+          <a:lstStyle/>
+          <a:p>
+            <a:pPr algn="l"/>
+            <a:r>
+              <a:rPr sz="1400" b="0" i="1">
+                <a:solidFill>
+                  <a:srgbClr val="636363"/>
+                </a:solidFill>
+                <a:latin typeface="Calibri"/>
+              </a:rPr>
+              <a:t>Overall PASS only if no schema-invalid items and (if checked) the blueprint matches exactly. Exit code feeds CI.</a:t>
             </a:r>
           </a:p>
         </p:txBody>
@@ -7448,13 +10759,13 @@
         <p:spPr>
           <a:xfrm>
             <a:off x="0" y="0"/>
-            <a:ext cx="12191695" cy="1051560"/>
+            <a:ext cx="12191695" cy="914400"/>
           </a:xfrm>
           <a:prstGeom prst="rect">
             <a:avLst/>
           </a:prstGeom>
           <a:solidFill>
-            <a:srgbClr val="1F2D3D"/>
+            <a:srgbClr val="002F5E"/>
           </a:solidFill>
           <a:ln>
             <a:noFill/>
@@ -7485,95 +10796,23 @@
       </p:sp>
       <p:sp>
         <p:nvSpPr>
-          <p:cNvPr id="3" name="TextBox 2"/>
-          <p:cNvSpPr txBox="1"/>
-          <p:nvPr/>
-        </p:nvSpPr>
-        <p:spPr>
-          <a:xfrm>
-            <a:off x="502920" y="164592"/>
-            <a:ext cx="11155680" cy="731520"/>
-          </a:xfrm>
-          <a:prstGeom prst="rect">
-            <a:avLst/>
-          </a:prstGeom>
-          <a:noFill/>
-        </p:spPr>
-        <p:txBody>
-          <a:bodyPr wrap="square" anchor="ctr">
-            <a:spAutoFit/>
-          </a:bodyPr>
-          <a:lstStyle/>
-          <a:p>
-            <a:pPr algn="l"/>
-            <a:r>
-              <a:rPr sz="3000" b="1" i="0">
-                <a:solidFill>
-                  <a:srgbClr val="FFFFFF"/>
-                </a:solidFill>
-                <a:latin typeface="Calibri"/>
-              </a:rPr>
-              <a:t>Where each technique comes from</a:t>
-            </a:r>
-          </a:p>
-        </p:txBody>
-      </p:sp>
-      <p:sp>
-        <p:nvSpPr>
-          <p:cNvPr id="4" name="TextBox 3"/>
-          <p:cNvSpPr txBox="1"/>
-          <p:nvPr/>
-        </p:nvSpPr>
-        <p:spPr>
-          <a:xfrm>
-            <a:off x="530352" y="18288"/>
-            <a:ext cx="10972800" cy="274320"/>
-          </a:xfrm>
-          <a:prstGeom prst="rect">
-            <a:avLst/>
-          </a:prstGeom>
-          <a:noFill/>
-        </p:spPr>
-        <p:txBody>
-          <a:bodyPr wrap="square" anchor="t">
-            <a:spAutoFit/>
-          </a:bodyPr>
-          <a:lstStyle/>
-          <a:p>
-            <a:pPr algn="l"/>
-            <a:r>
-              <a:rPr sz="1200" b="1" i="0">
-                <a:solidFill>
-                  <a:srgbClr val="DEEBF7"/>
-                </a:solidFill>
-                <a:latin typeface="Calibri"/>
-              </a:rPr>
-              <a:t>TECHNIQUE → SOURCE LINEAGE</a:t>
-            </a:r>
-          </a:p>
-        </p:txBody>
-      </p:sp>
-      <p:sp>
-        <p:nvSpPr>
-          <p:cNvPr id="5" name="Rounded Rectangle 4"/>
+          <p:cNvPr id="3" name="Rectangle 2"/>
           <p:cNvSpPr/>
           <p:nvPr/>
         </p:nvSpPr>
         <p:spPr>
           <a:xfrm>
-            <a:off x="640080" y="1371600"/>
-            <a:ext cx="4937760" cy="530352"/>
-          </a:xfrm>
-          <a:prstGeom prst="roundRect">
+            <a:off x="0" y="914400"/>
+            <a:ext cx="12191695" cy="54864"/>
+          </a:xfrm>
+          <a:prstGeom prst="rect">
             <a:avLst/>
           </a:prstGeom>
           <a:solidFill>
-            <a:srgbClr val="3182BD"/>
+            <a:srgbClr val="00B1EB"/>
           </a:solidFill>
-          <a:ln w="15875">
-            <a:solidFill>
-              <a:srgbClr val="3182BD"/>
-            </a:solidFill>
+          <a:ln>
+            <a:noFill/>
           </a:ln>
           <a:effectLst/>
         </p:spPr>
@@ -7592,43 +10831,137 @@
           </a:fontRef>
         </p:style>
         <p:txBody>
-          <a:bodyPr rtlCol="0" anchor="ctr" wrap="square" lIns="45720" rIns="45720" tIns="27432" bIns="27432"/>
-          <a:lstStyle/>
-          <a:p>
-            <a:pPr algn="ctr"/>
-            <a:r>
-              <a:rPr sz="1400" b="1" i="0">
+          <a:bodyPr rtlCol="0" anchor="ctr"/>
+          <a:lstStyle/>
+          <a:p>
+            <a:pPr algn="ctr"/>
+          </a:p>
+        </p:txBody>
+      </p:sp>
+      <p:sp>
+        <p:nvSpPr>
+          <p:cNvPr id="4" name="TextBox 3"/>
+          <p:cNvSpPr txBox="1"/>
+          <p:nvPr/>
+        </p:nvSpPr>
+        <p:spPr>
+          <a:xfrm>
+            <a:off x="457200" y="109728"/>
+            <a:ext cx="10058400" cy="713232"/>
+          </a:xfrm>
+          <a:prstGeom prst="rect">
+            <a:avLst/>
+          </a:prstGeom>
+          <a:noFill/>
+        </p:spPr>
+        <p:txBody>
+          <a:bodyPr wrap="square" anchor="ctr">
+            <a:spAutoFit/>
+          </a:bodyPr>
+          <a:lstStyle/>
+          <a:p>
+            <a:pPr algn="l"/>
+            <a:r>
+              <a:rPr sz="2800" b="1" i="0">
                 <a:solidFill>
                   <a:srgbClr val="FFFFFF"/>
                 </a:solidFill>
                 <a:latin typeface="Calibri"/>
               </a:rPr>
-              <a:t>Implemented in code</a:t>
-            </a:r>
-          </a:p>
-        </p:txBody>
-      </p:sp>
-      <p:sp>
-        <p:nvSpPr>
-          <p:cNvPr id="6" name="Rounded Rectangle 5"/>
+              <a:t>Using it</a:t>
+            </a:r>
+          </a:p>
+        </p:txBody>
+      </p:sp>
+      <p:sp>
+        <p:nvSpPr>
+          <p:cNvPr id="5" name="TextBox 4"/>
+          <p:cNvSpPr txBox="1"/>
+          <p:nvPr/>
+        </p:nvSpPr>
+        <p:spPr>
+          <a:xfrm>
+            <a:off x="10881360" y="164592"/>
+            <a:ext cx="1188720" cy="640080"/>
+          </a:xfrm>
+          <a:prstGeom prst="rect">
+            <a:avLst/>
+          </a:prstGeom>
+          <a:noFill/>
+        </p:spPr>
+        <p:txBody>
+          <a:bodyPr wrap="square" anchor="ctr">
+            <a:spAutoFit/>
+          </a:bodyPr>
+          <a:lstStyle/>
+          <a:p>
+            <a:pPr algn="r"/>
+            <a:r>
+              <a:rPr sz="2600" b="1" i="0">
+                <a:solidFill>
+                  <a:srgbClr val="00B1EB"/>
+                </a:solidFill>
+                <a:latin typeface="Calibri"/>
+              </a:rPr>
+              <a:t>FAU</a:t>
+            </a:r>
+          </a:p>
+        </p:txBody>
+      </p:sp>
+      <p:sp>
+        <p:nvSpPr>
+          <p:cNvPr id="6" name="TextBox 5"/>
+          <p:cNvSpPr txBox="1"/>
+          <p:nvPr/>
+        </p:nvSpPr>
+        <p:spPr>
+          <a:xfrm>
+            <a:off x="475488" y="-18288"/>
+            <a:ext cx="9144000" cy="256032"/>
+          </a:xfrm>
+          <a:prstGeom prst="rect">
+            <a:avLst/>
+          </a:prstGeom>
+          <a:noFill/>
+        </p:spPr>
+        <p:txBody>
+          <a:bodyPr wrap="square" anchor="t">
+            <a:spAutoFit/>
+          </a:bodyPr>
+          <a:lstStyle/>
+          <a:p>
+            <a:pPr algn="l"/>
+            <a:r>
+              <a:rPr sz="1100" b="1" i="0">
+                <a:solidFill>
+                  <a:srgbClr val="00B1EB"/>
+                </a:solidFill>
+                <a:latin typeface="Calibri"/>
+              </a:rPr>
+              <a:t>python -m quizgen</a:t>
+            </a:r>
+          </a:p>
+        </p:txBody>
+      </p:sp>
+      <p:sp>
+        <p:nvSpPr>
+          <p:cNvPr id="7" name="Rectangle 6"/>
           <p:cNvSpPr/>
           <p:nvPr/>
         </p:nvSpPr>
         <p:spPr>
           <a:xfrm>
-            <a:off x="5669280" y="1371600"/>
-            <a:ext cx="5943600" cy="530352"/>
-          </a:xfrm>
-          <a:prstGeom prst="roundRect">
+            <a:off x="0" y="6565392"/>
+            <a:ext cx="12191695" cy="18288"/>
+          </a:xfrm>
+          <a:prstGeom prst="rect">
             <a:avLst/>
           </a:prstGeom>
           <a:solidFill>
-            <a:srgbClr val="3182BD"/>
+            <a:srgbClr val="00B1EB"/>
           </a:solidFill>
-          <a:ln w="15875">
-            <a:solidFill>
-              <a:srgbClr val="3182BD"/>
-            </a:solidFill>
+          <a:ln>
+            <a:noFill/>
           </a:ln>
           <a:effectLst/>
         </p:spPr>
@@ -7647,42 +10980,173 @@
           </a:fontRef>
         </p:style>
         <p:txBody>
-          <a:bodyPr rtlCol="0" anchor="ctr" wrap="square" lIns="45720" rIns="45720" tIns="27432" bIns="27432"/>
-          <a:lstStyle/>
-          <a:p>
-            <a:pPr algn="ctr"/>
-            <a:r>
-              <a:rPr sz="1400" b="1" i="0">
-                <a:solidFill>
-                  <a:srgbClr val="FFFFFF"/>
-                </a:solidFill>
-                <a:latin typeface="Calibri"/>
-              </a:rPr>
-              <a:t>Source lineage</a:t>
-            </a:r>
-          </a:p>
-        </p:txBody>
-      </p:sp>
-      <p:sp>
-        <p:nvSpPr>
-          <p:cNvPr id="7" name="Rectangle 6"/>
+          <a:bodyPr rtlCol="0" anchor="ctr"/>
+          <a:lstStyle/>
+          <a:p>
+            <a:pPr algn="ctr"/>
+          </a:p>
+        </p:txBody>
+      </p:sp>
+      <p:sp>
+        <p:nvSpPr>
+          <p:cNvPr id="8" name="TextBox 7"/>
+          <p:cNvSpPr txBox="1"/>
+          <p:nvPr/>
+        </p:nvSpPr>
+        <p:spPr>
+          <a:xfrm>
+            <a:off x="457200" y="6583680"/>
+            <a:ext cx="2743200" cy="256032"/>
+          </a:xfrm>
+          <a:prstGeom prst="rect">
+            <a:avLst/>
+          </a:prstGeom>
+          <a:noFill/>
+        </p:spPr>
+        <p:txBody>
+          <a:bodyPr wrap="square" anchor="t">
+            <a:spAutoFit/>
+          </a:bodyPr>
+          <a:lstStyle/>
+          <a:p>
+            <a:pPr algn="l"/>
+            <a:r>
+              <a:rPr sz="900" b="0" i="0">
+                <a:solidFill>
+                  <a:srgbClr val="002F5E"/>
+                </a:solidFill>
+                <a:latin typeface="Calibri"/>
+              </a:rPr>
+              <a:t>J. Hayashi</a:t>
+            </a:r>
+          </a:p>
+        </p:txBody>
+      </p:sp>
+      <p:sp>
+        <p:nvSpPr>
+          <p:cNvPr id="9" name="TextBox 8"/>
+          <p:cNvSpPr txBox="1"/>
+          <p:nvPr/>
+        </p:nvSpPr>
+        <p:spPr>
+          <a:xfrm>
+            <a:off x="3200400" y="6583680"/>
+            <a:ext cx="5760720" cy="256032"/>
+          </a:xfrm>
+          <a:prstGeom prst="rect">
+            <a:avLst/>
+          </a:prstGeom>
+          <a:noFill/>
+        </p:spPr>
+        <p:txBody>
+          <a:bodyPr wrap="square" anchor="t">
+            <a:spAutoFit/>
+          </a:bodyPr>
+          <a:lstStyle/>
+          <a:p>
+            <a:pPr algn="ctr"/>
+            <a:r>
+              <a:rPr sz="900" b="0" i="0">
+                <a:solidFill>
+                  <a:srgbClr val="636363"/>
+                </a:solidFill>
+                <a:latin typeface="Calibri"/>
+              </a:rPr>
+              <a:t>quizgen — Automated Test Assembly</a:t>
+            </a:r>
+          </a:p>
+        </p:txBody>
+      </p:sp>
+      <p:sp>
+        <p:nvSpPr>
+          <p:cNvPr id="10" name="TextBox 9"/>
+          <p:cNvSpPr txBox="1"/>
+          <p:nvPr/>
+        </p:nvSpPr>
+        <p:spPr>
+          <a:xfrm>
+            <a:off x="8778240" y="6583680"/>
+            <a:ext cx="2926080" cy="256032"/>
+          </a:xfrm>
+          <a:prstGeom prst="rect">
+            <a:avLst/>
+          </a:prstGeom>
+          <a:noFill/>
+        </p:spPr>
+        <p:txBody>
+          <a:bodyPr wrap="square" anchor="t">
+            <a:spAutoFit/>
+          </a:bodyPr>
+          <a:lstStyle/>
+          <a:p>
+            <a:pPr algn="r"/>
+            <a:r>
+              <a:rPr sz="900" b="0" i="0">
+                <a:solidFill>
+                  <a:srgbClr val="002F5E"/>
+                </a:solidFill>
+                <a:latin typeface="Calibri"/>
+              </a:rPr>
+              <a:t>FAU Erlangen-Nürnberg   8</a:t>
+            </a:r>
+          </a:p>
+        </p:txBody>
+      </p:sp>
+      <p:sp>
+        <p:nvSpPr>
+          <p:cNvPr id="11" name="TextBox 10"/>
+          <p:cNvSpPr txBox="1"/>
+          <p:nvPr/>
+        </p:nvSpPr>
+        <p:spPr>
+          <a:xfrm>
+            <a:off x="640080" y="1188720"/>
+            <a:ext cx="10972800" cy="365760"/>
+          </a:xfrm>
+          <a:prstGeom prst="rect">
+            <a:avLst/>
+          </a:prstGeom>
+          <a:noFill/>
+        </p:spPr>
+        <p:txBody>
+          <a:bodyPr wrap="square" anchor="t">
+            <a:spAutoFit/>
+          </a:bodyPr>
+          <a:lstStyle/>
+          <a:p>
+            <a:pPr algn="l"/>
+            <a:r>
+              <a:rPr sz="1600" b="1" i="0">
+                <a:solidFill>
+                  <a:srgbClr val="222222"/>
+                </a:solidFill>
+                <a:latin typeface="Calibri"/>
+              </a:rPr>
+              <a:t>Pure command line (no YAML):</a:t>
+            </a:r>
+          </a:p>
+        </p:txBody>
+      </p:sp>
+      <p:sp>
+        <p:nvSpPr>
+          <p:cNvPr id="12" name="Rectangle 11"/>
           <p:cNvSpPr/>
           <p:nvPr/>
         </p:nvSpPr>
         <p:spPr>
           <a:xfrm>
-            <a:off x="640080" y="1901952"/>
-            <a:ext cx="4937760" cy="530352"/>
+            <a:off x="640080" y="1600200"/>
+            <a:ext cx="10972800" cy="1371600"/>
           </a:xfrm>
           <a:prstGeom prst="rect">
             <a:avLst/>
           </a:prstGeom>
           <a:solidFill>
-            <a:srgbClr val="F0F0F2"/>
+            <a:srgbClr val="002F5E"/>
           </a:solidFill>
           <a:ln w="15875">
             <a:solidFill>
-              <a:srgbClr val="636363"/>
+              <a:srgbClr val="002F5E"/>
             </a:solidFill>
           </a:ln>
           <a:effectLst/>
@@ -7707,37 +11171,120 @@
           <a:p>
             <a:pPr algn="ctr"/>
             <a:r>
-              <a:rPr sz="1200" b="0" i="0">
-                <a:solidFill>
-                  <a:srgbClr val="333333"/>
-                </a:solidFill>
-                <a:latin typeface="Calibri"/>
-              </a:rPr>
-              <a:t>Test assembly as 0–1 MIP</a:t>
-            </a:r>
-          </a:p>
-        </p:txBody>
-      </p:sp>
-      <p:sp>
-        <p:nvSpPr>
-          <p:cNvPr id="8" name="Rectangle 7"/>
+              <a:rPr sz="1300" b="0" i="0">
+                <a:solidFill>
+                  <a:srgbClr val="FFFFFF"/>
+                </a:solidFill>
+                <a:latin typeface="Consolas"/>
+              </a:rPr>
+              <a:t>python -m quizgen --pool questions.json \</a:t>
+            </a:r>
+          </a:p>
+          <a:p>
+            <a:pPr algn="ctr"/>
+            <a:r>
+              <a:rPr sz="1300" b="0" i="0">
+                <a:solidFill>
+                  <a:srgbClr val="FFFFFF"/>
+                </a:solidFill>
+                <a:latin typeface="Consolas"/>
+              </a:rPr>
+              <a:t>    --total 20 --chapters 1:10,2:6,3:4 \</a:t>
+            </a:r>
+          </a:p>
+          <a:p>
+            <a:pPr algn="ctr"/>
+            <a:r>
+              <a:rPr sz="1300" b="0" i="0">
+                <a:solidFill>
+                  <a:srgbClr val="FFFFFF"/>
+                </a:solidFill>
+                <a:latin typeface="Consolas"/>
+              </a:rPr>
+              <a:t>    --difficulty 0.4,0.4,0.2 \</a:t>
+            </a:r>
+          </a:p>
+          <a:p>
+            <a:pPr algn="ctr"/>
+            <a:r>
+              <a:rPr sz="1300" b="0" i="0">
+                <a:solidFill>
+                  <a:srgbClr val="FFFFFF"/>
+                </a:solidFill>
+                <a:latin typeface="Consolas"/>
+              </a:rPr>
+              <a:t>    --qtype-mix mcq:0.4,true_false:0.2,short_answer:0.2,cloze:0.2 \</a:t>
+            </a:r>
+          </a:p>
+          <a:p>
+            <a:pPr algn="ctr"/>
+            <a:r>
+              <a:rPr sz="1300" b="0" i="0">
+                <a:solidFill>
+                  <a:srgbClr val="FFFFFF"/>
+                </a:solidFill>
+                <a:latin typeface="Consolas"/>
+              </a:rPr>
+              <a:t>    --versions 2 --selector mip</a:t>
+            </a:r>
+          </a:p>
+        </p:txBody>
+      </p:sp>
+      <p:sp>
+        <p:nvSpPr>
+          <p:cNvPr id="13" name="TextBox 12"/>
+          <p:cNvSpPr txBox="1"/>
+          <p:nvPr/>
+        </p:nvSpPr>
+        <p:spPr>
+          <a:xfrm>
+            <a:off x="640080" y="3246120"/>
+            <a:ext cx="10972800" cy="365760"/>
+          </a:xfrm>
+          <a:prstGeom prst="rect">
+            <a:avLst/>
+          </a:prstGeom>
+          <a:noFill/>
+        </p:spPr>
+        <p:txBody>
+          <a:bodyPr wrap="square" anchor="t">
+            <a:spAutoFit/>
+          </a:bodyPr>
+          <a:lstStyle/>
+          <a:p>
+            <a:pPr algn="l"/>
+            <a:r>
+              <a:rPr sz="1600" b="1" i="0">
+                <a:solidFill>
+                  <a:srgbClr val="222222"/>
+                </a:solidFill>
+                <a:latin typeface="Calibri"/>
+              </a:rPr>
+              <a:t>Blueprint file + dedup + per-version validation report:</a:t>
+            </a:r>
+          </a:p>
+        </p:txBody>
+      </p:sp>
+      <p:sp>
+        <p:nvSpPr>
+          <p:cNvPr id="14" name="Rectangle 13"/>
           <p:cNvSpPr/>
           <p:nvPr/>
         </p:nvSpPr>
         <p:spPr>
           <a:xfrm>
-            <a:off x="5669280" y="1901952"/>
-            <a:ext cx="5943600" cy="530352"/>
+            <a:off x="640080" y="3657600"/>
+            <a:ext cx="10972800" cy="914400"/>
           </a:xfrm>
           <a:prstGeom prst="rect">
             <a:avLst/>
           </a:prstGeom>
           <a:solidFill>
-            <a:srgbClr val="F0F0F2"/>
+            <a:srgbClr val="002F5E"/>
           </a:solidFill>
           <a:ln w="15875">
             <a:solidFill>
-              <a:srgbClr val="636363"/>
+              <a:srgbClr val="002F5E"/>
             </a:solidFill>
           </a:ln>
           <a:effectLst/>
@@ -7762,687 +11309,39 @@
           <a:p>
             <a:pPr algn="ctr"/>
             <a:r>
-              <a:rPr sz="1200" b="0" i="0">
-                <a:solidFill>
-                  <a:srgbClr val="333333"/>
-                </a:solidFill>
-                <a:latin typeface="Calibri"/>
-              </a:rPr>
-              <a:t>van der Linden 2005 — optimal test design</a:t>
-            </a:r>
-          </a:p>
-        </p:txBody>
-      </p:sp>
-      <p:sp>
-        <p:nvSpPr>
-          <p:cNvPr id="9" name="Rectangle 8"/>
-          <p:cNvSpPr/>
-          <p:nvPr/>
-        </p:nvSpPr>
-        <p:spPr>
-          <a:xfrm>
-            <a:off x="640080" y="2432304"/>
-            <a:ext cx="4937760" cy="530352"/>
-          </a:xfrm>
-          <a:prstGeom prst="rect">
-            <a:avLst/>
-          </a:prstGeom>
-          <a:solidFill>
-            <a:srgbClr val="FFFFFF"/>
-          </a:solidFill>
-          <a:ln w="15875">
-            <a:solidFill>
-              <a:srgbClr val="636363"/>
-            </a:solidFill>
-          </a:ln>
-          <a:effectLst/>
-        </p:spPr>
-        <p:style>
-          <a:lnRef idx="1">
-            <a:schemeClr val="accent1"/>
-          </a:lnRef>
-          <a:fillRef idx="3">
-            <a:schemeClr val="accent1"/>
-          </a:fillRef>
-          <a:effectRef idx="2">
-            <a:schemeClr val="accent1"/>
-          </a:effectRef>
-          <a:fontRef idx="minor">
-            <a:schemeClr val="lt1"/>
-          </a:fontRef>
-        </p:style>
-        <p:txBody>
-          <a:bodyPr rtlCol="0" anchor="ctr" wrap="square" lIns="45720" rIns="45720" tIns="27432" bIns="27432"/>
-          <a:lstStyle/>
-          <a:p>
-            <a:pPr algn="ctr"/>
-            <a:r>
-              <a:rPr sz="1200" b="0" i="0">
-                <a:solidFill>
-                  <a:srgbClr val="333333"/>
-                </a:solidFill>
-                <a:latin typeface="Calibri"/>
-              </a:rPr>
-              <a:t>Quality-weighted selection</a:t>
-            </a:r>
-          </a:p>
-        </p:txBody>
-      </p:sp>
-      <p:sp>
-        <p:nvSpPr>
-          <p:cNvPr id="10" name="Rectangle 9"/>
-          <p:cNvSpPr/>
-          <p:nvPr/>
-        </p:nvSpPr>
-        <p:spPr>
-          <a:xfrm>
-            <a:off x="5669280" y="2432304"/>
-            <a:ext cx="5943600" cy="530352"/>
-          </a:xfrm>
-          <a:prstGeom prst="rect">
-            <a:avLst/>
-          </a:prstGeom>
-          <a:solidFill>
-            <a:srgbClr val="FFFFFF"/>
-          </a:solidFill>
-          <a:ln w="15875">
-            <a:solidFill>
-              <a:srgbClr val="636363"/>
-            </a:solidFill>
-          </a:ln>
-          <a:effectLst/>
-        </p:spPr>
-        <p:style>
-          <a:lnRef idx="1">
-            <a:schemeClr val="accent1"/>
-          </a:lnRef>
-          <a:fillRef idx="3">
-            <a:schemeClr val="accent1"/>
-          </a:fillRef>
-          <a:effectRef idx="2">
-            <a:schemeClr val="accent1"/>
-          </a:effectRef>
-          <a:fontRef idx="minor">
-            <a:schemeClr val="lt1"/>
-          </a:fontRef>
-        </p:style>
-        <p:txBody>
-          <a:bodyPr rtlCol="0" anchor="ctr" wrap="square" lIns="45720" rIns="45720" tIns="27432" bIns="27432"/>
-          <a:lstStyle/>
-          <a:p>
-            <a:pPr algn="ctr"/>
-            <a:r>
-              <a:rPr sz="1200" b="0" i="0">
-                <a:solidFill>
-                  <a:srgbClr val="333333"/>
-                </a:solidFill>
-                <a:latin typeface="Calibri"/>
-              </a:rPr>
-              <a:t>van der Linden 2005 (objective in ATA)</a:t>
-            </a:r>
-          </a:p>
-        </p:txBody>
-      </p:sp>
-      <p:sp>
-        <p:nvSpPr>
-          <p:cNvPr id="11" name="Rectangle 10"/>
-          <p:cNvSpPr/>
-          <p:nvPr/>
-        </p:nvSpPr>
-        <p:spPr>
-          <a:xfrm>
-            <a:off x="640080" y="2962656"/>
-            <a:ext cx="4937760" cy="530352"/>
-          </a:xfrm>
-          <a:prstGeom prst="rect">
-            <a:avLst/>
-          </a:prstGeom>
-          <a:solidFill>
-            <a:srgbClr val="F0F0F2"/>
-          </a:solidFill>
-          <a:ln w="15875">
-            <a:solidFill>
-              <a:srgbClr val="636363"/>
-            </a:solidFill>
-          </a:ln>
-          <a:effectLst/>
-        </p:spPr>
-        <p:style>
-          <a:lnRef idx="1">
-            <a:schemeClr val="accent1"/>
-          </a:lnRef>
-          <a:fillRef idx="3">
-            <a:schemeClr val="accent1"/>
-          </a:fillRef>
-          <a:effectRef idx="2">
-            <a:schemeClr val="accent1"/>
-          </a:effectRef>
-          <a:fontRef idx="minor">
-            <a:schemeClr val="lt1"/>
-          </a:fontRef>
-        </p:style>
-        <p:txBody>
-          <a:bodyPr rtlCol="0" anchor="ctr" wrap="square" lIns="45720" rIns="45720" tIns="27432" bIns="27432"/>
-          <a:lstStyle/>
-          <a:p>
-            <a:pPr algn="ctr"/>
-            <a:r>
-              <a:rPr sz="1200" b="0" i="0">
-                <a:solidFill>
-                  <a:srgbClr val="333333"/>
-                </a:solidFill>
-                <a:latin typeface="Calibri"/>
-              </a:rPr>
-              <a:t>Test blueprint</a:t>
-            </a:r>
-          </a:p>
-        </p:txBody>
-      </p:sp>
-      <p:sp>
-        <p:nvSpPr>
-          <p:cNvPr id="12" name="Rectangle 11"/>
-          <p:cNvSpPr/>
-          <p:nvPr/>
-        </p:nvSpPr>
-        <p:spPr>
-          <a:xfrm>
-            <a:off x="5669280" y="2962656"/>
-            <a:ext cx="5943600" cy="530352"/>
-          </a:xfrm>
-          <a:prstGeom prst="rect">
-            <a:avLst/>
-          </a:prstGeom>
-          <a:solidFill>
-            <a:srgbClr val="F0F0F2"/>
-          </a:solidFill>
-          <a:ln w="15875">
-            <a:solidFill>
-              <a:srgbClr val="636363"/>
-            </a:solidFill>
-          </a:ln>
-          <a:effectLst/>
-        </p:spPr>
-        <p:style>
-          <a:lnRef idx="1">
-            <a:schemeClr val="accent1"/>
-          </a:lnRef>
-          <a:fillRef idx="3">
-            <a:schemeClr val="accent1"/>
-          </a:fillRef>
-          <a:effectRef idx="2">
-            <a:schemeClr val="accent1"/>
-          </a:effectRef>
-          <a:fontRef idx="minor">
-            <a:schemeClr val="lt1"/>
-          </a:fontRef>
-        </p:style>
-        <p:txBody>
-          <a:bodyPr rtlCol="0" anchor="ctr" wrap="square" lIns="45720" rIns="45720" tIns="27432" bIns="27432"/>
-          <a:lstStyle/>
-          <a:p>
-            <a:pPr algn="ctr"/>
-            <a:r>
-              <a:rPr sz="1200" b="0" i="0">
-                <a:solidFill>
-                  <a:srgbClr val="333333"/>
-                </a:solidFill>
-                <a:latin typeface="Calibri"/>
-              </a:rPr>
-              <a:t>classical table-of-specifications design</a:t>
-            </a:r>
-          </a:p>
-        </p:txBody>
-      </p:sp>
-      <p:sp>
-        <p:nvSpPr>
-          <p:cNvPr id="13" name="Rectangle 12"/>
-          <p:cNvSpPr/>
-          <p:nvPr/>
-        </p:nvSpPr>
-        <p:spPr>
-          <a:xfrm>
-            <a:off x="640080" y="3493008"/>
-            <a:ext cx="4937760" cy="530352"/>
-          </a:xfrm>
-          <a:prstGeom prst="rect">
-            <a:avLst/>
-          </a:prstGeom>
-          <a:solidFill>
-            <a:srgbClr val="FFFFFF"/>
-          </a:solidFill>
-          <a:ln w="15875">
-            <a:solidFill>
-              <a:srgbClr val="636363"/>
-            </a:solidFill>
-          </a:ln>
-          <a:effectLst/>
-        </p:spPr>
-        <p:style>
-          <a:lnRef idx="1">
-            <a:schemeClr val="accent1"/>
-          </a:lnRef>
-          <a:fillRef idx="3">
-            <a:schemeClr val="accent1"/>
-          </a:fillRef>
-          <a:effectRef idx="2">
-            <a:schemeClr val="accent1"/>
-          </a:effectRef>
-          <a:fontRef idx="minor">
-            <a:schemeClr val="lt1"/>
-          </a:fontRef>
-        </p:style>
-        <p:txBody>
-          <a:bodyPr rtlCol="0" anchor="ctr" wrap="square" lIns="45720" rIns="45720" tIns="27432" bIns="27432"/>
-          <a:lstStyle/>
-          <a:p>
-            <a:pPr algn="ctr"/>
-            <a:r>
-              <a:rPr sz="1200" b="0" i="0">
-                <a:solidFill>
-                  <a:srgbClr val="333333"/>
-                </a:solidFill>
-                <a:latin typeface="Calibri"/>
-              </a:rPr>
-              <a:t>Bloom-level metadata</a:t>
-            </a:r>
-          </a:p>
-        </p:txBody>
-      </p:sp>
-      <p:sp>
-        <p:nvSpPr>
-          <p:cNvPr id="14" name="Rectangle 13"/>
-          <p:cNvSpPr/>
-          <p:nvPr/>
-        </p:nvSpPr>
-        <p:spPr>
-          <a:xfrm>
-            <a:off x="5669280" y="3493008"/>
-            <a:ext cx="5943600" cy="530352"/>
-          </a:xfrm>
-          <a:prstGeom prst="rect">
-            <a:avLst/>
-          </a:prstGeom>
-          <a:solidFill>
-            <a:srgbClr val="FFFFFF"/>
-          </a:solidFill>
-          <a:ln w="15875">
-            <a:solidFill>
-              <a:srgbClr val="636363"/>
-            </a:solidFill>
-          </a:ln>
-          <a:effectLst/>
-        </p:spPr>
-        <p:style>
-          <a:lnRef idx="1">
-            <a:schemeClr val="accent1"/>
-          </a:lnRef>
-          <a:fillRef idx="3">
-            <a:schemeClr val="accent1"/>
-          </a:fillRef>
-          <a:effectRef idx="2">
-            <a:schemeClr val="accent1"/>
-          </a:effectRef>
-          <a:fontRef idx="minor">
-            <a:schemeClr val="lt1"/>
-          </a:fontRef>
-        </p:style>
-        <p:txBody>
-          <a:bodyPr rtlCol="0" anchor="ctr" wrap="square" lIns="45720" rIns="45720" tIns="27432" bIns="27432"/>
-          <a:lstStyle/>
-          <a:p>
-            <a:pPr algn="ctr"/>
-            <a:r>
-              <a:rPr sz="1200" b="0" i="0">
-                <a:solidFill>
-                  <a:srgbClr val="333333"/>
-                </a:solidFill>
-                <a:latin typeface="Calibri"/>
-              </a:rPr>
-              <a:t>Anderson &amp; Krathwohl 2001 (revised Bloom)</a:t>
-            </a:r>
-          </a:p>
-        </p:txBody>
-      </p:sp>
-      <p:sp>
-        <p:nvSpPr>
-          <p:cNvPr id="15" name="Rectangle 14"/>
-          <p:cNvSpPr/>
-          <p:nvPr/>
-        </p:nvSpPr>
-        <p:spPr>
-          <a:xfrm>
-            <a:off x="640080" y="4023360"/>
-            <a:ext cx="4937760" cy="530352"/>
-          </a:xfrm>
-          <a:prstGeom prst="rect">
-            <a:avLst/>
-          </a:prstGeom>
-          <a:solidFill>
-            <a:srgbClr val="F0F0F2"/>
-          </a:solidFill>
-          <a:ln w="15875">
-            <a:solidFill>
-              <a:srgbClr val="636363"/>
-            </a:solidFill>
-          </a:ln>
-          <a:effectLst/>
-        </p:spPr>
-        <p:style>
-          <a:lnRef idx="1">
-            <a:schemeClr val="accent1"/>
-          </a:lnRef>
-          <a:fillRef idx="3">
-            <a:schemeClr val="accent1"/>
-          </a:fillRef>
-          <a:effectRef idx="2">
-            <a:schemeClr val="accent1"/>
-          </a:effectRef>
-          <a:fontRef idx="minor">
-            <a:schemeClr val="lt1"/>
-          </a:fontRef>
-        </p:style>
-        <p:txBody>
-          <a:bodyPr rtlCol="0" anchor="ctr" wrap="square" lIns="45720" rIns="45720" tIns="27432" bIns="27432"/>
-          <a:lstStyle/>
-          <a:p>
-            <a:pPr algn="ctr"/>
-            <a:r>
-              <a:rPr sz="1200" b="0" i="0">
-                <a:solidFill>
-                  <a:srgbClr val="333333"/>
-                </a:solidFill>
-                <a:latin typeface="Calibri"/>
-              </a:rPr>
-              <a:t>Semantic dedup (embeddings)</a:t>
-            </a:r>
-          </a:p>
-        </p:txBody>
-      </p:sp>
-      <p:sp>
-        <p:nvSpPr>
-          <p:cNvPr id="16" name="Rectangle 15"/>
-          <p:cNvSpPr/>
-          <p:nvPr/>
-        </p:nvSpPr>
-        <p:spPr>
-          <a:xfrm>
-            <a:off x="5669280" y="4023360"/>
-            <a:ext cx="5943600" cy="530352"/>
-          </a:xfrm>
-          <a:prstGeom prst="rect">
-            <a:avLst/>
-          </a:prstGeom>
-          <a:solidFill>
-            <a:srgbClr val="F0F0F2"/>
-          </a:solidFill>
-          <a:ln w="15875">
-            <a:solidFill>
-              <a:srgbClr val="636363"/>
-            </a:solidFill>
-          </a:ln>
-          <a:effectLst/>
-        </p:spPr>
-        <p:style>
-          <a:lnRef idx="1">
-            <a:schemeClr val="accent1"/>
-          </a:lnRef>
-          <a:fillRef idx="3">
-            <a:schemeClr val="accent1"/>
-          </a:fillRef>
-          <a:effectRef idx="2">
-            <a:schemeClr val="accent1"/>
-          </a:effectRef>
-          <a:fontRef idx="minor">
-            <a:schemeClr val="lt1"/>
-          </a:fontRef>
-        </p:style>
-        <p:txBody>
-          <a:bodyPr rtlCol="0" anchor="ctr" wrap="square" lIns="45720" rIns="45720" tIns="27432" bIns="27432"/>
-          <a:lstStyle/>
-          <a:p>
-            <a:pPr algn="ctr"/>
-            <a:r>
-              <a:rPr sz="1200" b="0" i="0">
-                <a:solidFill>
-                  <a:srgbClr val="333333"/>
-                </a:solidFill>
-                <a:latin typeface="Calibri"/>
-              </a:rPr>
-              <a:t>Sentence-BERT (Reimers &amp; Gurevych 2019)</a:t>
-            </a:r>
-          </a:p>
-        </p:txBody>
-      </p:sp>
-      <p:sp>
-        <p:nvSpPr>
-          <p:cNvPr id="17" name="Rectangle 16"/>
-          <p:cNvSpPr/>
-          <p:nvPr/>
-        </p:nvSpPr>
-        <p:spPr>
-          <a:xfrm>
-            <a:off x="640080" y="4553712"/>
-            <a:ext cx="4937760" cy="530352"/>
-          </a:xfrm>
-          <a:prstGeom prst="rect">
-            <a:avLst/>
-          </a:prstGeom>
-          <a:solidFill>
-            <a:srgbClr val="FFFFFF"/>
-          </a:solidFill>
-          <a:ln w="15875">
-            <a:solidFill>
-              <a:srgbClr val="636363"/>
-            </a:solidFill>
-          </a:ln>
-          <a:effectLst/>
-        </p:spPr>
-        <p:style>
-          <a:lnRef idx="1">
-            <a:schemeClr val="accent1"/>
-          </a:lnRef>
-          <a:fillRef idx="3">
-            <a:schemeClr val="accent1"/>
-          </a:fillRef>
-          <a:effectRef idx="2">
-            <a:schemeClr val="accent1"/>
-          </a:effectRef>
-          <a:fontRef idx="minor">
-            <a:schemeClr val="lt1"/>
-          </a:fontRef>
-        </p:style>
-        <p:txBody>
-          <a:bodyPr rtlCol="0" anchor="ctr" wrap="square" lIns="45720" rIns="45720" tIns="27432" bIns="27432"/>
-          <a:lstStyle/>
-          <a:p>
-            <a:pPr algn="ctr"/>
-            <a:r>
-              <a:rPr sz="1200" b="0" i="0">
-                <a:solidFill>
-                  <a:srgbClr val="333333"/>
-                </a:solidFill>
-                <a:latin typeface="Calibri"/>
-              </a:rPr>
-              <a:t>Largest-remainder counts</a:t>
-            </a:r>
-          </a:p>
-        </p:txBody>
-      </p:sp>
-      <p:sp>
-        <p:nvSpPr>
-          <p:cNvPr id="18" name="Rectangle 17"/>
-          <p:cNvSpPr/>
-          <p:nvPr/>
-        </p:nvSpPr>
-        <p:spPr>
-          <a:xfrm>
-            <a:off x="5669280" y="4553712"/>
-            <a:ext cx="5943600" cy="530352"/>
-          </a:xfrm>
-          <a:prstGeom prst="rect">
-            <a:avLst/>
-          </a:prstGeom>
-          <a:solidFill>
-            <a:srgbClr val="FFFFFF"/>
-          </a:solidFill>
-          <a:ln w="15875">
-            <a:solidFill>
-              <a:srgbClr val="636363"/>
-            </a:solidFill>
-          </a:ln>
-          <a:effectLst/>
-        </p:spPr>
-        <p:style>
-          <a:lnRef idx="1">
-            <a:schemeClr val="accent1"/>
-          </a:lnRef>
-          <a:fillRef idx="3">
-            <a:schemeClr val="accent1"/>
-          </a:fillRef>
-          <a:effectRef idx="2">
-            <a:schemeClr val="accent1"/>
-          </a:effectRef>
-          <a:fontRef idx="minor">
-            <a:schemeClr val="lt1"/>
-          </a:fontRef>
-        </p:style>
-        <p:txBody>
-          <a:bodyPr rtlCol="0" anchor="ctr" wrap="square" lIns="45720" rIns="45720" tIns="27432" bIns="27432"/>
-          <a:lstStyle/>
-          <a:p>
-            <a:pPr algn="ctr"/>
-            <a:r>
-              <a:rPr sz="1200" b="0" i="0">
-                <a:solidFill>
-                  <a:srgbClr val="333333"/>
-                </a:solidFill>
-                <a:latin typeface="Calibri"/>
-              </a:rPr>
-              <a:t>Hamilton apportionment (engineering)</a:t>
-            </a:r>
-          </a:p>
-        </p:txBody>
-      </p:sp>
-      <p:sp>
-        <p:nvSpPr>
-          <p:cNvPr id="19" name="Rectangle 18"/>
-          <p:cNvSpPr/>
-          <p:nvPr/>
-        </p:nvSpPr>
-        <p:spPr>
-          <a:xfrm>
-            <a:off x="640080" y="5084064"/>
-            <a:ext cx="4937760" cy="530352"/>
-          </a:xfrm>
-          <a:prstGeom prst="rect">
-            <a:avLst/>
-          </a:prstGeom>
-          <a:solidFill>
-            <a:srgbClr val="F0F0F2"/>
-          </a:solidFill>
-          <a:ln w="15875">
-            <a:solidFill>
-              <a:srgbClr val="636363"/>
-            </a:solidFill>
-          </a:ln>
-          <a:effectLst/>
-        </p:spPr>
-        <p:style>
-          <a:lnRef idx="1">
-            <a:schemeClr val="accent1"/>
-          </a:lnRef>
-          <a:fillRef idx="3">
-            <a:schemeClr val="accent1"/>
-          </a:fillRef>
-          <a:effectRef idx="2">
-            <a:schemeClr val="accent1"/>
-          </a:effectRef>
-          <a:fontRef idx="minor">
-            <a:schemeClr val="lt1"/>
-          </a:fontRef>
-        </p:style>
-        <p:txBody>
-          <a:bodyPr rtlCol="0" anchor="ctr" wrap="square" lIns="45720" rIns="45720" tIns="27432" bIns="27432"/>
-          <a:lstStyle/>
-          <a:p>
-            <a:pPr algn="ctr"/>
-            <a:r>
-              <a:rPr sz="1200" b="0" i="0">
-                <a:solidFill>
-                  <a:srgbClr val="333333"/>
-                </a:solidFill>
-                <a:latin typeface="Calibri"/>
-              </a:rPr>
-              <a:t>Greedy baseline, token Jaccard</a:t>
-            </a:r>
-          </a:p>
-        </p:txBody>
-      </p:sp>
-      <p:sp>
-        <p:nvSpPr>
-          <p:cNvPr id="20" name="Rectangle 19"/>
-          <p:cNvSpPr/>
-          <p:nvPr/>
-        </p:nvSpPr>
-        <p:spPr>
-          <a:xfrm>
-            <a:off x="5669280" y="5084064"/>
-            <a:ext cx="5943600" cy="530352"/>
-          </a:xfrm>
-          <a:prstGeom prst="rect">
-            <a:avLst/>
-          </a:prstGeom>
-          <a:solidFill>
-            <a:srgbClr val="F0F0F2"/>
-          </a:solidFill>
-          <a:ln w="15875">
-            <a:solidFill>
-              <a:srgbClr val="636363"/>
-            </a:solidFill>
-          </a:ln>
-          <a:effectLst/>
-        </p:spPr>
-        <p:style>
-          <a:lnRef idx="1">
-            <a:schemeClr val="accent1"/>
-          </a:lnRef>
-          <a:fillRef idx="3">
-            <a:schemeClr val="accent1"/>
-          </a:fillRef>
-          <a:effectRef idx="2">
-            <a:schemeClr val="accent1"/>
-          </a:effectRef>
-          <a:fontRef idx="minor">
-            <a:schemeClr val="lt1"/>
-          </a:fontRef>
-        </p:style>
-        <p:txBody>
-          <a:bodyPr rtlCol="0" anchor="ctr" wrap="square" lIns="45720" rIns="45720" tIns="27432" bIns="27432"/>
-          <a:lstStyle/>
-          <a:p>
-            <a:pPr algn="ctr"/>
-            <a:r>
-              <a:rPr sz="1200" b="0" i="0">
-                <a:solidFill>
-                  <a:srgbClr val="333333"/>
-                </a:solidFill>
-                <a:latin typeface="Calibri"/>
-              </a:rPr>
-              <a:t>project-specific engineering</a:t>
-            </a:r>
-          </a:p>
-        </p:txBody>
-      </p:sp>
-      <p:sp>
-        <p:nvSpPr>
-          <p:cNvPr id="21" name="TextBox 20"/>
+              <a:rPr sz="1400" b="0" i="0">
+                <a:solidFill>
+                  <a:srgbClr val="FFFFFF"/>
+                </a:solidFill>
+                <a:latin typeface="Consolas"/>
+              </a:rPr>
+              <a:t>python -m quizgen --pool questions.json --blueprint blueprint.yaml \</a:t>
+            </a:r>
+          </a:p>
+          <a:p>
+            <a:pPr algn="ctr"/>
+            <a:r>
+              <a:rPr sz="1400" b="0" i="0">
+                <a:solidFill>
+                  <a:srgbClr val="FFFFFF"/>
+                </a:solidFill>
+                <a:latin typeface="Consolas"/>
+              </a:rPr>
+              <a:t>    --dedup --validate --out-dir out</a:t>
+            </a:r>
+          </a:p>
+        </p:txBody>
+      </p:sp>
+      <p:sp>
+        <p:nvSpPr>
+          <p:cNvPr id="15" name="TextBox 14"/>
           <p:cNvSpPr txBox="1"/>
           <p:nvPr/>
         </p:nvSpPr>
         <p:spPr>
           <a:xfrm>
-            <a:off x="640080" y="6355080"/>
-            <a:ext cx="11338560" cy="365760"/>
+            <a:off x="640080" y="4846320"/>
+            <a:ext cx="10972800" cy="1645920"/>
           </a:xfrm>
           <a:prstGeom prst="rect">
             <a:avLst/>
@@ -8450,20 +11349,56 @@
           <a:noFill/>
         </p:spPr>
         <p:txBody>
-          <a:bodyPr wrap="square" anchor="t">
+          <a:bodyPr wrap="square">
             <a:spAutoFit/>
           </a:bodyPr>
           <a:lstStyle/>
           <a:p>
-            <a:pPr algn="l"/>
-            <a:r>
-              <a:rPr sz="1100" b="0" i="1">
-                <a:solidFill>
-                  <a:srgbClr val="DE2D26"/>
-                </a:solidFill>
-                <a:latin typeface="Calibri"/>
-              </a:rPr>
-              <a:t>Note: replace these keys with the thesis's exact bibliography.</a:t>
+            <a:pPr>
+              <a:spcAft>
+                <a:spcPts val="700"/>
+              </a:spcAft>
+            </a:pPr>
+            <a:r>
+              <a:rPr sz="1500">
+                <a:solidFill>
+                  <a:srgbClr val="222222"/>
+                </a:solidFill>
+                <a:latin typeface="Calibri"/>
+              </a:rPr>
+              <a:t>• Writes one Quiz JSON per version (each embeds the resolved blueprint).</a:t>
+            </a:r>
+          </a:p>
+          <a:p>
+            <a:pPr>
+              <a:spcAft>
+                <a:spcPts val="700"/>
+              </a:spcAft>
+            </a:pPr>
+            <a:r>
+              <a:rPr sz="1500">
+                <a:solidFill>
+                  <a:srgbClr val="222222"/>
+                </a:solidFill>
+                <a:latin typeface="Calibri"/>
+              </a:rPr>
+              <a:t>• Standalone entry points too: python -m quizgen.assemble, python -m quizgen.validate.</a:t>
+            </a:r>
+          </a:p>
+          <a:p>
+            <a:pPr>
+              <a:spcAft>
+                <a:spcPts val="700"/>
+              </a:spcAft>
+            </a:pPr>
+            <a:r>
+              <a:rPr sz="1500">
+                <a:solidFill>
+                  <a:srgbClr val="222222"/>
+                </a:solidFill>
+                <a:latin typeface="Calibri"/>
+              </a:rPr>
+              <a:t>• Exits non-zero on any non-compliant version → composes in scripts &amp; CI.</a:t>
             </a:r>
           </a:p>
         </p:txBody>

--- a/docs/quizgen_slides.pptx
+++ b/docs/quizgen_slides.pptx
@@ -16,6 +16,7 @@
     <p:sldId id="264" r:id="rId15"/>
     <p:sldId id="265" r:id="rId16"/>
     <p:sldId id="266" r:id="rId17"/>
+    <p:sldId id="267" r:id="rId18"/>
   </p:sldIdLst>
   <p:sldSz cx="12191695" cy="6858000" type="screen4x3"/>
   <p:notesSz cx="6858000" cy="9144000"/>
@@ -3667,7 +3668,7 @@
                 </a:solidFill>
                 <a:latin typeface="Calibri"/>
               </a:rPr>
-              <a:t>Where each technique comes from</a:t>
+              <a:t>Using it</a:t>
             </a:r>
           </a:p>
         </p:txBody>
@@ -3737,7 +3738,7 @@
                 </a:solidFill>
                 <a:latin typeface="Calibri"/>
               </a:rPr>
-              <a:t>TECHNIQUE → SOURCE LINEAGE</a:t>
+              <a:t>python -m quizgen</a:t>
             </a:r>
           </a:p>
         </p:txBody>
@@ -3893,16 +3894,51 @@
       </p:sp>
       <p:sp>
         <p:nvSpPr>
-          <p:cNvPr id="11" name="Rounded Rectangle 10"/>
+          <p:cNvPr id="11" name="TextBox 10"/>
+          <p:cNvSpPr txBox="1"/>
+          <p:nvPr/>
+        </p:nvSpPr>
+        <p:spPr>
+          <a:xfrm>
+            <a:off x="640080" y="1188720"/>
+            <a:ext cx="10972800" cy="365760"/>
+          </a:xfrm>
+          <a:prstGeom prst="rect">
+            <a:avLst/>
+          </a:prstGeom>
+          <a:noFill/>
+        </p:spPr>
+        <p:txBody>
+          <a:bodyPr wrap="square" anchor="t">
+            <a:spAutoFit/>
+          </a:bodyPr>
+          <a:lstStyle/>
+          <a:p>
+            <a:pPr algn="l"/>
+            <a:r>
+              <a:rPr sz="1600" b="1" i="0">
+                <a:solidFill>
+                  <a:srgbClr val="222222"/>
+                </a:solidFill>
+                <a:latin typeface="Calibri"/>
+              </a:rPr>
+              <a:t>Pure command line (no YAML):</a:t>
+            </a:r>
+          </a:p>
+        </p:txBody>
+      </p:sp>
+      <p:sp>
+        <p:nvSpPr>
+          <p:cNvPr id="12" name="Rectangle 11"/>
           <p:cNvSpPr/>
           <p:nvPr/>
         </p:nvSpPr>
         <p:spPr>
           <a:xfrm>
-            <a:off x="640080" y="1280160"/>
-            <a:ext cx="5120640" cy="502920"/>
-          </a:xfrm>
-          <a:prstGeom prst="roundRect">
+            <a:off x="640080" y="1600200"/>
+            <a:ext cx="10972800" cy="1371600"/>
+          </a:xfrm>
+          <a:prstGeom prst="rect">
             <a:avLst/>
           </a:prstGeom>
           <a:solidFill>
@@ -3935,29 +3971,112 @@
           <a:p>
             <a:pPr algn="ctr"/>
             <a:r>
-              <a:rPr sz="1400" b="1" i="0">
+              <a:rPr sz="1300" b="0" i="0">
                 <a:solidFill>
                   <a:srgbClr val="FFFFFF"/>
                 </a:solidFill>
-                <a:latin typeface="Calibri"/>
-              </a:rPr>
-              <a:t>Implemented in code</a:t>
-            </a:r>
-          </a:p>
-        </p:txBody>
-      </p:sp>
-      <p:sp>
-        <p:nvSpPr>
-          <p:cNvPr id="12" name="Rounded Rectangle 11"/>
+                <a:latin typeface="Consolas"/>
+              </a:rPr>
+              <a:t>python -m quizgen --pool questions.json \</a:t>
+            </a:r>
+          </a:p>
+          <a:p>
+            <a:pPr algn="ctr"/>
+            <a:r>
+              <a:rPr sz="1300" b="0" i="0">
+                <a:solidFill>
+                  <a:srgbClr val="FFFFFF"/>
+                </a:solidFill>
+                <a:latin typeface="Consolas"/>
+              </a:rPr>
+              <a:t>    --total 20 --chapters 1:10,2:6,3:4 \</a:t>
+            </a:r>
+          </a:p>
+          <a:p>
+            <a:pPr algn="ctr"/>
+            <a:r>
+              <a:rPr sz="1300" b="0" i="0">
+                <a:solidFill>
+                  <a:srgbClr val="FFFFFF"/>
+                </a:solidFill>
+                <a:latin typeface="Consolas"/>
+              </a:rPr>
+              <a:t>    --difficulty 0.4,0.4,0.2 \</a:t>
+            </a:r>
+          </a:p>
+          <a:p>
+            <a:pPr algn="ctr"/>
+            <a:r>
+              <a:rPr sz="1300" b="0" i="0">
+                <a:solidFill>
+                  <a:srgbClr val="FFFFFF"/>
+                </a:solidFill>
+                <a:latin typeface="Consolas"/>
+              </a:rPr>
+              <a:t>    --qtype-mix mcq:0.4,true_false:0.2,short_answer:0.2,cloze:0.2 \</a:t>
+            </a:r>
+          </a:p>
+          <a:p>
+            <a:pPr algn="ctr"/>
+            <a:r>
+              <a:rPr sz="1300" b="0" i="0">
+                <a:solidFill>
+                  <a:srgbClr val="FFFFFF"/>
+                </a:solidFill>
+                <a:latin typeface="Consolas"/>
+              </a:rPr>
+              <a:t>    --versions 2 --selector mip</a:t>
+            </a:r>
+          </a:p>
+        </p:txBody>
+      </p:sp>
+      <p:sp>
+        <p:nvSpPr>
+          <p:cNvPr id="13" name="TextBox 12"/>
+          <p:cNvSpPr txBox="1"/>
+          <p:nvPr/>
+        </p:nvSpPr>
+        <p:spPr>
+          <a:xfrm>
+            <a:off x="640080" y="3246120"/>
+            <a:ext cx="10972800" cy="365760"/>
+          </a:xfrm>
+          <a:prstGeom prst="rect">
+            <a:avLst/>
+          </a:prstGeom>
+          <a:noFill/>
+        </p:spPr>
+        <p:txBody>
+          <a:bodyPr wrap="square" anchor="t">
+            <a:spAutoFit/>
+          </a:bodyPr>
+          <a:lstStyle/>
+          <a:p>
+            <a:pPr algn="l"/>
+            <a:r>
+              <a:rPr sz="1600" b="1" i="0">
+                <a:solidFill>
+                  <a:srgbClr val="222222"/>
+                </a:solidFill>
+                <a:latin typeface="Calibri"/>
+              </a:rPr>
+              <a:t>Blueprint file + dedup + per-version validation report:</a:t>
+            </a:r>
+          </a:p>
+        </p:txBody>
+      </p:sp>
+      <p:sp>
+        <p:nvSpPr>
+          <p:cNvPr id="14" name="Rectangle 13"/>
           <p:cNvSpPr/>
           <p:nvPr/>
         </p:nvSpPr>
         <p:spPr>
           <a:xfrm>
-            <a:off x="5852160" y="1280160"/>
-            <a:ext cx="5760720" cy="502920"/>
-          </a:xfrm>
-          <a:prstGeom prst="roundRect">
+            <a:off x="640080" y="3657600"/>
+            <a:ext cx="10972800" cy="914400"/>
+          </a:xfrm>
+          <a:prstGeom prst="rect">
             <a:avLst/>
           </a:prstGeom>
           <a:solidFill>
@@ -3990,797 +4109,39 @@
           <a:p>
             <a:pPr algn="ctr"/>
             <a:r>
-              <a:rPr sz="1400" b="1" i="0">
+              <a:rPr sz="1400" b="0" i="0">
                 <a:solidFill>
                   <a:srgbClr val="FFFFFF"/>
                 </a:solidFill>
-                <a:latin typeface="Calibri"/>
-              </a:rPr>
-              <a:t>Source lineage</a:t>
-            </a:r>
-          </a:p>
-        </p:txBody>
-      </p:sp>
-      <p:sp>
-        <p:nvSpPr>
-          <p:cNvPr id="13" name="Rectangle 12"/>
-          <p:cNvSpPr/>
-          <p:nvPr/>
-        </p:nvSpPr>
-        <p:spPr>
-          <a:xfrm>
-            <a:off x="640080" y="1783080"/>
-            <a:ext cx="5120640" cy="502920"/>
-          </a:xfrm>
-          <a:prstGeom prst="rect">
-            <a:avLst/>
-          </a:prstGeom>
-          <a:solidFill>
-            <a:srgbClr val="F0F0F2"/>
-          </a:solidFill>
-          <a:ln w="15875">
-            <a:solidFill>
-              <a:srgbClr val="636363"/>
-            </a:solidFill>
-          </a:ln>
-          <a:effectLst/>
-        </p:spPr>
-        <p:style>
-          <a:lnRef idx="1">
-            <a:schemeClr val="accent1"/>
-          </a:lnRef>
-          <a:fillRef idx="3">
-            <a:schemeClr val="accent1"/>
-          </a:fillRef>
-          <a:effectRef idx="2">
-            <a:schemeClr val="accent1"/>
-          </a:effectRef>
-          <a:fontRef idx="minor">
-            <a:schemeClr val="lt1"/>
-          </a:fontRef>
-        </p:style>
-        <p:txBody>
-          <a:bodyPr rtlCol="0" anchor="ctr" wrap="square" lIns="45720" rIns="45720" tIns="27432" bIns="27432"/>
-          <a:lstStyle/>
-          <a:p>
-            <a:pPr algn="ctr"/>
-            <a:r>
-              <a:rPr sz="1200" b="0" i="0">
-                <a:solidFill>
-                  <a:srgbClr val="222222"/>
-                </a:solidFill>
-                <a:latin typeface="Calibri"/>
-              </a:rPr>
-              <a:t>Test assembly as 0–1 MIP</a:t>
-            </a:r>
-          </a:p>
-        </p:txBody>
-      </p:sp>
-      <p:sp>
-        <p:nvSpPr>
-          <p:cNvPr id="14" name="Rectangle 13"/>
-          <p:cNvSpPr/>
-          <p:nvPr/>
-        </p:nvSpPr>
-        <p:spPr>
-          <a:xfrm>
-            <a:off x="5852160" y="1783080"/>
-            <a:ext cx="5760720" cy="502920"/>
-          </a:xfrm>
-          <a:prstGeom prst="rect">
-            <a:avLst/>
-          </a:prstGeom>
-          <a:solidFill>
-            <a:srgbClr val="F0F0F2"/>
-          </a:solidFill>
-          <a:ln w="15875">
-            <a:solidFill>
-              <a:srgbClr val="636363"/>
-            </a:solidFill>
-          </a:ln>
-          <a:effectLst/>
-        </p:spPr>
-        <p:style>
-          <a:lnRef idx="1">
-            <a:schemeClr val="accent1"/>
-          </a:lnRef>
-          <a:fillRef idx="3">
-            <a:schemeClr val="accent1"/>
-          </a:fillRef>
-          <a:effectRef idx="2">
-            <a:schemeClr val="accent1"/>
-          </a:effectRef>
-          <a:fontRef idx="minor">
-            <a:schemeClr val="lt1"/>
-          </a:fontRef>
-        </p:style>
-        <p:txBody>
-          <a:bodyPr rtlCol="0" anchor="ctr" wrap="square" lIns="45720" rIns="45720" tIns="27432" bIns="27432"/>
-          <a:lstStyle/>
-          <a:p>
-            <a:pPr algn="ctr"/>
-            <a:r>
-              <a:rPr sz="1200" b="0" i="0">
-                <a:solidFill>
-                  <a:srgbClr val="222222"/>
-                </a:solidFill>
-                <a:latin typeface="Calibri"/>
-              </a:rPr>
-              <a:t>van der Linden 2005 — optimal test design</a:t>
-            </a:r>
-          </a:p>
-        </p:txBody>
-      </p:sp>
-      <p:sp>
-        <p:nvSpPr>
-          <p:cNvPr id="15" name="Rectangle 14"/>
-          <p:cNvSpPr/>
-          <p:nvPr/>
-        </p:nvSpPr>
-        <p:spPr>
-          <a:xfrm>
-            <a:off x="640080" y="2286000"/>
-            <a:ext cx="5120640" cy="502920"/>
-          </a:xfrm>
-          <a:prstGeom prst="rect">
-            <a:avLst/>
-          </a:prstGeom>
-          <a:solidFill>
-            <a:srgbClr val="FFFFFF"/>
-          </a:solidFill>
-          <a:ln w="15875">
-            <a:solidFill>
-              <a:srgbClr val="636363"/>
-            </a:solidFill>
-          </a:ln>
-          <a:effectLst/>
-        </p:spPr>
-        <p:style>
-          <a:lnRef idx="1">
-            <a:schemeClr val="accent1"/>
-          </a:lnRef>
-          <a:fillRef idx="3">
-            <a:schemeClr val="accent1"/>
-          </a:fillRef>
-          <a:effectRef idx="2">
-            <a:schemeClr val="accent1"/>
-          </a:effectRef>
-          <a:fontRef idx="minor">
-            <a:schemeClr val="lt1"/>
-          </a:fontRef>
-        </p:style>
-        <p:txBody>
-          <a:bodyPr rtlCol="0" anchor="ctr" wrap="square" lIns="45720" rIns="45720" tIns="27432" bIns="27432"/>
-          <a:lstStyle/>
-          <a:p>
-            <a:pPr algn="ctr"/>
-            <a:r>
-              <a:rPr sz="1200" b="0" i="0">
-                <a:solidFill>
-                  <a:srgbClr val="222222"/>
-                </a:solidFill>
-                <a:latin typeface="Calibri"/>
-              </a:rPr>
-              <a:t>Quality-weighted selection</a:t>
-            </a:r>
-          </a:p>
-        </p:txBody>
-      </p:sp>
-      <p:sp>
-        <p:nvSpPr>
-          <p:cNvPr id="16" name="Rectangle 15"/>
-          <p:cNvSpPr/>
-          <p:nvPr/>
-        </p:nvSpPr>
-        <p:spPr>
-          <a:xfrm>
-            <a:off x="5852160" y="2286000"/>
-            <a:ext cx="5760720" cy="502920"/>
-          </a:xfrm>
-          <a:prstGeom prst="rect">
-            <a:avLst/>
-          </a:prstGeom>
-          <a:solidFill>
-            <a:srgbClr val="FFFFFF"/>
-          </a:solidFill>
-          <a:ln w="15875">
-            <a:solidFill>
-              <a:srgbClr val="636363"/>
-            </a:solidFill>
-          </a:ln>
-          <a:effectLst/>
-        </p:spPr>
-        <p:style>
-          <a:lnRef idx="1">
-            <a:schemeClr val="accent1"/>
-          </a:lnRef>
-          <a:fillRef idx="3">
-            <a:schemeClr val="accent1"/>
-          </a:fillRef>
-          <a:effectRef idx="2">
-            <a:schemeClr val="accent1"/>
-          </a:effectRef>
-          <a:fontRef idx="minor">
-            <a:schemeClr val="lt1"/>
-          </a:fontRef>
-        </p:style>
-        <p:txBody>
-          <a:bodyPr rtlCol="0" anchor="ctr" wrap="square" lIns="45720" rIns="45720" tIns="27432" bIns="27432"/>
-          <a:lstStyle/>
-          <a:p>
-            <a:pPr algn="ctr"/>
-            <a:r>
-              <a:rPr sz="1200" b="0" i="0">
-                <a:solidFill>
-                  <a:srgbClr val="222222"/>
-                </a:solidFill>
-                <a:latin typeface="Calibri"/>
-              </a:rPr>
-              <a:t>van der Linden 2005 (objective in ATA)</a:t>
-            </a:r>
-          </a:p>
-        </p:txBody>
-      </p:sp>
-      <p:sp>
-        <p:nvSpPr>
-          <p:cNvPr id="17" name="Rectangle 16"/>
-          <p:cNvSpPr/>
-          <p:nvPr/>
-        </p:nvSpPr>
-        <p:spPr>
-          <a:xfrm>
-            <a:off x="640080" y="2788920"/>
-            <a:ext cx="5120640" cy="502920"/>
-          </a:xfrm>
-          <a:prstGeom prst="rect">
-            <a:avLst/>
-          </a:prstGeom>
-          <a:solidFill>
-            <a:srgbClr val="F0F0F2"/>
-          </a:solidFill>
-          <a:ln w="15875">
-            <a:solidFill>
-              <a:srgbClr val="636363"/>
-            </a:solidFill>
-          </a:ln>
-          <a:effectLst/>
-        </p:spPr>
-        <p:style>
-          <a:lnRef idx="1">
-            <a:schemeClr val="accent1"/>
-          </a:lnRef>
-          <a:fillRef idx="3">
-            <a:schemeClr val="accent1"/>
-          </a:fillRef>
-          <a:effectRef idx="2">
-            <a:schemeClr val="accent1"/>
-          </a:effectRef>
-          <a:fontRef idx="minor">
-            <a:schemeClr val="lt1"/>
-          </a:fontRef>
-        </p:style>
-        <p:txBody>
-          <a:bodyPr rtlCol="0" anchor="ctr" wrap="square" lIns="45720" rIns="45720" tIns="27432" bIns="27432"/>
-          <a:lstStyle/>
-          <a:p>
-            <a:pPr algn="ctr"/>
-            <a:r>
-              <a:rPr sz="1200" b="0" i="0">
-                <a:solidFill>
-                  <a:srgbClr val="222222"/>
-                </a:solidFill>
-                <a:latin typeface="Calibri"/>
-              </a:rPr>
-              <a:t>Test blueprint / type &amp; difficulty mix</a:t>
-            </a:r>
-          </a:p>
-        </p:txBody>
-      </p:sp>
-      <p:sp>
-        <p:nvSpPr>
-          <p:cNvPr id="18" name="Rectangle 17"/>
-          <p:cNvSpPr/>
-          <p:nvPr/>
-        </p:nvSpPr>
-        <p:spPr>
-          <a:xfrm>
-            <a:off x="5852160" y="2788920"/>
-            <a:ext cx="5760720" cy="502920"/>
-          </a:xfrm>
-          <a:prstGeom prst="rect">
-            <a:avLst/>
-          </a:prstGeom>
-          <a:solidFill>
-            <a:srgbClr val="F0F0F2"/>
-          </a:solidFill>
-          <a:ln w="15875">
-            <a:solidFill>
-              <a:srgbClr val="636363"/>
-            </a:solidFill>
-          </a:ln>
-          <a:effectLst/>
-        </p:spPr>
-        <p:style>
-          <a:lnRef idx="1">
-            <a:schemeClr val="accent1"/>
-          </a:lnRef>
-          <a:fillRef idx="3">
-            <a:schemeClr val="accent1"/>
-          </a:fillRef>
-          <a:effectRef idx="2">
-            <a:schemeClr val="accent1"/>
-          </a:effectRef>
-          <a:fontRef idx="minor">
-            <a:schemeClr val="lt1"/>
-          </a:fontRef>
-        </p:style>
-        <p:txBody>
-          <a:bodyPr rtlCol="0" anchor="ctr" wrap="square" lIns="45720" rIns="45720" tIns="27432" bIns="27432"/>
-          <a:lstStyle/>
-          <a:p>
-            <a:pPr algn="ctr"/>
-            <a:r>
-              <a:rPr sz="1200" b="0" i="0">
-                <a:solidFill>
-                  <a:srgbClr val="222222"/>
-                </a:solidFill>
-                <a:latin typeface="Calibri"/>
-              </a:rPr>
-              <a:t>classical table-of-specifications design</a:t>
-            </a:r>
-          </a:p>
-        </p:txBody>
-      </p:sp>
-      <p:sp>
-        <p:nvSpPr>
-          <p:cNvPr id="19" name="Rectangle 18"/>
-          <p:cNvSpPr/>
-          <p:nvPr/>
-        </p:nvSpPr>
-        <p:spPr>
-          <a:xfrm>
-            <a:off x="640080" y="3291840"/>
-            <a:ext cx="5120640" cy="502920"/>
-          </a:xfrm>
-          <a:prstGeom prst="rect">
-            <a:avLst/>
-          </a:prstGeom>
-          <a:solidFill>
-            <a:srgbClr val="FFFFFF"/>
-          </a:solidFill>
-          <a:ln w="15875">
-            <a:solidFill>
-              <a:srgbClr val="636363"/>
-            </a:solidFill>
-          </a:ln>
-          <a:effectLst/>
-        </p:spPr>
-        <p:style>
-          <a:lnRef idx="1">
-            <a:schemeClr val="accent1"/>
-          </a:lnRef>
-          <a:fillRef idx="3">
-            <a:schemeClr val="accent1"/>
-          </a:fillRef>
-          <a:effectRef idx="2">
-            <a:schemeClr val="accent1"/>
-          </a:effectRef>
-          <a:fontRef idx="minor">
-            <a:schemeClr val="lt1"/>
-          </a:fontRef>
-        </p:style>
-        <p:txBody>
-          <a:bodyPr rtlCol="0" anchor="ctr" wrap="square" lIns="45720" rIns="45720" tIns="27432" bIns="27432"/>
-          <a:lstStyle/>
-          <a:p>
-            <a:pPr algn="ctr"/>
-            <a:r>
-              <a:rPr sz="1200" b="0" i="0">
-                <a:solidFill>
-                  <a:srgbClr val="222222"/>
-                </a:solidFill>
-                <a:latin typeface="Calibri"/>
-              </a:rPr>
-              <a:t>Bloom-level metadata</a:t>
-            </a:r>
-          </a:p>
-        </p:txBody>
-      </p:sp>
-      <p:sp>
-        <p:nvSpPr>
-          <p:cNvPr id="20" name="Rectangle 19"/>
-          <p:cNvSpPr/>
-          <p:nvPr/>
-        </p:nvSpPr>
-        <p:spPr>
-          <a:xfrm>
-            <a:off x="5852160" y="3291840"/>
-            <a:ext cx="5760720" cy="502920"/>
-          </a:xfrm>
-          <a:prstGeom prst="rect">
-            <a:avLst/>
-          </a:prstGeom>
-          <a:solidFill>
-            <a:srgbClr val="FFFFFF"/>
-          </a:solidFill>
-          <a:ln w="15875">
-            <a:solidFill>
-              <a:srgbClr val="636363"/>
-            </a:solidFill>
-          </a:ln>
-          <a:effectLst/>
-        </p:spPr>
-        <p:style>
-          <a:lnRef idx="1">
-            <a:schemeClr val="accent1"/>
-          </a:lnRef>
-          <a:fillRef idx="3">
-            <a:schemeClr val="accent1"/>
-          </a:fillRef>
-          <a:effectRef idx="2">
-            <a:schemeClr val="accent1"/>
-          </a:effectRef>
-          <a:fontRef idx="minor">
-            <a:schemeClr val="lt1"/>
-          </a:fontRef>
-        </p:style>
-        <p:txBody>
-          <a:bodyPr rtlCol="0" anchor="ctr" wrap="square" lIns="45720" rIns="45720" tIns="27432" bIns="27432"/>
-          <a:lstStyle/>
-          <a:p>
-            <a:pPr algn="ctr"/>
-            <a:r>
-              <a:rPr sz="1200" b="0" i="0">
-                <a:solidFill>
-                  <a:srgbClr val="222222"/>
-                </a:solidFill>
-                <a:latin typeface="Calibri"/>
-              </a:rPr>
-              <a:t>Anderson &amp; Krathwohl 2001 (revised Bloom)</a:t>
-            </a:r>
-          </a:p>
-        </p:txBody>
-      </p:sp>
-      <p:sp>
-        <p:nvSpPr>
-          <p:cNvPr id="21" name="Rectangle 20"/>
-          <p:cNvSpPr/>
-          <p:nvPr/>
-        </p:nvSpPr>
-        <p:spPr>
-          <a:xfrm>
-            <a:off x="640080" y="3794760"/>
-            <a:ext cx="5120640" cy="502920"/>
-          </a:xfrm>
-          <a:prstGeom prst="rect">
-            <a:avLst/>
-          </a:prstGeom>
-          <a:solidFill>
-            <a:srgbClr val="F0F0F2"/>
-          </a:solidFill>
-          <a:ln w="15875">
-            <a:solidFill>
-              <a:srgbClr val="636363"/>
-            </a:solidFill>
-          </a:ln>
-          <a:effectLst/>
-        </p:spPr>
-        <p:style>
-          <a:lnRef idx="1">
-            <a:schemeClr val="accent1"/>
-          </a:lnRef>
-          <a:fillRef idx="3">
-            <a:schemeClr val="accent1"/>
-          </a:fillRef>
-          <a:effectRef idx="2">
-            <a:schemeClr val="accent1"/>
-          </a:effectRef>
-          <a:fontRef idx="minor">
-            <a:schemeClr val="lt1"/>
-          </a:fontRef>
-        </p:style>
-        <p:txBody>
-          <a:bodyPr rtlCol="0" anchor="ctr" wrap="square" lIns="45720" rIns="45720" tIns="27432" bIns="27432"/>
-          <a:lstStyle/>
-          <a:p>
-            <a:pPr algn="ctr"/>
-            <a:r>
-              <a:rPr sz="1200" b="0" i="0">
-                <a:solidFill>
-                  <a:srgbClr val="222222"/>
-                </a:solidFill>
-                <a:latin typeface="Calibri"/>
-              </a:rPr>
-              <a:t>Semantic dedup (embeddings)</a:t>
-            </a:r>
-          </a:p>
-        </p:txBody>
-      </p:sp>
-      <p:sp>
-        <p:nvSpPr>
-          <p:cNvPr id="22" name="Rectangle 21"/>
-          <p:cNvSpPr/>
-          <p:nvPr/>
-        </p:nvSpPr>
-        <p:spPr>
-          <a:xfrm>
-            <a:off x="5852160" y="3794760"/>
-            <a:ext cx="5760720" cy="502920"/>
-          </a:xfrm>
-          <a:prstGeom prst="rect">
-            <a:avLst/>
-          </a:prstGeom>
-          <a:solidFill>
-            <a:srgbClr val="F0F0F2"/>
-          </a:solidFill>
-          <a:ln w="15875">
-            <a:solidFill>
-              <a:srgbClr val="636363"/>
-            </a:solidFill>
-          </a:ln>
-          <a:effectLst/>
-        </p:spPr>
-        <p:style>
-          <a:lnRef idx="1">
-            <a:schemeClr val="accent1"/>
-          </a:lnRef>
-          <a:fillRef idx="3">
-            <a:schemeClr val="accent1"/>
-          </a:fillRef>
-          <a:effectRef idx="2">
-            <a:schemeClr val="accent1"/>
-          </a:effectRef>
-          <a:fontRef idx="minor">
-            <a:schemeClr val="lt1"/>
-          </a:fontRef>
-        </p:style>
-        <p:txBody>
-          <a:bodyPr rtlCol="0" anchor="ctr" wrap="square" lIns="45720" rIns="45720" tIns="27432" bIns="27432"/>
-          <a:lstStyle/>
-          <a:p>
-            <a:pPr algn="ctr"/>
-            <a:r>
-              <a:rPr sz="1200" b="0" i="0">
-                <a:solidFill>
-                  <a:srgbClr val="222222"/>
-                </a:solidFill>
-                <a:latin typeface="Calibri"/>
-              </a:rPr>
-              <a:t>Sentence-BERT (Reimers &amp; Gurevych 2019)</a:t>
-            </a:r>
-          </a:p>
-        </p:txBody>
-      </p:sp>
-      <p:sp>
-        <p:nvSpPr>
-          <p:cNvPr id="23" name="Rectangle 22"/>
-          <p:cNvSpPr/>
-          <p:nvPr/>
-        </p:nvSpPr>
-        <p:spPr>
-          <a:xfrm>
-            <a:off x="640080" y="4297680"/>
-            <a:ext cx="5120640" cy="502920"/>
-          </a:xfrm>
-          <a:prstGeom prst="rect">
-            <a:avLst/>
-          </a:prstGeom>
-          <a:solidFill>
-            <a:srgbClr val="FFFFFF"/>
-          </a:solidFill>
-          <a:ln w="15875">
-            <a:solidFill>
-              <a:srgbClr val="636363"/>
-            </a:solidFill>
-          </a:ln>
-          <a:effectLst/>
-        </p:spPr>
-        <p:style>
-          <a:lnRef idx="1">
-            <a:schemeClr val="accent1"/>
-          </a:lnRef>
-          <a:fillRef idx="3">
-            <a:schemeClr val="accent1"/>
-          </a:fillRef>
-          <a:effectRef idx="2">
-            <a:schemeClr val="accent1"/>
-          </a:effectRef>
-          <a:fontRef idx="minor">
-            <a:schemeClr val="lt1"/>
-          </a:fontRef>
-        </p:style>
-        <p:txBody>
-          <a:bodyPr rtlCol="0" anchor="ctr" wrap="square" lIns="45720" rIns="45720" tIns="27432" bIns="27432"/>
-          <a:lstStyle/>
-          <a:p>
-            <a:pPr algn="ctr"/>
-            <a:r>
-              <a:rPr sz="1200" b="0" i="0">
-                <a:solidFill>
-                  <a:srgbClr val="222222"/>
-                </a:solidFill>
-                <a:latin typeface="Calibri"/>
-              </a:rPr>
-              <a:t>Largest-remainder counts</a:t>
-            </a:r>
-          </a:p>
-        </p:txBody>
-      </p:sp>
-      <p:sp>
-        <p:nvSpPr>
-          <p:cNvPr id="24" name="Rectangle 23"/>
-          <p:cNvSpPr/>
-          <p:nvPr/>
-        </p:nvSpPr>
-        <p:spPr>
-          <a:xfrm>
-            <a:off x="5852160" y="4297680"/>
-            <a:ext cx="5760720" cy="502920"/>
-          </a:xfrm>
-          <a:prstGeom prst="rect">
-            <a:avLst/>
-          </a:prstGeom>
-          <a:solidFill>
-            <a:srgbClr val="FFFFFF"/>
-          </a:solidFill>
-          <a:ln w="15875">
-            <a:solidFill>
-              <a:srgbClr val="636363"/>
-            </a:solidFill>
-          </a:ln>
-          <a:effectLst/>
-        </p:spPr>
-        <p:style>
-          <a:lnRef idx="1">
-            <a:schemeClr val="accent1"/>
-          </a:lnRef>
-          <a:fillRef idx="3">
-            <a:schemeClr val="accent1"/>
-          </a:fillRef>
-          <a:effectRef idx="2">
-            <a:schemeClr val="accent1"/>
-          </a:effectRef>
-          <a:fontRef idx="minor">
-            <a:schemeClr val="lt1"/>
-          </a:fontRef>
-        </p:style>
-        <p:txBody>
-          <a:bodyPr rtlCol="0" anchor="ctr" wrap="square" lIns="45720" rIns="45720" tIns="27432" bIns="27432"/>
-          <a:lstStyle/>
-          <a:p>
-            <a:pPr algn="ctr"/>
-            <a:r>
-              <a:rPr sz="1200" b="0" i="0">
-                <a:solidFill>
-                  <a:srgbClr val="222222"/>
-                </a:solidFill>
-                <a:latin typeface="Calibri"/>
-              </a:rPr>
-              <a:t>Hamilton apportionment (engineering)</a:t>
-            </a:r>
-          </a:p>
-        </p:txBody>
-      </p:sp>
-      <p:sp>
-        <p:nvSpPr>
-          <p:cNvPr id="25" name="Rectangle 24"/>
-          <p:cNvSpPr/>
-          <p:nvPr/>
-        </p:nvSpPr>
-        <p:spPr>
-          <a:xfrm>
-            <a:off x="640080" y="4800600"/>
-            <a:ext cx="5120640" cy="502920"/>
-          </a:xfrm>
-          <a:prstGeom prst="rect">
-            <a:avLst/>
-          </a:prstGeom>
-          <a:solidFill>
-            <a:srgbClr val="F0F0F2"/>
-          </a:solidFill>
-          <a:ln w="15875">
-            <a:solidFill>
-              <a:srgbClr val="636363"/>
-            </a:solidFill>
-          </a:ln>
-          <a:effectLst/>
-        </p:spPr>
-        <p:style>
-          <a:lnRef idx="1">
-            <a:schemeClr val="accent1"/>
-          </a:lnRef>
-          <a:fillRef idx="3">
-            <a:schemeClr val="accent1"/>
-          </a:fillRef>
-          <a:effectRef idx="2">
-            <a:schemeClr val="accent1"/>
-          </a:effectRef>
-          <a:fontRef idx="minor">
-            <a:schemeClr val="lt1"/>
-          </a:fontRef>
-        </p:style>
-        <p:txBody>
-          <a:bodyPr rtlCol="0" anchor="ctr" wrap="square" lIns="45720" rIns="45720" tIns="27432" bIns="27432"/>
-          <a:lstStyle/>
-          <a:p>
-            <a:pPr algn="ctr"/>
-            <a:r>
-              <a:rPr sz="1200" b="0" i="0">
-                <a:solidFill>
-                  <a:srgbClr val="222222"/>
-                </a:solidFill>
-                <a:latin typeface="Calibri"/>
-              </a:rPr>
-              <a:t>Greedy baseline, token Jaccard</a:t>
-            </a:r>
-          </a:p>
-        </p:txBody>
-      </p:sp>
-      <p:sp>
-        <p:nvSpPr>
-          <p:cNvPr id="26" name="Rectangle 25"/>
-          <p:cNvSpPr/>
-          <p:nvPr/>
-        </p:nvSpPr>
-        <p:spPr>
-          <a:xfrm>
-            <a:off x="5852160" y="4800600"/>
-            <a:ext cx="5760720" cy="502920"/>
-          </a:xfrm>
-          <a:prstGeom prst="rect">
-            <a:avLst/>
-          </a:prstGeom>
-          <a:solidFill>
-            <a:srgbClr val="F0F0F2"/>
-          </a:solidFill>
-          <a:ln w="15875">
-            <a:solidFill>
-              <a:srgbClr val="636363"/>
-            </a:solidFill>
-          </a:ln>
-          <a:effectLst/>
-        </p:spPr>
-        <p:style>
-          <a:lnRef idx="1">
-            <a:schemeClr val="accent1"/>
-          </a:lnRef>
-          <a:fillRef idx="3">
-            <a:schemeClr val="accent1"/>
-          </a:fillRef>
-          <a:effectRef idx="2">
-            <a:schemeClr val="accent1"/>
-          </a:effectRef>
-          <a:fontRef idx="minor">
-            <a:schemeClr val="lt1"/>
-          </a:fontRef>
-        </p:style>
-        <p:txBody>
-          <a:bodyPr rtlCol="0" anchor="ctr" wrap="square" lIns="45720" rIns="45720" tIns="27432" bIns="27432"/>
-          <a:lstStyle/>
-          <a:p>
-            <a:pPr algn="ctr"/>
-            <a:r>
-              <a:rPr sz="1200" b="0" i="0">
-                <a:solidFill>
-                  <a:srgbClr val="222222"/>
-                </a:solidFill>
-                <a:latin typeface="Calibri"/>
-              </a:rPr>
-              <a:t>project-specific engineering</a:t>
-            </a:r>
-          </a:p>
-        </p:txBody>
-      </p:sp>
-      <p:sp>
-        <p:nvSpPr>
-          <p:cNvPr id="27" name="TextBox 26"/>
+                <a:latin typeface="Consolas"/>
+              </a:rPr>
+              <a:t>python -m quizgen --pool questions.json --blueprint blueprint.yaml \</a:t>
+            </a:r>
+          </a:p>
+          <a:p>
+            <a:pPr algn="ctr"/>
+            <a:r>
+              <a:rPr sz="1400" b="0" i="0">
+                <a:solidFill>
+                  <a:srgbClr val="FFFFFF"/>
+                </a:solidFill>
+                <a:latin typeface="Consolas"/>
+              </a:rPr>
+              <a:t>    --dedup --validate --out-dir out</a:t>
+            </a:r>
+          </a:p>
+        </p:txBody>
+      </p:sp>
+      <p:sp>
+        <p:nvSpPr>
+          <p:cNvPr id="15" name="TextBox 14"/>
           <p:cNvSpPr txBox="1"/>
           <p:nvPr/>
         </p:nvSpPr>
         <p:spPr>
           <a:xfrm>
-            <a:off x="640080" y="6126480"/>
-            <a:ext cx="11338560" cy="365760"/>
+            <a:off x="640080" y="4846320"/>
+            <a:ext cx="10972800" cy="1645920"/>
           </a:xfrm>
           <a:prstGeom prst="rect">
             <a:avLst/>
@@ -4788,20 +4149,56 @@
           <a:noFill/>
         </p:spPr>
         <p:txBody>
-          <a:bodyPr wrap="square" anchor="t">
+          <a:bodyPr wrap="square">
             <a:spAutoFit/>
           </a:bodyPr>
           <a:lstStyle/>
           <a:p>
-            <a:pPr algn="l"/>
-            <a:r>
-              <a:rPr sz="1100" b="0" i="1">
-                <a:solidFill>
-                  <a:srgbClr val="636363"/>
-                </a:solidFill>
-                <a:latin typeface="Calibri"/>
-              </a:rPr>
-              <a:t>See docs/references.bib for the full, verified bibliography.</a:t>
+            <a:pPr>
+              <a:spcAft>
+                <a:spcPts val="700"/>
+              </a:spcAft>
+            </a:pPr>
+            <a:r>
+              <a:rPr sz="1500">
+                <a:solidFill>
+                  <a:srgbClr val="222222"/>
+                </a:solidFill>
+                <a:latin typeface="Calibri"/>
+              </a:rPr>
+              <a:t>• Writes one Quiz JSON per version (each embeds the resolved blueprint).</a:t>
+            </a:r>
+          </a:p>
+          <a:p>
+            <a:pPr>
+              <a:spcAft>
+                <a:spcPts val="700"/>
+              </a:spcAft>
+            </a:pPr>
+            <a:r>
+              <a:rPr sz="1500">
+                <a:solidFill>
+                  <a:srgbClr val="222222"/>
+                </a:solidFill>
+                <a:latin typeface="Calibri"/>
+              </a:rPr>
+              <a:t>• Standalone entry points too: python -m quizgen.assemble, python -m quizgen.validate.</a:t>
+            </a:r>
+          </a:p>
+          <a:p>
+            <a:pPr>
+              <a:spcAft>
+                <a:spcPts val="700"/>
+              </a:spcAft>
+            </a:pPr>
+            <a:r>
+              <a:rPr sz="1500">
+                <a:solidFill>
+                  <a:srgbClr val="222222"/>
+                </a:solidFill>
+                <a:latin typeface="Calibri"/>
+              </a:rPr>
+              <a:t>• Exits non-zero on any non-compliant version → composes in scripts &amp; CI.</a:t>
             </a:r>
           </a:p>
         </p:txBody>
@@ -4833,6 +4230,1281 @@
         <p:spPr>
           <a:xfrm>
             <a:off x="0" y="0"/>
+            <a:ext cx="12191695" cy="914400"/>
+          </a:xfrm>
+          <a:prstGeom prst="rect">
+            <a:avLst/>
+          </a:prstGeom>
+          <a:solidFill>
+            <a:srgbClr val="002F5E"/>
+          </a:solidFill>
+          <a:ln>
+            <a:noFill/>
+          </a:ln>
+          <a:effectLst/>
+        </p:spPr>
+        <p:style>
+          <a:lnRef idx="1">
+            <a:schemeClr val="accent1"/>
+          </a:lnRef>
+          <a:fillRef idx="3">
+            <a:schemeClr val="accent1"/>
+          </a:fillRef>
+          <a:effectRef idx="2">
+            <a:schemeClr val="accent1"/>
+          </a:effectRef>
+          <a:fontRef idx="minor">
+            <a:schemeClr val="lt1"/>
+          </a:fontRef>
+        </p:style>
+        <p:txBody>
+          <a:bodyPr rtlCol="0" anchor="ctr"/>
+          <a:lstStyle/>
+          <a:p>
+            <a:pPr algn="ctr"/>
+          </a:p>
+        </p:txBody>
+      </p:sp>
+      <p:sp>
+        <p:nvSpPr>
+          <p:cNvPr id="3" name="Rectangle 2"/>
+          <p:cNvSpPr/>
+          <p:nvPr/>
+        </p:nvSpPr>
+        <p:spPr>
+          <a:xfrm>
+            <a:off x="0" y="914400"/>
+            <a:ext cx="12191695" cy="54864"/>
+          </a:xfrm>
+          <a:prstGeom prst="rect">
+            <a:avLst/>
+          </a:prstGeom>
+          <a:solidFill>
+            <a:srgbClr val="00B1EB"/>
+          </a:solidFill>
+          <a:ln>
+            <a:noFill/>
+          </a:ln>
+          <a:effectLst/>
+        </p:spPr>
+        <p:style>
+          <a:lnRef idx="1">
+            <a:schemeClr val="accent1"/>
+          </a:lnRef>
+          <a:fillRef idx="3">
+            <a:schemeClr val="accent1"/>
+          </a:fillRef>
+          <a:effectRef idx="2">
+            <a:schemeClr val="accent1"/>
+          </a:effectRef>
+          <a:fontRef idx="minor">
+            <a:schemeClr val="lt1"/>
+          </a:fontRef>
+        </p:style>
+        <p:txBody>
+          <a:bodyPr rtlCol="0" anchor="ctr"/>
+          <a:lstStyle/>
+          <a:p>
+            <a:pPr algn="ctr"/>
+          </a:p>
+        </p:txBody>
+      </p:sp>
+      <p:sp>
+        <p:nvSpPr>
+          <p:cNvPr id="4" name="TextBox 3"/>
+          <p:cNvSpPr txBox="1"/>
+          <p:nvPr/>
+        </p:nvSpPr>
+        <p:spPr>
+          <a:xfrm>
+            <a:off x="457200" y="109728"/>
+            <a:ext cx="10058400" cy="713232"/>
+          </a:xfrm>
+          <a:prstGeom prst="rect">
+            <a:avLst/>
+          </a:prstGeom>
+          <a:noFill/>
+        </p:spPr>
+        <p:txBody>
+          <a:bodyPr wrap="square" anchor="ctr">
+            <a:spAutoFit/>
+          </a:bodyPr>
+          <a:lstStyle/>
+          <a:p>
+            <a:pPr algn="l"/>
+            <a:r>
+              <a:rPr sz="2800" b="1" i="0">
+                <a:solidFill>
+                  <a:srgbClr val="FFFFFF"/>
+                </a:solidFill>
+                <a:latin typeface="Calibri"/>
+              </a:rPr>
+              <a:t>Where each technique comes from</a:t>
+            </a:r>
+          </a:p>
+        </p:txBody>
+      </p:sp>
+      <p:sp>
+        <p:nvSpPr>
+          <p:cNvPr id="5" name="TextBox 4"/>
+          <p:cNvSpPr txBox="1"/>
+          <p:nvPr/>
+        </p:nvSpPr>
+        <p:spPr>
+          <a:xfrm>
+            <a:off x="10881360" y="164592"/>
+            <a:ext cx="1188720" cy="640080"/>
+          </a:xfrm>
+          <a:prstGeom prst="rect">
+            <a:avLst/>
+          </a:prstGeom>
+          <a:noFill/>
+        </p:spPr>
+        <p:txBody>
+          <a:bodyPr wrap="square" anchor="ctr">
+            <a:spAutoFit/>
+          </a:bodyPr>
+          <a:lstStyle/>
+          <a:p>
+            <a:pPr algn="r"/>
+            <a:r>
+              <a:rPr sz="2600" b="1" i="0">
+                <a:solidFill>
+                  <a:srgbClr val="00B1EB"/>
+                </a:solidFill>
+                <a:latin typeface="Calibri"/>
+              </a:rPr>
+              <a:t>FAU</a:t>
+            </a:r>
+          </a:p>
+        </p:txBody>
+      </p:sp>
+      <p:sp>
+        <p:nvSpPr>
+          <p:cNvPr id="6" name="TextBox 5"/>
+          <p:cNvSpPr txBox="1"/>
+          <p:nvPr/>
+        </p:nvSpPr>
+        <p:spPr>
+          <a:xfrm>
+            <a:off x="475488" y="-18288"/>
+            <a:ext cx="9144000" cy="256032"/>
+          </a:xfrm>
+          <a:prstGeom prst="rect">
+            <a:avLst/>
+          </a:prstGeom>
+          <a:noFill/>
+        </p:spPr>
+        <p:txBody>
+          <a:bodyPr wrap="square" anchor="t">
+            <a:spAutoFit/>
+          </a:bodyPr>
+          <a:lstStyle/>
+          <a:p>
+            <a:pPr algn="l"/>
+            <a:r>
+              <a:rPr sz="1100" b="1" i="0">
+                <a:solidFill>
+                  <a:srgbClr val="00B1EB"/>
+                </a:solidFill>
+                <a:latin typeface="Calibri"/>
+              </a:rPr>
+              <a:t>TECHNIQUE → SOURCE LINEAGE</a:t>
+            </a:r>
+          </a:p>
+        </p:txBody>
+      </p:sp>
+      <p:sp>
+        <p:nvSpPr>
+          <p:cNvPr id="7" name="Rectangle 6"/>
+          <p:cNvSpPr/>
+          <p:nvPr/>
+        </p:nvSpPr>
+        <p:spPr>
+          <a:xfrm>
+            <a:off x="0" y="6565392"/>
+            <a:ext cx="12191695" cy="18288"/>
+          </a:xfrm>
+          <a:prstGeom prst="rect">
+            <a:avLst/>
+          </a:prstGeom>
+          <a:solidFill>
+            <a:srgbClr val="00B1EB"/>
+          </a:solidFill>
+          <a:ln>
+            <a:noFill/>
+          </a:ln>
+          <a:effectLst/>
+        </p:spPr>
+        <p:style>
+          <a:lnRef idx="1">
+            <a:schemeClr val="accent1"/>
+          </a:lnRef>
+          <a:fillRef idx="3">
+            <a:schemeClr val="accent1"/>
+          </a:fillRef>
+          <a:effectRef idx="2">
+            <a:schemeClr val="accent1"/>
+          </a:effectRef>
+          <a:fontRef idx="minor">
+            <a:schemeClr val="lt1"/>
+          </a:fontRef>
+        </p:style>
+        <p:txBody>
+          <a:bodyPr rtlCol="0" anchor="ctr"/>
+          <a:lstStyle/>
+          <a:p>
+            <a:pPr algn="ctr"/>
+          </a:p>
+        </p:txBody>
+      </p:sp>
+      <p:sp>
+        <p:nvSpPr>
+          <p:cNvPr id="8" name="TextBox 7"/>
+          <p:cNvSpPr txBox="1"/>
+          <p:nvPr/>
+        </p:nvSpPr>
+        <p:spPr>
+          <a:xfrm>
+            <a:off x="457200" y="6583680"/>
+            <a:ext cx="2743200" cy="256032"/>
+          </a:xfrm>
+          <a:prstGeom prst="rect">
+            <a:avLst/>
+          </a:prstGeom>
+          <a:noFill/>
+        </p:spPr>
+        <p:txBody>
+          <a:bodyPr wrap="square" anchor="t">
+            <a:spAutoFit/>
+          </a:bodyPr>
+          <a:lstStyle/>
+          <a:p>
+            <a:pPr algn="l"/>
+            <a:r>
+              <a:rPr sz="900" b="0" i="0">
+                <a:solidFill>
+                  <a:srgbClr val="002F5E"/>
+                </a:solidFill>
+                <a:latin typeface="Calibri"/>
+              </a:rPr>
+              <a:t>J. Hayashi</a:t>
+            </a:r>
+          </a:p>
+        </p:txBody>
+      </p:sp>
+      <p:sp>
+        <p:nvSpPr>
+          <p:cNvPr id="9" name="TextBox 8"/>
+          <p:cNvSpPr txBox="1"/>
+          <p:nvPr/>
+        </p:nvSpPr>
+        <p:spPr>
+          <a:xfrm>
+            <a:off x="3200400" y="6583680"/>
+            <a:ext cx="5760720" cy="256032"/>
+          </a:xfrm>
+          <a:prstGeom prst="rect">
+            <a:avLst/>
+          </a:prstGeom>
+          <a:noFill/>
+        </p:spPr>
+        <p:txBody>
+          <a:bodyPr wrap="square" anchor="t">
+            <a:spAutoFit/>
+          </a:bodyPr>
+          <a:lstStyle/>
+          <a:p>
+            <a:pPr algn="ctr"/>
+            <a:r>
+              <a:rPr sz="900" b="0" i="0">
+                <a:solidFill>
+                  <a:srgbClr val="636363"/>
+                </a:solidFill>
+                <a:latin typeface="Calibri"/>
+              </a:rPr>
+              <a:t>quizgen — Automated Test Assembly</a:t>
+            </a:r>
+          </a:p>
+        </p:txBody>
+      </p:sp>
+      <p:sp>
+        <p:nvSpPr>
+          <p:cNvPr id="10" name="TextBox 9"/>
+          <p:cNvSpPr txBox="1"/>
+          <p:nvPr/>
+        </p:nvSpPr>
+        <p:spPr>
+          <a:xfrm>
+            <a:off x="8778240" y="6583680"/>
+            <a:ext cx="2926080" cy="256032"/>
+          </a:xfrm>
+          <a:prstGeom prst="rect">
+            <a:avLst/>
+          </a:prstGeom>
+          <a:noFill/>
+        </p:spPr>
+        <p:txBody>
+          <a:bodyPr wrap="square" anchor="t">
+            <a:spAutoFit/>
+          </a:bodyPr>
+          <a:lstStyle/>
+          <a:p>
+            <a:pPr algn="r"/>
+            <a:r>
+              <a:rPr sz="900" b="0" i="0">
+                <a:solidFill>
+                  <a:srgbClr val="002F5E"/>
+                </a:solidFill>
+                <a:latin typeface="Calibri"/>
+              </a:rPr>
+              <a:t>FAU Erlangen-Nürnberg   10</a:t>
+            </a:r>
+          </a:p>
+        </p:txBody>
+      </p:sp>
+      <p:sp>
+        <p:nvSpPr>
+          <p:cNvPr id="11" name="Rounded Rectangle 10"/>
+          <p:cNvSpPr/>
+          <p:nvPr/>
+        </p:nvSpPr>
+        <p:spPr>
+          <a:xfrm>
+            <a:off x="640080" y="1280160"/>
+            <a:ext cx="5120640" cy="502920"/>
+          </a:xfrm>
+          <a:prstGeom prst="roundRect">
+            <a:avLst/>
+          </a:prstGeom>
+          <a:solidFill>
+            <a:srgbClr val="002F5E"/>
+          </a:solidFill>
+          <a:ln w="15875">
+            <a:solidFill>
+              <a:srgbClr val="002F5E"/>
+            </a:solidFill>
+          </a:ln>
+          <a:effectLst/>
+        </p:spPr>
+        <p:style>
+          <a:lnRef idx="1">
+            <a:schemeClr val="accent1"/>
+          </a:lnRef>
+          <a:fillRef idx="3">
+            <a:schemeClr val="accent1"/>
+          </a:fillRef>
+          <a:effectRef idx="2">
+            <a:schemeClr val="accent1"/>
+          </a:effectRef>
+          <a:fontRef idx="minor">
+            <a:schemeClr val="lt1"/>
+          </a:fontRef>
+        </p:style>
+        <p:txBody>
+          <a:bodyPr rtlCol="0" anchor="ctr" wrap="square" lIns="45720" rIns="45720" tIns="27432" bIns="27432"/>
+          <a:lstStyle/>
+          <a:p>
+            <a:pPr algn="ctr"/>
+            <a:r>
+              <a:rPr sz="1400" b="1" i="0">
+                <a:solidFill>
+                  <a:srgbClr val="FFFFFF"/>
+                </a:solidFill>
+                <a:latin typeface="Calibri"/>
+              </a:rPr>
+              <a:t>Implemented in code</a:t>
+            </a:r>
+          </a:p>
+        </p:txBody>
+      </p:sp>
+      <p:sp>
+        <p:nvSpPr>
+          <p:cNvPr id="12" name="Rounded Rectangle 11"/>
+          <p:cNvSpPr/>
+          <p:nvPr/>
+        </p:nvSpPr>
+        <p:spPr>
+          <a:xfrm>
+            <a:off x="5852160" y="1280160"/>
+            <a:ext cx="5760720" cy="502920"/>
+          </a:xfrm>
+          <a:prstGeom prst="roundRect">
+            <a:avLst/>
+          </a:prstGeom>
+          <a:solidFill>
+            <a:srgbClr val="002F5E"/>
+          </a:solidFill>
+          <a:ln w="15875">
+            <a:solidFill>
+              <a:srgbClr val="002F5E"/>
+            </a:solidFill>
+          </a:ln>
+          <a:effectLst/>
+        </p:spPr>
+        <p:style>
+          <a:lnRef idx="1">
+            <a:schemeClr val="accent1"/>
+          </a:lnRef>
+          <a:fillRef idx="3">
+            <a:schemeClr val="accent1"/>
+          </a:fillRef>
+          <a:effectRef idx="2">
+            <a:schemeClr val="accent1"/>
+          </a:effectRef>
+          <a:fontRef idx="minor">
+            <a:schemeClr val="lt1"/>
+          </a:fontRef>
+        </p:style>
+        <p:txBody>
+          <a:bodyPr rtlCol="0" anchor="ctr" wrap="square" lIns="45720" rIns="45720" tIns="27432" bIns="27432"/>
+          <a:lstStyle/>
+          <a:p>
+            <a:pPr algn="ctr"/>
+            <a:r>
+              <a:rPr sz="1400" b="1" i="0">
+                <a:solidFill>
+                  <a:srgbClr val="FFFFFF"/>
+                </a:solidFill>
+                <a:latin typeface="Calibri"/>
+              </a:rPr>
+              <a:t>Source lineage</a:t>
+            </a:r>
+          </a:p>
+        </p:txBody>
+      </p:sp>
+      <p:sp>
+        <p:nvSpPr>
+          <p:cNvPr id="13" name="Rectangle 12"/>
+          <p:cNvSpPr/>
+          <p:nvPr/>
+        </p:nvSpPr>
+        <p:spPr>
+          <a:xfrm>
+            <a:off x="640080" y="1783080"/>
+            <a:ext cx="5120640" cy="502920"/>
+          </a:xfrm>
+          <a:prstGeom prst="rect">
+            <a:avLst/>
+          </a:prstGeom>
+          <a:solidFill>
+            <a:srgbClr val="F0F0F2"/>
+          </a:solidFill>
+          <a:ln w="15875">
+            <a:solidFill>
+              <a:srgbClr val="636363"/>
+            </a:solidFill>
+          </a:ln>
+          <a:effectLst/>
+        </p:spPr>
+        <p:style>
+          <a:lnRef idx="1">
+            <a:schemeClr val="accent1"/>
+          </a:lnRef>
+          <a:fillRef idx="3">
+            <a:schemeClr val="accent1"/>
+          </a:fillRef>
+          <a:effectRef idx="2">
+            <a:schemeClr val="accent1"/>
+          </a:effectRef>
+          <a:fontRef idx="minor">
+            <a:schemeClr val="lt1"/>
+          </a:fontRef>
+        </p:style>
+        <p:txBody>
+          <a:bodyPr rtlCol="0" anchor="ctr" wrap="square" lIns="45720" rIns="45720" tIns="27432" bIns="27432"/>
+          <a:lstStyle/>
+          <a:p>
+            <a:pPr algn="ctr"/>
+            <a:r>
+              <a:rPr sz="1200" b="0" i="0">
+                <a:solidFill>
+                  <a:srgbClr val="222222"/>
+                </a:solidFill>
+                <a:latin typeface="Calibri"/>
+              </a:rPr>
+              <a:t>Test assembly as 0–1 MIP</a:t>
+            </a:r>
+          </a:p>
+        </p:txBody>
+      </p:sp>
+      <p:sp>
+        <p:nvSpPr>
+          <p:cNvPr id="14" name="Rectangle 13"/>
+          <p:cNvSpPr/>
+          <p:nvPr/>
+        </p:nvSpPr>
+        <p:spPr>
+          <a:xfrm>
+            <a:off x="5852160" y="1783080"/>
+            <a:ext cx="5760720" cy="502920"/>
+          </a:xfrm>
+          <a:prstGeom prst="rect">
+            <a:avLst/>
+          </a:prstGeom>
+          <a:solidFill>
+            <a:srgbClr val="F0F0F2"/>
+          </a:solidFill>
+          <a:ln w="15875">
+            <a:solidFill>
+              <a:srgbClr val="636363"/>
+            </a:solidFill>
+          </a:ln>
+          <a:effectLst/>
+        </p:spPr>
+        <p:style>
+          <a:lnRef idx="1">
+            <a:schemeClr val="accent1"/>
+          </a:lnRef>
+          <a:fillRef idx="3">
+            <a:schemeClr val="accent1"/>
+          </a:fillRef>
+          <a:effectRef idx="2">
+            <a:schemeClr val="accent1"/>
+          </a:effectRef>
+          <a:fontRef idx="minor">
+            <a:schemeClr val="lt1"/>
+          </a:fontRef>
+        </p:style>
+        <p:txBody>
+          <a:bodyPr rtlCol="0" anchor="ctr" wrap="square" lIns="45720" rIns="45720" tIns="27432" bIns="27432"/>
+          <a:lstStyle/>
+          <a:p>
+            <a:pPr algn="ctr"/>
+            <a:r>
+              <a:rPr sz="1200" b="0" i="0">
+                <a:solidFill>
+                  <a:srgbClr val="222222"/>
+                </a:solidFill>
+                <a:latin typeface="Calibri"/>
+              </a:rPr>
+              <a:t>van der Linden 2005 — optimal test design</a:t>
+            </a:r>
+          </a:p>
+        </p:txBody>
+      </p:sp>
+      <p:sp>
+        <p:nvSpPr>
+          <p:cNvPr id="15" name="Rectangle 14"/>
+          <p:cNvSpPr/>
+          <p:nvPr/>
+        </p:nvSpPr>
+        <p:spPr>
+          <a:xfrm>
+            <a:off x="640080" y="2286000"/>
+            <a:ext cx="5120640" cy="502920"/>
+          </a:xfrm>
+          <a:prstGeom prst="rect">
+            <a:avLst/>
+          </a:prstGeom>
+          <a:solidFill>
+            <a:srgbClr val="FFFFFF"/>
+          </a:solidFill>
+          <a:ln w="15875">
+            <a:solidFill>
+              <a:srgbClr val="636363"/>
+            </a:solidFill>
+          </a:ln>
+          <a:effectLst/>
+        </p:spPr>
+        <p:style>
+          <a:lnRef idx="1">
+            <a:schemeClr val="accent1"/>
+          </a:lnRef>
+          <a:fillRef idx="3">
+            <a:schemeClr val="accent1"/>
+          </a:fillRef>
+          <a:effectRef idx="2">
+            <a:schemeClr val="accent1"/>
+          </a:effectRef>
+          <a:fontRef idx="minor">
+            <a:schemeClr val="lt1"/>
+          </a:fontRef>
+        </p:style>
+        <p:txBody>
+          <a:bodyPr rtlCol="0" anchor="ctr" wrap="square" lIns="45720" rIns="45720" tIns="27432" bIns="27432"/>
+          <a:lstStyle/>
+          <a:p>
+            <a:pPr algn="ctr"/>
+            <a:r>
+              <a:rPr sz="1200" b="0" i="0">
+                <a:solidFill>
+                  <a:srgbClr val="222222"/>
+                </a:solidFill>
+                <a:latin typeface="Calibri"/>
+              </a:rPr>
+              <a:t>Quality-weighted selection</a:t>
+            </a:r>
+          </a:p>
+        </p:txBody>
+      </p:sp>
+      <p:sp>
+        <p:nvSpPr>
+          <p:cNvPr id="16" name="Rectangle 15"/>
+          <p:cNvSpPr/>
+          <p:nvPr/>
+        </p:nvSpPr>
+        <p:spPr>
+          <a:xfrm>
+            <a:off x="5852160" y="2286000"/>
+            <a:ext cx="5760720" cy="502920"/>
+          </a:xfrm>
+          <a:prstGeom prst="rect">
+            <a:avLst/>
+          </a:prstGeom>
+          <a:solidFill>
+            <a:srgbClr val="FFFFFF"/>
+          </a:solidFill>
+          <a:ln w="15875">
+            <a:solidFill>
+              <a:srgbClr val="636363"/>
+            </a:solidFill>
+          </a:ln>
+          <a:effectLst/>
+        </p:spPr>
+        <p:style>
+          <a:lnRef idx="1">
+            <a:schemeClr val="accent1"/>
+          </a:lnRef>
+          <a:fillRef idx="3">
+            <a:schemeClr val="accent1"/>
+          </a:fillRef>
+          <a:effectRef idx="2">
+            <a:schemeClr val="accent1"/>
+          </a:effectRef>
+          <a:fontRef idx="minor">
+            <a:schemeClr val="lt1"/>
+          </a:fontRef>
+        </p:style>
+        <p:txBody>
+          <a:bodyPr rtlCol="0" anchor="ctr" wrap="square" lIns="45720" rIns="45720" tIns="27432" bIns="27432"/>
+          <a:lstStyle/>
+          <a:p>
+            <a:pPr algn="ctr"/>
+            <a:r>
+              <a:rPr sz="1200" b="0" i="0">
+                <a:solidFill>
+                  <a:srgbClr val="222222"/>
+                </a:solidFill>
+                <a:latin typeface="Calibri"/>
+              </a:rPr>
+              <a:t>van der Linden 2005 (objective in ATA)</a:t>
+            </a:r>
+          </a:p>
+        </p:txBody>
+      </p:sp>
+      <p:sp>
+        <p:nvSpPr>
+          <p:cNvPr id="17" name="Rectangle 16"/>
+          <p:cNvSpPr/>
+          <p:nvPr/>
+        </p:nvSpPr>
+        <p:spPr>
+          <a:xfrm>
+            <a:off x="640080" y="2788920"/>
+            <a:ext cx="5120640" cy="502920"/>
+          </a:xfrm>
+          <a:prstGeom prst="rect">
+            <a:avLst/>
+          </a:prstGeom>
+          <a:solidFill>
+            <a:srgbClr val="F0F0F2"/>
+          </a:solidFill>
+          <a:ln w="15875">
+            <a:solidFill>
+              <a:srgbClr val="636363"/>
+            </a:solidFill>
+          </a:ln>
+          <a:effectLst/>
+        </p:spPr>
+        <p:style>
+          <a:lnRef idx="1">
+            <a:schemeClr val="accent1"/>
+          </a:lnRef>
+          <a:fillRef idx="3">
+            <a:schemeClr val="accent1"/>
+          </a:fillRef>
+          <a:effectRef idx="2">
+            <a:schemeClr val="accent1"/>
+          </a:effectRef>
+          <a:fontRef idx="minor">
+            <a:schemeClr val="lt1"/>
+          </a:fontRef>
+        </p:style>
+        <p:txBody>
+          <a:bodyPr rtlCol="0" anchor="ctr" wrap="square" lIns="45720" rIns="45720" tIns="27432" bIns="27432"/>
+          <a:lstStyle/>
+          <a:p>
+            <a:pPr algn="ctr"/>
+            <a:r>
+              <a:rPr sz="1200" b="0" i="0">
+                <a:solidFill>
+                  <a:srgbClr val="222222"/>
+                </a:solidFill>
+                <a:latin typeface="Calibri"/>
+              </a:rPr>
+              <a:t>Test blueprint / type &amp; difficulty mix</a:t>
+            </a:r>
+          </a:p>
+        </p:txBody>
+      </p:sp>
+      <p:sp>
+        <p:nvSpPr>
+          <p:cNvPr id="18" name="Rectangle 17"/>
+          <p:cNvSpPr/>
+          <p:nvPr/>
+        </p:nvSpPr>
+        <p:spPr>
+          <a:xfrm>
+            <a:off x="5852160" y="2788920"/>
+            <a:ext cx="5760720" cy="502920"/>
+          </a:xfrm>
+          <a:prstGeom prst="rect">
+            <a:avLst/>
+          </a:prstGeom>
+          <a:solidFill>
+            <a:srgbClr val="F0F0F2"/>
+          </a:solidFill>
+          <a:ln w="15875">
+            <a:solidFill>
+              <a:srgbClr val="636363"/>
+            </a:solidFill>
+          </a:ln>
+          <a:effectLst/>
+        </p:spPr>
+        <p:style>
+          <a:lnRef idx="1">
+            <a:schemeClr val="accent1"/>
+          </a:lnRef>
+          <a:fillRef idx="3">
+            <a:schemeClr val="accent1"/>
+          </a:fillRef>
+          <a:effectRef idx="2">
+            <a:schemeClr val="accent1"/>
+          </a:effectRef>
+          <a:fontRef idx="minor">
+            <a:schemeClr val="lt1"/>
+          </a:fontRef>
+        </p:style>
+        <p:txBody>
+          <a:bodyPr rtlCol="0" anchor="ctr" wrap="square" lIns="45720" rIns="45720" tIns="27432" bIns="27432"/>
+          <a:lstStyle/>
+          <a:p>
+            <a:pPr algn="ctr"/>
+            <a:r>
+              <a:rPr sz="1200" b="0" i="0">
+                <a:solidFill>
+                  <a:srgbClr val="222222"/>
+                </a:solidFill>
+                <a:latin typeface="Calibri"/>
+              </a:rPr>
+              <a:t>classical table-of-specifications design</a:t>
+            </a:r>
+          </a:p>
+        </p:txBody>
+      </p:sp>
+      <p:sp>
+        <p:nvSpPr>
+          <p:cNvPr id="19" name="Rectangle 18"/>
+          <p:cNvSpPr/>
+          <p:nvPr/>
+        </p:nvSpPr>
+        <p:spPr>
+          <a:xfrm>
+            <a:off x="640080" y="3291840"/>
+            <a:ext cx="5120640" cy="502920"/>
+          </a:xfrm>
+          <a:prstGeom prst="rect">
+            <a:avLst/>
+          </a:prstGeom>
+          <a:solidFill>
+            <a:srgbClr val="FFFFFF"/>
+          </a:solidFill>
+          <a:ln w="15875">
+            <a:solidFill>
+              <a:srgbClr val="636363"/>
+            </a:solidFill>
+          </a:ln>
+          <a:effectLst/>
+        </p:spPr>
+        <p:style>
+          <a:lnRef idx="1">
+            <a:schemeClr val="accent1"/>
+          </a:lnRef>
+          <a:fillRef idx="3">
+            <a:schemeClr val="accent1"/>
+          </a:fillRef>
+          <a:effectRef idx="2">
+            <a:schemeClr val="accent1"/>
+          </a:effectRef>
+          <a:fontRef idx="minor">
+            <a:schemeClr val="lt1"/>
+          </a:fontRef>
+        </p:style>
+        <p:txBody>
+          <a:bodyPr rtlCol="0" anchor="ctr" wrap="square" lIns="45720" rIns="45720" tIns="27432" bIns="27432"/>
+          <a:lstStyle/>
+          <a:p>
+            <a:pPr algn="ctr"/>
+            <a:r>
+              <a:rPr sz="1200" b="0" i="0">
+                <a:solidFill>
+                  <a:srgbClr val="222222"/>
+                </a:solidFill>
+                <a:latin typeface="Calibri"/>
+              </a:rPr>
+              <a:t>Bloom-level metadata</a:t>
+            </a:r>
+          </a:p>
+        </p:txBody>
+      </p:sp>
+      <p:sp>
+        <p:nvSpPr>
+          <p:cNvPr id="20" name="Rectangle 19"/>
+          <p:cNvSpPr/>
+          <p:nvPr/>
+        </p:nvSpPr>
+        <p:spPr>
+          <a:xfrm>
+            <a:off x="5852160" y="3291840"/>
+            <a:ext cx="5760720" cy="502920"/>
+          </a:xfrm>
+          <a:prstGeom prst="rect">
+            <a:avLst/>
+          </a:prstGeom>
+          <a:solidFill>
+            <a:srgbClr val="FFFFFF"/>
+          </a:solidFill>
+          <a:ln w="15875">
+            <a:solidFill>
+              <a:srgbClr val="636363"/>
+            </a:solidFill>
+          </a:ln>
+          <a:effectLst/>
+        </p:spPr>
+        <p:style>
+          <a:lnRef idx="1">
+            <a:schemeClr val="accent1"/>
+          </a:lnRef>
+          <a:fillRef idx="3">
+            <a:schemeClr val="accent1"/>
+          </a:fillRef>
+          <a:effectRef idx="2">
+            <a:schemeClr val="accent1"/>
+          </a:effectRef>
+          <a:fontRef idx="minor">
+            <a:schemeClr val="lt1"/>
+          </a:fontRef>
+        </p:style>
+        <p:txBody>
+          <a:bodyPr rtlCol="0" anchor="ctr" wrap="square" lIns="45720" rIns="45720" tIns="27432" bIns="27432"/>
+          <a:lstStyle/>
+          <a:p>
+            <a:pPr algn="ctr"/>
+            <a:r>
+              <a:rPr sz="1200" b="0" i="0">
+                <a:solidFill>
+                  <a:srgbClr val="222222"/>
+                </a:solidFill>
+                <a:latin typeface="Calibri"/>
+              </a:rPr>
+              <a:t>Anderson &amp; Krathwohl 2001 (revised Bloom)</a:t>
+            </a:r>
+          </a:p>
+        </p:txBody>
+      </p:sp>
+      <p:sp>
+        <p:nvSpPr>
+          <p:cNvPr id="21" name="Rectangle 20"/>
+          <p:cNvSpPr/>
+          <p:nvPr/>
+        </p:nvSpPr>
+        <p:spPr>
+          <a:xfrm>
+            <a:off x="640080" y="3794760"/>
+            <a:ext cx="5120640" cy="502920"/>
+          </a:xfrm>
+          <a:prstGeom prst="rect">
+            <a:avLst/>
+          </a:prstGeom>
+          <a:solidFill>
+            <a:srgbClr val="F0F0F2"/>
+          </a:solidFill>
+          <a:ln w="15875">
+            <a:solidFill>
+              <a:srgbClr val="636363"/>
+            </a:solidFill>
+          </a:ln>
+          <a:effectLst/>
+        </p:spPr>
+        <p:style>
+          <a:lnRef idx="1">
+            <a:schemeClr val="accent1"/>
+          </a:lnRef>
+          <a:fillRef idx="3">
+            <a:schemeClr val="accent1"/>
+          </a:fillRef>
+          <a:effectRef idx="2">
+            <a:schemeClr val="accent1"/>
+          </a:effectRef>
+          <a:fontRef idx="minor">
+            <a:schemeClr val="lt1"/>
+          </a:fontRef>
+        </p:style>
+        <p:txBody>
+          <a:bodyPr rtlCol="0" anchor="ctr" wrap="square" lIns="45720" rIns="45720" tIns="27432" bIns="27432"/>
+          <a:lstStyle/>
+          <a:p>
+            <a:pPr algn="ctr"/>
+            <a:r>
+              <a:rPr sz="1200" b="0" i="0">
+                <a:solidFill>
+                  <a:srgbClr val="222222"/>
+                </a:solidFill>
+                <a:latin typeface="Calibri"/>
+              </a:rPr>
+              <a:t>Semantic dedup (embeddings)</a:t>
+            </a:r>
+          </a:p>
+        </p:txBody>
+      </p:sp>
+      <p:sp>
+        <p:nvSpPr>
+          <p:cNvPr id="22" name="Rectangle 21"/>
+          <p:cNvSpPr/>
+          <p:nvPr/>
+        </p:nvSpPr>
+        <p:spPr>
+          <a:xfrm>
+            <a:off x="5852160" y="3794760"/>
+            <a:ext cx="5760720" cy="502920"/>
+          </a:xfrm>
+          <a:prstGeom prst="rect">
+            <a:avLst/>
+          </a:prstGeom>
+          <a:solidFill>
+            <a:srgbClr val="F0F0F2"/>
+          </a:solidFill>
+          <a:ln w="15875">
+            <a:solidFill>
+              <a:srgbClr val="636363"/>
+            </a:solidFill>
+          </a:ln>
+          <a:effectLst/>
+        </p:spPr>
+        <p:style>
+          <a:lnRef idx="1">
+            <a:schemeClr val="accent1"/>
+          </a:lnRef>
+          <a:fillRef idx="3">
+            <a:schemeClr val="accent1"/>
+          </a:fillRef>
+          <a:effectRef idx="2">
+            <a:schemeClr val="accent1"/>
+          </a:effectRef>
+          <a:fontRef idx="minor">
+            <a:schemeClr val="lt1"/>
+          </a:fontRef>
+        </p:style>
+        <p:txBody>
+          <a:bodyPr rtlCol="0" anchor="ctr" wrap="square" lIns="45720" rIns="45720" tIns="27432" bIns="27432"/>
+          <a:lstStyle/>
+          <a:p>
+            <a:pPr algn="ctr"/>
+            <a:r>
+              <a:rPr sz="1200" b="0" i="0">
+                <a:solidFill>
+                  <a:srgbClr val="222222"/>
+                </a:solidFill>
+                <a:latin typeface="Calibri"/>
+              </a:rPr>
+              <a:t>Sentence-BERT (Reimers &amp; Gurevych 2019)</a:t>
+            </a:r>
+          </a:p>
+        </p:txBody>
+      </p:sp>
+      <p:sp>
+        <p:nvSpPr>
+          <p:cNvPr id="23" name="Rectangle 22"/>
+          <p:cNvSpPr/>
+          <p:nvPr/>
+        </p:nvSpPr>
+        <p:spPr>
+          <a:xfrm>
+            <a:off x="640080" y="4297680"/>
+            <a:ext cx="5120640" cy="502920"/>
+          </a:xfrm>
+          <a:prstGeom prst="rect">
+            <a:avLst/>
+          </a:prstGeom>
+          <a:solidFill>
+            <a:srgbClr val="FFFFFF"/>
+          </a:solidFill>
+          <a:ln w="15875">
+            <a:solidFill>
+              <a:srgbClr val="636363"/>
+            </a:solidFill>
+          </a:ln>
+          <a:effectLst/>
+        </p:spPr>
+        <p:style>
+          <a:lnRef idx="1">
+            <a:schemeClr val="accent1"/>
+          </a:lnRef>
+          <a:fillRef idx="3">
+            <a:schemeClr val="accent1"/>
+          </a:fillRef>
+          <a:effectRef idx="2">
+            <a:schemeClr val="accent1"/>
+          </a:effectRef>
+          <a:fontRef idx="minor">
+            <a:schemeClr val="lt1"/>
+          </a:fontRef>
+        </p:style>
+        <p:txBody>
+          <a:bodyPr rtlCol="0" anchor="ctr" wrap="square" lIns="45720" rIns="45720" tIns="27432" bIns="27432"/>
+          <a:lstStyle/>
+          <a:p>
+            <a:pPr algn="ctr"/>
+            <a:r>
+              <a:rPr sz="1200" b="0" i="0">
+                <a:solidFill>
+                  <a:srgbClr val="222222"/>
+                </a:solidFill>
+                <a:latin typeface="Calibri"/>
+              </a:rPr>
+              <a:t>Largest-remainder counts</a:t>
+            </a:r>
+          </a:p>
+        </p:txBody>
+      </p:sp>
+      <p:sp>
+        <p:nvSpPr>
+          <p:cNvPr id="24" name="Rectangle 23"/>
+          <p:cNvSpPr/>
+          <p:nvPr/>
+        </p:nvSpPr>
+        <p:spPr>
+          <a:xfrm>
+            <a:off x="5852160" y="4297680"/>
+            <a:ext cx="5760720" cy="502920"/>
+          </a:xfrm>
+          <a:prstGeom prst="rect">
+            <a:avLst/>
+          </a:prstGeom>
+          <a:solidFill>
+            <a:srgbClr val="FFFFFF"/>
+          </a:solidFill>
+          <a:ln w="15875">
+            <a:solidFill>
+              <a:srgbClr val="636363"/>
+            </a:solidFill>
+          </a:ln>
+          <a:effectLst/>
+        </p:spPr>
+        <p:style>
+          <a:lnRef idx="1">
+            <a:schemeClr val="accent1"/>
+          </a:lnRef>
+          <a:fillRef idx="3">
+            <a:schemeClr val="accent1"/>
+          </a:fillRef>
+          <a:effectRef idx="2">
+            <a:schemeClr val="accent1"/>
+          </a:effectRef>
+          <a:fontRef idx="minor">
+            <a:schemeClr val="lt1"/>
+          </a:fontRef>
+        </p:style>
+        <p:txBody>
+          <a:bodyPr rtlCol="0" anchor="ctr" wrap="square" lIns="45720" rIns="45720" tIns="27432" bIns="27432"/>
+          <a:lstStyle/>
+          <a:p>
+            <a:pPr algn="ctr"/>
+            <a:r>
+              <a:rPr sz="1200" b="0" i="0">
+                <a:solidFill>
+                  <a:srgbClr val="222222"/>
+                </a:solidFill>
+                <a:latin typeface="Calibri"/>
+              </a:rPr>
+              <a:t>Hamilton apportionment (engineering)</a:t>
+            </a:r>
+          </a:p>
+        </p:txBody>
+      </p:sp>
+      <p:sp>
+        <p:nvSpPr>
+          <p:cNvPr id="25" name="Rectangle 24"/>
+          <p:cNvSpPr/>
+          <p:nvPr/>
+        </p:nvSpPr>
+        <p:spPr>
+          <a:xfrm>
+            <a:off x="640080" y="4800600"/>
+            <a:ext cx="5120640" cy="502920"/>
+          </a:xfrm>
+          <a:prstGeom prst="rect">
+            <a:avLst/>
+          </a:prstGeom>
+          <a:solidFill>
+            <a:srgbClr val="F0F0F2"/>
+          </a:solidFill>
+          <a:ln w="15875">
+            <a:solidFill>
+              <a:srgbClr val="636363"/>
+            </a:solidFill>
+          </a:ln>
+          <a:effectLst/>
+        </p:spPr>
+        <p:style>
+          <a:lnRef idx="1">
+            <a:schemeClr val="accent1"/>
+          </a:lnRef>
+          <a:fillRef idx="3">
+            <a:schemeClr val="accent1"/>
+          </a:fillRef>
+          <a:effectRef idx="2">
+            <a:schemeClr val="accent1"/>
+          </a:effectRef>
+          <a:fontRef idx="minor">
+            <a:schemeClr val="lt1"/>
+          </a:fontRef>
+        </p:style>
+        <p:txBody>
+          <a:bodyPr rtlCol="0" anchor="ctr" wrap="square" lIns="45720" rIns="45720" tIns="27432" bIns="27432"/>
+          <a:lstStyle/>
+          <a:p>
+            <a:pPr algn="ctr"/>
+            <a:r>
+              <a:rPr sz="1200" b="0" i="0">
+                <a:solidFill>
+                  <a:srgbClr val="222222"/>
+                </a:solidFill>
+                <a:latin typeface="Calibri"/>
+              </a:rPr>
+              <a:t>Greedy baseline, token Jaccard</a:t>
+            </a:r>
+          </a:p>
+        </p:txBody>
+      </p:sp>
+      <p:sp>
+        <p:nvSpPr>
+          <p:cNvPr id="26" name="Rectangle 25"/>
+          <p:cNvSpPr/>
+          <p:nvPr/>
+        </p:nvSpPr>
+        <p:spPr>
+          <a:xfrm>
+            <a:off x="5852160" y="4800600"/>
+            <a:ext cx="5760720" cy="502920"/>
+          </a:xfrm>
+          <a:prstGeom prst="rect">
+            <a:avLst/>
+          </a:prstGeom>
+          <a:solidFill>
+            <a:srgbClr val="F0F0F2"/>
+          </a:solidFill>
+          <a:ln w="15875">
+            <a:solidFill>
+              <a:srgbClr val="636363"/>
+            </a:solidFill>
+          </a:ln>
+          <a:effectLst/>
+        </p:spPr>
+        <p:style>
+          <a:lnRef idx="1">
+            <a:schemeClr val="accent1"/>
+          </a:lnRef>
+          <a:fillRef idx="3">
+            <a:schemeClr val="accent1"/>
+          </a:fillRef>
+          <a:effectRef idx="2">
+            <a:schemeClr val="accent1"/>
+          </a:effectRef>
+          <a:fontRef idx="minor">
+            <a:schemeClr val="lt1"/>
+          </a:fontRef>
+        </p:style>
+        <p:txBody>
+          <a:bodyPr rtlCol="0" anchor="ctr" wrap="square" lIns="45720" rIns="45720" tIns="27432" bIns="27432"/>
+          <a:lstStyle/>
+          <a:p>
+            <a:pPr algn="ctr"/>
+            <a:r>
+              <a:rPr sz="1200" b="0" i="0">
+                <a:solidFill>
+                  <a:srgbClr val="222222"/>
+                </a:solidFill>
+                <a:latin typeface="Calibri"/>
+              </a:rPr>
+              <a:t>project-specific engineering</a:t>
+            </a:r>
+          </a:p>
+        </p:txBody>
+      </p:sp>
+      <p:sp>
+        <p:nvSpPr>
+          <p:cNvPr id="27" name="TextBox 26"/>
+          <p:cNvSpPr txBox="1"/>
+          <p:nvPr/>
+        </p:nvSpPr>
+        <p:spPr>
+          <a:xfrm>
+            <a:off x="640080" y="6126480"/>
+            <a:ext cx="11338560" cy="365760"/>
+          </a:xfrm>
+          <a:prstGeom prst="rect">
+            <a:avLst/>
+          </a:prstGeom>
+          <a:noFill/>
+        </p:spPr>
+        <p:txBody>
+          <a:bodyPr wrap="square" anchor="t">
+            <a:spAutoFit/>
+          </a:bodyPr>
+          <a:lstStyle/>
+          <a:p>
+            <a:pPr algn="l"/>
+            <a:r>
+              <a:rPr sz="1100" b="0" i="1">
+                <a:solidFill>
+                  <a:srgbClr val="636363"/>
+                </a:solidFill>
+                <a:latin typeface="Calibri"/>
+              </a:rPr>
+              <a:t>See docs/references.bib for the full, verified bibliography.</a:t>
+            </a:r>
+          </a:p>
+        </p:txBody>
+      </p:sp>
+    </p:spTree>
+  </p:cSld>
+  <p:clrMapOvr>
+    <a:masterClrMapping/>
+  </p:clrMapOvr>
+</p:sld>
+</file>
+
+<file path=ppt/slides/slide12.xml><?xml version="1.0" encoding="utf-8"?>
+<p:sld xmlns:a="http://schemas.openxmlformats.org/drawingml/2006/main" xmlns:p="http://schemas.openxmlformats.org/presentationml/2006/main" xmlns:r="http://schemas.openxmlformats.org/officeDocument/2006/relationships">
+  <p:cSld>
+    <p:spTree>
+      <p:nvGrpSpPr>
+        <p:cNvPr id="1" name=""/>
+        <p:cNvGrpSpPr/>
+        <p:nvPr/>
+      </p:nvGrpSpPr>
+      <p:grpSpPr/>
+      <p:sp>
+        <p:nvSpPr>
+          <p:cNvPr id="2" name="Rectangle 1"/>
+          <p:cNvSpPr/>
+          <p:nvPr/>
+        </p:nvSpPr>
+        <p:spPr>
+          <a:xfrm>
+            <a:off x="0" y="0"/>
             <a:ext cx="12191695" cy="6858000"/>
           </a:xfrm>
           <a:prstGeom prst="rect">
@@ -9341,7 +10013,7 @@
                 </a:solidFill>
                 <a:latin typeface="Calibri"/>
               </a:rPr>
-              <a:t>Balanced formats, not all multiple-choice</a:t>
+              <a:t>What the equations actually say</a:t>
             </a:r>
           </a:p>
         </p:txBody>
@@ -9411,7 +10083,7 @@
                 </a:solidFill>
                 <a:latin typeface="Calibri"/>
               </a:rPr>
-              <a:t>WHY qtype_mix MATTERS</a:t>
+              <a:t>THE MIP IN PLAIN WORDS</a:t>
             </a:r>
           </a:p>
         </p:txBody>
@@ -9573,8 +10245,8 @@
         </p:nvSpPr>
         <p:spPr>
           <a:xfrm>
-            <a:off x="640080" y="1188720"/>
-            <a:ext cx="10972800" cy="731520"/>
+            <a:off x="640080" y="1097280"/>
+            <a:ext cx="11155680" cy="548640"/>
           </a:xfrm>
           <a:prstGeom prst="rect">
             <a:avLst/>
@@ -9589,13 +10261,13 @@
           <a:p>
             <a:pPr algn="l"/>
             <a:r>
-              <a:rPr sz="1700" b="0" i="0">
-                <a:solidFill>
-                  <a:srgbClr val="222222"/>
-                </a:solidFill>
-                <a:latin typeface="Calibri"/>
-              </a:rPr>
-              <a:t>The quality objective rewards well-formed MCQs (+0.2). With no constraint on the type distribution, the optimiser fills every free slot with MCQs.</a:t>
+              <a:rPr sz="1500" b="0" i="1">
+                <a:solidFill>
+                  <a:srgbClr val="636363"/>
+                </a:solidFill>
+                <a:latin typeface="Calibri"/>
+              </a:rPr>
+              <a:t>A MIP is just: lots of yes/no choices  +  one goal  +  rules to obey. The solver flips the switches to score as high as it can while breaking no rule.</a:t>
             </a:r>
           </a:p>
         </p:txBody>
@@ -9608,18 +10280,18 @@
         </p:nvSpPr>
         <p:spPr>
           <a:xfrm>
-            <a:off x="640080" y="2286000"/>
-            <a:ext cx="5212080" cy="548640"/>
+            <a:off x="640080" y="1737360"/>
+            <a:ext cx="4114800" cy="530352"/>
           </a:xfrm>
           <a:prstGeom prst="roundRect">
             <a:avLst/>
           </a:prstGeom>
           <a:solidFill>
-            <a:srgbClr val="DE2D26"/>
+            <a:srgbClr val="002F5E"/>
           </a:solidFill>
           <a:ln w="15875">
             <a:solidFill>
-              <a:srgbClr val="DE2D26"/>
+              <a:srgbClr val="002F5E"/>
             </a:solidFill>
           </a:ln>
           <a:effectLst/>
@@ -9644,37 +10316,37 @@
           <a:p>
             <a:pPr algn="ctr"/>
             <a:r>
-              <a:rPr sz="1500" b="1" i="0">
+              <a:rPr sz="1300" b="1" i="0">
                 <a:solidFill>
                   <a:srgbClr val="FFFFFF"/>
                 </a:solidFill>
                 <a:latin typeface="Calibri"/>
               </a:rPr>
-              <a:t>Without qtype_mix</a:t>
-            </a:r>
-          </a:p>
-        </p:txBody>
-      </p:sp>
-      <p:sp>
-        <p:nvSpPr>
-          <p:cNvPr id="13" name="Rectangle 12"/>
+              <a:t>The maths</a:t>
+            </a:r>
+          </a:p>
+        </p:txBody>
+      </p:sp>
+      <p:sp>
+        <p:nvSpPr>
+          <p:cNvPr id="13" name="Rounded Rectangle 12"/>
           <p:cNvSpPr/>
           <p:nvPr/>
         </p:nvSpPr>
         <p:spPr>
           <a:xfrm>
-            <a:off x="640080" y="2926080"/>
-            <a:ext cx="5212080" cy="1463040"/>
-          </a:xfrm>
-          <a:prstGeom prst="rect">
+            <a:off x="4846320" y="1737360"/>
+            <a:ext cx="6766560" cy="530352"/>
+          </a:xfrm>
+          <a:prstGeom prst="roundRect">
             <a:avLst/>
           </a:prstGeom>
           <a:solidFill>
-            <a:srgbClr val="FDE0DD"/>
+            <a:srgbClr val="002F5E"/>
           </a:solidFill>
           <a:ln w="15875">
             <a:solidFill>
-              <a:srgbClr val="DE2D26"/>
+              <a:srgbClr val="002F5E"/>
             </a:solidFill>
           </a:ln>
           <a:effectLst/>
@@ -9699,64 +10371,37 @@
           <a:p>
             <a:pPr algn="ctr"/>
             <a:r>
-              <a:rPr sz="1500" b="0" i="0">
-                <a:solidFill>
-                  <a:srgbClr val="222222"/>
-                </a:solidFill>
-                <a:latin typeface="Calibri"/>
-              </a:rPr>
-              <a:t>v1: mcq 18 · short_answer 1 · cloze 1</a:t>
-            </a:r>
-          </a:p>
-          <a:p>
-            <a:pPr algn="ctr"/>
-            <a:r>
-              <a:rPr sz="1500" b="0" i="0">
-                <a:solidFill>
-                  <a:srgbClr val="222222"/>
-                </a:solidFill>
-                <a:latin typeface="Calibri"/>
-              </a:rPr>
-              <a:t>v2: mcq 19 · short_answer 1</a:t>
-            </a:r>
-          </a:p>
-          <a:p>
-            <a:pPr algn="ctr"/>
-          </a:p>
-          <a:p>
-            <a:pPr algn="ctr"/>
-            <a:r>
-              <a:rPr sz="1500" b="0" i="0">
-                <a:solidFill>
-                  <a:srgbClr val="222222"/>
-                </a:solidFill>
-                <a:latin typeface="Calibri"/>
-              </a:rPr>
-              <a:t>→ effectively all MCQ</a:t>
-            </a:r>
-          </a:p>
-        </p:txBody>
-      </p:sp>
-      <p:sp>
-        <p:nvSpPr>
-          <p:cNvPr id="14" name="Rounded Rectangle 13"/>
+              <a:rPr sz="1300" b="1" i="0">
+                <a:solidFill>
+                  <a:srgbClr val="FFFFFF"/>
+                </a:solidFill>
+                <a:latin typeface="Calibri"/>
+              </a:rPr>
+              <a:t>What it says, in everyday words</a:t>
+            </a:r>
+          </a:p>
+        </p:txBody>
+      </p:sp>
+      <p:sp>
+        <p:nvSpPr>
+          <p:cNvPr id="14" name="Rectangle 13"/>
           <p:cNvSpPr/>
           <p:nvPr/>
         </p:nvSpPr>
         <p:spPr>
           <a:xfrm>
-            <a:off x="6400800" y="2286000"/>
-            <a:ext cx="5212080" cy="548640"/>
-          </a:xfrm>
-          <a:prstGeom prst="roundRect">
+            <a:off x="640080" y="2267712"/>
+            <a:ext cx="4114800" cy="530352"/>
+          </a:xfrm>
+          <a:prstGeom prst="rect">
             <a:avLst/>
           </a:prstGeom>
           <a:solidFill>
-            <a:srgbClr val="31A354"/>
+            <a:srgbClr val="F0F0F2"/>
           </a:solidFill>
           <a:ln w="15875">
             <a:solidFill>
-              <a:srgbClr val="31A354"/>
+              <a:srgbClr val="636363"/>
             </a:solidFill>
           </a:ln>
           <a:effectLst/>
@@ -9781,13 +10426,13 @@
           <a:p>
             <a:pPr algn="ctr"/>
             <a:r>
-              <a:rPr sz="1500" b="1" i="0">
-                <a:solidFill>
-                  <a:srgbClr val="FFFFFF"/>
-                </a:solidFill>
-                <a:latin typeface="Calibri"/>
-              </a:rPr>
-              <a:t>With qtype_mix (0.4/0.2/0.2/0.2)</a:t>
+              <a:rPr sz="1200" b="0" i="0">
+                <a:solidFill>
+                  <a:srgbClr val="222222"/>
+                </a:solidFill>
+                <a:latin typeface="Consolas"/>
+              </a:rPr>
+              <a:t>x(i,v) = 1 or 0</a:t>
             </a:r>
           </a:p>
         </p:txBody>
@@ -9800,18 +10445,18 @@
         </p:nvSpPr>
         <p:spPr>
           <a:xfrm>
-            <a:off x="6400800" y="2926080"/>
-            <a:ext cx="5212080" cy="1463040"/>
+            <a:off x="4846320" y="2267712"/>
+            <a:ext cx="6766560" cy="530352"/>
           </a:xfrm>
           <a:prstGeom prst="rect">
             <a:avLst/>
           </a:prstGeom>
           <a:solidFill>
-            <a:srgbClr val="E5F5E0"/>
+            <a:srgbClr val="F0F0F2"/>
           </a:solidFill>
           <a:ln w="15875">
             <a:solidFill>
-              <a:srgbClr val="31A354"/>
+              <a:srgbClr val="636363"/>
             </a:solidFill>
           </a:ln>
           <a:effectLst/>
@@ -9836,54 +10481,687 @@
           <a:p>
             <a:pPr algn="ctr"/>
             <a:r>
-              <a:rPr sz="1500" b="0" i="0">
+              <a:rPr sz="1200" b="0" i="0">
                 <a:solidFill>
                   <a:srgbClr val="222222"/>
                 </a:solidFill>
                 <a:latin typeface="Calibri"/>
               </a:rPr>
-              <a:t>v1: mcq 8 · true_false 4 · short_answer 4 · cloze 4</a:t>
-            </a:r>
-          </a:p>
-          <a:p>
-            <a:pPr algn="ctr"/>
-            <a:r>
-              <a:rPr sz="1500" b="0" i="0">
+              <a:t>An on/off switch for each question on each paper.  ON = use it here;  OFF = leave it out.</a:t>
+            </a:r>
+          </a:p>
+        </p:txBody>
+      </p:sp>
+      <p:sp>
+        <p:nvSpPr>
+          <p:cNvPr id="16" name="Rectangle 15"/>
+          <p:cNvSpPr/>
+          <p:nvPr/>
+        </p:nvSpPr>
+        <p:spPr>
+          <a:xfrm>
+            <a:off x="640080" y="2798064"/>
+            <a:ext cx="4114800" cy="530352"/>
+          </a:xfrm>
+          <a:prstGeom prst="rect">
+            <a:avLst/>
+          </a:prstGeom>
+          <a:solidFill>
+            <a:srgbClr val="FFFFFF"/>
+          </a:solidFill>
+          <a:ln w="15875">
+            <a:solidFill>
+              <a:srgbClr val="636363"/>
+            </a:solidFill>
+          </a:ln>
+          <a:effectLst/>
+        </p:spPr>
+        <p:style>
+          <a:lnRef idx="1">
+            <a:schemeClr val="accent1"/>
+          </a:lnRef>
+          <a:fillRef idx="3">
+            <a:schemeClr val="accent1"/>
+          </a:fillRef>
+          <a:effectRef idx="2">
+            <a:schemeClr val="accent1"/>
+          </a:effectRef>
+          <a:fontRef idx="minor">
+            <a:schemeClr val="lt1"/>
+          </a:fontRef>
+        </p:style>
+        <p:txBody>
+          <a:bodyPr rtlCol="0" anchor="ctr" wrap="square" lIns="45720" rIns="45720" tIns="27432" bIns="27432"/>
+          <a:lstStyle/>
+          <a:p>
+            <a:pPr algn="ctr"/>
+            <a:r>
+              <a:rPr sz="1200" b="0" i="0">
                 <a:solidFill>
                   <a:srgbClr val="222222"/>
                 </a:solidFill>
-                <a:latin typeface="Calibri"/>
-              </a:rPr>
-              <a:t>v2: mcq 8 · true_false 4 · short_answer 4 · cloze 4</a:t>
-            </a:r>
-          </a:p>
-          <a:p>
-            <a:pPr algn="ctr"/>
-          </a:p>
-          <a:p>
-            <a:pPr algn="ctr"/>
-            <a:r>
-              <a:rPr sz="1500" b="0" i="0">
+                <a:latin typeface="Consolas"/>
+              </a:rPr>
+              <a:t>maximise  Σ q(i)·x(i,v)</a:t>
+            </a:r>
+          </a:p>
+        </p:txBody>
+      </p:sp>
+      <p:sp>
+        <p:nvSpPr>
+          <p:cNvPr id="17" name="Rectangle 16"/>
+          <p:cNvSpPr/>
+          <p:nvPr/>
+        </p:nvSpPr>
+        <p:spPr>
+          <a:xfrm>
+            <a:off x="4846320" y="2798064"/>
+            <a:ext cx="6766560" cy="530352"/>
+          </a:xfrm>
+          <a:prstGeom prst="rect">
+            <a:avLst/>
+          </a:prstGeom>
+          <a:solidFill>
+            <a:srgbClr val="FFFFFF"/>
+          </a:solidFill>
+          <a:ln w="15875">
+            <a:solidFill>
+              <a:srgbClr val="636363"/>
+            </a:solidFill>
+          </a:ln>
+          <a:effectLst/>
+        </p:spPr>
+        <p:style>
+          <a:lnRef idx="1">
+            <a:schemeClr val="accent1"/>
+          </a:lnRef>
+          <a:fillRef idx="3">
+            <a:schemeClr val="accent1"/>
+          </a:fillRef>
+          <a:effectRef idx="2">
+            <a:schemeClr val="accent1"/>
+          </a:effectRef>
+          <a:fontRef idx="minor">
+            <a:schemeClr val="lt1"/>
+          </a:fontRef>
+        </p:style>
+        <p:txBody>
+          <a:bodyPr rtlCol="0" anchor="ctr" wrap="square" lIns="45720" rIns="45720" tIns="27432" bIns="27432"/>
+          <a:lstStyle/>
+          <a:p>
+            <a:pPr algn="ctr"/>
+            <a:r>
+              <a:rPr sz="1200" b="0" i="0">
                 <a:solidFill>
                   <a:srgbClr val="222222"/>
                 </a:solidFill>
                 <a:latin typeface="Calibri"/>
               </a:rPr>
-              <a:t>→ exact, balanced, still optimal</a:t>
-            </a:r>
-          </a:p>
-        </p:txBody>
-      </p:sp>
-      <p:sp>
-        <p:nvSpPr>
-          <p:cNvPr id="16" name="TextBox 15"/>
+              <a:t>Every question has a quality score. Turn ON the switches that add up to the best total.</a:t>
+            </a:r>
+          </a:p>
+        </p:txBody>
+      </p:sp>
+      <p:sp>
+        <p:nvSpPr>
+          <p:cNvPr id="18" name="Rectangle 17"/>
+          <p:cNvSpPr/>
+          <p:nvPr/>
+        </p:nvSpPr>
+        <p:spPr>
+          <a:xfrm>
+            <a:off x="640080" y="3328416"/>
+            <a:ext cx="4114800" cy="530352"/>
+          </a:xfrm>
+          <a:prstGeom prst="rect">
+            <a:avLst/>
+          </a:prstGeom>
+          <a:solidFill>
+            <a:srgbClr val="F0F0F2"/>
+          </a:solidFill>
+          <a:ln w="15875">
+            <a:solidFill>
+              <a:srgbClr val="636363"/>
+            </a:solidFill>
+          </a:ln>
+          <a:effectLst/>
+        </p:spPr>
+        <p:style>
+          <a:lnRef idx="1">
+            <a:schemeClr val="accent1"/>
+          </a:lnRef>
+          <a:fillRef idx="3">
+            <a:schemeClr val="accent1"/>
+          </a:fillRef>
+          <a:effectRef idx="2">
+            <a:schemeClr val="accent1"/>
+          </a:effectRef>
+          <a:fontRef idx="minor">
+            <a:schemeClr val="lt1"/>
+          </a:fontRef>
+        </p:style>
+        <p:txBody>
+          <a:bodyPr rtlCol="0" anchor="ctr" wrap="square" lIns="45720" rIns="45720" tIns="27432" bIns="27432"/>
+          <a:lstStyle/>
+          <a:p>
+            <a:pPr algn="ctr"/>
+            <a:r>
+              <a:rPr sz="1200" b="0" i="0">
+                <a:solidFill>
+                  <a:srgbClr val="222222"/>
+                </a:solidFill>
+                <a:latin typeface="Consolas"/>
+              </a:rPr>
+              <a:t>Σ x(i,v) = n_c    (chapter)</a:t>
+            </a:r>
+          </a:p>
+        </p:txBody>
+      </p:sp>
+      <p:sp>
+        <p:nvSpPr>
+          <p:cNvPr id="19" name="Rectangle 18"/>
+          <p:cNvSpPr/>
+          <p:nvPr/>
+        </p:nvSpPr>
+        <p:spPr>
+          <a:xfrm>
+            <a:off x="4846320" y="3328416"/>
+            <a:ext cx="6766560" cy="530352"/>
+          </a:xfrm>
+          <a:prstGeom prst="rect">
+            <a:avLst/>
+          </a:prstGeom>
+          <a:solidFill>
+            <a:srgbClr val="F0F0F2"/>
+          </a:solidFill>
+          <a:ln w="15875">
+            <a:solidFill>
+              <a:srgbClr val="636363"/>
+            </a:solidFill>
+          </a:ln>
+          <a:effectLst/>
+        </p:spPr>
+        <p:style>
+          <a:lnRef idx="1">
+            <a:schemeClr val="accent1"/>
+          </a:lnRef>
+          <a:fillRef idx="3">
+            <a:schemeClr val="accent1"/>
+          </a:fillRef>
+          <a:effectRef idx="2">
+            <a:schemeClr val="accent1"/>
+          </a:effectRef>
+          <a:fontRef idx="minor">
+            <a:schemeClr val="lt1"/>
+          </a:fontRef>
+        </p:style>
+        <p:txBody>
+          <a:bodyPr rtlCol="0" anchor="ctr" wrap="square" lIns="45720" rIns="45720" tIns="27432" bIns="27432"/>
+          <a:lstStyle/>
+          <a:p>
+            <a:pPr algn="ctr"/>
+            <a:r>
+              <a:rPr sz="1200" b="0" i="0">
+                <a:solidFill>
+                  <a:srgbClr val="222222"/>
+                </a:solidFill>
+                <a:latin typeface="Calibri"/>
+              </a:rPr>
+              <a:t>Use EXACTLY the wanted number of questions from each chapter — no more, no less.</a:t>
+            </a:r>
+          </a:p>
+        </p:txBody>
+      </p:sp>
+      <p:sp>
+        <p:nvSpPr>
+          <p:cNvPr id="20" name="Rectangle 19"/>
+          <p:cNvSpPr/>
+          <p:nvPr/>
+        </p:nvSpPr>
+        <p:spPr>
+          <a:xfrm>
+            <a:off x="640080" y="3858768"/>
+            <a:ext cx="4114800" cy="530352"/>
+          </a:xfrm>
+          <a:prstGeom prst="rect">
+            <a:avLst/>
+          </a:prstGeom>
+          <a:solidFill>
+            <a:srgbClr val="FFFFFF"/>
+          </a:solidFill>
+          <a:ln w="15875">
+            <a:solidFill>
+              <a:srgbClr val="636363"/>
+            </a:solidFill>
+          </a:ln>
+          <a:effectLst/>
+        </p:spPr>
+        <p:style>
+          <a:lnRef idx="1">
+            <a:schemeClr val="accent1"/>
+          </a:lnRef>
+          <a:fillRef idx="3">
+            <a:schemeClr val="accent1"/>
+          </a:fillRef>
+          <a:effectRef idx="2">
+            <a:schemeClr val="accent1"/>
+          </a:effectRef>
+          <a:fontRef idx="minor">
+            <a:schemeClr val="lt1"/>
+          </a:fontRef>
+        </p:style>
+        <p:txBody>
+          <a:bodyPr rtlCol="0" anchor="ctr" wrap="square" lIns="45720" rIns="45720" tIns="27432" bIns="27432"/>
+          <a:lstStyle/>
+          <a:p>
+            <a:pPr algn="ctr"/>
+            <a:r>
+              <a:rPr sz="1200" b="0" i="0">
+                <a:solidFill>
+                  <a:srgbClr val="222222"/>
+                </a:solidFill>
+                <a:latin typeface="Consolas"/>
+              </a:rPr>
+              <a:t>Σ x(i,v) = m_d    (difficulty)</a:t>
+            </a:r>
+          </a:p>
+        </p:txBody>
+      </p:sp>
+      <p:sp>
+        <p:nvSpPr>
+          <p:cNvPr id="21" name="Rectangle 20"/>
+          <p:cNvSpPr/>
+          <p:nvPr/>
+        </p:nvSpPr>
+        <p:spPr>
+          <a:xfrm>
+            <a:off x="4846320" y="3858768"/>
+            <a:ext cx="6766560" cy="530352"/>
+          </a:xfrm>
+          <a:prstGeom prst="rect">
+            <a:avLst/>
+          </a:prstGeom>
+          <a:solidFill>
+            <a:srgbClr val="FFFFFF"/>
+          </a:solidFill>
+          <a:ln w="15875">
+            <a:solidFill>
+              <a:srgbClr val="636363"/>
+            </a:solidFill>
+          </a:ln>
+          <a:effectLst/>
+        </p:spPr>
+        <p:style>
+          <a:lnRef idx="1">
+            <a:schemeClr val="accent1"/>
+          </a:lnRef>
+          <a:fillRef idx="3">
+            <a:schemeClr val="accent1"/>
+          </a:fillRef>
+          <a:effectRef idx="2">
+            <a:schemeClr val="accent1"/>
+          </a:effectRef>
+          <a:fontRef idx="minor">
+            <a:schemeClr val="lt1"/>
+          </a:fontRef>
+        </p:style>
+        <p:txBody>
+          <a:bodyPr rtlCol="0" anchor="ctr" wrap="square" lIns="45720" rIns="45720" tIns="27432" bIns="27432"/>
+          <a:lstStyle/>
+          <a:p>
+            <a:pPr algn="ctr"/>
+            <a:r>
+              <a:rPr sz="1200" b="0" i="0">
+                <a:solidFill>
+                  <a:srgbClr val="222222"/>
+                </a:solidFill>
+                <a:latin typeface="Calibri"/>
+              </a:rPr>
+              <a:t>Use EXACTLY the wanted number of easy / medium / hard questions.</a:t>
+            </a:r>
+          </a:p>
+        </p:txBody>
+      </p:sp>
+      <p:sp>
+        <p:nvSpPr>
+          <p:cNvPr id="22" name="Rectangle 21"/>
+          <p:cNvSpPr/>
+          <p:nvPr/>
+        </p:nvSpPr>
+        <p:spPr>
+          <a:xfrm>
+            <a:off x="640080" y="4389120"/>
+            <a:ext cx="4114800" cy="530352"/>
+          </a:xfrm>
+          <a:prstGeom prst="rect">
+            <a:avLst/>
+          </a:prstGeom>
+          <a:solidFill>
+            <a:srgbClr val="F0F0F2"/>
+          </a:solidFill>
+          <a:ln w="15875">
+            <a:solidFill>
+              <a:srgbClr val="636363"/>
+            </a:solidFill>
+          </a:ln>
+          <a:effectLst/>
+        </p:spPr>
+        <p:style>
+          <a:lnRef idx="1">
+            <a:schemeClr val="accent1"/>
+          </a:lnRef>
+          <a:fillRef idx="3">
+            <a:schemeClr val="accent1"/>
+          </a:fillRef>
+          <a:effectRef idx="2">
+            <a:schemeClr val="accent1"/>
+          </a:effectRef>
+          <a:fontRef idx="minor">
+            <a:schemeClr val="lt1"/>
+          </a:fontRef>
+        </p:style>
+        <p:txBody>
+          <a:bodyPr rtlCol="0" anchor="ctr" wrap="square" lIns="45720" rIns="45720" tIns="27432" bIns="27432"/>
+          <a:lstStyle/>
+          <a:p>
+            <a:pPr algn="ctr"/>
+            <a:r>
+              <a:rPr sz="1200" b="0" i="0">
+                <a:solidFill>
+                  <a:srgbClr val="222222"/>
+                </a:solidFill>
+                <a:latin typeface="Consolas"/>
+              </a:rPr>
+              <a:t>Σ x(i,v) = k_p    (type)</a:t>
+            </a:r>
+          </a:p>
+        </p:txBody>
+      </p:sp>
+      <p:sp>
+        <p:nvSpPr>
+          <p:cNvPr id="23" name="Rectangle 22"/>
+          <p:cNvSpPr/>
+          <p:nvPr/>
+        </p:nvSpPr>
+        <p:spPr>
+          <a:xfrm>
+            <a:off x="4846320" y="4389120"/>
+            <a:ext cx="6766560" cy="530352"/>
+          </a:xfrm>
+          <a:prstGeom prst="rect">
+            <a:avLst/>
+          </a:prstGeom>
+          <a:solidFill>
+            <a:srgbClr val="F0F0F2"/>
+          </a:solidFill>
+          <a:ln w="15875">
+            <a:solidFill>
+              <a:srgbClr val="636363"/>
+            </a:solidFill>
+          </a:ln>
+          <a:effectLst/>
+        </p:spPr>
+        <p:style>
+          <a:lnRef idx="1">
+            <a:schemeClr val="accent1"/>
+          </a:lnRef>
+          <a:fillRef idx="3">
+            <a:schemeClr val="accent1"/>
+          </a:fillRef>
+          <a:effectRef idx="2">
+            <a:schemeClr val="accent1"/>
+          </a:effectRef>
+          <a:fontRef idx="minor">
+            <a:schemeClr val="lt1"/>
+          </a:fontRef>
+        </p:style>
+        <p:txBody>
+          <a:bodyPr rtlCol="0" anchor="ctr" wrap="square" lIns="45720" rIns="45720" tIns="27432" bIns="27432"/>
+          <a:lstStyle/>
+          <a:p>
+            <a:pPr algn="ctr"/>
+            <a:r>
+              <a:rPr sz="1200" b="0" i="0">
+                <a:solidFill>
+                  <a:srgbClr val="222222"/>
+                </a:solidFill>
+                <a:latin typeface="Calibri"/>
+              </a:rPr>
+              <a:t>Use EXACTLY the wanted number of each kind (MCQ, true/false, short, cloze).</a:t>
+            </a:r>
+          </a:p>
+        </p:txBody>
+      </p:sp>
+      <p:sp>
+        <p:nvSpPr>
+          <p:cNvPr id="24" name="Rectangle 23"/>
+          <p:cNvSpPr/>
+          <p:nvPr/>
+        </p:nvSpPr>
+        <p:spPr>
+          <a:xfrm>
+            <a:off x="640080" y="4919472"/>
+            <a:ext cx="4114800" cy="530352"/>
+          </a:xfrm>
+          <a:prstGeom prst="rect">
+            <a:avLst/>
+          </a:prstGeom>
+          <a:solidFill>
+            <a:srgbClr val="FFFFFF"/>
+          </a:solidFill>
+          <a:ln w="15875">
+            <a:solidFill>
+              <a:srgbClr val="636363"/>
+            </a:solidFill>
+          </a:ln>
+          <a:effectLst/>
+        </p:spPr>
+        <p:style>
+          <a:lnRef idx="1">
+            <a:schemeClr val="accent1"/>
+          </a:lnRef>
+          <a:fillRef idx="3">
+            <a:schemeClr val="accent1"/>
+          </a:fillRef>
+          <a:effectRef idx="2">
+            <a:schemeClr val="accent1"/>
+          </a:effectRef>
+          <a:fontRef idx="minor">
+            <a:schemeClr val="lt1"/>
+          </a:fontRef>
+        </p:style>
+        <p:txBody>
+          <a:bodyPr rtlCol="0" anchor="ctr" wrap="square" lIns="45720" rIns="45720" tIns="27432" bIns="27432"/>
+          <a:lstStyle/>
+          <a:p>
+            <a:pPr algn="ctr"/>
+            <a:r>
+              <a:rPr sz="1200" b="0" i="0">
+                <a:solidFill>
+                  <a:srgbClr val="222222"/>
+                </a:solidFill>
+                <a:latin typeface="Consolas"/>
+              </a:rPr>
+              <a:t>Σ_v x(i,v) ≤ 1    (no overlap)</a:t>
+            </a:r>
+          </a:p>
+        </p:txBody>
+      </p:sp>
+      <p:sp>
+        <p:nvSpPr>
+          <p:cNvPr id="25" name="Rectangle 24"/>
+          <p:cNvSpPr/>
+          <p:nvPr/>
+        </p:nvSpPr>
+        <p:spPr>
+          <a:xfrm>
+            <a:off x="4846320" y="4919472"/>
+            <a:ext cx="6766560" cy="530352"/>
+          </a:xfrm>
+          <a:prstGeom prst="rect">
+            <a:avLst/>
+          </a:prstGeom>
+          <a:solidFill>
+            <a:srgbClr val="FFFFFF"/>
+          </a:solidFill>
+          <a:ln w="15875">
+            <a:solidFill>
+              <a:srgbClr val="636363"/>
+            </a:solidFill>
+          </a:ln>
+          <a:effectLst/>
+        </p:spPr>
+        <p:style>
+          <a:lnRef idx="1">
+            <a:schemeClr val="accent1"/>
+          </a:lnRef>
+          <a:fillRef idx="3">
+            <a:schemeClr val="accent1"/>
+          </a:fillRef>
+          <a:effectRef idx="2">
+            <a:schemeClr val="accent1"/>
+          </a:effectRef>
+          <a:fontRef idx="minor">
+            <a:schemeClr val="lt1"/>
+          </a:fontRef>
+        </p:style>
+        <p:txBody>
+          <a:bodyPr rtlCol="0" anchor="ctr" wrap="square" lIns="45720" rIns="45720" tIns="27432" bIns="27432"/>
+          <a:lstStyle/>
+          <a:p>
+            <a:pPr algn="ctr"/>
+            <a:r>
+              <a:rPr sz="1200" b="0" i="0">
+                <a:solidFill>
+                  <a:srgbClr val="222222"/>
+                </a:solidFill>
+                <a:latin typeface="Calibri"/>
+              </a:rPr>
+              <a:t>A question may go on at most ONE paper, so two papers never share a question.</a:t>
+            </a:r>
+          </a:p>
+        </p:txBody>
+      </p:sp>
+      <p:sp>
+        <p:nvSpPr>
+          <p:cNvPr id="26" name="Rectangle 25"/>
+          <p:cNvSpPr/>
+          <p:nvPr/>
+        </p:nvSpPr>
+        <p:spPr>
+          <a:xfrm>
+            <a:off x="640080" y="5449824"/>
+            <a:ext cx="4114800" cy="530352"/>
+          </a:xfrm>
+          <a:prstGeom prst="rect">
+            <a:avLst/>
+          </a:prstGeom>
+          <a:solidFill>
+            <a:srgbClr val="F0F0F2"/>
+          </a:solidFill>
+          <a:ln w="15875">
+            <a:solidFill>
+              <a:srgbClr val="636363"/>
+            </a:solidFill>
+          </a:ln>
+          <a:effectLst/>
+        </p:spPr>
+        <p:style>
+          <a:lnRef idx="1">
+            <a:schemeClr val="accent1"/>
+          </a:lnRef>
+          <a:fillRef idx="3">
+            <a:schemeClr val="accent1"/>
+          </a:fillRef>
+          <a:effectRef idx="2">
+            <a:schemeClr val="accent1"/>
+          </a:effectRef>
+          <a:fontRef idx="minor">
+            <a:schemeClr val="lt1"/>
+          </a:fontRef>
+        </p:style>
+        <p:txBody>
+          <a:bodyPr rtlCol="0" anchor="ctr" wrap="square" lIns="45720" rIns="45720" tIns="27432" bIns="27432"/>
+          <a:lstStyle/>
+          <a:p>
+            <a:pPr algn="ctr"/>
+            <a:r>
+              <a:rPr sz="1200" b="0" i="0">
+                <a:solidFill>
+                  <a:srgbClr val="222222"/>
+                </a:solidFill>
+                <a:latin typeface="Consolas"/>
+              </a:rPr>
+              <a:t>x(i,·) + x(j,·) ≤ 1  (near-twins)</a:t>
+            </a:r>
+          </a:p>
+        </p:txBody>
+      </p:sp>
+      <p:sp>
+        <p:nvSpPr>
+          <p:cNvPr id="27" name="Rectangle 26"/>
+          <p:cNvSpPr/>
+          <p:nvPr/>
+        </p:nvSpPr>
+        <p:spPr>
+          <a:xfrm>
+            <a:off x="4846320" y="5449824"/>
+            <a:ext cx="6766560" cy="530352"/>
+          </a:xfrm>
+          <a:prstGeom prst="rect">
+            <a:avLst/>
+          </a:prstGeom>
+          <a:solidFill>
+            <a:srgbClr val="F0F0F2"/>
+          </a:solidFill>
+          <a:ln w="15875">
+            <a:solidFill>
+              <a:srgbClr val="636363"/>
+            </a:solidFill>
+          </a:ln>
+          <a:effectLst/>
+        </p:spPr>
+        <p:style>
+          <a:lnRef idx="1">
+            <a:schemeClr val="accent1"/>
+          </a:lnRef>
+          <a:fillRef idx="3">
+            <a:schemeClr val="accent1"/>
+          </a:fillRef>
+          <a:effectRef idx="2">
+            <a:schemeClr val="accent1"/>
+          </a:effectRef>
+          <a:fontRef idx="minor">
+            <a:schemeClr val="lt1"/>
+          </a:fontRef>
+        </p:style>
+        <p:txBody>
+          <a:bodyPr rtlCol="0" anchor="ctr" wrap="square" lIns="45720" rIns="45720" tIns="27432" bIns="27432"/>
+          <a:lstStyle/>
+          <a:p>
+            <a:pPr algn="ctr"/>
+            <a:r>
+              <a:rPr sz="1200" b="0" i="0">
+                <a:solidFill>
+                  <a:srgbClr val="222222"/>
+                </a:solidFill>
+                <a:latin typeface="Calibri"/>
+              </a:rPr>
+              <a:t>If two questions are almost the same, use at most ONE of them anywhere.</a:t>
+            </a:r>
+          </a:p>
+        </p:txBody>
+      </p:sp>
+      <p:sp>
+        <p:nvSpPr>
+          <p:cNvPr id="28" name="TextBox 27"/>
           <p:cNvSpPr txBox="1"/>
           <p:nvPr/>
         </p:nvSpPr>
         <p:spPr>
           <a:xfrm>
-            <a:off x="640080" y="4846320"/>
-            <a:ext cx="10972800" cy="1280160"/>
+            <a:off x="640080" y="6016752"/>
+            <a:ext cx="11155680" cy="365760"/>
           </a:xfrm>
           <a:prstGeom prst="rect">
             <a:avLst/>
@@ -9898,13 +11176,13 @@
           <a:p>
             <a:pPr algn="l"/>
             <a:r>
-              <a:rPr sz="1600" b="0" i="1">
-                <a:solidFill>
-                  <a:srgbClr val="636363"/>
-                </a:solidFill>
-                <a:latin typeface="Calibri"/>
-              </a:rPr>
-              <a:t>The fix is a constraint, not a hack: qtype_mix is the question-type analogue of difficulty_mix, resolved to exact counts (largest-remainder) and enforced per version by both selectors. Pool stays mixed; the mix becomes guaranteed.</a:t>
+              <a:rPr sz="1200" b="1" i="0">
+                <a:solidFill>
+                  <a:srgbClr val="002F5E"/>
+                </a:solidFill>
+                <a:latin typeface="Calibri"/>
+              </a:rPr>
+              <a:t>The “=” lines are promises kept exactly; the “≤ 1” lines are limits that stop overlap.</a:t>
             </a:r>
           </a:p>
         </p:txBody>
@@ -10045,7 +11323,7 @@
                 </a:solidFill>
                 <a:latin typeface="Calibri"/>
               </a:rPr>
-              <a:t>Deduplication &amp; validation</a:t>
+              <a:t>Balanced formats, not all multiple-choice</a:t>
             </a:r>
           </a:p>
         </p:txBody>
@@ -10115,7 +11393,7 @@
                 </a:solidFill>
                 <a:latin typeface="Calibri"/>
               </a:rPr>
-              <a:t>similarity.py • dedup.py • validate.py</a:t>
+              <a:t>WHY qtype_mix MATTERS</a:t>
             </a:r>
           </a:p>
         </p:txBody>
@@ -10277,8 +11555,8 @@
         </p:nvSpPr>
         <p:spPr>
           <a:xfrm>
-            <a:off x="640080" y="1143000"/>
-            <a:ext cx="5486400" cy="365760"/>
+            <a:off x="640080" y="1188720"/>
+            <a:ext cx="10972800" cy="731520"/>
           </a:xfrm>
           <a:prstGeom prst="rect">
             <a:avLst/>
@@ -10293,108 +11571,37 @@
           <a:p>
             <a:pPr algn="l"/>
             <a:r>
-              <a:rPr sz="1700" b="1" i="0">
-                <a:solidFill>
-                  <a:srgbClr val="002F5E"/>
-                </a:solidFill>
-                <a:latin typeface="Calibri"/>
-              </a:rPr>
-              <a:t>DEDUP (--dedup)</a:t>
-            </a:r>
-          </a:p>
-        </p:txBody>
-      </p:sp>
-      <p:sp>
-        <p:nvSpPr>
-          <p:cNvPr id="12" name="TextBox 11"/>
-          <p:cNvSpPr txBox="1"/>
-          <p:nvPr/>
-        </p:nvSpPr>
-        <p:spPr>
-          <a:xfrm>
-            <a:off x="640080" y="1554480"/>
-            <a:ext cx="5303520" cy="2194560"/>
-          </a:xfrm>
-          <a:prstGeom prst="rect">
-            <a:avLst/>
-          </a:prstGeom>
-          <a:noFill/>
-        </p:spPr>
-        <p:txBody>
-          <a:bodyPr wrap="square">
-            <a:spAutoFit/>
-          </a:bodyPr>
-          <a:lstStyle/>
-          <a:p>
-            <a:pPr>
-              <a:spcAft>
-                <a:spcPts val="700"/>
-              </a:spcAft>
-            </a:pPr>
-            <a:r>
-              <a:rPr sz="1500">
+              <a:rPr sz="1700" b="0" i="0">
                 <a:solidFill>
                   <a:srgbClr val="222222"/>
                 </a:solidFill>
                 <a:latin typeface="Calibri"/>
               </a:rPr>
-              <a:t>• Token-Jaccard over stem+answer(+options) — offline, always on.</a:t>
-            </a:r>
-          </a:p>
-          <a:p>
-            <a:pPr>
-              <a:spcAft>
-                <a:spcPts val="700"/>
-              </a:spcAft>
-            </a:pPr>
-            <a:r>
-              <a:rPr sz="1500">
-                <a:solidFill>
-                  <a:srgbClr val="222222"/>
-                </a:solidFill>
-                <a:latin typeface="Calibri"/>
-              </a:rPr>
-              <a:t>• Optional embedding cosine — catches paraphrases.</a:t>
-            </a:r>
-          </a:p>
-          <a:p>
-            <a:pPr>
-              <a:spcAft>
-                <a:spcPts val="700"/>
-              </a:spcAft>
-            </a:pPr>
-            <a:r>
-              <a:rPr sz="1500">
-                <a:solidFill>
-                  <a:srgbClr val="222222"/>
-                </a:solidFill>
-                <a:latin typeface="Calibri"/>
-              </a:rPr>
-              <a:t>• Drops dups from the pool; MIP also forbids dup pairs across versions.</a:t>
-            </a:r>
-          </a:p>
-        </p:txBody>
-      </p:sp>
-      <p:sp>
-        <p:nvSpPr>
-          <p:cNvPr id="13" name="Rectangle 12"/>
+              <a:t>The quality objective rewards well-formed MCQs (+0.2). With no constraint on the type distribution, the optimiser fills every free slot with MCQs.</a:t>
+            </a:r>
+          </a:p>
+        </p:txBody>
+      </p:sp>
+      <p:sp>
+        <p:nvSpPr>
+          <p:cNvPr id="12" name="Rounded Rectangle 11"/>
           <p:cNvSpPr/>
           <p:nvPr/>
         </p:nvSpPr>
         <p:spPr>
           <a:xfrm>
-            <a:off x="640080" y="3931920"/>
-            <a:ext cx="5212080" cy="1005840"/>
-          </a:xfrm>
-          <a:prstGeom prst="rect">
+            <a:off x="640080" y="2286000"/>
+            <a:ext cx="5212080" cy="548640"/>
+          </a:xfrm>
+          <a:prstGeom prst="roundRect">
             <a:avLst/>
           </a:prstGeom>
           <a:solidFill>
-            <a:srgbClr val="F0F0F2"/>
+            <a:srgbClr val="DE2D26"/>
           </a:solidFill>
           <a:ln w="15875">
             <a:solidFill>
-              <a:srgbClr val="636363"/>
+              <a:srgbClr val="DE2D26"/>
             </a:solidFill>
           </a:ln>
           <a:effectLst/>
@@ -10419,64 +11626,166 @@
           <a:p>
             <a:pPr algn="ctr"/>
             <a:r>
-              <a:rPr sz="1400" b="0" i="0">
+              <a:rPr sz="1500" b="1" i="0">
+                <a:solidFill>
+                  <a:srgbClr val="FFFFFF"/>
+                </a:solidFill>
+                <a:latin typeface="Calibri"/>
+              </a:rPr>
+              <a:t>Without qtype_mix</a:t>
+            </a:r>
+          </a:p>
+        </p:txBody>
+      </p:sp>
+      <p:sp>
+        <p:nvSpPr>
+          <p:cNvPr id="13" name="Rectangle 12"/>
+          <p:cNvSpPr/>
+          <p:nvPr/>
+        </p:nvSpPr>
+        <p:spPr>
+          <a:xfrm>
+            <a:off x="640080" y="2926080"/>
+            <a:ext cx="5212080" cy="1463040"/>
+          </a:xfrm>
+          <a:prstGeom prst="rect">
+            <a:avLst/>
+          </a:prstGeom>
+          <a:solidFill>
+            <a:srgbClr val="FDE0DD"/>
+          </a:solidFill>
+          <a:ln w="15875">
+            <a:solidFill>
+              <a:srgbClr val="DE2D26"/>
+            </a:solidFill>
+          </a:ln>
+          <a:effectLst/>
+        </p:spPr>
+        <p:style>
+          <a:lnRef idx="1">
+            <a:schemeClr val="accent1"/>
+          </a:lnRef>
+          <a:fillRef idx="3">
+            <a:schemeClr val="accent1"/>
+          </a:fillRef>
+          <a:effectRef idx="2">
+            <a:schemeClr val="accent1"/>
+          </a:effectRef>
+          <a:fontRef idx="minor">
+            <a:schemeClr val="lt1"/>
+          </a:fontRef>
+        </p:style>
+        <p:txBody>
+          <a:bodyPr rtlCol="0" anchor="ctr" wrap="square" lIns="45720" rIns="45720" tIns="27432" bIns="27432"/>
+          <a:lstStyle/>
+          <a:p>
+            <a:pPr algn="ctr"/>
+            <a:r>
+              <a:rPr sz="1500" b="0" i="0">
                 <a:solidFill>
                   <a:srgbClr val="222222"/>
                 </a:solidFill>
-                <a:latin typeface="Consolas"/>
-              </a:rPr>
-              <a:t>sim(q₁,q₂) = |T(q₁) ∩ T(q₂)| / |T(q₁) ∪ T(q₂)|</a:t>
-            </a:r>
-          </a:p>
-        </p:txBody>
-      </p:sp>
-      <p:sp>
-        <p:nvSpPr>
-          <p:cNvPr id="14" name="TextBox 13"/>
-          <p:cNvSpPr txBox="1"/>
-          <p:nvPr/>
-        </p:nvSpPr>
-        <p:spPr>
-          <a:xfrm>
-            <a:off x="6400800" y="1143000"/>
-            <a:ext cx="5486400" cy="365760"/>
-          </a:xfrm>
-          <a:prstGeom prst="rect">
-            <a:avLst/>
-          </a:prstGeom>
-          <a:noFill/>
-        </p:spPr>
-        <p:txBody>
-          <a:bodyPr wrap="square" anchor="t">
-            <a:spAutoFit/>
-          </a:bodyPr>
-          <a:lstStyle/>
-          <a:p>
-            <a:pPr algn="l"/>
-            <a:r>
-              <a:rPr sz="1700" b="1" i="0">
-                <a:solidFill>
-                  <a:srgbClr val="31A354"/>
-                </a:solidFill>
-                <a:latin typeface="Calibri"/>
-              </a:rPr>
-              <a:t>VALIDATE (--validate)</a:t>
-            </a:r>
-          </a:p>
-        </p:txBody>
-      </p:sp>
-      <p:sp>
-        <p:nvSpPr>
-          <p:cNvPr id="15" name="Rounded Rectangle 14"/>
+                <a:latin typeface="Calibri"/>
+              </a:rPr>
+              <a:t>v1: mcq 18 · short_answer 1 · cloze 1</a:t>
+            </a:r>
+          </a:p>
+          <a:p>
+            <a:pPr algn="ctr"/>
+            <a:r>
+              <a:rPr sz="1500" b="0" i="0">
+                <a:solidFill>
+                  <a:srgbClr val="222222"/>
+                </a:solidFill>
+                <a:latin typeface="Calibri"/>
+              </a:rPr>
+              <a:t>v2: mcq 19 · short_answer 1</a:t>
+            </a:r>
+          </a:p>
+          <a:p>
+            <a:pPr algn="ctr"/>
+          </a:p>
+          <a:p>
+            <a:pPr algn="ctr"/>
+            <a:r>
+              <a:rPr sz="1500" b="0" i="0">
+                <a:solidFill>
+                  <a:srgbClr val="222222"/>
+                </a:solidFill>
+                <a:latin typeface="Calibri"/>
+              </a:rPr>
+              <a:t>→ effectively all MCQ</a:t>
+            </a:r>
+          </a:p>
+        </p:txBody>
+      </p:sp>
+      <p:sp>
+        <p:nvSpPr>
+          <p:cNvPr id="14" name="Rounded Rectangle 13"/>
           <p:cNvSpPr/>
           <p:nvPr/>
         </p:nvSpPr>
         <p:spPr>
           <a:xfrm>
-            <a:off x="6400800" y="1645920"/>
-            <a:ext cx="2560320" cy="822960"/>
+            <a:off x="6400800" y="2286000"/>
+            <a:ext cx="5212080" cy="548640"/>
           </a:xfrm>
           <a:prstGeom prst="roundRect">
+            <a:avLst/>
+          </a:prstGeom>
+          <a:solidFill>
+            <a:srgbClr val="31A354"/>
+          </a:solidFill>
+          <a:ln w="15875">
+            <a:solidFill>
+              <a:srgbClr val="31A354"/>
+            </a:solidFill>
+          </a:ln>
+          <a:effectLst/>
+        </p:spPr>
+        <p:style>
+          <a:lnRef idx="1">
+            <a:schemeClr val="accent1"/>
+          </a:lnRef>
+          <a:fillRef idx="3">
+            <a:schemeClr val="accent1"/>
+          </a:fillRef>
+          <a:effectRef idx="2">
+            <a:schemeClr val="accent1"/>
+          </a:effectRef>
+          <a:fontRef idx="minor">
+            <a:schemeClr val="lt1"/>
+          </a:fontRef>
+        </p:style>
+        <p:txBody>
+          <a:bodyPr rtlCol="0" anchor="ctr" wrap="square" lIns="45720" rIns="45720" tIns="27432" bIns="27432"/>
+          <a:lstStyle/>
+          <a:p>
+            <a:pPr algn="ctr"/>
+            <a:r>
+              <a:rPr sz="1500" b="1" i="0">
+                <a:solidFill>
+                  <a:srgbClr val="FFFFFF"/>
+                </a:solidFill>
+                <a:latin typeface="Calibri"/>
+              </a:rPr>
+              <a:t>With qtype_mix (0.4/0.2/0.2/0.2)</a:t>
+            </a:r>
+          </a:p>
+        </p:txBody>
+      </p:sp>
+      <p:sp>
+        <p:nvSpPr>
+          <p:cNvPr id="15" name="Rectangle 14"/>
+          <p:cNvSpPr/>
+          <p:nvPr/>
+        </p:nvSpPr>
+        <p:spPr>
+          <a:xfrm>
+            <a:off x="6400800" y="2926080"/>
+            <a:ext cx="5212080" cy="1463040"/>
+          </a:xfrm>
+          <a:prstGeom prst="rect">
             <a:avLst/>
           </a:prstGeom>
           <a:solidFill>
@@ -10509,204 +11818,54 @@
           <a:p>
             <a:pPr algn="ctr"/>
             <a:r>
-              <a:rPr sz="1200" b="1" i="0">
+              <a:rPr sz="1500" b="0" i="0">
                 <a:solidFill>
                   <a:srgbClr val="222222"/>
                 </a:solidFill>
                 <a:latin typeface="Calibri"/>
               </a:rPr>
-              <a:t>Schema validity</a:t>
-            </a:r>
-          </a:p>
-        </p:txBody>
-      </p:sp>
-      <p:sp>
-        <p:nvSpPr>
-          <p:cNvPr id="16" name="Rounded Rectangle 15"/>
-          <p:cNvSpPr/>
-          <p:nvPr/>
-        </p:nvSpPr>
-        <p:spPr>
-          <a:xfrm>
-            <a:off x="9098280" y="1645920"/>
-            <a:ext cx="2560320" cy="822960"/>
-          </a:xfrm>
-          <a:prstGeom prst="roundRect">
-            <a:avLst/>
-          </a:prstGeom>
-          <a:solidFill>
-            <a:srgbClr val="DEEBF7"/>
-          </a:solidFill>
-          <a:ln w="15875">
-            <a:solidFill>
-              <a:srgbClr val="002F5E"/>
-            </a:solidFill>
-          </a:ln>
-          <a:effectLst/>
-        </p:spPr>
-        <p:style>
-          <a:lnRef idx="1">
-            <a:schemeClr val="accent1"/>
-          </a:lnRef>
-          <a:fillRef idx="3">
-            <a:schemeClr val="accent1"/>
-          </a:fillRef>
-          <a:effectRef idx="2">
-            <a:schemeClr val="accent1"/>
-          </a:effectRef>
-          <a:fontRef idx="minor">
-            <a:schemeClr val="lt1"/>
-          </a:fontRef>
-        </p:style>
-        <p:txBody>
-          <a:bodyPr rtlCol="0" anchor="ctr" wrap="square" lIns="45720" rIns="45720" tIns="27432" bIns="27432"/>
-          <a:lstStyle/>
-          <a:p>
-            <a:pPr algn="ctr"/>
-            <a:r>
-              <a:rPr sz="1200" b="1" i="0">
+              <a:t>v1: mcq 8 · true_false 4 · short_answer 4 · cloze 4</a:t>
+            </a:r>
+          </a:p>
+          <a:p>
+            <a:pPr algn="ctr"/>
+            <a:r>
+              <a:rPr sz="1500" b="0" i="0">
                 <a:solidFill>
                   <a:srgbClr val="222222"/>
                 </a:solidFill>
                 <a:latin typeface="Calibri"/>
               </a:rPr>
-              <a:t>Blueprint compliance</a:t>
-            </a:r>
-          </a:p>
-          <a:p>
-            <a:pPr algn="ctr"/>
-            <a:r>
-              <a:rPr sz="1200" b="1" i="0">
+              <a:t>v2: mcq 8 · true_false 4 · short_answer 4 · cloze 4</a:t>
+            </a:r>
+          </a:p>
+          <a:p>
+            <a:pPr algn="ctr"/>
+          </a:p>
+          <a:p>
+            <a:pPr algn="ctr"/>
+            <a:r>
+              <a:rPr sz="1500" b="0" i="0">
                 <a:solidFill>
                   <a:srgbClr val="222222"/>
                 </a:solidFill>
                 <a:latin typeface="Calibri"/>
               </a:rPr>
-              <a:t>(chapter · difficulty · type)</a:t>
-            </a:r>
-          </a:p>
-        </p:txBody>
-      </p:sp>
-      <p:sp>
-        <p:nvSpPr>
-          <p:cNvPr id="17" name="Rounded Rectangle 16"/>
-          <p:cNvSpPr/>
-          <p:nvPr/>
-        </p:nvSpPr>
-        <p:spPr>
-          <a:xfrm>
-            <a:off x="6400800" y="2606040"/>
-            <a:ext cx="2560320" cy="822960"/>
-          </a:xfrm>
-          <a:prstGeom prst="roundRect">
-            <a:avLst/>
-          </a:prstGeom>
-          <a:solidFill>
-            <a:srgbClr val="E5F5E0"/>
-          </a:solidFill>
-          <a:ln w="15875">
-            <a:solidFill>
-              <a:srgbClr val="31A354"/>
-            </a:solidFill>
-          </a:ln>
-          <a:effectLst/>
-        </p:spPr>
-        <p:style>
-          <a:lnRef idx="1">
-            <a:schemeClr val="accent1"/>
-          </a:lnRef>
-          <a:fillRef idx="3">
-            <a:schemeClr val="accent1"/>
-          </a:fillRef>
-          <a:effectRef idx="2">
-            <a:schemeClr val="accent1"/>
-          </a:effectRef>
-          <a:fontRef idx="minor">
-            <a:schemeClr val="lt1"/>
-          </a:fontRef>
-        </p:style>
-        <p:txBody>
-          <a:bodyPr rtlCol="0" anchor="ctr" wrap="square" lIns="45720" rIns="45720" tIns="27432" bIns="27432"/>
-          <a:lstStyle/>
-          <a:p>
-            <a:pPr algn="ctr"/>
-            <a:r>
-              <a:rPr sz="1200" b="1" i="0">
-                <a:solidFill>
-                  <a:srgbClr val="222222"/>
-                </a:solidFill>
-                <a:latin typeface="Calibri"/>
-              </a:rPr>
-              <a:t>Grounding coverage</a:t>
-            </a:r>
-          </a:p>
-        </p:txBody>
-      </p:sp>
-      <p:sp>
-        <p:nvSpPr>
-          <p:cNvPr id="18" name="Rounded Rectangle 17"/>
-          <p:cNvSpPr/>
-          <p:nvPr/>
-        </p:nvSpPr>
-        <p:spPr>
-          <a:xfrm>
-            <a:off x="9098280" y="2606040"/>
-            <a:ext cx="2560320" cy="822960"/>
-          </a:xfrm>
-          <a:prstGeom prst="roundRect">
-            <a:avLst/>
-          </a:prstGeom>
-          <a:solidFill>
-            <a:srgbClr val="DEEBF7"/>
-          </a:solidFill>
-          <a:ln w="15875">
-            <a:solidFill>
-              <a:srgbClr val="002F5E"/>
-            </a:solidFill>
-          </a:ln>
-          <a:effectLst/>
-        </p:spPr>
-        <p:style>
-          <a:lnRef idx="1">
-            <a:schemeClr val="accent1"/>
-          </a:lnRef>
-          <a:fillRef idx="3">
-            <a:schemeClr val="accent1"/>
-          </a:fillRef>
-          <a:effectRef idx="2">
-            <a:schemeClr val="accent1"/>
-          </a:effectRef>
-          <a:fontRef idx="minor">
-            <a:schemeClr val="lt1"/>
-          </a:fontRef>
-        </p:style>
-        <p:txBody>
-          <a:bodyPr rtlCol="0" anchor="ctr" wrap="square" lIns="45720" rIns="45720" tIns="27432" bIns="27432"/>
-          <a:lstStyle/>
-          <a:p>
-            <a:pPr algn="ctr"/>
-            <a:r>
-              <a:rPr sz="1200" b="1" i="0">
-                <a:solidFill>
-                  <a:srgbClr val="222222"/>
-                </a:solidFill>
-                <a:latin typeface="Calibri"/>
-              </a:rPr>
-              <a:t>Duplicate rate</a:t>
-            </a:r>
-          </a:p>
-        </p:txBody>
-      </p:sp>
-      <p:sp>
-        <p:nvSpPr>
-          <p:cNvPr id="19" name="TextBox 18"/>
+              <a:t>→ exact, balanced, still optimal</a:t>
+            </a:r>
+          </a:p>
+        </p:txBody>
+      </p:sp>
+      <p:sp>
+        <p:nvSpPr>
+          <p:cNvPr id="16" name="TextBox 15"/>
           <p:cNvSpPr txBox="1"/>
           <p:nvPr/>
         </p:nvSpPr>
         <p:spPr>
           <a:xfrm>
-            <a:off x="6400800" y="3703320"/>
-            <a:ext cx="5303520" cy="1463040"/>
+            <a:off x="640080" y="4846320"/>
+            <a:ext cx="10972800" cy="1280160"/>
           </a:xfrm>
           <a:prstGeom prst="rect">
             <a:avLst/>
@@ -10721,13 +11880,13 @@
           <a:p>
             <a:pPr algn="l"/>
             <a:r>
-              <a:rPr sz="1400" b="0" i="1">
+              <a:rPr sz="1600" b="0" i="1">
                 <a:solidFill>
                   <a:srgbClr val="636363"/>
                 </a:solidFill>
                 <a:latin typeface="Calibri"/>
               </a:rPr>
-              <a:t>Overall PASS only if no schema-invalid items and (if checked) the blueprint matches exactly. Exit code feeds CI.</a:t>
+              <a:t>The fix is a constraint, not a hack: qtype_mix is the question-type analogue of difficulty_mix, resolved to exact counts (largest-remainder) and enforced per version by both selectors. Pool stays mixed; the mix becomes guaranteed.</a:t>
             </a:r>
           </a:p>
         </p:txBody>
@@ -10868,7 +12027,7 @@
                 </a:solidFill>
                 <a:latin typeface="Calibri"/>
               </a:rPr>
-              <a:t>Using it</a:t>
+              <a:t>Deduplication &amp; validation</a:t>
             </a:r>
           </a:p>
         </p:txBody>
@@ -10938,7 +12097,7 @@
                 </a:solidFill>
                 <a:latin typeface="Calibri"/>
               </a:rPr>
-              <a:t>python -m quizgen</a:t>
+              <a:t>similarity.py • dedup.py • validate.py</a:t>
             </a:r>
           </a:p>
         </p:txBody>
@@ -11100,8 +12259,8 @@
         </p:nvSpPr>
         <p:spPr>
           <a:xfrm>
-            <a:off x="640080" y="1188720"/>
-            <a:ext cx="10972800" cy="365760"/>
+            <a:off x="640080" y="1143000"/>
+            <a:ext cx="5486400" cy="365760"/>
           </a:xfrm>
           <a:prstGeom prst="rect">
             <a:avLst/>
@@ -11116,33 +12275,249 @@
           <a:p>
             <a:pPr algn="l"/>
             <a:r>
-              <a:rPr sz="1600" b="1" i="0">
+              <a:rPr sz="1700" b="1" i="0">
+                <a:solidFill>
+                  <a:srgbClr val="002F5E"/>
+                </a:solidFill>
+                <a:latin typeface="Calibri"/>
+              </a:rPr>
+              <a:t>DEDUP (--dedup)</a:t>
+            </a:r>
+          </a:p>
+        </p:txBody>
+      </p:sp>
+      <p:sp>
+        <p:nvSpPr>
+          <p:cNvPr id="12" name="TextBox 11"/>
+          <p:cNvSpPr txBox="1"/>
+          <p:nvPr/>
+        </p:nvSpPr>
+        <p:spPr>
+          <a:xfrm>
+            <a:off x="640080" y="1554480"/>
+            <a:ext cx="5303520" cy="2194560"/>
+          </a:xfrm>
+          <a:prstGeom prst="rect">
+            <a:avLst/>
+          </a:prstGeom>
+          <a:noFill/>
+        </p:spPr>
+        <p:txBody>
+          <a:bodyPr wrap="square">
+            <a:spAutoFit/>
+          </a:bodyPr>
+          <a:lstStyle/>
+          <a:p>
+            <a:pPr>
+              <a:spcAft>
+                <a:spcPts val="700"/>
+              </a:spcAft>
+            </a:pPr>
+            <a:r>
+              <a:rPr sz="1500">
                 <a:solidFill>
                   <a:srgbClr val="222222"/>
                 </a:solidFill>
                 <a:latin typeface="Calibri"/>
               </a:rPr>
-              <a:t>Pure command line (no YAML):</a:t>
-            </a:r>
-          </a:p>
-        </p:txBody>
-      </p:sp>
-      <p:sp>
-        <p:nvSpPr>
-          <p:cNvPr id="12" name="Rectangle 11"/>
+              <a:t>• Token-Jaccard over stem+answer(+options) — offline, always on.</a:t>
+            </a:r>
+          </a:p>
+          <a:p>
+            <a:pPr>
+              <a:spcAft>
+                <a:spcPts val="700"/>
+              </a:spcAft>
+            </a:pPr>
+            <a:r>
+              <a:rPr sz="1500">
+                <a:solidFill>
+                  <a:srgbClr val="222222"/>
+                </a:solidFill>
+                <a:latin typeface="Calibri"/>
+              </a:rPr>
+              <a:t>• Optional embedding cosine — catches paraphrases.</a:t>
+            </a:r>
+          </a:p>
+          <a:p>
+            <a:pPr>
+              <a:spcAft>
+                <a:spcPts val="700"/>
+              </a:spcAft>
+            </a:pPr>
+            <a:r>
+              <a:rPr sz="1500">
+                <a:solidFill>
+                  <a:srgbClr val="222222"/>
+                </a:solidFill>
+                <a:latin typeface="Calibri"/>
+              </a:rPr>
+              <a:t>• Drops dups from the pool; MIP also forbids dup pairs across versions.</a:t>
+            </a:r>
+          </a:p>
+        </p:txBody>
+      </p:sp>
+      <p:sp>
+        <p:nvSpPr>
+          <p:cNvPr id="13" name="Rectangle 12"/>
           <p:cNvSpPr/>
           <p:nvPr/>
         </p:nvSpPr>
         <p:spPr>
           <a:xfrm>
-            <a:off x="640080" y="1600200"/>
-            <a:ext cx="10972800" cy="1371600"/>
+            <a:off x="640080" y="3931920"/>
+            <a:ext cx="5212080" cy="1005840"/>
           </a:xfrm>
           <a:prstGeom prst="rect">
             <a:avLst/>
           </a:prstGeom>
           <a:solidFill>
-            <a:srgbClr val="002F5E"/>
+            <a:srgbClr val="F0F0F2"/>
+          </a:solidFill>
+          <a:ln w="15875">
+            <a:solidFill>
+              <a:srgbClr val="636363"/>
+            </a:solidFill>
+          </a:ln>
+          <a:effectLst/>
+        </p:spPr>
+        <p:style>
+          <a:lnRef idx="1">
+            <a:schemeClr val="accent1"/>
+          </a:lnRef>
+          <a:fillRef idx="3">
+            <a:schemeClr val="accent1"/>
+          </a:fillRef>
+          <a:effectRef idx="2">
+            <a:schemeClr val="accent1"/>
+          </a:effectRef>
+          <a:fontRef idx="minor">
+            <a:schemeClr val="lt1"/>
+          </a:fontRef>
+        </p:style>
+        <p:txBody>
+          <a:bodyPr rtlCol="0" anchor="ctr" wrap="square" lIns="45720" rIns="45720" tIns="27432" bIns="27432"/>
+          <a:lstStyle/>
+          <a:p>
+            <a:pPr algn="ctr"/>
+            <a:r>
+              <a:rPr sz="1400" b="0" i="0">
+                <a:solidFill>
+                  <a:srgbClr val="222222"/>
+                </a:solidFill>
+                <a:latin typeface="Consolas"/>
+              </a:rPr>
+              <a:t>sim(q₁,q₂) = |T(q₁) ∩ T(q₂)| / |T(q₁) ∪ T(q₂)|</a:t>
+            </a:r>
+          </a:p>
+        </p:txBody>
+      </p:sp>
+      <p:sp>
+        <p:nvSpPr>
+          <p:cNvPr id="14" name="TextBox 13"/>
+          <p:cNvSpPr txBox="1"/>
+          <p:nvPr/>
+        </p:nvSpPr>
+        <p:spPr>
+          <a:xfrm>
+            <a:off x="6400800" y="1143000"/>
+            <a:ext cx="5486400" cy="365760"/>
+          </a:xfrm>
+          <a:prstGeom prst="rect">
+            <a:avLst/>
+          </a:prstGeom>
+          <a:noFill/>
+        </p:spPr>
+        <p:txBody>
+          <a:bodyPr wrap="square" anchor="t">
+            <a:spAutoFit/>
+          </a:bodyPr>
+          <a:lstStyle/>
+          <a:p>
+            <a:pPr algn="l"/>
+            <a:r>
+              <a:rPr sz="1700" b="1" i="0">
+                <a:solidFill>
+                  <a:srgbClr val="31A354"/>
+                </a:solidFill>
+                <a:latin typeface="Calibri"/>
+              </a:rPr>
+              <a:t>VALIDATE (--validate)</a:t>
+            </a:r>
+          </a:p>
+        </p:txBody>
+      </p:sp>
+      <p:sp>
+        <p:nvSpPr>
+          <p:cNvPr id="15" name="Rounded Rectangle 14"/>
+          <p:cNvSpPr/>
+          <p:nvPr/>
+        </p:nvSpPr>
+        <p:spPr>
+          <a:xfrm>
+            <a:off x="6400800" y="1645920"/>
+            <a:ext cx="2560320" cy="822960"/>
+          </a:xfrm>
+          <a:prstGeom prst="roundRect">
+            <a:avLst/>
+          </a:prstGeom>
+          <a:solidFill>
+            <a:srgbClr val="E5F5E0"/>
+          </a:solidFill>
+          <a:ln w="15875">
+            <a:solidFill>
+              <a:srgbClr val="31A354"/>
+            </a:solidFill>
+          </a:ln>
+          <a:effectLst/>
+        </p:spPr>
+        <p:style>
+          <a:lnRef idx="1">
+            <a:schemeClr val="accent1"/>
+          </a:lnRef>
+          <a:fillRef idx="3">
+            <a:schemeClr val="accent1"/>
+          </a:fillRef>
+          <a:effectRef idx="2">
+            <a:schemeClr val="accent1"/>
+          </a:effectRef>
+          <a:fontRef idx="minor">
+            <a:schemeClr val="lt1"/>
+          </a:fontRef>
+        </p:style>
+        <p:txBody>
+          <a:bodyPr rtlCol="0" anchor="ctr" wrap="square" lIns="45720" rIns="45720" tIns="27432" bIns="27432"/>
+          <a:lstStyle/>
+          <a:p>
+            <a:pPr algn="ctr"/>
+            <a:r>
+              <a:rPr sz="1200" b="1" i="0">
+                <a:solidFill>
+                  <a:srgbClr val="222222"/>
+                </a:solidFill>
+                <a:latin typeface="Calibri"/>
+              </a:rPr>
+              <a:t>Schema validity</a:t>
+            </a:r>
+          </a:p>
+        </p:txBody>
+      </p:sp>
+      <p:sp>
+        <p:nvSpPr>
+          <p:cNvPr id="16" name="Rounded Rectangle 15"/>
+          <p:cNvSpPr/>
+          <p:nvPr/>
+        </p:nvSpPr>
+        <p:spPr>
+          <a:xfrm>
+            <a:off x="9098280" y="1645920"/>
+            <a:ext cx="2560320" cy="822960"/>
+          </a:xfrm>
+          <a:prstGeom prst="roundRect">
+            <a:avLst/>
+          </a:prstGeom>
+          <a:solidFill>
+            <a:srgbClr val="DEEBF7"/>
           </a:solidFill>
           <a:ln w="15875">
             <a:solidFill>
@@ -11171,116 +12546,100 @@
           <a:p>
             <a:pPr algn="ctr"/>
             <a:r>
-              <a:rPr sz="1300" b="0" i="0">
-                <a:solidFill>
-                  <a:srgbClr val="FFFFFF"/>
-                </a:solidFill>
-                <a:latin typeface="Consolas"/>
-              </a:rPr>
-              <a:t>python -m quizgen --pool questions.json \</a:t>
-            </a:r>
-          </a:p>
-          <a:p>
-            <a:pPr algn="ctr"/>
-            <a:r>
-              <a:rPr sz="1300" b="0" i="0">
-                <a:solidFill>
-                  <a:srgbClr val="FFFFFF"/>
-                </a:solidFill>
-                <a:latin typeface="Consolas"/>
-              </a:rPr>
-              <a:t>    --total 20 --chapters 1:10,2:6,3:4 \</a:t>
-            </a:r>
-          </a:p>
-          <a:p>
-            <a:pPr algn="ctr"/>
-            <a:r>
-              <a:rPr sz="1300" b="0" i="0">
-                <a:solidFill>
-                  <a:srgbClr val="FFFFFF"/>
-                </a:solidFill>
-                <a:latin typeface="Consolas"/>
-              </a:rPr>
-              <a:t>    --difficulty 0.4,0.4,0.2 \</a:t>
-            </a:r>
-          </a:p>
-          <a:p>
-            <a:pPr algn="ctr"/>
-            <a:r>
-              <a:rPr sz="1300" b="0" i="0">
-                <a:solidFill>
-                  <a:srgbClr val="FFFFFF"/>
-                </a:solidFill>
-                <a:latin typeface="Consolas"/>
-              </a:rPr>
-              <a:t>    --qtype-mix mcq:0.4,true_false:0.2,short_answer:0.2,cloze:0.2 \</a:t>
-            </a:r>
-          </a:p>
-          <a:p>
-            <a:pPr algn="ctr"/>
-            <a:r>
-              <a:rPr sz="1300" b="0" i="0">
-                <a:solidFill>
-                  <a:srgbClr val="FFFFFF"/>
-                </a:solidFill>
-                <a:latin typeface="Consolas"/>
-              </a:rPr>
-              <a:t>    --versions 2 --selector mip</a:t>
-            </a:r>
-          </a:p>
-        </p:txBody>
-      </p:sp>
-      <p:sp>
-        <p:nvSpPr>
-          <p:cNvPr id="13" name="TextBox 12"/>
-          <p:cNvSpPr txBox="1"/>
-          <p:nvPr/>
-        </p:nvSpPr>
-        <p:spPr>
-          <a:xfrm>
-            <a:off x="640080" y="3246120"/>
-            <a:ext cx="10972800" cy="365760"/>
-          </a:xfrm>
-          <a:prstGeom prst="rect">
-            <a:avLst/>
-          </a:prstGeom>
-          <a:noFill/>
-        </p:spPr>
-        <p:txBody>
-          <a:bodyPr wrap="square" anchor="t">
-            <a:spAutoFit/>
-          </a:bodyPr>
-          <a:lstStyle/>
-          <a:p>
-            <a:pPr algn="l"/>
-            <a:r>
-              <a:rPr sz="1600" b="1" i="0">
+              <a:rPr sz="1200" b="1" i="0">
                 <a:solidFill>
                   <a:srgbClr val="222222"/>
                 </a:solidFill>
                 <a:latin typeface="Calibri"/>
               </a:rPr>
-              <a:t>Blueprint file + dedup + per-version validation report:</a:t>
-            </a:r>
-          </a:p>
-        </p:txBody>
-      </p:sp>
-      <p:sp>
-        <p:nvSpPr>
-          <p:cNvPr id="14" name="Rectangle 13"/>
+              <a:t>Blueprint compliance</a:t>
+            </a:r>
+          </a:p>
+          <a:p>
+            <a:pPr algn="ctr"/>
+            <a:r>
+              <a:rPr sz="1200" b="1" i="0">
+                <a:solidFill>
+                  <a:srgbClr val="222222"/>
+                </a:solidFill>
+                <a:latin typeface="Calibri"/>
+              </a:rPr>
+              <a:t>(chapter · difficulty · type)</a:t>
+            </a:r>
+          </a:p>
+        </p:txBody>
+      </p:sp>
+      <p:sp>
+        <p:nvSpPr>
+          <p:cNvPr id="17" name="Rounded Rectangle 16"/>
           <p:cNvSpPr/>
           <p:nvPr/>
         </p:nvSpPr>
         <p:spPr>
           <a:xfrm>
-            <a:off x="640080" y="3657600"/>
-            <a:ext cx="10972800" cy="914400"/>
-          </a:xfrm>
-          <a:prstGeom prst="rect">
+            <a:off x="6400800" y="2606040"/>
+            <a:ext cx="2560320" cy="822960"/>
+          </a:xfrm>
+          <a:prstGeom prst="roundRect">
             <a:avLst/>
           </a:prstGeom>
           <a:solidFill>
-            <a:srgbClr val="002F5E"/>
+            <a:srgbClr val="E5F5E0"/>
+          </a:solidFill>
+          <a:ln w="15875">
+            <a:solidFill>
+              <a:srgbClr val="31A354"/>
+            </a:solidFill>
+          </a:ln>
+          <a:effectLst/>
+        </p:spPr>
+        <p:style>
+          <a:lnRef idx="1">
+            <a:schemeClr val="accent1"/>
+          </a:lnRef>
+          <a:fillRef idx="3">
+            <a:schemeClr val="accent1"/>
+          </a:fillRef>
+          <a:effectRef idx="2">
+            <a:schemeClr val="accent1"/>
+          </a:effectRef>
+          <a:fontRef idx="minor">
+            <a:schemeClr val="lt1"/>
+          </a:fontRef>
+        </p:style>
+        <p:txBody>
+          <a:bodyPr rtlCol="0" anchor="ctr" wrap="square" lIns="45720" rIns="45720" tIns="27432" bIns="27432"/>
+          <a:lstStyle/>
+          <a:p>
+            <a:pPr algn="ctr"/>
+            <a:r>
+              <a:rPr sz="1200" b="1" i="0">
+                <a:solidFill>
+                  <a:srgbClr val="222222"/>
+                </a:solidFill>
+                <a:latin typeface="Calibri"/>
+              </a:rPr>
+              <a:t>Grounding coverage</a:t>
+            </a:r>
+          </a:p>
+        </p:txBody>
+      </p:sp>
+      <p:sp>
+        <p:nvSpPr>
+          <p:cNvPr id="18" name="Rounded Rectangle 17"/>
+          <p:cNvSpPr/>
+          <p:nvPr/>
+        </p:nvSpPr>
+        <p:spPr>
+          <a:xfrm>
+            <a:off x="9098280" y="2606040"/>
+            <a:ext cx="2560320" cy="822960"/>
+          </a:xfrm>
+          <a:prstGeom prst="roundRect">
+            <a:avLst/>
+          </a:prstGeom>
+          <a:solidFill>
+            <a:srgbClr val="DEEBF7"/>
           </a:solidFill>
           <a:ln w="15875">
             <a:solidFill>
@@ -11309,39 +12668,27 @@
           <a:p>
             <a:pPr algn="ctr"/>
             <a:r>
-              <a:rPr sz="1400" b="0" i="0">
-                <a:solidFill>
-                  <a:srgbClr val="FFFFFF"/>
-                </a:solidFill>
-                <a:latin typeface="Consolas"/>
-              </a:rPr>
-              <a:t>python -m quizgen --pool questions.json --blueprint blueprint.yaml \</a:t>
-            </a:r>
-          </a:p>
-          <a:p>
-            <a:pPr algn="ctr"/>
-            <a:r>
-              <a:rPr sz="1400" b="0" i="0">
-                <a:solidFill>
-                  <a:srgbClr val="FFFFFF"/>
-                </a:solidFill>
-                <a:latin typeface="Consolas"/>
-              </a:rPr>
-              <a:t>    --dedup --validate --out-dir out</a:t>
-            </a:r>
-          </a:p>
-        </p:txBody>
-      </p:sp>
-      <p:sp>
-        <p:nvSpPr>
-          <p:cNvPr id="15" name="TextBox 14"/>
+              <a:rPr sz="1200" b="1" i="0">
+                <a:solidFill>
+                  <a:srgbClr val="222222"/>
+                </a:solidFill>
+                <a:latin typeface="Calibri"/>
+              </a:rPr>
+              <a:t>Duplicate rate</a:t>
+            </a:r>
+          </a:p>
+        </p:txBody>
+      </p:sp>
+      <p:sp>
+        <p:nvSpPr>
+          <p:cNvPr id="19" name="TextBox 18"/>
           <p:cNvSpPr txBox="1"/>
           <p:nvPr/>
         </p:nvSpPr>
         <p:spPr>
           <a:xfrm>
-            <a:off x="640080" y="4846320"/>
-            <a:ext cx="10972800" cy="1645920"/>
+            <a:off x="6400800" y="3703320"/>
+            <a:ext cx="5303520" cy="1463040"/>
           </a:xfrm>
           <a:prstGeom prst="rect">
             <a:avLst/>
@@ -11349,56 +12696,20 @@
           <a:noFill/>
         </p:spPr>
         <p:txBody>
-          <a:bodyPr wrap="square">
+          <a:bodyPr wrap="square" anchor="t">
             <a:spAutoFit/>
           </a:bodyPr>
           <a:lstStyle/>
           <a:p>
-            <a:pPr>
-              <a:spcAft>
-                <a:spcPts val="700"/>
-              </a:spcAft>
-            </a:pPr>
-            <a:r>
-              <a:rPr sz="1500">
-                <a:solidFill>
-                  <a:srgbClr val="222222"/>
-                </a:solidFill>
-                <a:latin typeface="Calibri"/>
-              </a:rPr>
-              <a:t>• Writes one Quiz JSON per version (each embeds the resolved blueprint).</a:t>
-            </a:r>
-          </a:p>
-          <a:p>
-            <a:pPr>
-              <a:spcAft>
-                <a:spcPts val="700"/>
-              </a:spcAft>
-            </a:pPr>
-            <a:r>
-              <a:rPr sz="1500">
-                <a:solidFill>
-                  <a:srgbClr val="222222"/>
-                </a:solidFill>
-                <a:latin typeface="Calibri"/>
-              </a:rPr>
-              <a:t>• Standalone entry points too: python -m quizgen.assemble, python -m quizgen.validate.</a:t>
-            </a:r>
-          </a:p>
-          <a:p>
-            <a:pPr>
-              <a:spcAft>
-                <a:spcPts val="700"/>
-              </a:spcAft>
-            </a:pPr>
-            <a:r>
-              <a:rPr sz="1500">
-                <a:solidFill>
-                  <a:srgbClr val="222222"/>
-                </a:solidFill>
-                <a:latin typeface="Calibri"/>
-              </a:rPr>
-              <a:t>• Exits non-zero on any non-compliant version → composes in scripts &amp; CI.</a:t>
+            <a:pPr algn="l"/>
+            <a:r>
+              <a:rPr sz="1400" b="0" i="1">
+                <a:solidFill>
+                  <a:srgbClr val="636363"/>
+                </a:solidFill>
+                <a:latin typeface="Calibri"/>
+              </a:rPr>
+              <a:t>Overall PASS only if no schema-invalid items and (if checked) the blueprint matches exactly. Exit code feeds CI.</a:t>
             </a:r>
           </a:p>
         </p:txBody>
